--- a/presentations/Pipeline Accidents Presentation v0.pptx
+++ b/presentations/Pipeline Accidents Presentation v0.pptx
@@ -5,7 +5,21 @@
     <p:sldMasterId id="2147483648" r:id="rId1"/>
   </p:sldMasterIdLst>
   <p:sldIdLst>
-    <p:sldId id="256" r:id="rId2"/>
+    <p:sldId id="260" r:id="rId2"/>
+    <p:sldId id="256" r:id="rId3"/>
+    <p:sldId id="265" r:id="rId4"/>
+    <p:sldId id="266" r:id="rId5"/>
+    <p:sldId id="267" r:id="rId6"/>
+    <p:sldId id="269" r:id="rId7"/>
+    <p:sldId id="270" r:id="rId8"/>
+    <p:sldId id="271" r:id="rId9"/>
+    <p:sldId id="262" r:id="rId10"/>
+    <p:sldId id="263" r:id="rId11"/>
+    <p:sldId id="264" r:id="rId12"/>
+    <p:sldId id="257" r:id="rId13"/>
+    <p:sldId id="258" r:id="rId14"/>
+    <p:sldId id="259" r:id="rId15"/>
+    <p:sldId id="261" r:id="rId16"/>
   </p:sldIdLst>
   <p:sldSz cx="12192000" cy="6858000"/>
   <p:notesSz cx="6858000" cy="9144000"/>
@@ -104,6 +118,11 @@
       </a:defRPr>
     </a:lvl9pPr>
   </p:defaultTextStyle>
+  <p:extLst>
+    <p:ext uri="{EFAFB233-063F-42B5-8137-9DF3F51BA10A}">
+      <p15:sldGuideLst xmlns:p15="http://schemas.microsoft.com/office/powerpoint/2012/main"/>
+    </p:ext>
+  </p:extLst>
 </p:presentation>
 </file>
 
@@ -254,7 +273,7 @@
           <a:p>
             <a:fld id="{F2B6BF67-2978-CE4D-8D5C-6E816D1CE5DA}" type="datetimeFigureOut">
               <a:rPr lang="en-US" smtClean="0"/>
-              <a:t>1/23/24</a:t>
+              <a:t>1/25/24</a:t>
             </a:fld>
             <a:endParaRPr lang="en-US"/>
           </a:p>
@@ -452,7 +471,7 @@
           <a:p>
             <a:fld id="{F2B6BF67-2978-CE4D-8D5C-6E816D1CE5DA}" type="datetimeFigureOut">
               <a:rPr lang="en-US" smtClean="0"/>
-              <a:t>1/23/24</a:t>
+              <a:t>1/25/24</a:t>
             </a:fld>
             <a:endParaRPr lang="en-US"/>
           </a:p>
@@ -660,7 +679,7 @@
           <a:p>
             <a:fld id="{F2B6BF67-2978-CE4D-8D5C-6E816D1CE5DA}" type="datetimeFigureOut">
               <a:rPr lang="en-US" smtClean="0"/>
-              <a:t>1/23/24</a:t>
+              <a:t>1/25/24</a:t>
             </a:fld>
             <a:endParaRPr lang="en-US"/>
           </a:p>
@@ -858,7 +877,7 @@
           <a:p>
             <a:fld id="{F2B6BF67-2978-CE4D-8D5C-6E816D1CE5DA}" type="datetimeFigureOut">
               <a:rPr lang="en-US" smtClean="0"/>
-              <a:t>1/23/24</a:t>
+              <a:t>1/25/24</a:t>
             </a:fld>
             <a:endParaRPr lang="en-US"/>
           </a:p>
@@ -1133,7 +1152,7 @@
           <a:p>
             <a:fld id="{F2B6BF67-2978-CE4D-8D5C-6E816D1CE5DA}" type="datetimeFigureOut">
               <a:rPr lang="en-US" smtClean="0"/>
-              <a:t>1/23/24</a:t>
+              <a:t>1/25/24</a:t>
             </a:fld>
             <a:endParaRPr lang="en-US"/>
           </a:p>
@@ -1398,7 +1417,7 @@
           <a:p>
             <a:fld id="{F2B6BF67-2978-CE4D-8D5C-6E816D1CE5DA}" type="datetimeFigureOut">
               <a:rPr lang="en-US" smtClean="0"/>
-              <a:t>1/23/24</a:t>
+              <a:t>1/25/24</a:t>
             </a:fld>
             <a:endParaRPr lang="en-US"/>
           </a:p>
@@ -1810,7 +1829,7 @@
           <a:p>
             <a:fld id="{F2B6BF67-2978-CE4D-8D5C-6E816D1CE5DA}" type="datetimeFigureOut">
               <a:rPr lang="en-US" smtClean="0"/>
-              <a:t>1/23/24</a:t>
+              <a:t>1/25/24</a:t>
             </a:fld>
             <a:endParaRPr lang="en-US"/>
           </a:p>
@@ -1951,7 +1970,7 @@
           <a:p>
             <a:fld id="{F2B6BF67-2978-CE4D-8D5C-6E816D1CE5DA}" type="datetimeFigureOut">
               <a:rPr lang="en-US" smtClean="0"/>
-              <a:t>1/23/24</a:t>
+              <a:t>1/25/24</a:t>
             </a:fld>
             <a:endParaRPr lang="en-US"/>
           </a:p>
@@ -2064,7 +2083,7 @@
           <a:p>
             <a:fld id="{F2B6BF67-2978-CE4D-8D5C-6E816D1CE5DA}" type="datetimeFigureOut">
               <a:rPr lang="en-US" smtClean="0"/>
-              <a:t>1/23/24</a:t>
+              <a:t>1/25/24</a:t>
             </a:fld>
             <a:endParaRPr lang="en-US"/>
           </a:p>
@@ -2375,7 +2394,7 @@
           <a:p>
             <a:fld id="{F2B6BF67-2978-CE4D-8D5C-6E816D1CE5DA}" type="datetimeFigureOut">
               <a:rPr lang="en-US" smtClean="0"/>
-              <a:t>1/23/24</a:t>
+              <a:t>1/25/24</a:t>
             </a:fld>
             <a:endParaRPr lang="en-US"/>
           </a:p>
@@ -2663,7 +2682,7 @@
           <a:p>
             <a:fld id="{F2B6BF67-2978-CE4D-8D5C-6E816D1CE5DA}" type="datetimeFigureOut">
               <a:rPr lang="en-US" smtClean="0"/>
-              <a:t>1/23/24</a:t>
+              <a:t>1/25/24</a:t>
             </a:fld>
             <a:endParaRPr lang="en-US"/>
           </a:p>
@@ -2904,7 +2923,7 @@
           <a:p>
             <a:fld id="{F2B6BF67-2978-CE4D-8D5C-6E816D1CE5DA}" type="datetimeFigureOut">
               <a:rPr lang="en-US" smtClean="0"/>
-              <a:t>1/23/24</a:t>
+              <a:t>1/25/24</a:t>
             </a:fld>
             <a:endParaRPr lang="en-US"/>
           </a:p>
@@ -3326,6 +3345,1058 @@
           <p:cNvPr id="2" name="Title 1">
             <a:extLst>
               <a:ext uri="{FF2B5EF4-FFF2-40B4-BE49-F238E27FC236}">
+                <a16:creationId xmlns:a16="http://schemas.microsoft.com/office/drawing/2014/main" id="{6FA141E8-7A77-B683-CBCA-B721AC37DBC5}"/>
+              </a:ext>
+            </a:extLst>
+          </p:cNvPr>
+          <p:cNvSpPr>
+            <a:spLocks noGrp="1"/>
+          </p:cNvSpPr>
+          <p:nvPr>
+            <p:ph type="title"/>
+          </p:nvPr>
+        </p:nvSpPr>
+        <p:spPr/>
+        <p:txBody>
+          <a:bodyPr/>
+          <a:lstStyle/>
+          <a:p>
+            <a:endParaRPr lang="en-US"/>
+          </a:p>
+        </p:txBody>
+      </p:sp>
+      <p:sp>
+        <p:nvSpPr>
+          <p:cNvPr id="3" name="Content Placeholder 2">
+            <a:extLst>
+              <a:ext uri="{FF2B5EF4-FFF2-40B4-BE49-F238E27FC236}">
+                <a16:creationId xmlns:a16="http://schemas.microsoft.com/office/drawing/2014/main" id="{342D54F5-96FD-BFB9-21CC-0BD88CE6E898}"/>
+              </a:ext>
+            </a:extLst>
+          </p:cNvPr>
+          <p:cNvSpPr>
+            <a:spLocks noGrp="1"/>
+          </p:cNvSpPr>
+          <p:nvPr>
+            <p:ph idx="1"/>
+          </p:nvPr>
+        </p:nvSpPr>
+        <p:spPr/>
+        <p:txBody>
+          <a:bodyPr/>
+          <a:lstStyle/>
+          <a:p>
+            <a:endParaRPr lang="en-US"/>
+          </a:p>
+        </p:txBody>
+      </p:sp>
+      <p:pic>
+        <p:nvPicPr>
+          <p:cNvPr id="6146" name="Picture 2" descr="Why Is Validere a Great Place to Work? - Validere">
+            <a:extLst>
+              <a:ext uri="{FF2B5EF4-FFF2-40B4-BE49-F238E27FC236}">
+                <a16:creationId xmlns:a16="http://schemas.microsoft.com/office/drawing/2014/main" id="{D4130606-64FB-7738-40AD-DD2BE50BA002}"/>
+              </a:ext>
+            </a:extLst>
+          </p:cNvPr>
+          <p:cNvPicPr>
+            <a:picLocks noChangeAspect="1" noChangeArrowheads="1"/>
+          </p:cNvPicPr>
+          <p:nvPr/>
+        </p:nvPicPr>
+        <p:blipFill rotWithShape="1">
+          <a:blip r:embed="rId2">
+            <a:extLst>
+              <a:ext uri="{28A0092B-C50C-407E-A947-70E740481C1C}">
+                <a14:useLocalDpi xmlns:a14="http://schemas.microsoft.com/office/drawing/2010/main" val="0"/>
+              </a:ext>
+            </a:extLst>
+          </a:blip>
+          <a:srcRect l="30556"/>
+          <a:stretch/>
+        </p:blipFill>
+        <p:spPr bwMode="auto">
+          <a:xfrm flipH="1" flipV="1">
+            <a:off x="0" y="0"/>
+            <a:ext cx="12192000" cy="6858000"/>
+          </a:xfrm>
+          <a:prstGeom prst="rect">
+            <a:avLst/>
+          </a:prstGeom>
+          <a:noFill/>
+          <a:extLst>
+            <a:ext uri="{909E8E84-426E-40DD-AFC4-6F175D3DCCD1}">
+              <a14:hiddenFill xmlns:a14="http://schemas.microsoft.com/office/drawing/2010/main">
+                <a:solidFill>
+                  <a:srgbClr val="FFFFFF"/>
+                </a:solidFill>
+              </a14:hiddenFill>
+            </a:ext>
+          </a:extLst>
+        </p:spPr>
+      </p:pic>
+      <p:sp>
+        <p:nvSpPr>
+          <p:cNvPr id="4" name="Rectangle 3">
+            <a:extLst>
+              <a:ext uri="{FF2B5EF4-FFF2-40B4-BE49-F238E27FC236}">
+                <a16:creationId xmlns:a16="http://schemas.microsoft.com/office/drawing/2014/main" id="{3DB5877E-665B-64F8-9EF0-1F08DC10C61F}"/>
+              </a:ext>
+            </a:extLst>
+          </p:cNvPr>
+          <p:cNvSpPr/>
+          <p:nvPr/>
+        </p:nvSpPr>
+        <p:spPr>
+          <a:xfrm>
+            <a:off x="729573" y="1784737"/>
+            <a:ext cx="6698838" cy="1220287"/>
+          </a:xfrm>
+          <a:prstGeom prst="rect">
+            <a:avLst/>
+          </a:prstGeom>
+          <a:noFill/>
+          <a:ln>
+            <a:noFill/>
+          </a:ln>
+        </p:spPr>
+        <p:style>
+          <a:lnRef idx="2">
+            <a:schemeClr val="accent1">
+              <a:shade val="15000"/>
+            </a:schemeClr>
+          </a:lnRef>
+          <a:fillRef idx="1">
+            <a:schemeClr val="accent1"/>
+          </a:fillRef>
+          <a:effectRef idx="0">
+            <a:schemeClr val="accent1"/>
+          </a:effectRef>
+          <a:fontRef idx="minor">
+            <a:schemeClr val="lt1"/>
+          </a:fontRef>
+        </p:style>
+        <p:txBody>
+          <a:bodyPr rtlCol="0" anchor="ctr"/>
+          <a:lstStyle/>
+          <a:p>
+            <a:r>
+              <a:rPr lang="en-US" sz="3600" b="1" dirty="0">
+                <a:solidFill>
+                  <a:schemeClr val="bg1"/>
+                </a:solidFill>
+              </a:rPr>
+              <a:t>Properties of Crude Oil Responsible for Pipeline Accidents</a:t>
+            </a:r>
+          </a:p>
+        </p:txBody>
+      </p:sp>
+      <p:sp>
+        <p:nvSpPr>
+          <p:cNvPr id="5" name="Rectangle 4">
+            <a:extLst>
+              <a:ext uri="{FF2B5EF4-FFF2-40B4-BE49-F238E27FC236}">
+                <a16:creationId xmlns:a16="http://schemas.microsoft.com/office/drawing/2014/main" id="{88A1459F-5616-25FF-A46F-2D925E859077}"/>
+              </a:ext>
+            </a:extLst>
+          </p:cNvPr>
+          <p:cNvSpPr/>
+          <p:nvPr/>
+        </p:nvSpPr>
+        <p:spPr>
+          <a:xfrm>
+            <a:off x="729573" y="3491387"/>
+            <a:ext cx="5969541" cy="361590"/>
+          </a:xfrm>
+          <a:prstGeom prst="rect">
+            <a:avLst/>
+          </a:prstGeom>
+          <a:noFill/>
+          <a:ln>
+            <a:noFill/>
+          </a:ln>
+        </p:spPr>
+        <p:style>
+          <a:lnRef idx="2">
+            <a:schemeClr val="accent1">
+              <a:shade val="15000"/>
+            </a:schemeClr>
+          </a:lnRef>
+          <a:fillRef idx="1">
+            <a:schemeClr val="accent1"/>
+          </a:fillRef>
+          <a:effectRef idx="0">
+            <a:schemeClr val="accent1"/>
+          </a:effectRef>
+          <a:fontRef idx="minor">
+            <a:schemeClr val="lt1"/>
+          </a:fontRef>
+        </p:style>
+        <p:txBody>
+          <a:bodyPr rtlCol="0" anchor="ctr"/>
+          <a:lstStyle/>
+          <a:p>
+            <a:r>
+              <a:rPr lang="en-US" sz="2000" dirty="0">
+                <a:solidFill>
+                  <a:schemeClr val="bg1"/>
+                </a:solidFill>
+              </a:rPr>
+              <a:t>Date: January 29, 2023</a:t>
+            </a:r>
+          </a:p>
+        </p:txBody>
+      </p:sp>
+      <p:sp>
+        <p:nvSpPr>
+          <p:cNvPr id="6" name="Rectangle 5">
+            <a:extLst>
+              <a:ext uri="{FF2B5EF4-FFF2-40B4-BE49-F238E27FC236}">
+                <a16:creationId xmlns:a16="http://schemas.microsoft.com/office/drawing/2014/main" id="{479A94D8-104F-A669-9211-52C5BED1D9DE}"/>
+              </a:ext>
+            </a:extLst>
+          </p:cNvPr>
+          <p:cNvSpPr/>
+          <p:nvPr/>
+        </p:nvSpPr>
+        <p:spPr>
+          <a:xfrm>
+            <a:off x="729573" y="3142478"/>
+            <a:ext cx="5969541" cy="348909"/>
+          </a:xfrm>
+          <a:prstGeom prst="rect">
+            <a:avLst/>
+          </a:prstGeom>
+          <a:noFill/>
+          <a:ln>
+            <a:noFill/>
+          </a:ln>
+        </p:spPr>
+        <p:style>
+          <a:lnRef idx="2">
+            <a:schemeClr val="accent1">
+              <a:shade val="15000"/>
+            </a:schemeClr>
+          </a:lnRef>
+          <a:fillRef idx="1">
+            <a:schemeClr val="accent1"/>
+          </a:fillRef>
+          <a:effectRef idx="0">
+            <a:schemeClr val="accent1"/>
+          </a:effectRef>
+          <a:fontRef idx="minor">
+            <a:schemeClr val="lt1"/>
+          </a:fontRef>
+        </p:style>
+        <p:txBody>
+          <a:bodyPr rtlCol="0" anchor="ctr"/>
+          <a:lstStyle/>
+          <a:p>
+            <a:r>
+              <a:rPr lang="en-US" sz="2000" dirty="0">
+                <a:solidFill>
+                  <a:schemeClr val="bg1"/>
+                </a:solidFill>
+              </a:rPr>
+              <a:t>Created By: Cameron MacKinnon</a:t>
+            </a:r>
+          </a:p>
+        </p:txBody>
+      </p:sp>
+      <p:cxnSp>
+        <p:nvCxnSpPr>
+          <p:cNvPr id="7" name="Straight Connector 6">
+            <a:extLst>
+              <a:ext uri="{FF2B5EF4-FFF2-40B4-BE49-F238E27FC236}">
+                <a16:creationId xmlns:a16="http://schemas.microsoft.com/office/drawing/2014/main" id="{FE3C0BFB-6277-8E26-2255-59D04F6A73B4}"/>
+              </a:ext>
+            </a:extLst>
+          </p:cNvPr>
+          <p:cNvCxnSpPr>
+            <a:cxnSpLocks/>
+          </p:cNvCxnSpPr>
+          <p:nvPr/>
+        </p:nvCxnSpPr>
+        <p:spPr>
+          <a:xfrm>
+            <a:off x="836023" y="3005024"/>
+            <a:ext cx="6731726" cy="0"/>
+          </a:xfrm>
+          <a:prstGeom prst="line">
+            <a:avLst/>
+          </a:prstGeom>
+          <a:ln w="38100">
+            <a:solidFill>
+              <a:srgbClr val="D6DBDD"/>
+            </a:solidFill>
+          </a:ln>
+        </p:spPr>
+        <p:style>
+          <a:lnRef idx="1">
+            <a:schemeClr val="accent1"/>
+          </a:lnRef>
+          <a:fillRef idx="0">
+            <a:schemeClr val="accent1"/>
+          </a:fillRef>
+          <a:effectRef idx="0">
+            <a:schemeClr val="accent1"/>
+          </a:effectRef>
+          <a:fontRef idx="minor">
+            <a:schemeClr val="tx1"/>
+          </a:fontRef>
+        </p:style>
+      </p:cxnSp>
+      <p:pic>
+        <p:nvPicPr>
+          <p:cNvPr id="8" name="Picture 2" descr="Validere Acquires Regulatory Reporting Platform Clairifi - Validere">
+            <a:extLst>
+              <a:ext uri="{FF2B5EF4-FFF2-40B4-BE49-F238E27FC236}">
+                <a16:creationId xmlns:a16="http://schemas.microsoft.com/office/drawing/2014/main" id="{3BF0D8B9-1BB4-7CC2-EDF9-838BE3BCC4B7}"/>
+              </a:ext>
+            </a:extLst>
+          </p:cNvPr>
+          <p:cNvPicPr>
+            <a:picLocks noChangeAspect="1" noChangeArrowheads="1"/>
+          </p:cNvPicPr>
+          <p:nvPr/>
+        </p:nvPicPr>
+        <p:blipFill>
+          <a:blip r:embed="rId3">
+            <a:lum bright="70000" contrast="-70000"/>
+            <a:extLst>
+              <a:ext uri="{28A0092B-C50C-407E-A947-70E740481C1C}">
+                <a14:useLocalDpi xmlns:a14="http://schemas.microsoft.com/office/drawing/2010/main" val="0"/>
+              </a:ext>
+            </a:extLst>
+          </a:blip>
+          <a:srcRect/>
+          <a:stretch>
+            <a:fillRect/>
+          </a:stretch>
+        </p:blipFill>
+        <p:spPr bwMode="auto">
+          <a:xfrm>
+            <a:off x="9588136" y="6313712"/>
+            <a:ext cx="2385518" cy="248400"/>
+          </a:xfrm>
+          <a:prstGeom prst="rect">
+            <a:avLst/>
+          </a:prstGeom>
+          <a:noFill/>
+          <a:extLst>
+            <a:ext uri="{909E8E84-426E-40DD-AFC4-6F175D3DCCD1}">
+              <a14:hiddenFill xmlns:a14="http://schemas.microsoft.com/office/drawing/2010/main">
+                <a:solidFill>
+                  <a:srgbClr val="FFFFFF"/>
+                </a:solidFill>
+              </a14:hiddenFill>
+            </a:ext>
+          </a:extLst>
+        </p:spPr>
+      </p:pic>
+    </p:spTree>
+    <p:extLst>
+      <p:ext uri="{BB962C8B-B14F-4D97-AF65-F5344CB8AC3E}">
+        <p14:creationId xmlns:p14="http://schemas.microsoft.com/office/powerpoint/2010/main" val="2344224524"/>
+      </p:ext>
+    </p:extLst>
+  </p:cSld>
+  <p:clrMapOvr>
+    <a:masterClrMapping/>
+  </p:clrMapOvr>
+</p:sld>
+</file>
+
+<file path=ppt/slides/slide10.xml><?xml version="1.0" encoding="utf-8"?>
+<p:sld xmlns:a="http://schemas.openxmlformats.org/drawingml/2006/main" xmlns:r="http://schemas.openxmlformats.org/officeDocument/2006/relationships" xmlns:p="http://schemas.openxmlformats.org/presentationml/2006/main">
+  <p:cSld>
+    <p:spTree>
+      <p:nvGrpSpPr>
+        <p:cNvPr id="1" name=""/>
+        <p:cNvGrpSpPr/>
+        <p:nvPr/>
+      </p:nvGrpSpPr>
+      <p:grpSpPr>
+        <a:xfrm>
+          <a:off x="0" y="0"/>
+          <a:ext cx="0" cy="0"/>
+          <a:chOff x="0" y="0"/>
+          <a:chExt cx="0" cy="0"/>
+        </a:xfrm>
+      </p:grpSpPr>
+      <p:pic>
+        <p:nvPicPr>
+          <p:cNvPr id="2" name="Picture 2" descr="Validere Acquires Regulatory Reporting Platform Clairifi - Validere">
+            <a:extLst>
+              <a:ext uri="{FF2B5EF4-FFF2-40B4-BE49-F238E27FC236}">
+                <a16:creationId xmlns:a16="http://schemas.microsoft.com/office/drawing/2014/main" id="{0FDE1F5C-16C5-8498-9DE0-2E46B12DF724}"/>
+              </a:ext>
+            </a:extLst>
+          </p:cNvPr>
+          <p:cNvPicPr>
+            <a:picLocks noChangeAspect="1" noChangeArrowheads="1"/>
+          </p:cNvPicPr>
+          <p:nvPr/>
+        </p:nvPicPr>
+        <p:blipFill>
+          <a:blip r:embed="rId2">
+            <a:extLst>
+              <a:ext uri="{28A0092B-C50C-407E-A947-70E740481C1C}">
+                <a14:useLocalDpi xmlns:a14="http://schemas.microsoft.com/office/drawing/2010/main" val="0"/>
+              </a:ext>
+            </a:extLst>
+          </a:blip>
+          <a:srcRect/>
+          <a:stretch>
+            <a:fillRect/>
+          </a:stretch>
+        </p:blipFill>
+        <p:spPr bwMode="auto">
+          <a:xfrm>
+            <a:off x="0" y="7622"/>
+            <a:ext cx="12192000" cy="6842756"/>
+          </a:xfrm>
+          <a:prstGeom prst="rect">
+            <a:avLst/>
+          </a:prstGeom>
+          <a:noFill/>
+          <a:extLst>
+            <a:ext uri="{909E8E84-426E-40DD-AFC4-6F175D3DCCD1}">
+              <a14:hiddenFill xmlns:a14="http://schemas.microsoft.com/office/drawing/2010/main">
+                <a:solidFill>
+                  <a:srgbClr val="FFFFFF"/>
+                </a:solidFill>
+              </a14:hiddenFill>
+            </a:ext>
+          </a:extLst>
+        </p:spPr>
+      </p:pic>
+      <p:pic>
+        <p:nvPicPr>
+          <p:cNvPr id="4" name="Picture 2" descr="Validere Acquires Regulatory Reporting Platform Clairifi - Validere">
+            <a:extLst>
+              <a:ext uri="{FF2B5EF4-FFF2-40B4-BE49-F238E27FC236}">
+                <a16:creationId xmlns:a16="http://schemas.microsoft.com/office/drawing/2014/main" id="{FB7EE65E-8925-81A8-2BFC-A529915986B8}"/>
+              </a:ext>
+            </a:extLst>
+          </p:cNvPr>
+          <p:cNvPicPr>
+            <a:picLocks noChangeAspect="1" noChangeArrowheads="1"/>
+          </p:cNvPicPr>
+          <p:nvPr/>
+        </p:nvPicPr>
+        <p:blipFill>
+          <a:blip r:embed="rId3">
+            <a:extLst>
+              <a:ext uri="{28A0092B-C50C-407E-A947-70E740481C1C}">
+                <a14:useLocalDpi xmlns:a14="http://schemas.microsoft.com/office/drawing/2010/main" val="0"/>
+              </a:ext>
+            </a:extLst>
+          </a:blip>
+          <a:srcRect/>
+          <a:stretch>
+            <a:fillRect/>
+          </a:stretch>
+        </p:blipFill>
+        <p:spPr bwMode="auto">
+          <a:xfrm>
+            <a:off x="9588137" y="6313713"/>
+            <a:ext cx="2377441" cy="247559"/>
+          </a:xfrm>
+          <a:prstGeom prst="rect">
+            <a:avLst/>
+          </a:prstGeom>
+          <a:noFill/>
+          <a:extLst>
+            <a:ext uri="{909E8E84-426E-40DD-AFC4-6F175D3DCCD1}">
+              <a14:hiddenFill xmlns:a14="http://schemas.microsoft.com/office/drawing/2010/main">
+                <a:solidFill>
+                  <a:srgbClr val="FFFFFF"/>
+                </a:solidFill>
+              </a14:hiddenFill>
+            </a:ext>
+          </a:extLst>
+        </p:spPr>
+      </p:pic>
+      <p:sp>
+        <p:nvSpPr>
+          <p:cNvPr id="6" name="Rectangle 5">
+            <a:extLst>
+              <a:ext uri="{FF2B5EF4-FFF2-40B4-BE49-F238E27FC236}">
+                <a16:creationId xmlns:a16="http://schemas.microsoft.com/office/drawing/2014/main" id="{07F40E04-0FF0-4058-E5B2-051685ADDEDB}"/>
+              </a:ext>
+            </a:extLst>
+          </p:cNvPr>
+          <p:cNvSpPr/>
+          <p:nvPr/>
+        </p:nvSpPr>
+        <p:spPr>
+          <a:xfrm>
+            <a:off x="729573" y="1784737"/>
+            <a:ext cx="6698838" cy="1220287"/>
+          </a:xfrm>
+          <a:prstGeom prst="rect">
+            <a:avLst/>
+          </a:prstGeom>
+          <a:noFill/>
+          <a:ln>
+            <a:noFill/>
+          </a:ln>
+        </p:spPr>
+        <p:style>
+          <a:lnRef idx="2">
+            <a:schemeClr val="accent1">
+              <a:shade val="15000"/>
+            </a:schemeClr>
+          </a:lnRef>
+          <a:fillRef idx="1">
+            <a:schemeClr val="accent1"/>
+          </a:fillRef>
+          <a:effectRef idx="0">
+            <a:schemeClr val="accent1"/>
+          </a:effectRef>
+          <a:fontRef idx="minor">
+            <a:schemeClr val="lt1"/>
+          </a:fontRef>
+        </p:style>
+        <p:txBody>
+          <a:bodyPr rtlCol="0" anchor="ctr"/>
+          <a:lstStyle/>
+          <a:p>
+            <a:r>
+              <a:rPr lang="en-US" sz="3600" b="1" dirty="0">
+                <a:solidFill>
+                  <a:srgbClr val="1D2C33"/>
+                </a:solidFill>
+              </a:rPr>
+              <a:t>Properties of Crude Oil Responsible for Pipeline Accidents</a:t>
+            </a:r>
+          </a:p>
+        </p:txBody>
+      </p:sp>
+      <p:sp>
+        <p:nvSpPr>
+          <p:cNvPr id="3" name="Rectangle 2">
+            <a:extLst>
+              <a:ext uri="{FF2B5EF4-FFF2-40B4-BE49-F238E27FC236}">
+                <a16:creationId xmlns:a16="http://schemas.microsoft.com/office/drawing/2014/main" id="{14363152-BE08-674D-0A2B-51E112F6E136}"/>
+              </a:ext>
+            </a:extLst>
+          </p:cNvPr>
+          <p:cNvSpPr/>
+          <p:nvPr/>
+        </p:nvSpPr>
+        <p:spPr>
+          <a:xfrm>
+            <a:off x="729573" y="3491387"/>
+            <a:ext cx="5969541" cy="361590"/>
+          </a:xfrm>
+          <a:prstGeom prst="rect">
+            <a:avLst/>
+          </a:prstGeom>
+          <a:noFill/>
+          <a:ln>
+            <a:noFill/>
+          </a:ln>
+        </p:spPr>
+        <p:style>
+          <a:lnRef idx="2">
+            <a:schemeClr val="accent1">
+              <a:shade val="15000"/>
+            </a:schemeClr>
+          </a:lnRef>
+          <a:fillRef idx="1">
+            <a:schemeClr val="accent1"/>
+          </a:fillRef>
+          <a:effectRef idx="0">
+            <a:schemeClr val="accent1"/>
+          </a:effectRef>
+          <a:fontRef idx="minor">
+            <a:schemeClr val="lt1"/>
+          </a:fontRef>
+        </p:style>
+        <p:txBody>
+          <a:bodyPr rtlCol="0" anchor="ctr"/>
+          <a:lstStyle/>
+          <a:p>
+            <a:r>
+              <a:rPr lang="en-US" sz="2000" dirty="0">
+                <a:solidFill>
+                  <a:srgbClr val="1D2C33"/>
+                </a:solidFill>
+              </a:rPr>
+              <a:t>Date: January 29, 2023</a:t>
+            </a:r>
+          </a:p>
+        </p:txBody>
+      </p:sp>
+      <p:sp>
+        <p:nvSpPr>
+          <p:cNvPr id="5" name="Rectangle 4">
+            <a:extLst>
+              <a:ext uri="{FF2B5EF4-FFF2-40B4-BE49-F238E27FC236}">
+                <a16:creationId xmlns:a16="http://schemas.microsoft.com/office/drawing/2014/main" id="{98D019AC-5746-90F8-AAB6-A88FF770F305}"/>
+              </a:ext>
+            </a:extLst>
+          </p:cNvPr>
+          <p:cNvSpPr/>
+          <p:nvPr/>
+        </p:nvSpPr>
+        <p:spPr>
+          <a:xfrm>
+            <a:off x="729573" y="3142478"/>
+            <a:ext cx="5969541" cy="348909"/>
+          </a:xfrm>
+          <a:prstGeom prst="rect">
+            <a:avLst/>
+          </a:prstGeom>
+          <a:noFill/>
+          <a:ln>
+            <a:noFill/>
+          </a:ln>
+        </p:spPr>
+        <p:style>
+          <a:lnRef idx="2">
+            <a:schemeClr val="accent1">
+              <a:shade val="15000"/>
+            </a:schemeClr>
+          </a:lnRef>
+          <a:fillRef idx="1">
+            <a:schemeClr val="accent1"/>
+          </a:fillRef>
+          <a:effectRef idx="0">
+            <a:schemeClr val="accent1"/>
+          </a:effectRef>
+          <a:fontRef idx="minor">
+            <a:schemeClr val="lt1"/>
+          </a:fontRef>
+        </p:style>
+        <p:txBody>
+          <a:bodyPr rtlCol="0" anchor="ctr"/>
+          <a:lstStyle/>
+          <a:p>
+            <a:r>
+              <a:rPr lang="en-US" sz="2000" dirty="0">
+                <a:solidFill>
+                  <a:srgbClr val="1D2C33"/>
+                </a:solidFill>
+              </a:rPr>
+              <a:t>Created By: Cameron MacKinnon</a:t>
+            </a:r>
+          </a:p>
+        </p:txBody>
+      </p:sp>
+      <p:cxnSp>
+        <p:nvCxnSpPr>
+          <p:cNvPr id="9" name="Straight Connector 8">
+            <a:extLst>
+              <a:ext uri="{FF2B5EF4-FFF2-40B4-BE49-F238E27FC236}">
+                <a16:creationId xmlns:a16="http://schemas.microsoft.com/office/drawing/2014/main" id="{8BA039D3-CD15-E1D4-2890-6F8AE3E7E0C4}"/>
+              </a:ext>
+            </a:extLst>
+          </p:cNvPr>
+          <p:cNvCxnSpPr/>
+          <p:nvPr/>
+        </p:nvCxnSpPr>
+        <p:spPr>
+          <a:xfrm>
+            <a:off x="836023" y="3005024"/>
+            <a:ext cx="10171611" cy="0"/>
+          </a:xfrm>
+          <a:prstGeom prst="line">
+            <a:avLst/>
+          </a:prstGeom>
+          <a:ln w="38100">
+            <a:solidFill>
+              <a:schemeClr val="bg1"/>
+            </a:solidFill>
+          </a:ln>
+        </p:spPr>
+        <p:style>
+          <a:lnRef idx="1">
+            <a:schemeClr val="accent1"/>
+          </a:lnRef>
+          <a:fillRef idx="0">
+            <a:schemeClr val="accent1"/>
+          </a:fillRef>
+          <a:effectRef idx="0">
+            <a:schemeClr val="accent1"/>
+          </a:effectRef>
+          <a:fontRef idx="minor">
+            <a:schemeClr val="tx1"/>
+          </a:fontRef>
+        </p:style>
+      </p:cxnSp>
+    </p:spTree>
+    <p:extLst>
+      <p:ext uri="{BB962C8B-B14F-4D97-AF65-F5344CB8AC3E}">
+        <p14:creationId xmlns:p14="http://schemas.microsoft.com/office/powerpoint/2010/main" val="206083684"/>
+      </p:ext>
+    </p:extLst>
+  </p:cSld>
+  <p:clrMapOvr>
+    <a:masterClrMapping/>
+  </p:clrMapOvr>
+</p:sld>
+</file>
+
+<file path=ppt/slides/slide11.xml><?xml version="1.0" encoding="utf-8"?>
+<p:sld xmlns:a="http://schemas.openxmlformats.org/drawingml/2006/main" xmlns:r="http://schemas.openxmlformats.org/officeDocument/2006/relationships" xmlns:p="http://schemas.openxmlformats.org/presentationml/2006/main">
+  <p:cSld>
+    <p:spTree>
+      <p:nvGrpSpPr>
+        <p:cNvPr id="1" name=""/>
+        <p:cNvGrpSpPr/>
+        <p:nvPr/>
+      </p:nvGrpSpPr>
+      <p:grpSpPr>
+        <a:xfrm>
+          <a:off x="0" y="0"/>
+          <a:ext cx="0" cy="0"/>
+          <a:chOff x="0" y="0"/>
+          <a:chExt cx="0" cy="0"/>
+        </a:xfrm>
+      </p:grpSpPr>
+      <p:pic>
+        <p:nvPicPr>
+          <p:cNvPr id="7" name="Picture 2" descr="ESG Is Not a Black Box - Validere">
+            <a:extLst>
+              <a:ext uri="{FF2B5EF4-FFF2-40B4-BE49-F238E27FC236}">
+                <a16:creationId xmlns:a16="http://schemas.microsoft.com/office/drawing/2014/main" id="{EA3C2ED1-6235-120F-BB67-8B382C3EA5AB}"/>
+              </a:ext>
+            </a:extLst>
+          </p:cNvPr>
+          <p:cNvPicPr>
+            <a:picLocks noChangeAspect="1" noChangeArrowheads="1"/>
+          </p:cNvPicPr>
+          <p:nvPr/>
+        </p:nvPicPr>
+        <p:blipFill>
+          <a:blip r:embed="rId2">
+            <a:extLst>
+              <a:ext uri="{28A0092B-C50C-407E-A947-70E740481C1C}">
+                <a14:useLocalDpi xmlns:a14="http://schemas.microsoft.com/office/drawing/2010/main" val="0"/>
+              </a:ext>
+            </a:extLst>
+          </a:blip>
+          <a:srcRect/>
+          <a:stretch>
+            <a:fillRect/>
+          </a:stretch>
+        </p:blipFill>
+        <p:spPr bwMode="auto">
+          <a:xfrm>
+            <a:off x="0" y="0"/>
+            <a:ext cx="12192000" cy="6858000"/>
+          </a:xfrm>
+          <a:prstGeom prst="rect">
+            <a:avLst/>
+          </a:prstGeom>
+          <a:noFill/>
+          <a:extLst>
+            <a:ext uri="{909E8E84-426E-40DD-AFC4-6F175D3DCCD1}">
+              <a14:hiddenFill xmlns:a14="http://schemas.microsoft.com/office/drawing/2010/main">
+                <a:solidFill>
+                  <a:srgbClr val="FFFFFF"/>
+                </a:solidFill>
+              </a14:hiddenFill>
+            </a:ext>
+          </a:extLst>
+        </p:spPr>
+      </p:pic>
+      <p:sp>
+        <p:nvSpPr>
+          <p:cNvPr id="6" name="Rectangle 5">
+            <a:extLst>
+              <a:ext uri="{FF2B5EF4-FFF2-40B4-BE49-F238E27FC236}">
+                <a16:creationId xmlns:a16="http://schemas.microsoft.com/office/drawing/2014/main" id="{07F40E04-0FF0-4058-E5B2-051685ADDEDB}"/>
+              </a:ext>
+            </a:extLst>
+          </p:cNvPr>
+          <p:cNvSpPr/>
+          <p:nvPr/>
+        </p:nvSpPr>
+        <p:spPr>
+          <a:xfrm>
+            <a:off x="729573" y="1784737"/>
+            <a:ext cx="6698838" cy="1220287"/>
+          </a:xfrm>
+          <a:prstGeom prst="rect">
+            <a:avLst/>
+          </a:prstGeom>
+          <a:noFill/>
+          <a:ln>
+            <a:noFill/>
+          </a:ln>
+        </p:spPr>
+        <p:style>
+          <a:lnRef idx="2">
+            <a:schemeClr val="accent1">
+              <a:shade val="15000"/>
+            </a:schemeClr>
+          </a:lnRef>
+          <a:fillRef idx="1">
+            <a:schemeClr val="accent1"/>
+          </a:fillRef>
+          <a:effectRef idx="0">
+            <a:schemeClr val="accent1"/>
+          </a:effectRef>
+          <a:fontRef idx="minor">
+            <a:schemeClr val="lt1"/>
+          </a:fontRef>
+        </p:style>
+        <p:txBody>
+          <a:bodyPr rtlCol="0" anchor="ctr"/>
+          <a:lstStyle/>
+          <a:p>
+            <a:r>
+              <a:rPr lang="en-US" sz="3600" b="1" dirty="0">
+                <a:solidFill>
+                  <a:schemeClr val="bg1"/>
+                </a:solidFill>
+              </a:rPr>
+              <a:t>Properties of Crude Oil Responsible for Pipeline Accidents</a:t>
+            </a:r>
+          </a:p>
+        </p:txBody>
+      </p:sp>
+      <p:sp>
+        <p:nvSpPr>
+          <p:cNvPr id="3" name="Rectangle 2">
+            <a:extLst>
+              <a:ext uri="{FF2B5EF4-FFF2-40B4-BE49-F238E27FC236}">
+                <a16:creationId xmlns:a16="http://schemas.microsoft.com/office/drawing/2014/main" id="{14363152-BE08-674D-0A2B-51E112F6E136}"/>
+              </a:ext>
+            </a:extLst>
+          </p:cNvPr>
+          <p:cNvSpPr/>
+          <p:nvPr/>
+        </p:nvSpPr>
+        <p:spPr>
+          <a:xfrm>
+            <a:off x="729573" y="3491387"/>
+            <a:ext cx="5969541" cy="361590"/>
+          </a:xfrm>
+          <a:prstGeom prst="rect">
+            <a:avLst/>
+          </a:prstGeom>
+          <a:noFill/>
+          <a:ln>
+            <a:noFill/>
+          </a:ln>
+        </p:spPr>
+        <p:style>
+          <a:lnRef idx="2">
+            <a:schemeClr val="accent1">
+              <a:shade val="15000"/>
+            </a:schemeClr>
+          </a:lnRef>
+          <a:fillRef idx="1">
+            <a:schemeClr val="accent1"/>
+          </a:fillRef>
+          <a:effectRef idx="0">
+            <a:schemeClr val="accent1"/>
+          </a:effectRef>
+          <a:fontRef idx="minor">
+            <a:schemeClr val="lt1"/>
+          </a:fontRef>
+        </p:style>
+        <p:txBody>
+          <a:bodyPr rtlCol="0" anchor="ctr"/>
+          <a:lstStyle/>
+          <a:p>
+            <a:r>
+              <a:rPr lang="en-US" sz="2000" dirty="0">
+                <a:solidFill>
+                  <a:schemeClr val="bg1"/>
+                </a:solidFill>
+              </a:rPr>
+              <a:t>Date: January 29, 2023</a:t>
+            </a:r>
+          </a:p>
+        </p:txBody>
+      </p:sp>
+      <p:sp>
+        <p:nvSpPr>
+          <p:cNvPr id="5" name="Rectangle 4">
+            <a:extLst>
+              <a:ext uri="{FF2B5EF4-FFF2-40B4-BE49-F238E27FC236}">
+                <a16:creationId xmlns:a16="http://schemas.microsoft.com/office/drawing/2014/main" id="{98D019AC-5746-90F8-AAB6-A88FF770F305}"/>
+              </a:ext>
+            </a:extLst>
+          </p:cNvPr>
+          <p:cNvSpPr/>
+          <p:nvPr/>
+        </p:nvSpPr>
+        <p:spPr>
+          <a:xfrm>
+            <a:off x="729573" y="3142478"/>
+            <a:ext cx="5969541" cy="348909"/>
+          </a:xfrm>
+          <a:prstGeom prst="rect">
+            <a:avLst/>
+          </a:prstGeom>
+          <a:noFill/>
+          <a:ln>
+            <a:noFill/>
+          </a:ln>
+        </p:spPr>
+        <p:style>
+          <a:lnRef idx="2">
+            <a:schemeClr val="accent1">
+              <a:shade val="15000"/>
+            </a:schemeClr>
+          </a:lnRef>
+          <a:fillRef idx="1">
+            <a:schemeClr val="accent1"/>
+          </a:fillRef>
+          <a:effectRef idx="0">
+            <a:schemeClr val="accent1"/>
+          </a:effectRef>
+          <a:fontRef idx="minor">
+            <a:schemeClr val="lt1"/>
+          </a:fontRef>
+        </p:style>
+        <p:txBody>
+          <a:bodyPr rtlCol="0" anchor="ctr"/>
+          <a:lstStyle/>
+          <a:p>
+            <a:r>
+              <a:rPr lang="en-US" sz="2000" dirty="0">
+                <a:solidFill>
+                  <a:schemeClr val="bg1"/>
+                </a:solidFill>
+              </a:rPr>
+              <a:t>Created By: Cameron MacKinnon</a:t>
+            </a:r>
+          </a:p>
+        </p:txBody>
+      </p:sp>
+      <p:cxnSp>
+        <p:nvCxnSpPr>
+          <p:cNvPr id="9" name="Straight Connector 8">
+            <a:extLst>
+              <a:ext uri="{FF2B5EF4-FFF2-40B4-BE49-F238E27FC236}">
+                <a16:creationId xmlns:a16="http://schemas.microsoft.com/office/drawing/2014/main" id="{8BA039D3-CD15-E1D4-2890-6F8AE3E7E0C4}"/>
+              </a:ext>
+            </a:extLst>
+          </p:cNvPr>
+          <p:cNvCxnSpPr/>
+          <p:nvPr/>
+        </p:nvCxnSpPr>
+        <p:spPr>
+          <a:xfrm>
+            <a:off x="836023" y="3005024"/>
+            <a:ext cx="10171611" cy="0"/>
+          </a:xfrm>
+          <a:prstGeom prst="line">
+            <a:avLst/>
+          </a:prstGeom>
+          <a:ln w="38100">
+            <a:solidFill>
+              <a:schemeClr val="bg1">
+                <a:lumMod val="50000"/>
+              </a:schemeClr>
+            </a:solidFill>
+          </a:ln>
+        </p:spPr>
+        <p:style>
+          <a:lnRef idx="1">
+            <a:schemeClr val="accent1"/>
+          </a:lnRef>
+          <a:fillRef idx="0">
+            <a:schemeClr val="accent1"/>
+          </a:fillRef>
+          <a:effectRef idx="0">
+            <a:schemeClr val="accent1"/>
+          </a:effectRef>
+          <a:fontRef idx="minor">
+            <a:schemeClr val="tx1"/>
+          </a:fontRef>
+        </p:style>
+      </p:cxnSp>
+      <p:pic>
+        <p:nvPicPr>
+          <p:cNvPr id="4" name="Picture 2" descr="Validere Acquires Regulatory Reporting Platform Clairifi - Validere">
+            <a:extLst>
+              <a:ext uri="{FF2B5EF4-FFF2-40B4-BE49-F238E27FC236}">
+                <a16:creationId xmlns:a16="http://schemas.microsoft.com/office/drawing/2014/main" id="{FB7EE65E-8925-81A8-2BFC-A529915986B8}"/>
+              </a:ext>
+            </a:extLst>
+          </p:cNvPr>
+          <p:cNvPicPr>
+            <a:picLocks noChangeAspect="1" noChangeArrowheads="1"/>
+          </p:cNvPicPr>
+          <p:nvPr/>
+        </p:nvPicPr>
+        <p:blipFill>
+          <a:blip r:embed="rId3">
+            <a:extLst>
+              <a:ext uri="{28A0092B-C50C-407E-A947-70E740481C1C}">
+                <a14:useLocalDpi xmlns:a14="http://schemas.microsoft.com/office/drawing/2010/main" val="0"/>
+              </a:ext>
+            </a:extLst>
+          </a:blip>
+          <a:srcRect/>
+          <a:stretch>
+            <a:fillRect/>
+          </a:stretch>
+        </p:blipFill>
+        <p:spPr bwMode="auto">
+          <a:xfrm>
+            <a:off x="9588137" y="6313713"/>
+            <a:ext cx="2377441" cy="247559"/>
+          </a:xfrm>
+          <a:prstGeom prst="rect">
+            <a:avLst/>
+          </a:prstGeom>
+          <a:noFill/>
+          <a:extLst>
+            <a:ext uri="{909E8E84-426E-40DD-AFC4-6F175D3DCCD1}">
+              <a14:hiddenFill xmlns:a14="http://schemas.microsoft.com/office/drawing/2010/main">
+                <a:solidFill>
+                  <a:srgbClr val="FFFFFF"/>
+                </a:solidFill>
+              </a14:hiddenFill>
+            </a:ext>
+          </a:extLst>
+        </p:spPr>
+      </p:pic>
+    </p:spTree>
+    <p:extLst>
+      <p:ext uri="{BB962C8B-B14F-4D97-AF65-F5344CB8AC3E}">
+        <p14:creationId xmlns:p14="http://schemas.microsoft.com/office/powerpoint/2010/main" val="1571639814"/>
+      </p:ext>
+    </p:extLst>
+  </p:cSld>
+  <p:clrMapOvr>
+    <a:masterClrMapping/>
+  </p:clrMapOvr>
+</p:sld>
+</file>
+
+<file path=ppt/slides/slide12.xml><?xml version="1.0" encoding="utf-8"?>
+<p:sld xmlns:a="http://schemas.openxmlformats.org/drawingml/2006/main" xmlns:r="http://schemas.openxmlformats.org/officeDocument/2006/relationships" xmlns:p="http://schemas.openxmlformats.org/presentationml/2006/main">
+  <p:cSld>
+    <p:spTree>
+      <p:nvGrpSpPr>
+        <p:cNvPr id="1" name=""/>
+        <p:cNvGrpSpPr/>
+        <p:nvPr/>
+      </p:nvGrpSpPr>
+      <p:grpSpPr>
+        <a:xfrm>
+          <a:off x="0" y="0"/>
+          <a:ext cx="0" cy="0"/>
+          <a:chOff x="0" y="0"/>
+          <a:chExt cx="0" cy="0"/>
+        </a:xfrm>
+      </p:grpSpPr>
+      <p:sp>
+        <p:nvSpPr>
+          <p:cNvPr id="2" name="Title 1">
+            <a:extLst>
+              <a:ext uri="{FF2B5EF4-FFF2-40B4-BE49-F238E27FC236}">
                 <a16:creationId xmlns:a16="http://schemas.microsoft.com/office/drawing/2014/main" id="{A9368AD3-1A3E-3983-DB7C-39908780DADF}"/>
               </a:ext>
             </a:extLst>
@@ -3342,7 +4413,7 @@
           <a:bodyPr/>
           <a:lstStyle/>
           <a:p>
-            <a:endParaRPr lang="en-US"/>
+            <a:endParaRPr lang="en-US" dirty="0"/>
           </a:p>
         </p:txBody>
       </p:sp>
@@ -3371,10 +4442,4316 @@
           </a:p>
         </p:txBody>
       </p:sp>
+      <p:pic>
+        <p:nvPicPr>
+          <p:cNvPr id="3076" name="Picture 4" descr="Validere expands market fundamentals team with key new hires - Validere">
+            <a:extLst>
+              <a:ext uri="{FF2B5EF4-FFF2-40B4-BE49-F238E27FC236}">
+                <a16:creationId xmlns:a16="http://schemas.microsoft.com/office/drawing/2014/main" id="{06A31D39-E681-EF0C-26B9-87D55E335D56}"/>
+              </a:ext>
+            </a:extLst>
+          </p:cNvPr>
+          <p:cNvPicPr>
+            <a:picLocks noChangeAspect="1" noChangeArrowheads="1"/>
+          </p:cNvPicPr>
+          <p:nvPr/>
+        </p:nvPicPr>
+        <p:blipFill>
+          <a:blip r:embed="rId2">
+            <a:extLst>
+              <a:ext uri="{28A0092B-C50C-407E-A947-70E740481C1C}">
+                <a14:useLocalDpi xmlns:a14="http://schemas.microsoft.com/office/drawing/2010/main" val="0"/>
+              </a:ext>
+            </a:extLst>
+          </a:blip>
+          <a:srcRect/>
+          <a:stretch>
+            <a:fillRect/>
+          </a:stretch>
+        </p:blipFill>
+        <p:spPr bwMode="auto">
+          <a:xfrm>
+            <a:off x="0" y="1220788"/>
+            <a:ext cx="12192000" cy="4762500"/>
+          </a:xfrm>
+          <a:prstGeom prst="rect">
+            <a:avLst/>
+          </a:prstGeom>
+          <a:noFill/>
+          <a:extLst>
+            <a:ext uri="{909E8E84-426E-40DD-AFC4-6F175D3DCCD1}">
+              <a14:hiddenFill xmlns:a14="http://schemas.microsoft.com/office/drawing/2010/main">
+                <a:solidFill>
+                  <a:srgbClr val="FFFFFF"/>
+                </a:solidFill>
+              </a14:hiddenFill>
+            </a:ext>
+          </a:extLst>
+        </p:spPr>
+      </p:pic>
+      <p:pic>
+        <p:nvPicPr>
+          <p:cNvPr id="4" name="Picture 2" descr="Validere Acquires Regulatory Reporting Platform Clairifi - Validere">
+            <a:extLst>
+              <a:ext uri="{FF2B5EF4-FFF2-40B4-BE49-F238E27FC236}">
+                <a16:creationId xmlns:a16="http://schemas.microsoft.com/office/drawing/2014/main" id="{0146D473-672E-CB38-5452-62B26CE7CE1F}"/>
+              </a:ext>
+            </a:extLst>
+          </p:cNvPr>
+          <p:cNvPicPr>
+            <a:picLocks noChangeAspect="1" noChangeArrowheads="1"/>
+          </p:cNvPicPr>
+          <p:nvPr/>
+        </p:nvPicPr>
+        <p:blipFill>
+          <a:blip r:embed="rId3">
+            <a:extLst>
+              <a:ext uri="{28A0092B-C50C-407E-A947-70E740481C1C}">
+                <a14:useLocalDpi xmlns:a14="http://schemas.microsoft.com/office/drawing/2010/main" val="0"/>
+              </a:ext>
+            </a:extLst>
+          </a:blip>
+          <a:srcRect/>
+          <a:stretch>
+            <a:fillRect/>
+          </a:stretch>
+        </p:blipFill>
+        <p:spPr bwMode="auto">
+          <a:xfrm>
+            <a:off x="130629" y="6169404"/>
+            <a:ext cx="4406537" cy="539915"/>
+          </a:xfrm>
+          <a:prstGeom prst="rect">
+            <a:avLst/>
+          </a:prstGeom>
+          <a:noFill/>
+          <a:extLst>
+            <a:ext uri="{909E8E84-426E-40DD-AFC4-6F175D3DCCD1}">
+              <a14:hiddenFill xmlns:a14="http://schemas.microsoft.com/office/drawing/2010/main">
+                <a:solidFill>
+                  <a:srgbClr val="FFFFFF"/>
+                </a:solidFill>
+              </a14:hiddenFill>
+            </a:ext>
+          </a:extLst>
+        </p:spPr>
+      </p:pic>
+    </p:spTree>
+    <p:extLst>
+      <p:ext uri="{BB962C8B-B14F-4D97-AF65-F5344CB8AC3E}">
+        <p14:creationId xmlns:p14="http://schemas.microsoft.com/office/powerpoint/2010/main" val="512944562"/>
+      </p:ext>
+    </p:extLst>
+  </p:cSld>
+  <p:clrMapOvr>
+    <a:masterClrMapping/>
+  </p:clrMapOvr>
+</p:sld>
+</file>
+
+<file path=ppt/slides/slide13.xml><?xml version="1.0" encoding="utf-8"?>
+<p:sld xmlns:a="http://schemas.openxmlformats.org/drawingml/2006/main" xmlns:r="http://schemas.openxmlformats.org/officeDocument/2006/relationships" xmlns:p="http://schemas.openxmlformats.org/presentationml/2006/main">
+  <p:cSld>
+    <p:spTree>
+      <p:nvGrpSpPr>
+        <p:cNvPr id="1" name=""/>
+        <p:cNvGrpSpPr/>
+        <p:nvPr/>
+      </p:nvGrpSpPr>
+      <p:grpSpPr>
+        <a:xfrm>
+          <a:off x="0" y="0"/>
+          <a:ext cx="0" cy="0"/>
+          <a:chOff x="0" y="0"/>
+          <a:chExt cx="0" cy="0"/>
+        </a:xfrm>
+      </p:grpSpPr>
+      <p:sp>
+        <p:nvSpPr>
+          <p:cNvPr id="2" name="Title 1">
+            <a:extLst>
+              <a:ext uri="{FF2B5EF4-FFF2-40B4-BE49-F238E27FC236}">
+                <a16:creationId xmlns:a16="http://schemas.microsoft.com/office/drawing/2014/main" id="{C5E32ABF-1F14-9577-C4AB-228146EECC25}"/>
+              </a:ext>
+            </a:extLst>
+          </p:cNvPr>
+          <p:cNvSpPr>
+            <a:spLocks noGrp="1"/>
+          </p:cNvSpPr>
+          <p:nvPr>
+            <p:ph type="title"/>
+          </p:nvPr>
+        </p:nvSpPr>
+        <p:spPr/>
+        <p:txBody>
+          <a:bodyPr/>
+          <a:lstStyle/>
+          <a:p>
+            <a:endParaRPr lang="en-US"/>
+          </a:p>
+        </p:txBody>
+      </p:sp>
+      <p:sp>
+        <p:nvSpPr>
+          <p:cNvPr id="3" name="Content Placeholder 2">
+            <a:extLst>
+              <a:ext uri="{FF2B5EF4-FFF2-40B4-BE49-F238E27FC236}">
+                <a16:creationId xmlns:a16="http://schemas.microsoft.com/office/drawing/2014/main" id="{F75D4244-2B4C-8733-FC75-6C7DD616B888}"/>
+              </a:ext>
+            </a:extLst>
+          </p:cNvPr>
+          <p:cNvSpPr>
+            <a:spLocks noGrp="1"/>
+          </p:cNvSpPr>
+          <p:nvPr>
+            <p:ph idx="1"/>
+          </p:nvPr>
+        </p:nvSpPr>
+        <p:spPr/>
+        <p:txBody>
+          <a:bodyPr/>
+          <a:lstStyle/>
+          <a:p>
+            <a:endParaRPr lang="en-US"/>
+          </a:p>
+        </p:txBody>
+      </p:sp>
+      <p:pic>
+        <p:nvPicPr>
+          <p:cNvPr id="4098" name="Picture 2" descr="ESG Is Not a Black Box - Validere">
+            <a:extLst>
+              <a:ext uri="{FF2B5EF4-FFF2-40B4-BE49-F238E27FC236}">
+                <a16:creationId xmlns:a16="http://schemas.microsoft.com/office/drawing/2014/main" id="{83618BB5-8201-104C-3A20-0DB715B8D357}"/>
+              </a:ext>
+            </a:extLst>
+          </p:cNvPr>
+          <p:cNvPicPr>
+            <a:picLocks noChangeAspect="1" noChangeArrowheads="1"/>
+          </p:cNvPicPr>
+          <p:nvPr/>
+        </p:nvPicPr>
+        <p:blipFill>
+          <a:blip r:embed="rId2">
+            <a:extLst>
+              <a:ext uri="{28A0092B-C50C-407E-A947-70E740481C1C}">
+                <a14:useLocalDpi xmlns:a14="http://schemas.microsoft.com/office/drawing/2010/main" val="0"/>
+              </a:ext>
+            </a:extLst>
+          </a:blip>
+          <a:srcRect/>
+          <a:stretch>
+            <a:fillRect/>
+          </a:stretch>
+        </p:blipFill>
+        <p:spPr bwMode="auto">
+          <a:xfrm>
+            <a:off x="0" y="1047750"/>
+            <a:ext cx="12192000" cy="4762500"/>
+          </a:xfrm>
+          <a:prstGeom prst="rect">
+            <a:avLst/>
+          </a:prstGeom>
+          <a:noFill/>
+          <a:extLst>
+            <a:ext uri="{909E8E84-426E-40DD-AFC4-6F175D3DCCD1}">
+              <a14:hiddenFill xmlns:a14="http://schemas.microsoft.com/office/drawing/2010/main">
+                <a:solidFill>
+                  <a:srgbClr val="FFFFFF"/>
+                </a:solidFill>
+              </a14:hiddenFill>
+            </a:ext>
+          </a:extLst>
+        </p:spPr>
+      </p:pic>
+    </p:spTree>
+    <p:extLst>
+      <p:ext uri="{BB962C8B-B14F-4D97-AF65-F5344CB8AC3E}">
+        <p14:creationId xmlns:p14="http://schemas.microsoft.com/office/powerpoint/2010/main" val="2099015204"/>
+      </p:ext>
+    </p:extLst>
+  </p:cSld>
+  <p:clrMapOvr>
+    <a:masterClrMapping/>
+  </p:clrMapOvr>
+</p:sld>
+</file>
+
+<file path=ppt/slides/slide14.xml><?xml version="1.0" encoding="utf-8"?>
+<p:sld xmlns:a="http://schemas.openxmlformats.org/drawingml/2006/main" xmlns:r="http://schemas.openxmlformats.org/officeDocument/2006/relationships" xmlns:p="http://schemas.openxmlformats.org/presentationml/2006/main">
+  <p:cSld>
+    <p:spTree>
+      <p:nvGrpSpPr>
+        <p:cNvPr id="1" name=""/>
+        <p:cNvGrpSpPr/>
+        <p:nvPr/>
+      </p:nvGrpSpPr>
+      <p:grpSpPr>
+        <a:xfrm>
+          <a:off x="0" y="0"/>
+          <a:ext cx="0" cy="0"/>
+          <a:chOff x="0" y="0"/>
+          <a:chExt cx="0" cy="0"/>
+        </a:xfrm>
+      </p:grpSpPr>
+      <p:sp>
+        <p:nvSpPr>
+          <p:cNvPr id="2" name="Title 1">
+            <a:extLst>
+              <a:ext uri="{FF2B5EF4-FFF2-40B4-BE49-F238E27FC236}">
+                <a16:creationId xmlns:a16="http://schemas.microsoft.com/office/drawing/2014/main" id="{65A56B82-0F79-D426-A7C1-F67CF9A8E1F7}"/>
+              </a:ext>
+            </a:extLst>
+          </p:cNvPr>
+          <p:cNvSpPr>
+            <a:spLocks noGrp="1"/>
+          </p:cNvSpPr>
+          <p:nvPr>
+            <p:ph type="title"/>
+          </p:nvPr>
+        </p:nvSpPr>
+        <p:spPr/>
+        <p:txBody>
+          <a:bodyPr/>
+          <a:lstStyle/>
+          <a:p>
+            <a:endParaRPr lang="en-US"/>
+          </a:p>
+        </p:txBody>
+      </p:sp>
+      <p:sp>
+        <p:nvSpPr>
+          <p:cNvPr id="3" name="Content Placeholder 2">
+            <a:extLst>
+              <a:ext uri="{FF2B5EF4-FFF2-40B4-BE49-F238E27FC236}">
+                <a16:creationId xmlns:a16="http://schemas.microsoft.com/office/drawing/2014/main" id="{046B585E-E41D-CC5E-BB42-CE86A6EC71B1}"/>
+              </a:ext>
+            </a:extLst>
+          </p:cNvPr>
+          <p:cNvSpPr>
+            <a:spLocks noGrp="1"/>
+          </p:cNvSpPr>
+          <p:nvPr>
+            <p:ph idx="1"/>
+          </p:nvPr>
+        </p:nvSpPr>
+        <p:spPr/>
+        <p:txBody>
+          <a:bodyPr/>
+          <a:lstStyle/>
+          <a:p>
+            <a:endParaRPr lang="en-US"/>
+          </a:p>
+        </p:txBody>
+      </p:sp>
+      <p:pic>
+        <p:nvPicPr>
+          <p:cNvPr id="5122" name="Picture 2" descr="Validere Acquires Regulatory Reporting Platform Clairifi - Validere">
+            <a:extLst>
+              <a:ext uri="{FF2B5EF4-FFF2-40B4-BE49-F238E27FC236}">
+                <a16:creationId xmlns:a16="http://schemas.microsoft.com/office/drawing/2014/main" id="{7386BC02-A5BE-3C85-36B7-4EFF3FA207F7}"/>
+              </a:ext>
+            </a:extLst>
+          </p:cNvPr>
+          <p:cNvPicPr>
+            <a:picLocks noChangeAspect="1" noChangeArrowheads="1"/>
+          </p:cNvPicPr>
+          <p:nvPr/>
+        </p:nvPicPr>
+        <p:blipFill>
+          <a:blip r:embed="rId2">
+            <a:extLst>
+              <a:ext uri="{28A0092B-C50C-407E-A947-70E740481C1C}">
+                <a14:useLocalDpi xmlns:a14="http://schemas.microsoft.com/office/drawing/2010/main" val="0"/>
+              </a:ext>
+            </a:extLst>
+          </a:blip>
+          <a:srcRect/>
+          <a:stretch>
+            <a:fillRect/>
+          </a:stretch>
+        </p:blipFill>
+        <p:spPr bwMode="auto">
+          <a:xfrm>
+            <a:off x="0" y="1047750"/>
+            <a:ext cx="12192000" cy="4762500"/>
+          </a:xfrm>
+          <a:prstGeom prst="rect">
+            <a:avLst/>
+          </a:prstGeom>
+          <a:noFill/>
+          <a:extLst>
+            <a:ext uri="{909E8E84-426E-40DD-AFC4-6F175D3DCCD1}">
+              <a14:hiddenFill xmlns:a14="http://schemas.microsoft.com/office/drawing/2010/main">
+                <a:solidFill>
+                  <a:srgbClr val="FFFFFF"/>
+                </a:solidFill>
+              </a14:hiddenFill>
+            </a:ext>
+          </a:extLst>
+        </p:spPr>
+      </p:pic>
+    </p:spTree>
+    <p:extLst>
+      <p:ext uri="{BB962C8B-B14F-4D97-AF65-F5344CB8AC3E}">
+        <p14:creationId xmlns:p14="http://schemas.microsoft.com/office/powerpoint/2010/main" val="1458444183"/>
+      </p:ext>
+    </p:extLst>
+  </p:cSld>
+  <p:clrMapOvr>
+    <a:masterClrMapping/>
+  </p:clrMapOvr>
+</p:sld>
+</file>
+
+<file path=ppt/slides/slide15.xml><?xml version="1.0" encoding="utf-8"?>
+<p:sld xmlns:a="http://schemas.openxmlformats.org/drawingml/2006/main" xmlns:r="http://schemas.openxmlformats.org/officeDocument/2006/relationships" xmlns:p="http://schemas.openxmlformats.org/presentationml/2006/main">
+  <p:cSld>
+    <p:spTree>
+      <p:nvGrpSpPr>
+        <p:cNvPr id="1" name=""/>
+        <p:cNvGrpSpPr/>
+        <p:nvPr/>
+      </p:nvGrpSpPr>
+      <p:grpSpPr>
+        <a:xfrm>
+          <a:off x="0" y="0"/>
+          <a:ext cx="0" cy="0"/>
+          <a:chOff x="0" y="0"/>
+          <a:chExt cx="0" cy="0"/>
+        </a:xfrm>
+      </p:grpSpPr>
+      <p:sp>
+        <p:nvSpPr>
+          <p:cNvPr id="2" name="Title 1">
+            <a:extLst>
+              <a:ext uri="{FF2B5EF4-FFF2-40B4-BE49-F238E27FC236}">
+                <a16:creationId xmlns:a16="http://schemas.microsoft.com/office/drawing/2014/main" id="{786C09BF-E58A-F9AB-F9BC-DD9F48FF555F}"/>
+              </a:ext>
+            </a:extLst>
+          </p:cNvPr>
+          <p:cNvSpPr>
+            <a:spLocks noGrp="1"/>
+          </p:cNvSpPr>
+          <p:nvPr>
+            <p:ph type="title"/>
+          </p:nvPr>
+        </p:nvSpPr>
+        <p:spPr/>
+        <p:txBody>
+          <a:bodyPr/>
+          <a:lstStyle/>
+          <a:p>
+            <a:endParaRPr lang="en-US"/>
+          </a:p>
+        </p:txBody>
+      </p:sp>
+      <p:sp>
+        <p:nvSpPr>
+          <p:cNvPr id="3" name="Content Placeholder 2">
+            <a:extLst>
+              <a:ext uri="{FF2B5EF4-FFF2-40B4-BE49-F238E27FC236}">
+                <a16:creationId xmlns:a16="http://schemas.microsoft.com/office/drawing/2014/main" id="{70CA3B42-232A-301C-A8F2-15984BF06504}"/>
+              </a:ext>
+            </a:extLst>
+          </p:cNvPr>
+          <p:cNvSpPr>
+            <a:spLocks noGrp="1"/>
+          </p:cNvSpPr>
+          <p:nvPr>
+            <p:ph idx="1"/>
+          </p:nvPr>
+        </p:nvSpPr>
+        <p:spPr/>
+        <p:txBody>
+          <a:bodyPr/>
+          <a:lstStyle/>
+          <a:p>
+            <a:endParaRPr lang="en-US"/>
+          </a:p>
+        </p:txBody>
+      </p:sp>
+    </p:spTree>
+    <p:extLst>
+      <p:ext uri="{BB962C8B-B14F-4D97-AF65-F5344CB8AC3E}">
+        <p14:creationId xmlns:p14="http://schemas.microsoft.com/office/powerpoint/2010/main" val="2216246092"/>
+      </p:ext>
+    </p:extLst>
+  </p:cSld>
+  <p:clrMapOvr>
+    <a:masterClrMapping/>
+  </p:clrMapOvr>
+</p:sld>
+</file>
+
+<file path=ppt/slides/slide2.xml><?xml version="1.0" encoding="utf-8"?>
+<p:sld xmlns:a="http://schemas.openxmlformats.org/drawingml/2006/main" xmlns:r="http://schemas.openxmlformats.org/officeDocument/2006/relationships" xmlns:p="http://schemas.openxmlformats.org/presentationml/2006/main">
+  <p:cSld>
+    <p:spTree>
+      <p:nvGrpSpPr>
+        <p:cNvPr id="1" name=""/>
+        <p:cNvGrpSpPr/>
+        <p:nvPr/>
+      </p:nvGrpSpPr>
+      <p:grpSpPr>
+        <a:xfrm>
+          <a:off x="0" y="0"/>
+          <a:ext cx="0" cy="0"/>
+          <a:chOff x="0" y="0"/>
+          <a:chExt cx="0" cy="0"/>
+        </a:xfrm>
+      </p:grpSpPr>
+      <p:sp>
+        <p:nvSpPr>
+          <p:cNvPr id="4" name="Rectangle 3">
+            <a:extLst>
+              <a:ext uri="{FF2B5EF4-FFF2-40B4-BE49-F238E27FC236}">
+                <a16:creationId xmlns:a16="http://schemas.microsoft.com/office/drawing/2014/main" id="{9C5E69D8-2133-86C5-C478-359118968E16}"/>
+              </a:ext>
+            </a:extLst>
+          </p:cNvPr>
+          <p:cNvSpPr/>
+          <p:nvPr/>
+        </p:nvSpPr>
+        <p:spPr>
+          <a:xfrm>
+            <a:off x="233183" y="304280"/>
+            <a:ext cx="11523387" cy="618829"/>
+          </a:xfrm>
+          <a:prstGeom prst="rect">
+            <a:avLst/>
+          </a:prstGeom>
+          <a:noFill/>
+          <a:ln>
+            <a:noFill/>
+          </a:ln>
+        </p:spPr>
+        <p:style>
+          <a:lnRef idx="2">
+            <a:schemeClr val="accent1">
+              <a:shade val="15000"/>
+            </a:schemeClr>
+          </a:lnRef>
+          <a:fillRef idx="1">
+            <a:schemeClr val="accent1"/>
+          </a:fillRef>
+          <a:effectRef idx="0">
+            <a:schemeClr val="accent1"/>
+          </a:effectRef>
+          <a:fontRef idx="minor">
+            <a:schemeClr val="lt1"/>
+          </a:fontRef>
+        </p:style>
+        <p:txBody>
+          <a:bodyPr rtlCol="0" anchor="ctr"/>
+          <a:lstStyle/>
+          <a:p>
+            <a:r>
+              <a:rPr lang="en-US" sz="3600" b="1" dirty="0">
+                <a:solidFill>
+                  <a:srgbClr val="213442"/>
+                </a:solidFill>
+              </a:rPr>
+              <a:t>Table of Contents</a:t>
+            </a:r>
+          </a:p>
+        </p:txBody>
+      </p:sp>
+      <p:pic>
+        <p:nvPicPr>
+          <p:cNvPr id="6" name="Picture 2" descr="Validere Acquires Regulatory Reporting Platform Clairifi - Validere">
+            <a:extLst>
+              <a:ext uri="{FF2B5EF4-FFF2-40B4-BE49-F238E27FC236}">
+                <a16:creationId xmlns:a16="http://schemas.microsoft.com/office/drawing/2014/main" id="{5AE29AB1-08CB-3040-BAF6-3C28420849C7}"/>
+              </a:ext>
+            </a:extLst>
+          </p:cNvPr>
+          <p:cNvPicPr>
+            <a:picLocks noChangeAspect="1" noChangeArrowheads="1"/>
+          </p:cNvPicPr>
+          <p:nvPr/>
+        </p:nvPicPr>
+        <p:blipFill>
+          <a:blip r:embed="rId2">
+            <a:extLst>
+              <a:ext uri="{28A0092B-C50C-407E-A947-70E740481C1C}">
+                <a14:useLocalDpi xmlns:a14="http://schemas.microsoft.com/office/drawing/2010/main" val="0"/>
+              </a:ext>
+            </a:extLst>
+          </a:blip>
+          <a:srcRect/>
+          <a:stretch>
+            <a:fillRect/>
+          </a:stretch>
+        </p:blipFill>
+        <p:spPr bwMode="auto">
+          <a:xfrm>
+            <a:off x="9588136" y="6313712"/>
+            <a:ext cx="2385518" cy="248400"/>
+          </a:xfrm>
+          <a:prstGeom prst="rect">
+            <a:avLst/>
+          </a:prstGeom>
+          <a:noFill/>
+          <a:extLst>
+            <a:ext uri="{909E8E84-426E-40DD-AFC4-6F175D3DCCD1}">
+              <a14:hiddenFill xmlns:a14="http://schemas.microsoft.com/office/drawing/2010/main">
+                <a:solidFill>
+                  <a:srgbClr val="FFFFFF"/>
+                </a:solidFill>
+              </a14:hiddenFill>
+            </a:ext>
+          </a:extLst>
+        </p:spPr>
+      </p:pic>
+      <p:sp>
+        <p:nvSpPr>
+          <p:cNvPr id="7" name="TextBox 6">
+            <a:extLst>
+              <a:ext uri="{FF2B5EF4-FFF2-40B4-BE49-F238E27FC236}">
+                <a16:creationId xmlns:a16="http://schemas.microsoft.com/office/drawing/2014/main" id="{3DA76F35-D9B8-C9A4-D281-3E7D21973AFB}"/>
+              </a:ext>
+            </a:extLst>
+          </p:cNvPr>
+          <p:cNvSpPr txBox="1"/>
+          <p:nvPr/>
+        </p:nvSpPr>
+        <p:spPr>
+          <a:xfrm>
+            <a:off x="348343" y="1489166"/>
+            <a:ext cx="10162903" cy="3970318"/>
+          </a:xfrm>
+          <a:prstGeom prst="rect">
+            <a:avLst/>
+          </a:prstGeom>
+          <a:noFill/>
+        </p:spPr>
+        <p:txBody>
+          <a:bodyPr wrap="square" rtlCol="0">
+            <a:spAutoFit/>
+          </a:bodyPr>
+          <a:lstStyle/>
+          <a:p>
+            <a:pPr marL="342900" indent="-342900">
+              <a:buFont typeface="Arial" panose="020B0604020202020204" pitchFamily="34" charset="0"/>
+              <a:buChar char="•"/>
+            </a:pPr>
+            <a:r>
+              <a:rPr lang="en-US" dirty="0"/>
+              <a:t>Problem Statement</a:t>
+            </a:r>
+          </a:p>
+          <a:p>
+            <a:pPr marL="342900" indent="-342900">
+              <a:buFont typeface="Arial" panose="020B0604020202020204" pitchFamily="34" charset="0"/>
+              <a:buChar char="•"/>
+            </a:pPr>
+            <a:r>
+              <a:rPr lang="en-US" dirty="0"/>
+              <a:t>Scope</a:t>
+            </a:r>
+          </a:p>
+          <a:p>
+            <a:pPr marL="800100" lvl="1" indent="-342900">
+              <a:buFont typeface="Arial" panose="020B0604020202020204" pitchFamily="34" charset="0"/>
+              <a:buChar char="•"/>
+            </a:pPr>
+            <a:r>
+              <a:rPr lang="en-US" dirty="0"/>
+              <a:t>Pipeline Accidents</a:t>
+            </a:r>
+          </a:p>
+          <a:p>
+            <a:pPr marL="800100" lvl="1" indent="-342900">
+              <a:buFont typeface="Arial" panose="020B0604020202020204" pitchFamily="34" charset="0"/>
+              <a:buChar char="•"/>
+            </a:pPr>
+            <a:r>
+              <a:rPr lang="en-US" dirty="0"/>
+              <a:t>Pipeline Materials</a:t>
+            </a:r>
+          </a:p>
+          <a:p>
+            <a:pPr marL="342900" indent="-342900">
+              <a:buFont typeface="Arial" panose="020B0604020202020204" pitchFamily="34" charset="0"/>
+              <a:buChar char="•"/>
+            </a:pPr>
+            <a:r>
+              <a:rPr lang="en-US" dirty="0"/>
+              <a:t>Approach</a:t>
+            </a:r>
+          </a:p>
+          <a:p>
+            <a:pPr marL="800100" lvl="1" indent="-342900">
+              <a:buFont typeface="Arial" panose="020B0604020202020204" pitchFamily="34" charset="0"/>
+              <a:buChar char="•"/>
+            </a:pPr>
+            <a:r>
+              <a:rPr lang="en-US" dirty="0"/>
+              <a:t>Physical and Chemical Properties of Crude Oil</a:t>
+            </a:r>
+          </a:p>
+          <a:p>
+            <a:pPr marL="800100" lvl="1" indent="-342900">
+              <a:buFont typeface="Arial" panose="020B0604020202020204" pitchFamily="34" charset="0"/>
+              <a:buChar char="•"/>
+            </a:pPr>
+            <a:r>
+              <a:rPr lang="en-US" dirty="0"/>
+              <a:t>Hypothesis</a:t>
+            </a:r>
+          </a:p>
+          <a:p>
+            <a:pPr marL="342900" indent="-342900">
+              <a:buFont typeface="Arial" panose="020B0604020202020204" pitchFamily="34" charset="0"/>
+              <a:buChar char="•"/>
+            </a:pPr>
+            <a:r>
+              <a:rPr lang="en-US" dirty="0"/>
+              <a:t>Datasets</a:t>
+            </a:r>
+          </a:p>
+          <a:p>
+            <a:pPr marL="342900" indent="-342900">
+              <a:buFont typeface="Arial" panose="020B0604020202020204" pitchFamily="34" charset="0"/>
+              <a:buChar char="•"/>
+            </a:pPr>
+            <a:r>
+              <a:rPr lang="en-US" dirty="0"/>
+              <a:t>Analysis</a:t>
+            </a:r>
+          </a:p>
+          <a:p>
+            <a:pPr marL="342900" indent="-342900">
+              <a:buFont typeface="Arial" panose="020B0604020202020204" pitchFamily="34" charset="0"/>
+              <a:buChar char="•"/>
+            </a:pPr>
+            <a:r>
+              <a:rPr lang="en-US" dirty="0"/>
+              <a:t>Results</a:t>
+            </a:r>
+          </a:p>
+          <a:p>
+            <a:pPr marL="342900" indent="-342900">
+              <a:buFont typeface="Arial" panose="020B0604020202020204" pitchFamily="34" charset="0"/>
+              <a:buChar char="•"/>
+            </a:pPr>
+            <a:r>
+              <a:rPr lang="en-US" dirty="0"/>
+              <a:t>Conclusion</a:t>
+            </a:r>
+          </a:p>
+          <a:p>
+            <a:pPr marL="342900" indent="-342900">
+              <a:buFont typeface="Arial" panose="020B0604020202020204" pitchFamily="34" charset="0"/>
+              <a:buChar char="•"/>
+            </a:pPr>
+            <a:r>
+              <a:rPr lang="en-US" dirty="0"/>
+              <a:t>Future Investigation</a:t>
+            </a:r>
+          </a:p>
+          <a:p>
+            <a:pPr marL="342900" indent="-342900">
+              <a:buFont typeface="Arial" panose="020B0604020202020204" pitchFamily="34" charset="0"/>
+              <a:buChar char="•"/>
+            </a:pPr>
+            <a:r>
+              <a:rPr lang="en-US" dirty="0"/>
+              <a:t>References</a:t>
+            </a:r>
+          </a:p>
+          <a:p>
+            <a:pPr marL="342900" indent="-342900">
+              <a:buFont typeface="Arial" panose="020B0604020202020204" pitchFamily="34" charset="0"/>
+              <a:buChar char="•"/>
+            </a:pPr>
+            <a:r>
+              <a:rPr lang="en-US" dirty="0"/>
+              <a:t>Appendix</a:t>
+            </a:r>
+          </a:p>
+        </p:txBody>
+      </p:sp>
+      <p:cxnSp>
+        <p:nvCxnSpPr>
+          <p:cNvPr id="8" name="Straight Connector 7">
+            <a:extLst>
+              <a:ext uri="{FF2B5EF4-FFF2-40B4-BE49-F238E27FC236}">
+                <a16:creationId xmlns:a16="http://schemas.microsoft.com/office/drawing/2014/main" id="{367ED728-390F-3F8A-5857-EA1F707AD76B}"/>
+              </a:ext>
+            </a:extLst>
+          </p:cNvPr>
+          <p:cNvCxnSpPr>
+            <a:cxnSpLocks/>
+          </p:cNvCxnSpPr>
+          <p:nvPr/>
+        </p:nvCxnSpPr>
+        <p:spPr>
+          <a:xfrm>
+            <a:off x="348343" y="923109"/>
+            <a:ext cx="11625311" cy="0"/>
+          </a:xfrm>
+          <a:prstGeom prst="line">
+            <a:avLst/>
+          </a:prstGeom>
+          <a:ln w="38100">
+            <a:solidFill>
+              <a:srgbClr val="213442"/>
+            </a:solidFill>
+          </a:ln>
+        </p:spPr>
+        <p:style>
+          <a:lnRef idx="1">
+            <a:schemeClr val="accent1"/>
+          </a:lnRef>
+          <a:fillRef idx="0">
+            <a:schemeClr val="accent1"/>
+          </a:fillRef>
+          <a:effectRef idx="0">
+            <a:schemeClr val="accent1"/>
+          </a:effectRef>
+          <a:fontRef idx="minor">
+            <a:schemeClr val="tx1"/>
+          </a:fontRef>
+        </p:style>
+      </p:cxnSp>
     </p:spTree>
     <p:extLst>
       <p:ext uri="{BB962C8B-B14F-4D97-AF65-F5344CB8AC3E}">
         <p14:creationId xmlns:p14="http://schemas.microsoft.com/office/powerpoint/2010/main" val="418048750"/>
+      </p:ext>
+    </p:extLst>
+  </p:cSld>
+  <p:clrMapOvr>
+    <a:masterClrMapping/>
+  </p:clrMapOvr>
+</p:sld>
+</file>
+
+<file path=ppt/slides/slide3.xml><?xml version="1.0" encoding="utf-8"?>
+<p:sld xmlns:a="http://schemas.openxmlformats.org/drawingml/2006/main" xmlns:r="http://schemas.openxmlformats.org/officeDocument/2006/relationships" xmlns:p="http://schemas.openxmlformats.org/presentationml/2006/main">
+  <p:cSld>
+    <p:spTree>
+      <p:nvGrpSpPr>
+        <p:cNvPr id="1" name=""/>
+        <p:cNvGrpSpPr/>
+        <p:nvPr/>
+      </p:nvGrpSpPr>
+      <p:grpSpPr>
+        <a:xfrm>
+          <a:off x="0" y="0"/>
+          <a:ext cx="0" cy="0"/>
+          <a:chOff x="0" y="0"/>
+          <a:chExt cx="0" cy="0"/>
+        </a:xfrm>
+      </p:grpSpPr>
+      <p:sp>
+        <p:nvSpPr>
+          <p:cNvPr id="4" name="Rectangle 3">
+            <a:extLst>
+              <a:ext uri="{FF2B5EF4-FFF2-40B4-BE49-F238E27FC236}">
+                <a16:creationId xmlns:a16="http://schemas.microsoft.com/office/drawing/2014/main" id="{9C5E69D8-2133-86C5-C478-359118968E16}"/>
+              </a:ext>
+            </a:extLst>
+          </p:cNvPr>
+          <p:cNvSpPr/>
+          <p:nvPr/>
+        </p:nvSpPr>
+        <p:spPr>
+          <a:xfrm>
+            <a:off x="233183" y="304280"/>
+            <a:ext cx="11523387" cy="618829"/>
+          </a:xfrm>
+          <a:prstGeom prst="rect">
+            <a:avLst/>
+          </a:prstGeom>
+          <a:noFill/>
+          <a:ln>
+            <a:noFill/>
+          </a:ln>
+        </p:spPr>
+        <p:style>
+          <a:lnRef idx="2">
+            <a:schemeClr val="accent1">
+              <a:shade val="15000"/>
+            </a:schemeClr>
+          </a:lnRef>
+          <a:fillRef idx="1">
+            <a:schemeClr val="accent1"/>
+          </a:fillRef>
+          <a:effectRef idx="0">
+            <a:schemeClr val="accent1"/>
+          </a:effectRef>
+          <a:fontRef idx="minor">
+            <a:schemeClr val="lt1"/>
+          </a:fontRef>
+        </p:style>
+        <p:txBody>
+          <a:bodyPr rtlCol="0" anchor="ctr"/>
+          <a:lstStyle/>
+          <a:p>
+            <a:r>
+              <a:rPr lang="en-US" sz="3600" b="1" dirty="0">
+                <a:solidFill>
+                  <a:srgbClr val="213442"/>
+                </a:solidFill>
+              </a:rPr>
+              <a:t>Problem Statement</a:t>
+            </a:r>
+          </a:p>
+        </p:txBody>
+      </p:sp>
+      <p:pic>
+        <p:nvPicPr>
+          <p:cNvPr id="6" name="Picture 2" descr="Validere Acquires Regulatory Reporting Platform Clairifi - Validere">
+            <a:extLst>
+              <a:ext uri="{FF2B5EF4-FFF2-40B4-BE49-F238E27FC236}">
+                <a16:creationId xmlns:a16="http://schemas.microsoft.com/office/drawing/2014/main" id="{5AE29AB1-08CB-3040-BAF6-3C28420849C7}"/>
+              </a:ext>
+            </a:extLst>
+          </p:cNvPr>
+          <p:cNvPicPr>
+            <a:picLocks noChangeAspect="1" noChangeArrowheads="1"/>
+          </p:cNvPicPr>
+          <p:nvPr/>
+        </p:nvPicPr>
+        <p:blipFill>
+          <a:blip r:embed="rId2">
+            <a:extLst>
+              <a:ext uri="{28A0092B-C50C-407E-A947-70E740481C1C}">
+                <a14:useLocalDpi xmlns:a14="http://schemas.microsoft.com/office/drawing/2010/main" val="0"/>
+              </a:ext>
+            </a:extLst>
+          </a:blip>
+          <a:srcRect/>
+          <a:stretch>
+            <a:fillRect/>
+          </a:stretch>
+        </p:blipFill>
+        <p:spPr bwMode="auto">
+          <a:xfrm>
+            <a:off x="9588136" y="6313712"/>
+            <a:ext cx="2385518" cy="248400"/>
+          </a:xfrm>
+          <a:prstGeom prst="rect">
+            <a:avLst/>
+          </a:prstGeom>
+          <a:noFill/>
+          <a:extLst>
+            <a:ext uri="{909E8E84-426E-40DD-AFC4-6F175D3DCCD1}">
+              <a14:hiddenFill xmlns:a14="http://schemas.microsoft.com/office/drawing/2010/main">
+                <a:solidFill>
+                  <a:srgbClr val="FFFFFF"/>
+                </a:solidFill>
+              </a14:hiddenFill>
+            </a:ext>
+          </a:extLst>
+        </p:spPr>
+      </p:pic>
+      <p:sp>
+        <p:nvSpPr>
+          <p:cNvPr id="7" name="TextBox 6">
+            <a:extLst>
+              <a:ext uri="{FF2B5EF4-FFF2-40B4-BE49-F238E27FC236}">
+                <a16:creationId xmlns:a16="http://schemas.microsoft.com/office/drawing/2014/main" id="{3DA76F35-D9B8-C9A4-D281-3E7D21973AFB}"/>
+              </a:ext>
+            </a:extLst>
+          </p:cNvPr>
+          <p:cNvSpPr txBox="1"/>
+          <p:nvPr/>
+        </p:nvSpPr>
+        <p:spPr>
+          <a:xfrm>
+            <a:off x="348343" y="1910250"/>
+            <a:ext cx="10162903" cy="1569660"/>
+          </a:xfrm>
+          <a:prstGeom prst="rect">
+            <a:avLst/>
+          </a:prstGeom>
+          <a:noFill/>
+        </p:spPr>
+        <p:txBody>
+          <a:bodyPr wrap="square" rtlCol="0">
+            <a:spAutoFit/>
+          </a:bodyPr>
+          <a:lstStyle/>
+          <a:p>
+            <a:r>
+              <a:rPr lang="en-US" sz="1200" b="1" dirty="0"/>
+              <a:t>Part A</a:t>
+            </a:r>
+          </a:p>
+          <a:p>
+            <a:r>
+              <a:rPr lang="en-US" sz="1200" dirty="0"/>
+              <a:t>What physical or chemical properties of crude oil could be responsible for pipeline accidents?</a:t>
+            </a:r>
+          </a:p>
+          <a:p>
+            <a:endParaRPr lang="en-US" sz="1200" dirty="0"/>
+          </a:p>
+          <a:p>
+            <a:r>
+              <a:rPr lang="en-US" sz="1200" b="1" dirty="0"/>
+              <a:t>Part B - Regulations &amp; Implications</a:t>
+            </a:r>
+          </a:p>
+          <a:p>
+            <a:r>
+              <a:rPr lang="en-US" sz="1200" dirty="0"/>
+              <a:t>- What regulations on those properties would you recommend?</a:t>
+            </a:r>
+          </a:p>
+          <a:p>
+            <a:r>
+              <a:rPr lang="en-US" sz="1200" dirty="0"/>
+              <a:t>- Have we gotten better at regulating those properties over time?</a:t>
+            </a:r>
+          </a:p>
+          <a:p>
+            <a:r>
+              <a:rPr lang="en-US" sz="1200" dirty="0"/>
+              <a:t>- What implications on the oil market would these regulations have? </a:t>
+            </a:r>
+          </a:p>
+          <a:p>
+            <a:r>
+              <a:rPr lang="en-US" sz="1200" dirty="0"/>
+              <a:t>- How can success of these regulations be quantified in the short term and long term? </a:t>
+            </a:r>
+          </a:p>
+        </p:txBody>
+      </p:sp>
+      <p:cxnSp>
+        <p:nvCxnSpPr>
+          <p:cNvPr id="8" name="Straight Connector 7">
+            <a:extLst>
+              <a:ext uri="{FF2B5EF4-FFF2-40B4-BE49-F238E27FC236}">
+                <a16:creationId xmlns:a16="http://schemas.microsoft.com/office/drawing/2014/main" id="{367ED728-390F-3F8A-5857-EA1F707AD76B}"/>
+              </a:ext>
+            </a:extLst>
+          </p:cNvPr>
+          <p:cNvCxnSpPr>
+            <a:cxnSpLocks/>
+          </p:cNvCxnSpPr>
+          <p:nvPr/>
+        </p:nvCxnSpPr>
+        <p:spPr>
+          <a:xfrm>
+            <a:off x="348343" y="923109"/>
+            <a:ext cx="11625311" cy="0"/>
+          </a:xfrm>
+          <a:prstGeom prst="line">
+            <a:avLst/>
+          </a:prstGeom>
+          <a:ln w="38100">
+            <a:solidFill>
+              <a:srgbClr val="213442"/>
+            </a:solidFill>
+          </a:ln>
+        </p:spPr>
+        <p:style>
+          <a:lnRef idx="1">
+            <a:schemeClr val="accent1"/>
+          </a:lnRef>
+          <a:fillRef idx="0">
+            <a:schemeClr val="accent1"/>
+          </a:fillRef>
+          <a:effectRef idx="0">
+            <a:schemeClr val="accent1"/>
+          </a:effectRef>
+          <a:fontRef idx="minor">
+            <a:schemeClr val="tx1"/>
+          </a:fontRef>
+        </p:style>
+      </p:cxnSp>
+      <p:sp>
+        <p:nvSpPr>
+          <p:cNvPr id="2" name="TextBox 1">
+            <a:extLst>
+              <a:ext uri="{FF2B5EF4-FFF2-40B4-BE49-F238E27FC236}">
+                <a16:creationId xmlns:a16="http://schemas.microsoft.com/office/drawing/2014/main" id="{8446A0DB-5D02-B35C-44C5-F05E5426C5DF}"/>
+              </a:ext>
+            </a:extLst>
+          </p:cNvPr>
+          <p:cNvSpPr txBox="1"/>
+          <p:nvPr/>
+        </p:nvSpPr>
+        <p:spPr>
+          <a:xfrm>
+            <a:off x="290763" y="1047347"/>
+            <a:ext cx="11682892" cy="369332"/>
+          </a:xfrm>
+          <a:prstGeom prst="rect">
+            <a:avLst/>
+          </a:prstGeom>
+          <a:noFill/>
+        </p:spPr>
+        <p:txBody>
+          <a:bodyPr wrap="square" rtlCol="0">
+            <a:spAutoFit/>
+          </a:bodyPr>
+          <a:lstStyle/>
+          <a:p>
+            <a:r>
+              <a:rPr lang="en-US" dirty="0"/>
+              <a:t>What qualities of crude oil lead to pipeline accidents? </a:t>
+            </a:r>
+          </a:p>
+        </p:txBody>
+      </p:sp>
+    </p:spTree>
+    <p:extLst>
+      <p:ext uri="{BB962C8B-B14F-4D97-AF65-F5344CB8AC3E}">
+        <p14:creationId xmlns:p14="http://schemas.microsoft.com/office/powerpoint/2010/main" val="387674944"/>
+      </p:ext>
+    </p:extLst>
+  </p:cSld>
+  <p:clrMapOvr>
+    <a:masterClrMapping/>
+  </p:clrMapOvr>
+</p:sld>
+</file>
+
+<file path=ppt/slides/slide4.xml><?xml version="1.0" encoding="utf-8"?>
+<p:sld xmlns:a="http://schemas.openxmlformats.org/drawingml/2006/main" xmlns:r="http://schemas.openxmlformats.org/officeDocument/2006/relationships" xmlns:p="http://schemas.openxmlformats.org/presentationml/2006/main">
+  <p:cSld>
+    <p:spTree>
+      <p:nvGrpSpPr>
+        <p:cNvPr id="1" name=""/>
+        <p:cNvGrpSpPr/>
+        <p:nvPr/>
+      </p:nvGrpSpPr>
+      <p:grpSpPr>
+        <a:xfrm>
+          <a:off x="0" y="0"/>
+          <a:ext cx="0" cy="0"/>
+          <a:chOff x="0" y="0"/>
+          <a:chExt cx="0" cy="0"/>
+        </a:xfrm>
+      </p:grpSpPr>
+      <p:sp>
+        <p:nvSpPr>
+          <p:cNvPr id="4" name="Rectangle 3">
+            <a:extLst>
+              <a:ext uri="{FF2B5EF4-FFF2-40B4-BE49-F238E27FC236}">
+                <a16:creationId xmlns:a16="http://schemas.microsoft.com/office/drawing/2014/main" id="{9C5E69D8-2133-86C5-C478-359118968E16}"/>
+              </a:ext>
+            </a:extLst>
+          </p:cNvPr>
+          <p:cNvSpPr/>
+          <p:nvPr/>
+        </p:nvSpPr>
+        <p:spPr>
+          <a:xfrm>
+            <a:off x="233183" y="304280"/>
+            <a:ext cx="11523387" cy="618829"/>
+          </a:xfrm>
+          <a:prstGeom prst="rect">
+            <a:avLst/>
+          </a:prstGeom>
+          <a:noFill/>
+          <a:ln>
+            <a:noFill/>
+          </a:ln>
+        </p:spPr>
+        <p:style>
+          <a:lnRef idx="2">
+            <a:schemeClr val="accent1">
+              <a:shade val="15000"/>
+            </a:schemeClr>
+          </a:lnRef>
+          <a:fillRef idx="1">
+            <a:schemeClr val="accent1"/>
+          </a:fillRef>
+          <a:effectRef idx="0">
+            <a:schemeClr val="accent1"/>
+          </a:effectRef>
+          <a:fontRef idx="minor">
+            <a:schemeClr val="lt1"/>
+          </a:fontRef>
+        </p:style>
+        <p:txBody>
+          <a:bodyPr rtlCol="0" anchor="ctr"/>
+          <a:lstStyle/>
+          <a:p>
+            <a:r>
+              <a:rPr lang="en-US" sz="3600" b="1" dirty="0">
+                <a:solidFill>
+                  <a:srgbClr val="213442"/>
+                </a:solidFill>
+              </a:rPr>
+              <a:t>Scope</a:t>
+            </a:r>
+          </a:p>
+        </p:txBody>
+      </p:sp>
+      <p:pic>
+        <p:nvPicPr>
+          <p:cNvPr id="6" name="Picture 2" descr="Validere Acquires Regulatory Reporting Platform Clairifi - Validere">
+            <a:extLst>
+              <a:ext uri="{FF2B5EF4-FFF2-40B4-BE49-F238E27FC236}">
+                <a16:creationId xmlns:a16="http://schemas.microsoft.com/office/drawing/2014/main" id="{5AE29AB1-08CB-3040-BAF6-3C28420849C7}"/>
+              </a:ext>
+            </a:extLst>
+          </p:cNvPr>
+          <p:cNvPicPr>
+            <a:picLocks noChangeAspect="1" noChangeArrowheads="1"/>
+          </p:cNvPicPr>
+          <p:nvPr/>
+        </p:nvPicPr>
+        <p:blipFill>
+          <a:blip r:embed="rId2">
+            <a:extLst>
+              <a:ext uri="{28A0092B-C50C-407E-A947-70E740481C1C}">
+                <a14:useLocalDpi xmlns:a14="http://schemas.microsoft.com/office/drawing/2010/main" val="0"/>
+              </a:ext>
+            </a:extLst>
+          </a:blip>
+          <a:srcRect/>
+          <a:stretch>
+            <a:fillRect/>
+          </a:stretch>
+        </p:blipFill>
+        <p:spPr bwMode="auto">
+          <a:xfrm>
+            <a:off x="9588136" y="6313712"/>
+            <a:ext cx="2385518" cy="248400"/>
+          </a:xfrm>
+          <a:prstGeom prst="rect">
+            <a:avLst/>
+          </a:prstGeom>
+          <a:noFill/>
+          <a:extLst>
+            <a:ext uri="{909E8E84-426E-40DD-AFC4-6F175D3DCCD1}">
+              <a14:hiddenFill xmlns:a14="http://schemas.microsoft.com/office/drawing/2010/main">
+                <a:solidFill>
+                  <a:srgbClr val="FFFFFF"/>
+                </a:solidFill>
+              </a14:hiddenFill>
+            </a:ext>
+          </a:extLst>
+        </p:spPr>
+      </p:pic>
+      <p:sp>
+        <p:nvSpPr>
+          <p:cNvPr id="7" name="TextBox 6">
+            <a:extLst>
+              <a:ext uri="{FF2B5EF4-FFF2-40B4-BE49-F238E27FC236}">
+                <a16:creationId xmlns:a16="http://schemas.microsoft.com/office/drawing/2014/main" id="{3DA76F35-D9B8-C9A4-D281-3E7D21973AFB}"/>
+              </a:ext>
+            </a:extLst>
+          </p:cNvPr>
+          <p:cNvSpPr txBox="1"/>
+          <p:nvPr/>
+        </p:nvSpPr>
+        <p:spPr>
+          <a:xfrm>
+            <a:off x="348343" y="1910250"/>
+            <a:ext cx="10162903" cy="1938992"/>
+          </a:xfrm>
+          <a:prstGeom prst="rect">
+            <a:avLst/>
+          </a:prstGeom>
+          <a:noFill/>
+        </p:spPr>
+        <p:txBody>
+          <a:bodyPr wrap="square" rtlCol="0">
+            <a:spAutoFit/>
+          </a:bodyPr>
+          <a:lstStyle/>
+          <a:p>
+            <a:r>
+              <a:rPr lang="en-US" sz="1200" b="1" dirty="0"/>
+              <a:t>Pipeline Accidents</a:t>
+            </a:r>
+          </a:p>
+          <a:p>
+            <a:r>
+              <a:rPr lang="en-US" sz="1200" dirty="0"/>
+              <a:t>- Multiple materials (liquids, gases) moved by pipelines, including crude oil, natural gas, etc.</a:t>
+            </a:r>
+          </a:p>
+          <a:p>
+            <a:r>
+              <a:rPr lang="en-US" sz="1200" dirty="0"/>
+              <a:t>- Lots of reasons for pipeline accidents – human error, equipment malfunction, etc.</a:t>
+            </a:r>
+          </a:p>
+          <a:p>
+            <a:endParaRPr lang="en-US" sz="1200" dirty="0"/>
+          </a:p>
+          <a:p>
+            <a:r>
+              <a:rPr lang="en-US" sz="1200" b="1" dirty="0"/>
+              <a:t>Focus of Investigation</a:t>
+            </a:r>
+          </a:p>
+          <a:p>
+            <a:r>
+              <a:rPr lang="en-US" sz="1200" dirty="0"/>
+              <a:t>- Materials</a:t>
+            </a:r>
+          </a:p>
+          <a:p>
+            <a:r>
+              <a:rPr lang="en-US" sz="1200" dirty="0"/>
+              <a:t>	- first look at crude oil vs. everything else to see if there is anything inherent in crude oil</a:t>
+            </a:r>
+          </a:p>
+          <a:p>
+            <a:r>
+              <a:rPr lang="en-US" sz="1200" dirty="0"/>
+              <a:t>	- second look at different properties of crude oil to see if they are having an influence on accidents</a:t>
+            </a:r>
+          </a:p>
+          <a:p>
+            <a:r>
+              <a:rPr lang="en-US" sz="1200" dirty="0"/>
+              <a:t>- Cause of accident - try to focus on accidents that may have been related to the material that they were transporting. This includes flammability, corrosivity, and more… </a:t>
+            </a:r>
+          </a:p>
+        </p:txBody>
+      </p:sp>
+      <p:cxnSp>
+        <p:nvCxnSpPr>
+          <p:cNvPr id="8" name="Straight Connector 7">
+            <a:extLst>
+              <a:ext uri="{FF2B5EF4-FFF2-40B4-BE49-F238E27FC236}">
+                <a16:creationId xmlns:a16="http://schemas.microsoft.com/office/drawing/2014/main" id="{367ED728-390F-3F8A-5857-EA1F707AD76B}"/>
+              </a:ext>
+            </a:extLst>
+          </p:cNvPr>
+          <p:cNvCxnSpPr>
+            <a:cxnSpLocks/>
+          </p:cNvCxnSpPr>
+          <p:nvPr/>
+        </p:nvCxnSpPr>
+        <p:spPr>
+          <a:xfrm>
+            <a:off x="348343" y="923109"/>
+            <a:ext cx="11625311" cy="0"/>
+          </a:xfrm>
+          <a:prstGeom prst="line">
+            <a:avLst/>
+          </a:prstGeom>
+          <a:ln w="38100">
+            <a:solidFill>
+              <a:srgbClr val="213442"/>
+            </a:solidFill>
+          </a:ln>
+        </p:spPr>
+        <p:style>
+          <a:lnRef idx="1">
+            <a:schemeClr val="accent1"/>
+          </a:lnRef>
+          <a:fillRef idx="0">
+            <a:schemeClr val="accent1"/>
+          </a:fillRef>
+          <a:effectRef idx="0">
+            <a:schemeClr val="accent1"/>
+          </a:effectRef>
+          <a:fontRef idx="minor">
+            <a:schemeClr val="tx1"/>
+          </a:fontRef>
+        </p:style>
+      </p:cxnSp>
+      <p:sp>
+        <p:nvSpPr>
+          <p:cNvPr id="2" name="TextBox 1">
+            <a:extLst>
+              <a:ext uri="{FF2B5EF4-FFF2-40B4-BE49-F238E27FC236}">
+                <a16:creationId xmlns:a16="http://schemas.microsoft.com/office/drawing/2014/main" id="{8446A0DB-5D02-B35C-44C5-F05E5426C5DF}"/>
+              </a:ext>
+            </a:extLst>
+          </p:cNvPr>
+          <p:cNvSpPr txBox="1"/>
+          <p:nvPr/>
+        </p:nvSpPr>
+        <p:spPr>
+          <a:xfrm>
+            <a:off x="290763" y="1047347"/>
+            <a:ext cx="11682892" cy="369332"/>
+          </a:xfrm>
+          <a:prstGeom prst="rect">
+            <a:avLst/>
+          </a:prstGeom>
+          <a:noFill/>
+        </p:spPr>
+        <p:txBody>
+          <a:bodyPr wrap="square" rtlCol="0">
+            <a:spAutoFit/>
+          </a:bodyPr>
+          <a:lstStyle/>
+          <a:p>
+            <a:r>
+              <a:rPr lang="en-US" dirty="0"/>
+              <a:t>Narrowing in on the problem statement so that we can take a data-driven approach to come to a solution</a:t>
+            </a:r>
+          </a:p>
+        </p:txBody>
+      </p:sp>
+    </p:spTree>
+    <p:extLst>
+      <p:ext uri="{BB962C8B-B14F-4D97-AF65-F5344CB8AC3E}">
+        <p14:creationId xmlns:p14="http://schemas.microsoft.com/office/powerpoint/2010/main" val="3328951655"/>
+      </p:ext>
+    </p:extLst>
+  </p:cSld>
+  <p:clrMapOvr>
+    <a:masterClrMapping/>
+  </p:clrMapOvr>
+</p:sld>
+</file>
+
+<file path=ppt/slides/slide5.xml><?xml version="1.0" encoding="utf-8"?>
+<p:sld xmlns:a="http://schemas.openxmlformats.org/drawingml/2006/main" xmlns:r="http://schemas.openxmlformats.org/officeDocument/2006/relationships" xmlns:p="http://schemas.openxmlformats.org/presentationml/2006/main">
+  <p:cSld>
+    <p:spTree>
+      <p:nvGrpSpPr>
+        <p:cNvPr id="1" name=""/>
+        <p:cNvGrpSpPr/>
+        <p:nvPr/>
+      </p:nvGrpSpPr>
+      <p:grpSpPr>
+        <a:xfrm>
+          <a:off x="0" y="0"/>
+          <a:ext cx="0" cy="0"/>
+          <a:chOff x="0" y="0"/>
+          <a:chExt cx="0" cy="0"/>
+        </a:xfrm>
+      </p:grpSpPr>
+      <p:sp>
+        <p:nvSpPr>
+          <p:cNvPr id="4" name="Rectangle 3">
+            <a:extLst>
+              <a:ext uri="{FF2B5EF4-FFF2-40B4-BE49-F238E27FC236}">
+                <a16:creationId xmlns:a16="http://schemas.microsoft.com/office/drawing/2014/main" id="{9C5E69D8-2133-86C5-C478-359118968E16}"/>
+              </a:ext>
+            </a:extLst>
+          </p:cNvPr>
+          <p:cNvSpPr/>
+          <p:nvPr/>
+        </p:nvSpPr>
+        <p:spPr>
+          <a:xfrm>
+            <a:off x="233183" y="304280"/>
+            <a:ext cx="11523387" cy="618829"/>
+          </a:xfrm>
+          <a:prstGeom prst="rect">
+            <a:avLst/>
+          </a:prstGeom>
+          <a:noFill/>
+          <a:ln>
+            <a:noFill/>
+          </a:ln>
+        </p:spPr>
+        <p:style>
+          <a:lnRef idx="2">
+            <a:schemeClr val="accent1">
+              <a:shade val="15000"/>
+            </a:schemeClr>
+          </a:lnRef>
+          <a:fillRef idx="1">
+            <a:schemeClr val="accent1"/>
+          </a:fillRef>
+          <a:effectRef idx="0">
+            <a:schemeClr val="accent1"/>
+          </a:effectRef>
+          <a:fontRef idx="minor">
+            <a:schemeClr val="lt1"/>
+          </a:fontRef>
+        </p:style>
+        <p:txBody>
+          <a:bodyPr rtlCol="0" anchor="ctr"/>
+          <a:lstStyle/>
+          <a:p>
+            <a:r>
+              <a:rPr lang="en-US" sz="3600" b="1" dirty="0">
+                <a:solidFill>
+                  <a:srgbClr val="213442"/>
+                </a:solidFill>
+              </a:rPr>
+              <a:t>Approach</a:t>
+            </a:r>
+          </a:p>
+        </p:txBody>
+      </p:sp>
+      <p:pic>
+        <p:nvPicPr>
+          <p:cNvPr id="6" name="Picture 2" descr="Validere Acquires Regulatory Reporting Platform Clairifi - Validere">
+            <a:extLst>
+              <a:ext uri="{FF2B5EF4-FFF2-40B4-BE49-F238E27FC236}">
+                <a16:creationId xmlns:a16="http://schemas.microsoft.com/office/drawing/2014/main" id="{5AE29AB1-08CB-3040-BAF6-3C28420849C7}"/>
+              </a:ext>
+            </a:extLst>
+          </p:cNvPr>
+          <p:cNvPicPr>
+            <a:picLocks noChangeAspect="1" noChangeArrowheads="1"/>
+          </p:cNvPicPr>
+          <p:nvPr/>
+        </p:nvPicPr>
+        <p:blipFill>
+          <a:blip r:embed="rId2">
+            <a:extLst>
+              <a:ext uri="{28A0092B-C50C-407E-A947-70E740481C1C}">
+                <a14:useLocalDpi xmlns:a14="http://schemas.microsoft.com/office/drawing/2010/main" val="0"/>
+              </a:ext>
+            </a:extLst>
+          </a:blip>
+          <a:srcRect/>
+          <a:stretch>
+            <a:fillRect/>
+          </a:stretch>
+        </p:blipFill>
+        <p:spPr bwMode="auto">
+          <a:xfrm>
+            <a:off x="9588136" y="6313712"/>
+            <a:ext cx="2385518" cy="248400"/>
+          </a:xfrm>
+          <a:prstGeom prst="rect">
+            <a:avLst/>
+          </a:prstGeom>
+          <a:noFill/>
+          <a:extLst>
+            <a:ext uri="{909E8E84-426E-40DD-AFC4-6F175D3DCCD1}">
+              <a14:hiddenFill xmlns:a14="http://schemas.microsoft.com/office/drawing/2010/main">
+                <a:solidFill>
+                  <a:srgbClr val="FFFFFF"/>
+                </a:solidFill>
+              </a14:hiddenFill>
+            </a:ext>
+          </a:extLst>
+        </p:spPr>
+      </p:pic>
+      <p:sp>
+        <p:nvSpPr>
+          <p:cNvPr id="7" name="TextBox 6">
+            <a:extLst>
+              <a:ext uri="{FF2B5EF4-FFF2-40B4-BE49-F238E27FC236}">
+                <a16:creationId xmlns:a16="http://schemas.microsoft.com/office/drawing/2014/main" id="{3DA76F35-D9B8-C9A4-D281-3E7D21973AFB}"/>
+              </a:ext>
+            </a:extLst>
+          </p:cNvPr>
+          <p:cNvSpPr txBox="1"/>
+          <p:nvPr/>
+        </p:nvSpPr>
+        <p:spPr>
+          <a:xfrm>
+            <a:off x="348343" y="1910250"/>
+            <a:ext cx="10162903" cy="2123658"/>
+          </a:xfrm>
+          <a:prstGeom prst="rect">
+            <a:avLst/>
+          </a:prstGeom>
+          <a:noFill/>
+        </p:spPr>
+        <p:txBody>
+          <a:bodyPr wrap="square" rtlCol="0">
+            <a:spAutoFit/>
+          </a:bodyPr>
+          <a:lstStyle/>
+          <a:p>
+            <a:r>
+              <a:rPr lang="en-US" sz="1200" b="1" dirty="0"/>
+              <a:t>About crude oil</a:t>
+            </a:r>
+          </a:p>
+          <a:p>
+            <a:r>
+              <a:rPr lang="en-US" sz="1200" dirty="0"/>
+              <a:t>- made up of hydrocarbons (by weight carbon, some hydrogen)</a:t>
+            </a:r>
+          </a:p>
+          <a:p>
+            <a:r>
+              <a:rPr lang="en-US" sz="1200" dirty="0"/>
+              <a:t>- Physical properties: can be light, medium, or heavy – API gravity</a:t>
+            </a:r>
+          </a:p>
+          <a:p>
+            <a:r>
+              <a:rPr lang="en-US" sz="1200" dirty="0"/>
+              <a:t>- Chemical properties: can be sour or sweet depending on sulfur content</a:t>
+            </a:r>
+          </a:p>
+          <a:p>
+            <a:endParaRPr lang="en-US" sz="1200" dirty="0"/>
+          </a:p>
+          <a:p>
+            <a:r>
+              <a:rPr lang="en-US" sz="1200" b="1" dirty="0"/>
+              <a:t>Hypothesis</a:t>
+            </a:r>
+          </a:p>
+          <a:p>
+            <a:r>
+              <a:rPr lang="en-US" sz="1200" dirty="0"/>
+              <a:t> - sour is more corrosive than sweet</a:t>
+            </a:r>
+          </a:p>
+          <a:p>
+            <a:r>
+              <a:rPr lang="en-US" sz="1200" dirty="0"/>
+              <a:t>- heavier affects how it flows – more pressure and energy required to pump the oil</a:t>
+            </a:r>
+          </a:p>
+          <a:p>
+            <a:r>
+              <a:rPr lang="en-US" sz="1200" dirty="0"/>
+              <a:t>	but light are more flammable</a:t>
+            </a:r>
+          </a:p>
+          <a:p>
+            <a:r>
+              <a:rPr lang="en-US" sz="1200" dirty="0"/>
+              <a:t>Make sure to use this:</a:t>
+            </a:r>
+          </a:p>
+          <a:p>
+            <a:r>
+              <a:rPr lang="en-US" sz="1200" dirty="0"/>
+              <a:t>	https://</a:t>
+            </a:r>
+            <a:r>
+              <a:rPr lang="en-US" sz="1200" dirty="0" err="1"/>
+              <a:t>www.epa.gov</a:t>
+            </a:r>
+            <a:r>
+              <a:rPr lang="en-US" sz="1200" dirty="0"/>
+              <a:t>/emergency-response/types-crude-oil</a:t>
+            </a:r>
+          </a:p>
+        </p:txBody>
+      </p:sp>
+      <p:cxnSp>
+        <p:nvCxnSpPr>
+          <p:cNvPr id="8" name="Straight Connector 7">
+            <a:extLst>
+              <a:ext uri="{FF2B5EF4-FFF2-40B4-BE49-F238E27FC236}">
+                <a16:creationId xmlns:a16="http://schemas.microsoft.com/office/drawing/2014/main" id="{367ED728-390F-3F8A-5857-EA1F707AD76B}"/>
+              </a:ext>
+            </a:extLst>
+          </p:cNvPr>
+          <p:cNvCxnSpPr>
+            <a:cxnSpLocks/>
+          </p:cNvCxnSpPr>
+          <p:nvPr/>
+        </p:nvCxnSpPr>
+        <p:spPr>
+          <a:xfrm>
+            <a:off x="348343" y="923109"/>
+            <a:ext cx="11625311" cy="0"/>
+          </a:xfrm>
+          <a:prstGeom prst="line">
+            <a:avLst/>
+          </a:prstGeom>
+          <a:ln w="38100">
+            <a:solidFill>
+              <a:srgbClr val="213442"/>
+            </a:solidFill>
+          </a:ln>
+        </p:spPr>
+        <p:style>
+          <a:lnRef idx="1">
+            <a:schemeClr val="accent1"/>
+          </a:lnRef>
+          <a:fillRef idx="0">
+            <a:schemeClr val="accent1"/>
+          </a:fillRef>
+          <a:effectRef idx="0">
+            <a:schemeClr val="accent1"/>
+          </a:effectRef>
+          <a:fontRef idx="minor">
+            <a:schemeClr val="tx1"/>
+          </a:fontRef>
+        </p:style>
+      </p:cxnSp>
+      <p:sp>
+        <p:nvSpPr>
+          <p:cNvPr id="2" name="TextBox 1">
+            <a:extLst>
+              <a:ext uri="{FF2B5EF4-FFF2-40B4-BE49-F238E27FC236}">
+                <a16:creationId xmlns:a16="http://schemas.microsoft.com/office/drawing/2014/main" id="{8446A0DB-5D02-B35C-44C5-F05E5426C5DF}"/>
+              </a:ext>
+            </a:extLst>
+          </p:cNvPr>
+          <p:cNvSpPr txBox="1"/>
+          <p:nvPr/>
+        </p:nvSpPr>
+        <p:spPr>
+          <a:xfrm>
+            <a:off x="290763" y="1047347"/>
+            <a:ext cx="11682892" cy="369332"/>
+          </a:xfrm>
+          <a:prstGeom prst="rect">
+            <a:avLst/>
+          </a:prstGeom>
+          <a:noFill/>
+        </p:spPr>
+        <p:txBody>
+          <a:bodyPr wrap="square" rtlCol="0">
+            <a:spAutoFit/>
+          </a:bodyPr>
+          <a:lstStyle/>
+          <a:p>
+            <a:r>
+              <a:rPr lang="en-US" dirty="0"/>
+              <a:t>Investigating properties of crude oil so that a logical approach can be taken to solve the problem. </a:t>
+            </a:r>
+          </a:p>
+        </p:txBody>
+      </p:sp>
+    </p:spTree>
+    <p:extLst>
+      <p:ext uri="{BB962C8B-B14F-4D97-AF65-F5344CB8AC3E}">
+        <p14:creationId xmlns:p14="http://schemas.microsoft.com/office/powerpoint/2010/main" val="3191056045"/>
+      </p:ext>
+    </p:extLst>
+  </p:cSld>
+  <p:clrMapOvr>
+    <a:masterClrMapping/>
+  </p:clrMapOvr>
+</p:sld>
+</file>
+
+<file path=ppt/slides/slide6.xml><?xml version="1.0" encoding="utf-8"?>
+<p:sld xmlns:a="http://schemas.openxmlformats.org/drawingml/2006/main" xmlns:r="http://schemas.openxmlformats.org/officeDocument/2006/relationships" xmlns:p="http://schemas.openxmlformats.org/presentationml/2006/main">
+  <p:cSld>
+    <p:spTree>
+      <p:nvGrpSpPr>
+        <p:cNvPr id="1" name=""/>
+        <p:cNvGrpSpPr/>
+        <p:nvPr/>
+      </p:nvGrpSpPr>
+      <p:grpSpPr>
+        <a:xfrm>
+          <a:off x="0" y="0"/>
+          <a:ext cx="0" cy="0"/>
+          <a:chOff x="0" y="0"/>
+          <a:chExt cx="0" cy="0"/>
+        </a:xfrm>
+      </p:grpSpPr>
+      <p:sp>
+        <p:nvSpPr>
+          <p:cNvPr id="4" name="Rectangle 3">
+            <a:extLst>
+              <a:ext uri="{FF2B5EF4-FFF2-40B4-BE49-F238E27FC236}">
+                <a16:creationId xmlns:a16="http://schemas.microsoft.com/office/drawing/2014/main" id="{9C5E69D8-2133-86C5-C478-359118968E16}"/>
+              </a:ext>
+            </a:extLst>
+          </p:cNvPr>
+          <p:cNvSpPr/>
+          <p:nvPr/>
+        </p:nvSpPr>
+        <p:spPr>
+          <a:xfrm>
+            <a:off x="233183" y="304280"/>
+            <a:ext cx="11523387" cy="618829"/>
+          </a:xfrm>
+          <a:prstGeom prst="rect">
+            <a:avLst/>
+          </a:prstGeom>
+          <a:noFill/>
+          <a:ln>
+            <a:noFill/>
+          </a:ln>
+        </p:spPr>
+        <p:style>
+          <a:lnRef idx="2">
+            <a:schemeClr val="accent1">
+              <a:shade val="15000"/>
+            </a:schemeClr>
+          </a:lnRef>
+          <a:fillRef idx="1">
+            <a:schemeClr val="accent1"/>
+          </a:fillRef>
+          <a:effectRef idx="0">
+            <a:schemeClr val="accent1"/>
+          </a:effectRef>
+          <a:fontRef idx="minor">
+            <a:schemeClr val="lt1"/>
+          </a:fontRef>
+        </p:style>
+        <p:txBody>
+          <a:bodyPr rtlCol="0" anchor="ctr"/>
+          <a:lstStyle/>
+          <a:p>
+            <a:r>
+              <a:rPr lang="en-US" sz="3600" b="1" dirty="0">
+                <a:solidFill>
+                  <a:srgbClr val="213442"/>
+                </a:solidFill>
+              </a:rPr>
+              <a:t>Datasets</a:t>
+            </a:r>
+          </a:p>
+        </p:txBody>
+      </p:sp>
+      <p:pic>
+        <p:nvPicPr>
+          <p:cNvPr id="6" name="Picture 2" descr="Validere Acquires Regulatory Reporting Platform Clairifi - Validere">
+            <a:extLst>
+              <a:ext uri="{FF2B5EF4-FFF2-40B4-BE49-F238E27FC236}">
+                <a16:creationId xmlns:a16="http://schemas.microsoft.com/office/drawing/2014/main" id="{5AE29AB1-08CB-3040-BAF6-3C28420849C7}"/>
+              </a:ext>
+            </a:extLst>
+          </p:cNvPr>
+          <p:cNvPicPr>
+            <a:picLocks noChangeAspect="1" noChangeArrowheads="1"/>
+          </p:cNvPicPr>
+          <p:nvPr/>
+        </p:nvPicPr>
+        <p:blipFill>
+          <a:blip r:embed="rId2">
+            <a:extLst>
+              <a:ext uri="{28A0092B-C50C-407E-A947-70E740481C1C}">
+                <a14:useLocalDpi xmlns:a14="http://schemas.microsoft.com/office/drawing/2010/main" val="0"/>
+              </a:ext>
+            </a:extLst>
+          </a:blip>
+          <a:srcRect/>
+          <a:stretch>
+            <a:fillRect/>
+          </a:stretch>
+        </p:blipFill>
+        <p:spPr bwMode="auto">
+          <a:xfrm>
+            <a:off x="9588136" y="6313712"/>
+            <a:ext cx="2385518" cy="248400"/>
+          </a:xfrm>
+          <a:prstGeom prst="rect">
+            <a:avLst/>
+          </a:prstGeom>
+          <a:noFill/>
+          <a:extLst>
+            <a:ext uri="{909E8E84-426E-40DD-AFC4-6F175D3DCCD1}">
+              <a14:hiddenFill xmlns:a14="http://schemas.microsoft.com/office/drawing/2010/main">
+                <a:solidFill>
+                  <a:srgbClr val="FFFFFF"/>
+                </a:solidFill>
+              </a14:hiddenFill>
+            </a:ext>
+          </a:extLst>
+        </p:spPr>
+      </p:pic>
+      <p:cxnSp>
+        <p:nvCxnSpPr>
+          <p:cNvPr id="8" name="Straight Connector 7">
+            <a:extLst>
+              <a:ext uri="{FF2B5EF4-FFF2-40B4-BE49-F238E27FC236}">
+                <a16:creationId xmlns:a16="http://schemas.microsoft.com/office/drawing/2014/main" id="{367ED728-390F-3F8A-5857-EA1F707AD76B}"/>
+              </a:ext>
+            </a:extLst>
+          </p:cNvPr>
+          <p:cNvCxnSpPr>
+            <a:cxnSpLocks/>
+          </p:cNvCxnSpPr>
+          <p:nvPr/>
+        </p:nvCxnSpPr>
+        <p:spPr>
+          <a:xfrm>
+            <a:off x="348343" y="923109"/>
+            <a:ext cx="11625311" cy="0"/>
+          </a:xfrm>
+          <a:prstGeom prst="line">
+            <a:avLst/>
+          </a:prstGeom>
+          <a:ln w="38100">
+            <a:solidFill>
+              <a:srgbClr val="213442"/>
+            </a:solidFill>
+          </a:ln>
+        </p:spPr>
+        <p:style>
+          <a:lnRef idx="1">
+            <a:schemeClr val="accent1"/>
+          </a:lnRef>
+          <a:fillRef idx="0">
+            <a:schemeClr val="accent1"/>
+          </a:fillRef>
+          <a:effectRef idx="0">
+            <a:schemeClr val="accent1"/>
+          </a:effectRef>
+          <a:fontRef idx="minor">
+            <a:schemeClr val="tx1"/>
+          </a:fontRef>
+        </p:style>
+      </p:cxnSp>
+      <p:graphicFrame>
+        <p:nvGraphicFramePr>
+          <p:cNvPr id="7" name="Table 6">
+            <a:extLst>
+              <a:ext uri="{FF2B5EF4-FFF2-40B4-BE49-F238E27FC236}">
+                <a16:creationId xmlns:a16="http://schemas.microsoft.com/office/drawing/2014/main" id="{5E0EA448-18DA-9F51-CD94-1693B1992971}"/>
+              </a:ext>
+            </a:extLst>
+          </p:cNvPr>
+          <p:cNvGraphicFramePr>
+            <a:graphicFrameLocks noGrp="1"/>
+          </p:cNvGraphicFramePr>
+          <p:nvPr>
+            <p:extLst>
+              <p:ext uri="{D42A27DB-BD31-4B8C-83A1-F6EECF244321}">
+                <p14:modId xmlns:p14="http://schemas.microsoft.com/office/powerpoint/2010/main" val="57940289"/>
+              </p:ext>
+            </p:extLst>
+          </p:nvPr>
+        </p:nvGraphicFramePr>
+        <p:xfrm>
+          <a:off x="283343" y="2579344"/>
+          <a:ext cx="11625313" cy="3627120"/>
+        </p:xfrm>
+        <a:graphic>
+          <a:graphicData uri="http://schemas.openxmlformats.org/drawingml/2006/table">
+            <a:tbl>
+              <a:tblPr firstRow="1" bandRow="1">
+                <a:tableStyleId>{5C22544A-7EE6-4342-B048-85BDC9FD1C3A}</a:tableStyleId>
+              </a:tblPr>
+              <a:tblGrid>
+                <a:gridCol w="1660759">
+                  <a:extLst>
+                    <a:ext uri="{9D8B030D-6E8A-4147-A177-3AD203B41FA5}">
+                      <a16:colId xmlns:a16="http://schemas.microsoft.com/office/drawing/2014/main" val="2211251634"/>
+                    </a:ext>
+                  </a:extLst>
+                </a:gridCol>
+                <a:gridCol w="1660759">
+                  <a:extLst>
+                    <a:ext uri="{9D8B030D-6E8A-4147-A177-3AD203B41FA5}">
+                      <a16:colId xmlns:a16="http://schemas.microsoft.com/office/drawing/2014/main" val="3887264379"/>
+                    </a:ext>
+                  </a:extLst>
+                </a:gridCol>
+                <a:gridCol w="1660759">
+                  <a:extLst>
+                    <a:ext uri="{9D8B030D-6E8A-4147-A177-3AD203B41FA5}">
+                      <a16:colId xmlns:a16="http://schemas.microsoft.com/office/drawing/2014/main" val="2310699712"/>
+                    </a:ext>
+                  </a:extLst>
+                </a:gridCol>
+                <a:gridCol w="1660759">
+                  <a:extLst>
+                    <a:ext uri="{9D8B030D-6E8A-4147-A177-3AD203B41FA5}">
+                      <a16:colId xmlns:a16="http://schemas.microsoft.com/office/drawing/2014/main" val="16386430"/>
+                    </a:ext>
+                  </a:extLst>
+                </a:gridCol>
+                <a:gridCol w="1660759">
+                  <a:extLst>
+                    <a:ext uri="{9D8B030D-6E8A-4147-A177-3AD203B41FA5}">
+                      <a16:colId xmlns:a16="http://schemas.microsoft.com/office/drawing/2014/main" val="4140645014"/>
+                    </a:ext>
+                  </a:extLst>
+                </a:gridCol>
+                <a:gridCol w="1660759">
+                  <a:extLst>
+                    <a:ext uri="{9D8B030D-6E8A-4147-A177-3AD203B41FA5}">
+                      <a16:colId xmlns:a16="http://schemas.microsoft.com/office/drawing/2014/main" val="1847296050"/>
+                    </a:ext>
+                  </a:extLst>
+                </a:gridCol>
+                <a:gridCol w="1660759">
+                  <a:extLst>
+                    <a:ext uri="{9D8B030D-6E8A-4147-A177-3AD203B41FA5}">
+                      <a16:colId xmlns:a16="http://schemas.microsoft.com/office/drawing/2014/main" val="1275319257"/>
+                    </a:ext>
+                  </a:extLst>
+                </a:gridCol>
+              </a:tblGrid>
+              <a:tr h="0">
+                <a:tc>
+                  <a:txBody>
+                    <a:bodyPr/>
+                    <a:lstStyle/>
+                    <a:p>
+                      <a:r>
+                        <a:rPr lang="en-US" sz="1000" dirty="0"/>
+                        <a:t>Label</a:t>
+                      </a:r>
+                    </a:p>
+                  </a:txBody>
+                  <a:tcPr/>
+                </a:tc>
+                <a:tc>
+                  <a:txBody>
+                    <a:bodyPr/>
+                    <a:lstStyle/>
+                    <a:p>
+                      <a:r>
+                        <a:rPr lang="en-US" sz="1000" dirty="0"/>
+                        <a:t>Dataset Name</a:t>
+                      </a:r>
+                    </a:p>
+                  </a:txBody>
+                  <a:tcPr/>
+                </a:tc>
+                <a:tc>
+                  <a:txBody>
+                    <a:bodyPr/>
+                    <a:lstStyle/>
+                    <a:p>
+                      <a:r>
+                        <a:rPr lang="en-US" sz="1000" dirty="0"/>
+                        <a:t>Description</a:t>
+                      </a:r>
+                    </a:p>
+                  </a:txBody>
+                  <a:tcPr/>
+                </a:tc>
+                <a:tc>
+                  <a:txBody>
+                    <a:bodyPr/>
+                    <a:lstStyle/>
+                    <a:p>
+                      <a:r>
+                        <a:rPr lang="en-US" sz="1000" dirty="0"/>
+                        <a:t>Country</a:t>
+                      </a:r>
+                    </a:p>
+                  </a:txBody>
+                  <a:tcPr/>
+                </a:tc>
+                <a:tc>
+                  <a:txBody>
+                    <a:bodyPr/>
+                    <a:lstStyle/>
+                    <a:p>
+                      <a:r>
+                        <a:rPr lang="en-US" sz="1000" dirty="0"/>
+                        <a:t>Governing Body</a:t>
+                      </a:r>
+                    </a:p>
+                  </a:txBody>
+                  <a:tcPr/>
+                </a:tc>
+                <a:tc>
+                  <a:txBody>
+                    <a:bodyPr/>
+                    <a:lstStyle/>
+                    <a:p>
+                      <a:r>
+                        <a:rPr lang="en-US" sz="1000" dirty="0"/>
+                        <a:t>Date Range</a:t>
+                      </a:r>
+                    </a:p>
+                  </a:txBody>
+                  <a:tcPr/>
+                </a:tc>
+                <a:tc>
+                  <a:txBody>
+                    <a:bodyPr/>
+                    <a:lstStyle/>
+                    <a:p>
+                      <a:r>
+                        <a:rPr lang="en-US" sz="1000" dirty="0"/>
+                        <a:t># Records</a:t>
+                      </a:r>
+                    </a:p>
+                  </a:txBody>
+                  <a:tcPr/>
+                </a:tc>
+                <a:extLst>
+                  <a:ext uri="{0D108BD9-81ED-4DB2-BD59-A6C34878D82A}">
+                    <a16:rowId xmlns:a16="http://schemas.microsoft.com/office/drawing/2014/main" val="536057717"/>
+                  </a:ext>
+                </a:extLst>
+              </a:tr>
+              <a:tr h="201070">
+                <a:tc>
+                  <a:txBody>
+                    <a:bodyPr/>
+                    <a:lstStyle/>
+                    <a:p>
+                      <a:r>
+                        <a:rPr lang="en-US" sz="1000" dirty="0"/>
+                        <a:t>A</a:t>
+                      </a:r>
+                    </a:p>
+                  </a:txBody>
+                  <a:tcPr/>
+                </a:tc>
+                <a:tc>
+                  <a:txBody>
+                    <a:bodyPr/>
+                    <a:lstStyle/>
+                    <a:p>
+                      <a:r>
+                        <a:rPr lang="en-US" sz="1000" dirty="0"/>
+                        <a:t>Pipeline-incidents-comprehensive-</a:t>
+                      </a:r>
+                      <a:r>
+                        <a:rPr lang="en-US" sz="1000" dirty="0" err="1"/>
+                        <a:t>data.csv</a:t>
+                      </a:r>
+                      <a:endParaRPr lang="en-US" sz="1000" dirty="0"/>
+                    </a:p>
+                  </a:txBody>
+                  <a:tcPr/>
+                </a:tc>
+                <a:tc>
+                  <a:txBody>
+                    <a:bodyPr/>
+                    <a:lstStyle/>
+                    <a:p>
+                      <a:r>
+                        <a:rPr lang="en-US" sz="1000" dirty="0"/>
+                        <a:t>Pipeline incidents as defined by OPR and Processing Plant regulations</a:t>
+                      </a:r>
+                    </a:p>
+                  </a:txBody>
+                  <a:tcPr/>
+                </a:tc>
+                <a:tc>
+                  <a:txBody>
+                    <a:bodyPr/>
+                    <a:lstStyle/>
+                    <a:p>
+                      <a:r>
+                        <a:rPr lang="en-US" sz="1000" dirty="0"/>
+                        <a:t>Canada</a:t>
+                      </a:r>
+                    </a:p>
+                  </a:txBody>
+                  <a:tcPr/>
+                </a:tc>
+                <a:tc>
+                  <a:txBody>
+                    <a:bodyPr/>
+                    <a:lstStyle/>
+                    <a:p>
+                      <a:r>
+                        <a:rPr lang="en-US" sz="1000" dirty="0"/>
+                        <a:t>CER/ NEB</a:t>
+                      </a:r>
+                    </a:p>
+                  </a:txBody>
+                  <a:tcPr/>
+                </a:tc>
+                <a:tc>
+                  <a:txBody>
+                    <a:bodyPr/>
+                    <a:lstStyle/>
+                    <a:p>
+                      <a:r>
+                        <a:rPr lang="en-US" sz="1000" dirty="0"/>
+                        <a:t>2008 to Present</a:t>
+                      </a:r>
+                    </a:p>
+                  </a:txBody>
+                  <a:tcPr/>
+                </a:tc>
+                <a:tc>
+                  <a:txBody>
+                    <a:bodyPr/>
+                    <a:lstStyle/>
+                    <a:p>
+                      <a:r>
+                        <a:rPr lang="en-US" sz="1000" dirty="0"/>
+                        <a:t>1856</a:t>
+                      </a:r>
+                    </a:p>
+                  </a:txBody>
+                  <a:tcPr/>
+                </a:tc>
+                <a:extLst>
+                  <a:ext uri="{0D108BD9-81ED-4DB2-BD59-A6C34878D82A}">
+                    <a16:rowId xmlns:a16="http://schemas.microsoft.com/office/drawing/2014/main" val="3021167467"/>
+                  </a:ext>
+                </a:extLst>
+              </a:tr>
+              <a:tr h="201070">
+                <a:tc>
+                  <a:txBody>
+                    <a:bodyPr/>
+                    <a:lstStyle/>
+                    <a:p>
+                      <a:r>
+                        <a:rPr lang="en-US" sz="1000" dirty="0"/>
+                        <a:t>B</a:t>
+                      </a:r>
+                    </a:p>
+                  </a:txBody>
+                  <a:tcPr/>
+                </a:tc>
+                <a:tc>
+                  <a:txBody>
+                    <a:bodyPr/>
+                    <a:lstStyle/>
+                    <a:p>
+                      <a:r>
+                        <a:rPr lang="en-US" sz="1000" dirty="0" err="1"/>
+                        <a:t>PODSdb_MDOTW_VW_OCCURRENCE_PUBLIC.csv</a:t>
+                      </a:r>
+                      <a:endParaRPr lang="en-US" sz="1000" dirty="0"/>
+                    </a:p>
+                  </a:txBody>
+                  <a:tcPr/>
+                </a:tc>
+                <a:tc>
+                  <a:txBody>
+                    <a:bodyPr/>
+                    <a:lstStyle/>
+                    <a:p>
+                      <a:r>
+                        <a:rPr lang="en-US" sz="1000" dirty="0"/>
+                        <a:t>Incidents at CER-regulated pipelines and facilities as defined by OPR </a:t>
+                      </a:r>
+                    </a:p>
+                  </a:txBody>
+                  <a:tcPr/>
+                </a:tc>
+                <a:tc>
+                  <a:txBody>
+                    <a:bodyPr/>
+                    <a:lstStyle/>
+                    <a:p>
+                      <a:r>
+                        <a:rPr lang="en-US" sz="1000" dirty="0"/>
+                        <a:t>Canada</a:t>
+                      </a:r>
+                    </a:p>
+                  </a:txBody>
+                  <a:tcPr/>
+                </a:tc>
+                <a:tc>
+                  <a:txBody>
+                    <a:bodyPr/>
+                    <a:lstStyle/>
+                    <a:p>
+                      <a:r>
+                        <a:rPr lang="en-US" sz="1000" dirty="0"/>
+                        <a:t>CER / NEB</a:t>
+                      </a:r>
+                    </a:p>
+                  </a:txBody>
+                  <a:tcPr/>
+                </a:tc>
+                <a:tc>
+                  <a:txBody>
+                    <a:bodyPr/>
+                    <a:lstStyle/>
+                    <a:p>
+                      <a:r>
+                        <a:rPr lang="en-US" sz="1000" dirty="0"/>
+                        <a:t>2008 to current</a:t>
+                      </a:r>
+                    </a:p>
+                  </a:txBody>
+                  <a:tcPr/>
+                </a:tc>
+                <a:tc>
+                  <a:txBody>
+                    <a:bodyPr/>
+                    <a:lstStyle/>
+                    <a:p>
+                      <a:r>
+                        <a:rPr lang="en-US" sz="1000" dirty="0"/>
+                        <a:t>3265</a:t>
+                      </a:r>
+                    </a:p>
+                  </a:txBody>
+                  <a:tcPr/>
+                </a:tc>
+                <a:extLst>
+                  <a:ext uri="{0D108BD9-81ED-4DB2-BD59-A6C34878D82A}">
+                    <a16:rowId xmlns:a16="http://schemas.microsoft.com/office/drawing/2014/main" val="687701981"/>
+                  </a:ext>
+                </a:extLst>
+              </a:tr>
+              <a:tr h="145217">
+                <a:tc>
+                  <a:txBody>
+                    <a:bodyPr/>
+                    <a:lstStyle/>
+                    <a:p>
+                      <a:r>
+                        <a:rPr lang="en-US" sz="1000" dirty="0"/>
+                        <a:t>C</a:t>
+                      </a:r>
+                    </a:p>
+                  </a:txBody>
+                  <a:tcPr/>
+                </a:tc>
+                <a:tc>
+                  <a:txBody>
+                    <a:bodyPr/>
+                    <a:lstStyle/>
+                    <a:p>
+                      <a:r>
+                        <a:rPr lang="en-US" sz="1000" dirty="0"/>
+                        <a:t>Accident_hazardous_liquid_pre1986.txt</a:t>
+                      </a:r>
+                    </a:p>
+                  </a:txBody>
+                  <a:tcPr/>
+                </a:tc>
+                <a:tc>
+                  <a:txBody>
+                    <a:bodyPr/>
+                    <a:lstStyle/>
+                    <a:p>
+                      <a:r>
+                        <a:rPr lang="en-US" sz="1000" dirty="0"/>
+                        <a:t>Incidents within Hazardous Liquid and Carbon Dioxide Pipelines from 1968 to 1985</a:t>
+                      </a:r>
+                    </a:p>
+                  </a:txBody>
+                  <a:tcPr/>
+                </a:tc>
+                <a:tc>
+                  <a:txBody>
+                    <a:bodyPr/>
+                    <a:lstStyle/>
+                    <a:p>
+                      <a:r>
+                        <a:rPr lang="en-US" sz="1000" dirty="0"/>
+                        <a:t>USA</a:t>
+                      </a:r>
+                    </a:p>
+                  </a:txBody>
+                  <a:tcPr/>
+                </a:tc>
+                <a:tc>
+                  <a:txBody>
+                    <a:bodyPr/>
+                    <a:lstStyle/>
+                    <a:p>
+                      <a:r>
+                        <a:rPr lang="en-US" sz="1000" dirty="0"/>
+                        <a:t>PHMSA</a:t>
+                      </a:r>
+                    </a:p>
+                  </a:txBody>
+                  <a:tcPr/>
+                </a:tc>
+                <a:tc>
+                  <a:txBody>
+                    <a:bodyPr/>
+                    <a:lstStyle/>
+                    <a:p>
+                      <a:r>
+                        <a:rPr lang="en-US" sz="1000" dirty="0"/>
+                        <a:t>1968 to 1985</a:t>
+                      </a:r>
+                    </a:p>
+                  </a:txBody>
+                  <a:tcPr/>
+                </a:tc>
+                <a:tc>
+                  <a:txBody>
+                    <a:bodyPr/>
+                    <a:lstStyle/>
+                    <a:p>
+                      <a:r>
+                        <a:rPr lang="en-US" sz="1000" dirty="0"/>
+                        <a:t>4734</a:t>
+                      </a:r>
+                    </a:p>
+                  </a:txBody>
+                  <a:tcPr/>
+                </a:tc>
+                <a:extLst>
+                  <a:ext uri="{0D108BD9-81ED-4DB2-BD59-A6C34878D82A}">
+                    <a16:rowId xmlns:a16="http://schemas.microsoft.com/office/drawing/2014/main" val="3261954188"/>
+                  </a:ext>
+                </a:extLst>
+              </a:tr>
+              <a:tr h="145217">
+                <a:tc>
+                  <a:txBody>
+                    <a:bodyPr/>
+                    <a:lstStyle/>
+                    <a:p>
+                      <a:r>
+                        <a:rPr lang="en-US" sz="1000" dirty="0"/>
+                        <a:t>D</a:t>
+                      </a:r>
+                    </a:p>
+                  </a:txBody>
+                  <a:tcPr/>
+                </a:tc>
+                <a:tc>
+                  <a:txBody>
+                    <a:bodyPr/>
+                    <a:lstStyle/>
+                    <a:p>
+                      <a:r>
+                        <a:rPr lang="en-US" sz="1000" dirty="0"/>
+                        <a:t>Accident_hazardous_liquid_1986_jan2002.txt</a:t>
+                      </a:r>
+                    </a:p>
+                  </a:txBody>
+                  <a:tcPr/>
+                </a:tc>
+                <a:tc>
+                  <a:txBody>
+                    <a:bodyPr/>
+                    <a:lstStyle/>
+                    <a:p>
+                      <a:endParaRPr lang="en-US" sz="1000" dirty="0"/>
+                    </a:p>
+                  </a:txBody>
+                  <a:tcPr/>
+                </a:tc>
+                <a:tc>
+                  <a:txBody>
+                    <a:bodyPr/>
+                    <a:lstStyle/>
+                    <a:p>
+                      <a:r>
+                        <a:rPr lang="en-US" sz="1000" dirty="0"/>
+                        <a:t>USA</a:t>
+                      </a:r>
+                    </a:p>
+                  </a:txBody>
+                  <a:tcPr/>
+                </a:tc>
+                <a:tc>
+                  <a:txBody>
+                    <a:bodyPr/>
+                    <a:lstStyle/>
+                    <a:p>
+                      <a:pPr marL="0" marR="0" lvl="0" indent="0" algn="l" defTabSz="914400" rtl="0" eaLnBrk="1" fontAlgn="auto" latinLnBrk="0" hangingPunct="1">
+                        <a:lnSpc>
+                          <a:spcPct val="100000"/>
+                        </a:lnSpc>
+                        <a:spcBef>
+                          <a:spcPts val="0"/>
+                        </a:spcBef>
+                        <a:spcAft>
+                          <a:spcPts val="0"/>
+                        </a:spcAft>
+                        <a:buClrTx/>
+                        <a:buSzTx/>
+                        <a:buFontTx/>
+                        <a:buNone/>
+                        <a:tabLst/>
+                        <a:defRPr/>
+                      </a:pPr>
+                      <a:r>
+                        <a:rPr lang="en-US" sz="1000" dirty="0"/>
+                        <a:t>PHMSA</a:t>
+                      </a:r>
+                    </a:p>
+                  </a:txBody>
+                  <a:tcPr/>
+                </a:tc>
+                <a:tc>
+                  <a:txBody>
+                    <a:bodyPr/>
+                    <a:lstStyle/>
+                    <a:p>
+                      <a:r>
+                        <a:rPr lang="en-US" sz="1000" dirty="0"/>
+                        <a:t>1986 to 2002</a:t>
+                      </a:r>
+                    </a:p>
+                  </a:txBody>
+                  <a:tcPr/>
+                </a:tc>
+                <a:tc>
+                  <a:txBody>
+                    <a:bodyPr/>
+                    <a:lstStyle/>
+                    <a:p>
+                      <a:r>
+                        <a:rPr lang="en-US" sz="1000" dirty="0"/>
+                        <a:t>3095</a:t>
+                      </a:r>
+                    </a:p>
+                  </a:txBody>
+                  <a:tcPr/>
+                </a:tc>
+                <a:extLst>
+                  <a:ext uri="{0D108BD9-81ED-4DB2-BD59-A6C34878D82A}">
+                    <a16:rowId xmlns:a16="http://schemas.microsoft.com/office/drawing/2014/main" val="716426142"/>
+                  </a:ext>
+                </a:extLst>
+              </a:tr>
+              <a:tr h="145217">
+                <a:tc>
+                  <a:txBody>
+                    <a:bodyPr/>
+                    <a:lstStyle/>
+                    <a:p>
+                      <a:r>
+                        <a:rPr lang="en-US" sz="1000" dirty="0"/>
+                        <a:t>E</a:t>
+                      </a:r>
+                    </a:p>
+                  </a:txBody>
+                  <a:tcPr/>
+                </a:tc>
+                <a:tc>
+                  <a:txBody>
+                    <a:bodyPr/>
+                    <a:lstStyle/>
+                    <a:p>
+                      <a:r>
+                        <a:rPr lang="en-US" sz="1000" dirty="0"/>
+                        <a:t>Accident_hazardous_liquid_jan2002_dec2009</a:t>
+                      </a:r>
+                    </a:p>
+                  </a:txBody>
+                  <a:tcPr/>
+                </a:tc>
+                <a:tc>
+                  <a:txBody>
+                    <a:bodyPr/>
+                    <a:lstStyle/>
+                    <a:p>
+                      <a:endParaRPr lang="en-US" sz="1000" dirty="0"/>
+                    </a:p>
+                  </a:txBody>
+                  <a:tcPr/>
+                </a:tc>
+                <a:tc>
+                  <a:txBody>
+                    <a:bodyPr/>
+                    <a:lstStyle/>
+                    <a:p>
+                      <a:r>
+                        <a:rPr lang="en-US" sz="1000" dirty="0"/>
+                        <a:t>USA</a:t>
+                      </a:r>
+                    </a:p>
+                  </a:txBody>
+                  <a:tcPr/>
+                </a:tc>
+                <a:tc>
+                  <a:txBody>
+                    <a:bodyPr/>
+                    <a:lstStyle/>
+                    <a:p>
+                      <a:pPr marL="0" marR="0" lvl="0" indent="0" algn="l" defTabSz="914400" rtl="0" eaLnBrk="1" fontAlgn="auto" latinLnBrk="0" hangingPunct="1">
+                        <a:lnSpc>
+                          <a:spcPct val="100000"/>
+                        </a:lnSpc>
+                        <a:spcBef>
+                          <a:spcPts val="0"/>
+                        </a:spcBef>
+                        <a:spcAft>
+                          <a:spcPts val="0"/>
+                        </a:spcAft>
+                        <a:buClrTx/>
+                        <a:buSzTx/>
+                        <a:buFontTx/>
+                        <a:buNone/>
+                        <a:tabLst/>
+                        <a:defRPr/>
+                      </a:pPr>
+                      <a:r>
+                        <a:rPr lang="en-US" sz="1000" dirty="0"/>
+                        <a:t>PHMSA</a:t>
+                      </a:r>
+                    </a:p>
+                  </a:txBody>
+                  <a:tcPr/>
+                </a:tc>
+                <a:tc>
+                  <a:txBody>
+                    <a:bodyPr/>
+                    <a:lstStyle/>
+                    <a:p>
+                      <a:r>
+                        <a:rPr lang="en-US" sz="1000" dirty="0"/>
+                        <a:t>2002 to 2009</a:t>
+                      </a:r>
+                    </a:p>
+                  </a:txBody>
+                  <a:tcPr/>
+                </a:tc>
+                <a:tc>
+                  <a:txBody>
+                    <a:bodyPr/>
+                    <a:lstStyle/>
+                    <a:p>
+                      <a:r>
+                        <a:rPr lang="en-US" sz="1000" dirty="0"/>
+                        <a:t>3031</a:t>
+                      </a:r>
+                    </a:p>
+                  </a:txBody>
+                  <a:tcPr/>
+                </a:tc>
+                <a:extLst>
+                  <a:ext uri="{0D108BD9-81ED-4DB2-BD59-A6C34878D82A}">
+                    <a16:rowId xmlns:a16="http://schemas.microsoft.com/office/drawing/2014/main" val="3728517201"/>
+                  </a:ext>
+                </a:extLst>
+              </a:tr>
+              <a:tr h="145217">
+                <a:tc>
+                  <a:txBody>
+                    <a:bodyPr/>
+                    <a:lstStyle/>
+                    <a:p>
+                      <a:r>
+                        <a:rPr lang="en-US" sz="1000" dirty="0"/>
+                        <a:t>F</a:t>
+                      </a:r>
+                    </a:p>
+                  </a:txBody>
+                  <a:tcPr/>
+                </a:tc>
+                <a:tc>
+                  <a:txBody>
+                    <a:bodyPr/>
+                    <a:lstStyle/>
+                    <a:p>
+                      <a:r>
+                        <a:rPr lang="en-US" sz="1000" dirty="0"/>
+                        <a:t>Accident_hazardous_liquid_jan2010_present</a:t>
+                      </a:r>
+                    </a:p>
+                  </a:txBody>
+                  <a:tcPr/>
+                </a:tc>
+                <a:tc>
+                  <a:txBody>
+                    <a:bodyPr/>
+                    <a:lstStyle/>
+                    <a:p>
+                      <a:endParaRPr lang="en-US" sz="1000" dirty="0"/>
+                    </a:p>
+                  </a:txBody>
+                  <a:tcPr/>
+                </a:tc>
+                <a:tc>
+                  <a:txBody>
+                    <a:bodyPr/>
+                    <a:lstStyle/>
+                    <a:p>
+                      <a:r>
+                        <a:rPr lang="en-US" sz="1000" dirty="0"/>
+                        <a:t>USA</a:t>
+                      </a:r>
+                    </a:p>
+                  </a:txBody>
+                  <a:tcPr/>
+                </a:tc>
+                <a:tc>
+                  <a:txBody>
+                    <a:bodyPr/>
+                    <a:lstStyle/>
+                    <a:p>
+                      <a:pPr marL="0" marR="0" lvl="0" indent="0" algn="l" defTabSz="914400" rtl="0" eaLnBrk="1" fontAlgn="auto" latinLnBrk="0" hangingPunct="1">
+                        <a:lnSpc>
+                          <a:spcPct val="100000"/>
+                        </a:lnSpc>
+                        <a:spcBef>
+                          <a:spcPts val="0"/>
+                        </a:spcBef>
+                        <a:spcAft>
+                          <a:spcPts val="0"/>
+                        </a:spcAft>
+                        <a:buClrTx/>
+                        <a:buSzTx/>
+                        <a:buFontTx/>
+                        <a:buNone/>
+                        <a:tabLst/>
+                        <a:defRPr/>
+                      </a:pPr>
+                      <a:r>
+                        <a:rPr lang="en-US" sz="1000" dirty="0"/>
+                        <a:t>PHMSA</a:t>
+                      </a:r>
+                    </a:p>
+                  </a:txBody>
+                  <a:tcPr/>
+                </a:tc>
+                <a:tc>
+                  <a:txBody>
+                    <a:bodyPr/>
+                    <a:lstStyle/>
+                    <a:p>
+                      <a:r>
+                        <a:rPr lang="en-US" sz="1000" dirty="0"/>
+                        <a:t>2010 to 2023</a:t>
+                      </a:r>
+                    </a:p>
+                  </a:txBody>
+                  <a:tcPr/>
+                </a:tc>
+                <a:tc>
+                  <a:txBody>
+                    <a:bodyPr/>
+                    <a:lstStyle/>
+                    <a:p>
+                      <a:r>
+                        <a:rPr lang="en-US" sz="1000" dirty="0"/>
+                        <a:t>5248</a:t>
+                      </a:r>
+                    </a:p>
+                  </a:txBody>
+                  <a:tcPr/>
+                </a:tc>
+                <a:extLst>
+                  <a:ext uri="{0D108BD9-81ED-4DB2-BD59-A6C34878D82A}">
+                    <a16:rowId xmlns:a16="http://schemas.microsoft.com/office/drawing/2014/main" val="3292624838"/>
+                  </a:ext>
+                </a:extLst>
+              </a:tr>
+              <a:tr h="145217">
+                <a:tc>
+                  <a:txBody>
+                    <a:bodyPr/>
+                    <a:lstStyle/>
+                    <a:p>
+                      <a:r>
+                        <a:rPr lang="en-US" sz="1000" dirty="0"/>
+                        <a:t>G</a:t>
+                      </a:r>
+                    </a:p>
+                  </a:txBody>
+                  <a:tcPr/>
+                </a:tc>
+                <a:tc>
+                  <a:txBody>
+                    <a:bodyPr/>
+                    <a:lstStyle/>
+                    <a:p>
+                      <a:r>
+                        <a:rPr lang="en-US" sz="1000" dirty="0"/>
+                        <a:t>Accident_gravity_reporting_regulated_jul2020_present.txt</a:t>
+                      </a:r>
+                    </a:p>
+                  </a:txBody>
+                  <a:tcPr/>
+                </a:tc>
+                <a:tc>
+                  <a:txBody>
+                    <a:bodyPr/>
+                    <a:lstStyle/>
+                    <a:p>
+                      <a:endParaRPr lang="en-US" sz="1000" dirty="0"/>
+                    </a:p>
+                  </a:txBody>
+                  <a:tcPr/>
+                </a:tc>
+                <a:tc>
+                  <a:txBody>
+                    <a:bodyPr/>
+                    <a:lstStyle/>
+                    <a:p>
+                      <a:r>
+                        <a:rPr lang="en-US" sz="1000" dirty="0"/>
+                        <a:t>USA</a:t>
+                      </a:r>
+                    </a:p>
+                  </a:txBody>
+                  <a:tcPr/>
+                </a:tc>
+                <a:tc>
+                  <a:txBody>
+                    <a:bodyPr/>
+                    <a:lstStyle/>
+                    <a:p>
+                      <a:pPr marL="0" marR="0" lvl="0" indent="0" algn="l" defTabSz="914400" rtl="0" eaLnBrk="1" fontAlgn="auto" latinLnBrk="0" hangingPunct="1">
+                        <a:lnSpc>
+                          <a:spcPct val="100000"/>
+                        </a:lnSpc>
+                        <a:spcBef>
+                          <a:spcPts val="0"/>
+                        </a:spcBef>
+                        <a:spcAft>
+                          <a:spcPts val="0"/>
+                        </a:spcAft>
+                        <a:buClrTx/>
+                        <a:buSzTx/>
+                        <a:buFontTx/>
+                        <a:buNone/>
+                        <a:tabLst/>
+                        <a:defRPr/>
+                      </a:pPr>
+                      <a:r>
+                        <a:rPr lang="en-US" sz="1000" dirty="0"/>
+                        <a:t>PHMSA</a:t>
+                      </a:r>
+                    </a:p>
+                  </a:txBody>
+                  <a:tcPr/>
+                </a:tc>
+                <a:tc>
+                  <a:txBody>
+                    <a:bodyPr/>
+                    <a:lstStyle/>
+                    <a:p>
+                      <a:r>
+                        <a:rPr lang="en-US" sz="1000" dirty="0"/>
+                        <a:t>2021 to 2023</a:t>
+                      </a:r>
+                    </a:p>
+                  </a:txBody>
+                  <a:tcPr/>
+                </a:tc>
+                <a:tc>
+                  <a:txBody>
+                    <a:bodyPr/>
+                    <a:lstStyle/>
+                    <a:p>
+                      <a:r>
+                        <a:rPr lang="en-US" sz="1000" dirty="0"/>
+                        <a:t>297</a:t>
+                      </a:r>
+                    </a:p>
+                  </a:txBody>
+                  <a:tcPr/>
+                </a:tc>
+                <a:extLst>
+                  <a:ext uri="{0D108BD9-81ED-4DB2-BD59-A6C34878D82A}">
+                    <a16:rowId xmlns:a16="http://schemas.microsoft.com/office/drawing/2014/main" val="3448899204"/>
+                  </a:ext>
+                </a:extLst>
+              </a:tr>
+            </a:tbl>
+          </a:graphicData>
+        </a:graphic>
+      </p:graphicFrame>
+      <p:sp>
+        <p:nvSpPr>
+          <p:cNvPr id="10" name="TextBox 9">
+            <a:extLst>
+              <a:ext uri="{FF2B5EF4-FFF2-40B4-BE49-F238E27FC236}">
+                <a16:creationId xmlns:a16="http://schemas.microsoft.com/office/drawing/2014/main" id="{AA4CAC90-F79F-0BA2-D247-C3D2F561EB5F}"/>
+              </a:ext>
+            </a:extLst>
+          </p:cNvPr>
+          <p:cNvSpPr txBox="1"/>
+          <p:nvPr/>
+        </p:nvSpPr>
+        <p:spPr>
+          <a:xfrm>
+            <a:off x="290763" y="1047347"/>
+            <a:ext cx="11682892" cy="369332"/>
+          </a:xfrm>
+          <a:prstGeom prst="rect">
+            <a:avLst/>
+          </a:prstGeom>
+          <a:noFill/>
+        </p:spPr>
+        <p:txBody>
+          <a:bodyPr wrap="square" rtlCol="0">
+            <a:spAutoFit/>
+          </a:bodyPr>
+          <a:lstStyle/>
+          <a:p>
+            <a:r>
+              <a:rPr lang="en-US" dirty="0"/>
+              <a:t>Exploring potential datasets to see which will be most beneficial for our exploration and analysis. +data dictionaries</a:t>
+            </a:r>
+          </a:p>
+        </p:txBody>
+      </p:sp>
+      <p:sp>
+        <p:nvSpPr>
+          <p:cNvPr id="11" name="TextBox 10">
+            <a:extLst>
+              <a:ext uri="{FF2B5EF4-FFF2-40B4-BE49-F238E27FC236}">
+                <a16:creationId xmlns:a16="http://schemas.microsoft.com/office/drawing/2014/main" id="{F1947413-E90C-20F9-0EA3-F1A1296BA622}"/>
+              </a:ext>
+            </a:extLst>
+          </p:cNvPr>
+          <p:cNvSpPr txBox="1"/>
+          <p:nvPr/>
+        </p:nvSpPr>
+        <p:spPr>
+          <a:xfrm>
+            <a:off x="290762" y="1560686"/>
+            <a:ext cx="11682892" cy="707886"/>
+          </a:xfrm>
+          <a:prstGeom prst="rect">
+            <a:avLst/>
+          </a:prstGeom>
+          <a:noFill/>
+        </p:spPr>
+        <p:txBody>
+          <a:bodyPr wrap="square" rtlCol="0">
+            <a:spAutoFit/>
+          </a:bodyPr>
+          <a:lstStyle/>
+          <a:p>
+            <a:r>
+              <a:rPr lang="en-US" sz="1000" dirty="0"/>
+              <a:t>Onshore Pipeline Regulations: OPR</a:t>
+            </a:r>
+          </a:p>
+          <a:p>
+            <a:r>
+              <a:rPr lang="en-US" sz="1000" dirty="0"/>
+              <a:t>Canada Energy Regulator: CER</a:t>
+            </a:r>
+          </a:p>
+          <a:p>
+            <a:r>
+              <a:rPr lang="en-US" sz="1000" dirty="0"/>
+              <a:t>National Energy Board: NEB</a:t>
+            </a:r>
+          </a:p>
+          <a:p>
+            <a:r>
+              <a:rPr lang="en-US" sz="1000" dirty="0"/>
+              <a:t>Pipeline and Hazardous Materials Safety Administration: PHMSA</a:t>
+            </a:r>
+          </a:p>
+        </p:txBody>
+      </p:sp>
+      <p:sp>
+        <p:nvSpPr>
+          <p:cNvPr id="12" name="TextBox 11">
+            <a:extLst>
+              <a:ext uri="{FF2B5EF4-FFF2-40B4-BE49-F238E27FC236}">
+                <a16:creationId xmlns:a16="http://schemas.microsoft.com/office/drawing/2014/main" id="{6CA47C6D-7433-1D20-BA00-C3D30C0A9390}"/>
+              </a:ext>
+            </a:extLst>
+          </p:cNvPr>
+          <p:cNvSpPr txBox="1"/>
+          <p:nvPr/>
+        </p:nvSpPr>
+        <p:spPr>
+          <a:xfrm>
+            <a:off x="2942521" y="1469571"/>
+            <a:ext cx="8178325" cy="246221"/>
+          </a:xfrm>
+          <a:prstGeom prst="rect">
+            <a:avLst/>
+          </a:prstGeom>
+          <a:noFill/>
+        </p:spPr>
+        <p:txBody>
+          <a:bodyPr wrap="square" rtlCol="0">
+            <a:spAutoFit/>
+          </a:bodyPr>
+          <a:lstStyle/>
+          <a:p>
+            <a:r>
+              <a:rPr lang="en-US" sz="1000" dirty="0"/>
+              <a:t>*Omitting pipeline transportation occurrence data from Jan 1979 as the TSB does not warrant the quality, accuracy, reliability or completeness of its data</a:t>
+            </a:r>
+          </a:p>
+        </p:txBody>
+      </p:sp>
+    </p:spTree>
+    <p:extLst>
+      <p:ext uri="{BB962C8B-B14F-4D97-AF65-F5344CB8AC3E}">
+        <p14:creationId xmlns:p14="http://schemas.microsoft.com/office/powerpoint/2010/main" val="1951343218"/>
+      </p:ext>
+    </p:extLst>
+  </p:cSld>
+  <p:clrMapOvr>
+    <a:masterClrMapping/>
+  </p:clrMapOvr>
+</p:sld>
+</file>
+
+<file path=ppt/slides/slide7.xml><?xml version="1.0" encoding="utf-8"?>
+<p:sld xmlns:a="http://schemas.openxmlformats.org/drawingml/2006/main" xmlns:r="http://schemas.openxmlformats.org/officeDocument/2006/relationships" xmlns:p="http://schemas.openxmlformats.org/presentationml/2006/main">
+  <p:cSld>
+    <p:spTree>
+      <p:nvGrpSpPr>
+        <p:cNvPr id="1" name=""/>
+        <p:cNvGrpSpPr/>
+        <p:nvPr/>
+      </p:nvGrpSpPr>
+      <p:grpSpPr>
+        <a:xfrm>
+          <a:off x="0" y="0"/>
+          <a:ext cx="0" cy="0"/>
+          <a:chOff x="0" y="0"/>
+          <a:chExt cx="0" cy="0"/>
+        </a:xfrm>
+      </p:grpSpPr>
+      <p:sp>
+        <p:nvSpPr>
+          <p:cNvPr id="4" name="Rectangle 3">
+            <a:extLst>
+              <a:ext uri="{FF2B5EF4-FFF2-40B4-BE49-F238E27FC236}">
+                <a16:creationId xmlns:a16="http://schemas.microsoft.com/office/drawing/2014/main" id="{9C5E69D8-2133-86C5-C478-359118968E16}"/>
+              </a:ext>
+            </a:extLst>
+          </p:cNvPr>
+          <p:cNvSpPr/>
+          <p:nvPr/>
+        </p:nvSpPr>
+        <p:spPr>
+          <a:xfrm>
+            <a:off x="233183" y="304280"/>
+            <a:ext cx="11523387" cy="618829"/>
+          </a:xfrm>
+          <a:prstGeom prst="rect">
+            <a:avLst/>
+          </a:prstGeom>
+          <a:noFill/>
+          <a:ln>
+            <a:noFill/>
+          </a:ln>
+        </p:spPr>
+        <p:style>
+          <a:lnRef idx="2">
+            <a:schemeClr val="accent1">
+              <a:shade val="15000"/>
+            </a:schemeClr>
+          </a:lnRef>
+          <a:fillRef idx="1">
+            <a:schemeClr val="accent1"/>
+          </a:fillRef>
+          <a:effectRef idx="0">
+            <a:schemeClr val="accent1"/>
+          </a:effectRef>
+          <a:fontRef idx="minor">
+            <a:schemeClr val="lt1"/>
+          </a:fontRef>
+        </p:style>
+        <p:txBody>
+          <a:bodyPr rtlCol="0" anchor="ctr"/>
+          <a:lstStyle/>
+          <a:p>
+            <a:r>
+              <a:rPr lang="en-US" sz="3600" b="1" dirty="0">
+                <a:solidFill>
+                  <a:srgbClr val="213442"/>
+                </a:solidFill>
+              </a:rPr>
+              <a:t>Datasets</a:t>
+            </a:r>
+          </a:p>
+        </p:txBody>
+      </p:sp>
+      <p:pic>
+        <p:nvPicPr>
+          <p:cNvPr id="6" name="Picture 2" descr="Validere Acquires Regulatory Reporting Platform Clairifi - Validere">
+            <a:extLst>
+              <a:ext uri="{FF2B5EF4-FFF2-40B4-BE49-F238E27FC236}">
+                <a16:creationId xmlns:a16="http://schemas.microsoft.com/office/drawing/2014/main" id="{5AE29AB1-08CB-3040-BAF6-3C28420849C7}"/>
+              </a:ext>
+            </a:extLst>
+          </p:cNvPr>
+          <p:cNvPicPr>
+            <a:picLocks noChangeAspect="1" noChangeArrowheads="1"/>
+          </p:cNvPicPr>
+          <p:nvPr/>
+        </p:nvPicPr>
+        <p:blipFill>
+          <a:blip r:embed="rId2">
+            <a:extLst>
+              <a:ext uri="{28A0092B-C50C-407E-A947-70E740481C1C}">
+                <a14:useLocalDpi xmlns:a14="http://schemas.microsoft.com/office/drawing/2010/main" val="0"/>
+              </a:ext>
+            </a:extLst>
+          </a:blip>
+          <a:srcRect/>
+          <a:stretch>
+            <a:fillRect/>
+          </a:stretch>
+        </p:blipFill>
+        <p:spPr bwMode="auto">
+          <a:xfrm>
+            <a:off x="9588136" y="6313712"/>
+            <a:ext cx="2385518" cy="248400"/>
+          </a:xfrm>
+          <a:prstGeom prst="rect">
+            <a:avLst/>
+          </a:prstGeom>
+          <a:noFill/>
+          <a:extLst>
+            <a:ext uri="{909E8E84-426E-40DD-AFC4-6F175D3DCCD1}">
+              <a14:hiddenFill xmlns:a14="http://schemas.microsoft.com/office/drawing/2010/main">
+                <a:solidFill>
+                  <a:srgbClr val="FFFFFF"/>
+                </a:solidFill>
+              </a14:hiddenFill>
+            </a:ext>
+          </a:extLst>
+        </p:spPr>
+      </p:pic>
+      <p:cxnSp>
+        <p:nvCxnSpPr>
+          <p:cNvPr id="8" name="Straight Connector 7">
+            <a:extLst>
+              <a:ext uri="{FF2B5EF4-FFF2-40B4-BE49-F238E27FC236}">
+                <a16:creationId xmlns:a16="http://schemas.microsoft.com/office/drawing/2014/main" id="{367ED728-390F-3F8A-5857-EA1F707AD76B}"/>
+              </a:ext>
+            </a:extLst>
+          </p:cNvPr>
+          <p:cNvCxnSpPr>
+            <a:cxnSpLocks/>
+          </p:cNvCxnSpPr>
+          <p:nvPr/>
+        </p:nvCxnSpPr>
+        <p:spPr>
+          <a:xfrm>
+            <a:off x="348343" y="923109"/>
+            <a:ext cx="11625311" cy="0"/>
+          </a:xfrm>
+          <a:prstGeom prst="line">
+            <a:avLst/>
+          </a:prstGeom>
+          <a:ln w="38100">
+            <a:solidFill>
+              <a:srgbClr val="213442"/>
+            </a:solidFill>
+          </a:ln>
+        </p:spPr>
+        <p:style>
+          <a:lnRef idx="1">
+            <a:schemeClr val="accent1"/>
+          </a:lnRef>
+          <a:fillRef idx="0">
+            <a:schemeClr val="accent1"/>
+          </a:fillRef>
+          <a:effectRef idx="0">
+            <a:schemeClr val="accent1"/>
+          </a:effectRef>
+          <a:fontRef idx="minor">
+            <a:schemeClr val="tx1"/>
+          </a:fontRef>
+        </p:style>
+      </p:cxnSp>
+      <p:graphicFrame>
+        <p:nvGraphicFramePr>
+          <p:cNvPr id="3" name="Table 2">
+            <a:extLst>
+              <a:ext uri="{FF2B5EF4-FFF2-40B4-BE49-F238E27FC236}">
+                <a16:creationId xmlns:a16="http://schemas.microsoft.com/office/drawing/2014/main" id="{7EA89493-B280-E2EC-EADD-BC7216EF5F76}"/>
+              </a:ext>
+            </a:extLst>
+          </p:cNvPr>
+          <p:cNvGraphicFramePr>
+            <a:graphicFrameLocks noGrp="1"/>
+          </p:cNvGraphicFramePr>
+          <p:nvPr>
+            <p:extLst>
+              <p:ext uri="{D42A27DB-BD31-4B8C-83A1-F6EECF244321}">
+                <p14:modId xmlns:p14="http://schemas.microsoft.com/office/powerpoint/2010/main" val="579127882"/>
+              </p:ext>
+            </p:extLst>
+          </p:nvPr>
+        </p:nvGraphicFramePr>
+        <p:xfrm>
+          <a:off x="348343" y="1854926"/>
+          <a:ext cx="10493830" cy="4389120"/>
+        </p:xfrm>
+        <a:graphic>
+          <a:graphicData uri="http://schemas.openxmlformats.org/drawingml/2006/table">
+            <a:tbl>
+              <a:tblPr firstRow="1" bandRow="1">
+                <a:tableStyleId>{5C22544A-7EE6-4342-B048-85BDC9FD1C3A}</a:tableStyleId>
+              </a:tblPr>
+              <a:tblGrid>
+                <a:gridCol w="2098766">
+                  <a:extLst>
+                    <a:ext uri="{9D8B030D-6E8A-4147-A177-3AD203B41FA5}">
+                      <a16:colId xmlns:a16="http://schemas.microsoft.com/office/drawing/2014/main" val="1202839457"/>
+                    </a:ext>
+                  </a:extLst>
+                </a:gridCol>
+                <a:gridCol w="2098766">
+                  <a:extLst>
+                    <a:ext uri="{9D8B030D-6E8A-4147-A177-3AD203B41FA5}">
+                      <a16:colId xmlns:a16="http://schemas.microsoft.com/office/drawing/2014/main" val="4222257465"/>
+                    </a:ext>
+                  </a:extLst>
+                </a:gridCol>
+                <a:gridCol w="2098766">
+                  <a:extLst>
+                    <a:ext uri="{9D8B030D-6E8A-4147-A177-3AD203B41FA5}">
+                      <a16:colId xmlns:a16="http://schemas.microsoft.com/office/drawing/2014/main" val="3530916901"/>
+                    </a:ext>
+                  </a:extLst>
+                </a:gridCol>
+                <a:gridCol w="2098766">
+                  <a:extLst>
+                    <a:ext uri="{9D8B030D-6E8A-4147-A177-3AD203B41FA5}">
+                      <a16:colId xmlns:a16="http://schemas.microsoft.com/office/drawing/2014/main" val="3655148647"/>
+                    </a:ext>
+                  </a:extLst>
+                </a:gridCol>
+                <a:gridCol w="2098766">
+                  <a:extLst>
+                    <a:ext uri="{9D8B030D-6E8A-4147-A177-3AD203B41FA5}">
+                      <a16:colId xmlns:a16="http://schemas.microsoft.com/office/drawing/2014/main" val="3534968921"/>
+                    </a:ext>
+                  </a:extLst>
+                </a:gridCol>
+              </a:tblGrid>
+              <a:tr h="122933">
+                <a:tc>
+                  <a:txBody>
+                    <a:bodyPr/>
+                    <a:lstStyle/>
+                    <a:p>
+                      <a:r>
+                        <a:rPr lang="en-US" sz="1000" dirty="0"/>
+                        <a:t>Label</a:t>
+                      </a:r>
+                    </a:p>
+                  </a:txBody>
+                  <a:tcPr/>
+                </a:tc>
+                <a:tc>
+                  <a:txBody>
+                    <a:bodyPr/>
+                    <a:lstStyle/>
+                    <a:p>
+                      <a:r>
+                        <a:rPr lang="en-US" sz="1000" dirty="0"/>
+                        <a:t>Crude Oil Types</a:t>
+                      </a:r>
+                    </a:p>
+                  </a:txBody>
+                  <a:tcPr/>
+                </a:tc>
+                <a:tc>
+                  <a:txBody>
+                    <a:bodyPr/>
+                    <a:lstStyle/>
+                    <a:p>
+                      <a:r>
+                        <a:rPr lang="en-US" sz="1000" dirty="0"/>
+                        <a:t>Weight-specific info?</a:t>
+                      </a:r>
+                    </a:p>
+                  </a:txBody>
+                  <a:tcPr/>
+                </a:tc>
+                <a:tc>
+                  <a:txBody>
+                    <a:bodyPr/>
+                    <a:lstStyle/>
+                    <a:p>
+                      <a:r>
+                        <a:rPr lang="en-US" sz="1000" dirty="0"/>
+                        <a:t>Sulfur-specific info? </a:t>
+                      </a:r>
+                    </a:p>
+                  </a:txBody>
+                  <a:tcPr/>
+                </a:tc>
+                <a:tc>
+                  <a:txBody>
+                    <a:bodyPr/>
+                    <a:lstStyle/>
+                    <a:p>
+                      <a:r>
+                        <a:rPr lang="en-US" sz="1000" dirty="0"/>
+                        <a:t>Accident-specific info</a:t>
+                      </a:r>
+                    </a:p>
+                  </a:txBody>
+                  <a:tcPr/>
+                </a:tc>
+                <a:extLst>
+                  <a:ext uri="{0D108BD9-81ED-4DB2-BD59-A6C34878D82A}">
+                    <a16:rowId xmlns:a16="http://schemas.microsoft.com/office/drawing/2014/main" val="3767179623"/>
+                  </a:ext>
+                </a:extLst>
+              </a:tr>
+              <a:tr h="139945">
+                <a:tc>
+                  <a:txBody>
+                    <a:bodyPr/>
+                    <a:lstStyle/>
+                    <a:p>
+                      <a:r>
+                        <a:rPr lang="en-US" sz="1000" dirty="0"/>
+                        <a:t>A</a:t>
+                      </a:r>
+                    </a:p>
+                  </a:txBody>
+                  <a:tcPr/>
+                </a:tc>
+                <a:tc>
+                  <a:txBody>
+                    <a:bodyPr/>
+                    <a:lstStyle/>
+                    <a:p>
+                      <a:r>
+                        <a:rPr lang="en-US" sz="1000" dirty="0"/>
+                        <a:t>Crude Oil – Sour, Crude Oil – Sweet, Crude Oil - Synthetic</a:t>
+                      </a:r>
+                    </a:p>
+                  </a:txBody>
+                  <a:tcPr/>
+                </a:tc>
+                <a:tc>
+                  <a:txBody>
+                    <a:bodyPr/>
+                    <a:lstStyle/>
+                    <a:p>
+                      <a:r>
+                        <a:rPr lang="en-US" sz="1000" dirty="0"/>
+                        <a:t>No</a:t>
+                      </a:r>
+                    </a:p>
+                  </a:txBody>
+                  <a:tcPr/>
+                </a:tc>
+                <a:tc>
+                  <a:txBody>
+                    <a:bodyPr/>
+                    <a:lstStyle/>
+                    <a:p>
+                      <a:r>
+                        <a:rPr lang="en-US" sz="1000" dirty="0"/>
+                        <a:t>Sour vs. sweet</a:t>
+                      </a:r>
+                    </a:p>
+                  </a:txBody>
+                  <a:tcPr/>
+                </a:tc>
+                <a:tc>
+                  <a:txBody>
+                    <a:bodyPr/>
+                    <a:lstStyle/>
+                    <a:p>
+                      <a:r>
+                        <a:rPr lang="en-US" sz="1000" dirty="0"/>
+                        <a:t>What happened: damage, deterioration, construction, etc.; incident type: fire, release of substance, etc.</a:t>
+                      </a:r>
+                    </a:p>
+                  </a:txBody>
+                  <a:tcPr>
+                    <a:noFill/>
+                  </a:tcPr>
+                </a:tc>
+                <a:extLst>
+                  <a:ext uri="{0D108BD9-81ED-4DB2-BD59-A6C34878D82A}">
+                    <a16:rowId xmlns:a16="http://schemas.microsoft.com/office/drawing/2014/main" val="714267587"/>
+                  </a:ext>
+                </a:extLst>
+              </a:tr>
+              <a:tr h="156444">
+                <a:tc>
+                  <a:txBody>
+                    <a:bodyPr/>
+                    <a:lstStyle/>
+                    <a:p>
+                      <a:r>
+                        <a:rPr lang="en-US" sz="1000" dirty="0"/>
+                        <a:t>B</a:t>
+                      </a:r>
+                    </a:p>
+                  </a:txBody>
+                  <a:tcPr/>
+                </a:tc>
+                <a:tc>
+                  <a:txBody>
+                    <a:bodyPr/>
+                    <a:lstStyle/>
+                    <a:p>
+                      <a:r>
+                        <a:rPr lang="en-US" sz="1000" dirty="0"/>
+                        <a:t>Crude Oil, Crude Oil-Sour</a:t>
+                      </a:r>
+                    </a:p>
+                  </a:txBody>
+                  <a:tcPr/>
+                </a:tc>
+                <a:tc>
+                  <a:txBody>
+                    <a:bodyPr/>
+                    <a:lstStyle/>
+                    <a:p>
+                      <a:r>
+                        <a:rPr lang="en-US" sz="1000" dirty="0"/>
+                        <a:t>No</a:t>
+                      </a:r>
+                    </a:p>
+                  </a:txBody>
+                  <a:tcPr/>
+                </a:tc>
+                <a:tc>
+                  <a:txBody>
+                    <a:bodyPr/>
+                    <a:lstStyle/>
+                    <a:p>
+                      <a:r>
+                        <a:rPr lang="en-US" sz="1000" dirty="0"/>
+                        <a:t>Sour vs. not sour</a:t>
+                      </a:r>
+                    </a:p>
+                  </a:txBody>
+                  <a:tcPr/>
+                </a:tc>
+                <a:tc>
+                  <a:txBody>
+                    <a:bodyPr/>
+                    <a:lstStyle/>
+                    <a:p>
+                      <a:r>
+                        <a:rPr lang="en-US" sz="1000" dirty="0"/>
+                        <a:t>Classification of Occurrence (encoded); occurrence summary</a:t>
+                      </a:r>
+                    </a:p>
+                  </a:txBody>
+                  <a:tcPr>
+                    <a:noFill/>
+                  </a:tcPr>
+                </a:tc>
+                <a:extLst>
+                  <a:ext uri="{0D108BD9-81ED-4DB2-BD59-A6C34878D82A}">
+                    <a16:rowId xmlns:a16="http://schemas.microsoft.com/office/drawing/2014/main" val="2006049966"/>
+                  </a:ext>
+                </a:extLst>
+              </a:tr>
+              <a:tr h="0">
+                <a:tc>
+                  <a:txBody>
+                    <a:bodyPr/>
+                    <a:lstStyle/>
+                    <a:p>
+                      <a:r>
+                        <a:rPr lang="en-US" sz="1000" dirty="0"/>
+                        <a:t>C</a:t>
+                      </a:r>
+                    </a:p>
+                  </a:txBody>
+                  <a:tcPr/>
+                </a:tc>
+                <a:tc>
+                  <a:txBody>
+                    <a:bodyPr/>
+                    <a:lstStyle/>
+                    <a:p>
+                      <a:r>
+                        <a:rPr lang="en-US" sz="1000" dirty="0"/>
+                        <a:t>Crude Oil</a:t>
+                      </a:r>
+                    </a:p>
+                  </a:txBody>
+                  <a:tcPr/>
+                </a:tc>
+                <a:tc>
+                  <a:txBody>
+                    <a:bodyPr/>
+                    <a:lstStyle/>
+                    <a:p>
+                      <a:r>
+                        <a:rPr lang="en-US" sz="1000" dirty="0"/>
+                        <a:t>No</a:t>
+                      </a:r>
+                    </a:p>
+                  </a:txBody>
+                  <a:tcPr/>
+                </a:tc>
+                <a:tc>
+                  <a:txBody>
+                    <a:bodyPr/>
+                    <a:lstStyle/>
+                    <a:p>
+                      <a:r>
+                        <a:rPr lang="en-US" sz="1000" dirty="0"/>
+                        <a:t>No</a:t>
+                      </a:r>
+                    </a:p>
+                  </a:txBody>
+                  <a:tcPr/>
+                </a:tc>
+                <a:tc>
+                  <a:txBody>
+                    <a:bodyPr/>
+                    <a:lstStyle/>
+                    <a:p>
+                      <a:r>
+                        <a:rPr lang="en-US" sz="1000" dirty="0"/>
+                        <a:t>PRIMARY_CAUSE: corrosion, equipment, defective pipe, etc.</a:t>
+                      </a:r>
+                    </a:p>
+                  </a:txBody>
+                  <a:tcPr>
+                    <a:noFill/>
+                  </a:tcPr>
+                </a:tc>
+                <a:extLst>
+                  <a:ext uri="{0D108BD9-81ED-4DB2-BD59-A6C34878D82A}">
+                    <a16:rowId xmlns:a16="http://schemas.microsoft.com/office/drawing/2014/main" val="2065673178"/>
+                  </a:ext>
+                </a:extLst>
+              </a:tr>
+              <a:tr h="0">
+                <a:tc>
+                  <a:txBody>
+                    <a:bodyPr/>
+                    <a:lstStyle/>
+                    <a:p>
+                      <a:r>
+                        <a:rPr lang="en-US" sz="1000" dirty="0"/>
+                        <a:t>D</a:t>
+                      </a:r>
+                    </a:p>
+                  </a:txBody>
+                  <a:tcPr/>
+                </a:tc>
+                <a:tc>
+                  <a:txBody>
+                    <a:bodyPr/>
+                    <a:lstStyle/>
+                    <a:p>
+                      <a:r>
+                        <a:rPr lang="en-US" sz="1000" dirty="0"/>
+                        <a:t>Crude Oil</a:t>
+                      </a:r>
+                    </a:p>
+                  </a:txBody>
+                  <a:tcPr/>
+                </a:tc>
+                <a:tc>
+                  <a:txBody>
+                    <a:bodyPr/>
+                    <a:lstStyle/>
+                    <a:p>
+                      <a:r>
+                        <a:rPr lang="en-US" sz="1000" dirty="0"/>
+                        <a:t>No</a:t>
+                      </a:r>
+                    </a:p>
+                  </a:txBody>
+                  <a:tcPr/>
+                </a:tc>
+                <a:tc>
+                  <a:txBody>
+                    <a:bodyPr/>
+                    <a:lstStyle/>
+                    <a:p>
+                      <a:r>
+                        <a:rPr lang="en-US" sz="1000" dirty="0"/>
+                        <a:t>No</a:t>
+                      </a:r>
+                    </a:p>
+                  </a:txBody>
+                  <a:tcPr/>
+                </a:tc>
+                <a:tc>
+                  <a:txBody>
+                    <a:bodyPr/>
+                    <a:lstStyle/>
+                    <a:p>
+                      <a:r>
+                        <a:rPr lang="en-US" sz="1000" dirty="0"/>
+                        <a:t>CAUS: corrosion, failed pipe, malfunction, etc. ; CAUSO: breakdown of CAUS; NARRATIVE</a:t>
+                      </a:r>
+                    </a:p>
+                  </a:txBody>
+                  <a:tcPr/>
+                </a:tc>
+                <a:extLst>
+                  <a:ext uri="{0D108BD9-81ED-4DB2-BD59-A6C34878D82A}">
+                    <a16:rowId xmlns:a16="http://schemas.microsoft.com/office/drawing/2014/main" val="2518064417"/>
+                  </a:ext>
+                </a:extLst>
+              </a:tr>
+              <a:tr h="0">
+                <a:tc>
+                  <a:txBody>
+                    <a:bodyPr/>
+                    <a:lstStyle/>
+                    <a:p>
+                      <a:r>
+                        <a:rPr lang="en-US" sz="1000" dirty="0"/>
+                        <a:t>E</a:t>
+                      </a:r>
+                    </a:p>
+                  </a:txBody>
+                  <a:tcPr/>
+                </a:tc>
+                <a:tc>
+                  <a:txBody>
+                    <a:bodyPr/>
+                    <a:lstStyle/>
+                    <a:p>
+                      <a:r>
+                        <a:rPr lang="en-US" sz="1000" dirty="0"/>
+                        <a:t>Crude Oil, Crude Oil Heavy, Crude Oil Sour, Crude Oil / Location, and more</a:t>
+                      </a:r>
+                    </a:p>
+                  </a:txBody>
+                  <a:tcPr/>
+                </a:tc>
+                <a:tc>
+                  <a:txBody>
+                    <a:bodyPr/>
+                    <a:lstStyle/>
+                    <a:p>
+                      <a:r>
+                        <a:rPr lang="en-US" sz="1000" dirty="0"/>
+                        <a:t>Not explicitly; can be roughly extrapolated</a:t>
+                      </a:r>
+                    </a:p>
+                  </a:txBody>
+                  <a:tcPr/>
+                </a:tc>
+                <a:tc>
+                  <a:txBody>
+                    <a:bodyPr/>
+                    <a:lstStyle/>
+                    <a:p>
+                      <a:pPr marL="0" marR="0" lvl="0" indent="0" algn="l" defTabSz="914400" rtl="0" eaLnBrk="1" fontAlgn="auto" latinLnBrk="0" hangingPunct="1">
+                        <a:lnSpc>
+                          <a:spcPct val="100000"/>
+                        </a:lnSpc>
+                        <a:spcBef>
+                          <a:spcPts val="0"/>
+                        </a:spcBef>
+                        <a:spcAft>
+                          <a:spcPts val="0"/>
+                        </a:spcAft>
+                        <a:buClrTx/>
+                        <a:buSzTx/>
+                        <a:buFontTx/>
+                        <a:buNone/>
+                        <a:tabLst/>
+                        <a:defRPr/>
+                      </a:pPr>
+                      <a:r>
+                        <a:rPr lang="en-US" sz="1000" dirty="0"/>
+                        <a:t>Not explicitly; can be roughly extrapolated</a:t>
+                      </a:r>
+                    </a:p>
+                  </a:txBody>
+                  <a:tcPr/>
+                </a:tc>
+                <a:tc>
+                  <a:txBody>
+                    <a:bodyPr/>
+                    <a:lstStyle/>
+                    <a:p>
+                      <a:r>
+                        <a:rPr lang="en-US" sz="1000" dirty="0"/>
+                        <a:t>Small spills: GEN_CAUSE (equipment, corrosion, etc.)</a:t>
+                      </a:r>
+                    </a:p>
+                    <a:p>
+                      <a:r>
+                        <a:rPr lang="en-US" sz="1000" dirty="0"/>
+                        <a:t>Big spills: CAUSE (more detailed than small spills); NARRATIVE</a:t>
+                      </a:r>
+                    </a:p>
+                  </a:txBody>
+                  <a:tcPr/>
+                </a:tc>
+                <a:extLst>
+                  <a:ext uri="{0D108BD9-81ED-4DB2-BD59-A6C34878D82A}">
+                    <a16:rowId xmlns:a16="http://schemas.microsoft.com/office/drawing/2014/main" val="964204434"/>
+                  </a:ext>
+                </a:extLst>
+              </a:tr>
+              <a:tr h="0">
+                <a:tc>
+                  <a:txBody>
+                    <a:bodyPr/>
+                    <a:lstStyle/>
+                    <a:p>
+                      <a:r>
+                        <a:rPr lang="en-US" sz="1000" dirty="0"/>
+                        <a:t>F</a:t>
+                      </a:r>
+                    </a:p>
+                  </a:txBody>
+                  <a:tcPr/>
+                </a:tc>
+                <a:tc>
+                  <a:txBody>
+                    <a:bodyPr/>
+                    <a:lstStyle/>
+                    <a:p>
+                      <a:r>
+                        <a:rPr lang="en-US" sz="1000" dirty="0"/>
+                        <a:t>Crude Oil</a:t>
+                      </a:r>
+                    </a:p>
+                  </a:txBody>
+                  <a:tcPr/>
+                </a:tc>
+                <a:tc>
+                  <a:txBody>
+                    <a:bodyPr/>
+                    <a:lstStyle/>
+                    <a:p>
+                      <a:r>
+                        <a:rPr lang="en-US" sz="1000" dirty="0"/>
+                        <a:t>No</a:t>
+                      </a:r>
+                    </a:p>
+                  </a:txBody>
+                  <a:tcPr/>
+                </a:tc>
+                <a:tc>
+                  <a:txBody>
+                    <a:bodyPr/>
+                    <a:lstStyle/>
+                    <a:p>
+                      <a:r>
+                        <a:rPr lang="en-US" sz="1000" dirty="0"/>
+                        <a:t>No</a:t>
+                      </a:r>
+                    </a:p>
+                  </a:txBody>
+                  <a:tcPr/>
+                </a:tc>
+                <a:tc>
+                  <a:txBody>
+                    <a:bodyPr/>
+                    <a:lstStyle/>
+                    <a:p>
+                      <a:r>
+                        <a:rPr lang="en-US" sz="1000" dirty="0"/>
+                        <a:t>CAUSE: corrosion, equipment, manual error, etc.</a:t>
+                      </a:r>
+                    </a:p>
+                    <a:p>
+                      <a:r>
+                        <a:rPr lang="en-US" sz="1000" dirty="0"/>
+                        <a:t>CAUSE_DETAILS: more detailed than above; NARRATIVE</a:t>
+                      </a:r>
+                    </a:p>
+                  </a:txBody>
+                  <a:tcPr/>
+                </a:tc>
+                <a:extLst>
+                  <a:ext uri="{0D108BD9-81ED-4DB2-BD59-A6C34878D82A}">
+                    <a16:rowId xmlns:a16="http://schemas.microsoft.com/office/drawing/2014/main" val="219358764"/>
+                  </a:ext>
+                </a:extLst>
+              </a:tr>
+              <a:tr h="128508">
+                <a:tc>
+                  <a:txBody>
+                    <a:bodyPr/>
+                    <a:lstStyle/>
+                    <a:p>
+                      <a:r>
+                        <a:rPr lang="en-US" sz="1000" dirty="0"/>
+                        <a:t>G</a:t>
+                      </a:r>
+                    </a:p>
+                  </a:txBody>
+                  <a:tcPr/>
+                </a:tc>
+                <a:tc>
+                  <a:txBody>
+                    <a:bodyPr/>
+                    <a:lstStyle/>
+                    <a:p>
+                      <a:r>
+                        <a:rPr lang="en-US" sz="1000" dirty="0"/>
+                        <a:t>Crude Oil (Nothing else)</a:t>
+                      </a:r>
+                    </a:p>
+                  </a:txBody>
+                  <a:tcPr/>
+                </a:tc>
+                <a:tc>
+                  <a:txBody>
+                    <a:bodyPr/>
+                    <a:lstStyle/>
+                    <a:p>
+                      <a:r>
+                        <a:rPr lang="en-US" sz="1000" dirty="0"/>
+                        <a:t>No</a:t>
+                      </a:r>
+                    </a:p>
+                  </a:txBody>
+                  <a:tcPr/>
+                </a:tc>
+                <a:tc>
+                  <a:txBody>
+                    <a:bodyPr/>
+                    <a:lstStyle/>
+                    <a:p>
+                      <a:r>
+                        <a:rPr lang="en-US" sz="1000" dirty="0"/>
+                        <a:t>No</a:t>
+                      </a:r>
+                    </a:p>
+                  </a:txBody>
+                  <a:tcPr/>
+                </a:tc>
+                <a:tc>
+                  <a:txBody>
+                    <a:bodyPr/>
+                    <a:lstStyle/>
+                    <a:p>
+                      <a:r>
+                        <a:rPr lang="en-US" sz="1000" dirty="0"/>
+                        <a:t>CAUSE: corrosion, equipment, manual error, etc.</a:t>
+                      </a:r>
+                    </a:p>
+                    <a:p>
+                      <a:r>
+                        <a:rPr lang="en-US" sz="1000" dirty="0"/>
+                        <a:t>CAUSE_DETAILS: more detailed than above; NARRATIVE</a:t>
+                      </a:r>
+                    </a:p>
+                  </a:txBody>
+                  <a:tcPr/>
+                </a:tc>
+                <a:extLst>
+                  <a:ext uri="{0D108BD9-81ED-4DB2-BD59-A6C34878D82A}">
+                    <a16:rowId xmlns:a16="http://schemas.microsoft.com/office/drawing/2014/main" val="99239900"/>
+                  </a:ext>
+                </a:extLst>
+              </a:tr>
+            </a:tbl>
+          </a:graphicData>
+        </a:graphic>
+      </p:graphicFrame>
+    </p:spTree>
+    <p:extLst>
+      <p:ext uri="{BB962C8B-B14F-4D97-AF65-F5344CB8AC3E}">
+        <p14:creationId xmlns:p14="http://schemas.microsoft.com/office/powerpoint/2010/main" val="1492534602"/>
+      </p:ext>
+    </p:extLst>
+  </p:cSld>
+  <p:clrMapOvr>
+    <a:masterClrMapping/>
+  </p:clrMapOvr>
+</p:sld>
+</file>
+
+<file path=ppt/slides/slide8.xml><?xml version="1.0" encoding="utf-8"?>
+<p:sld xmlns:a="http://schemas.openxmlformats.org/drawingml/2006/main" xmlns:r="http://schemas.openxmlformats.org/officeDocument/2006/relationships" xmlns:p="http://schemas.openxmlformats.org/presentationml/2006/main">
+  <p:cSld>
+    <p:spTree>
+      <p:nvGrpSpPr>
+        <p:cNvPr id="1" name=""/>
+        <p:cNvGrpSpPr/>
+        <p:nvPr/>
+      </p:nvGrpSpPr>
+      <p:grpSpPr>
+        <a:xfrm>
+          <a:off x="0" y="0"/>
+          <a:ext cx="0" cy="0"/>
+          <a:chOff x="0" y="0"/>
+          <a:chExt cx="0" cy="0"/>
+        </a:xfrm>
+      </p:grpSpPr>
+      <p:sp>
+        <p:nvSpPr>
+          <p:cNvPr id="4" name="Rectangle 3">
+            <a:extLst>
+              <a:ext uri="{FF2B5EF4-FFF2-40B4-BE49-F238E27FC236}">
+                <a16:creationId xmlns:a16="http://schemas.microsoft.com/office/drawing/2014/main" id="{9C5E69D8-2133-86C5-C478-359118968E16}"/>
+              </a:ext>
+            </a:extLst>
+          </p:cNvPr>
+          <p:cNvSpPr/>
+          <p:nvPr/>
+        </p:nvSpPr>
+        <p:spPr>
+          <a:xfrm>
+            <a:off x="233183" y="304280"/>
+            <a:ext cx="11523387" cy="618829"/>
+          </a:xfrm>
+          <a:prstGeom prst="rect">
+            <a:avLst/>
+          </a:prstGeom>
+          <a:noFill/>
+          <a:ln>
+            <a:noFill/>
+          </a:ln>
+        </p:spPr>
+        <p:style>
+          <a:lnRef idx="2">
+            <a:schemeClr val="accent1">
+              <a:shade val="15000"/>
+            </a:schemeClr>
+          </a:lnRef>
+          <a:fillRef idx="1">
+            <a:schemeClr val="accent1"/>
+          </a:fillRef>
+          <a:effectRef idx="0">
+            <a:schemeClr val="accent1"/>
+          </a:effectRef>
+          <a:fontRef idx="minor">
+            <a:schemeClr val="lt1"/>
+          </a:fontRef>
+        </p:style>
+        <p:txBody>
+          <a:bodyPr rtlCol="0" anchor="ctr"/>
+          <a:lstStyle/>
+          <a:p>
+            <a:r>
+              <a:rPr lang="en-US" sz="3600" b="1" dirty="0">
+                <a:solidFill>
+                  <a:srgbClr val="213442"/>
+                </a:solidFill>
+              </a:rPr>
+              <a:t>Analysis - Canada</a:t>
+            </a:r>
+          </a:p>
+        </p:txBody>
+      </p:sp>
+      <p:pic>
+        <p:nvPicPr>
+          <p:cNvPr id="6" name="Picture 2" descr="Validere Acquires Regulatory Reporting Platform Clairifi - Validere">
+            <a:extLst>
+              <a:ext uri="{FF2B5EF4-FFF2-40B4-BE49-F238E27FC236}">
+                <a16:creationId xmlns:a16="http://schemas.microsoft.com/office/drawing/2014/main" id="{5AE29AB1-08CB-3040-BAF6-3C28420849C7}"/>
+              </a:ext>
+            </a:extLst>
+          </p:cNvPr>
+          <p:cNvPicPr>
+            <a:picLocks noChangeAspect="1" noChangeArrowheads="1"/>
+          </p:cNvPicPr>
+          <p:nvPr/>
+        </p:nvPicPr>
+        <p:blipFill>
+          <a:blip r:embed="rId2">
+            <a:extLst>
+              <a:ext uri="{28A0092B-C50C-407E-A947-70E740481C1C}">
+                <a14:useLocalDpi xmlns:a14="http://schemas.microsoft.com/office/drawing/2010/main" val="0"/>
+              </a:ext>
+            </a:extLst>
+          </a:blip>
+          <a:srcRect/>
+          <a:stretch>
+            <a:fillRect/>
+          </a:stretch>
+        </p:blipFill>
+        <p:spPr bwMode="auto">
+          <a:xfrm>
+            <a:off x="9588136" y="6313712"/>
+            <a:ext cx="2385518" cy="248400"/>
+          </a:xfrm>
+          <a:prstGeom prst="rect">
+            <a:avLst/>
+          </a:prstGeom>
+          <a:noFill/>
+          <a:extLst>
+            <a:ext uri="{909E8E84-426E-40DD-AFC4-6F175D3DCCD1}">
+              <a14:hiddenFill xmlns:a14="http://schemas.microsoft.com/office/drawing/2010/main">
+                <a:solidFill>
+                  <a:srgbClr val="FFFFFF"/>
+                </a:solidFill>
+              </a14:hiddenFill>
+            </a:ext>
+          </a:extLst>
+        </p:spPr>
+      </p:pic>
+      <p:sp>
+        <p:nvSpPr>
+          <p:cNvPr id="7" name="TextBox 6">
+            <a:extLst>
+              <a:ext uri="{FF2B5EF4-FFF2-40B4-BE49-F238E27FC236}">
+                <a16:creationId xmlns:a16="http://schemas.microsoft.com/office/drawing/2014/main" id="{3DA76F35-D9B8-C9A4-D281-3E7D21973AFB}"/>
+              </a:ext>
+            </a:extLst>
+          </p:cNvPr>
+          <p:cNvSpPr txBox="1"/>
+          <p:nvPr/>
+        </p:nvSpPr>
+        <p:spPr>
+          <a:xfrm>
+            <a:off x="348343" y="1910250"/>
+            <a:ext cx="10162903" cy="3785652"/>
+          </a:xfrm>
+          <a:prstGeom prst="rect">
+            <a:avLst/>
+          </a:prstGeom>
+          <a:noFill/>
+        </p:spPr>
+        <p:txBody>
+          <a:bodyPr wrap="square" rtlCol="0">
+            <a:spAutoFit/>
+          </a:bodyPr>
+          <a:lstStyle/>
+          <a:p>
+            <a:r>
+              <a:rPr lang="en-US" sz="1200" b="1" dirty="0"/>
+              <a:t>Step 1  - crude oil vs. non-crude oil</a:t>
+            </a:r>
+          </a:p>
+          <a:p>
+            <a:r>
+              <a:rPr lang="en-US" sz="1200" dirty="0"/>
+              <a:t>- explored/performed initial investigation of data</a:t>
+            </a:r>
+          </a:p>
+          <a:p>
+            <a:r>
+              <a:rPr lang="en-US" sz="1200" dirty="0"/>
+              <a:t>	- observation: operating </a:t>
+            </a:r>
+            <a:r>
+              <a:rPr lang="en-US" sz="1200" dirty="0" err="1"/>
+              <a:t>kpa</a:t>
+            </a:r>
+            <a:r>
+              <a:rPr lang="en-US" sz="1200" dirty="0"/>
+              <a:t> difference</a:t>
+            </a:r>
+          </a:p>
+          <a:p>
+            <a:r>
+              <a:rPr lang="en-US" sz="1200" dirty="0"/>
+              <a:t>- performed logistic regression to see if you could determine crude vs. non-crude based on qualitative columns</a:t>
+            </a:r>
+          </a:p>
+          <a:p>
+            <a:r>
+              <a:rPr lang="en-US" sz="1200" dirty="0"/>
+              <a:t>    - specifically, used "what happened" and "details of what happened" columns</a:t>
+            </a:r>
+          </a:p>
+          <a:p>
+            <a:r>
+              <a:rPr lang="en-US" sz="1200" dirty="0"/>
+              <a:t>    - unable to consistently predict; could be a result of more non-crude than crude or incomplete data</a:t>
+            </a:r>
+          </a:p>
+          <a:p>
+            <a:r>
+              <a:rPr lang="en-US" sz="1200" dirty="0"/>
+              <a:t>	- or simply because it’s hard to predict</a:t>
+            </a:r>
+          </a:p>
+          <a:p>
+            <a:r>
+              <a:rPr lang="en-US" sz="1200" dirty="0"/>
+              <a:t>- tried to rerun model by filtering for “what happened” that could be related to chemistry/substance – fire, frost, deterioration, cracking, … </a:t>
+            </a:r>
+          </a:p>
+          <a:p>
+            <a:r>
+              <a:rPr lang="en-US" sz="1200" dirty="0"/>
+              <a:t>- also tried playing around with dropping cols that are missing &gt;50% (or x threshold) </a:t>
+            </a:r>
+            <a:r>
+              <a:rPr lang="en-US" sz="1200"/>
+              <a:t>of values</a:t>
+            </a:r>
+            <a:endParaRPr lang="en-US" sz="1200" dirty="0"/>
+          </a:p>
+          <a:p>
+            <a:endParaRPr lang="en-US" sz="1200" dirty="0"/>
+          </a:p>
+          <a:p>
+            <a:r>
+              <a:rPr lang="en-US" sz="1200" dirty="0"/>
+              <a:t>Process</a:t>
+            </a:r>
+          </a:p>
+          <a:p>
+            <a:r>
+              <a:rPr lang="en-US" sz="1200" dirty="0"/>
+              <a:t>- loaded and cleaned data</a:t>
+            </a:r>
+          </a:p>
+          <a:p>
+            <a:r>
+              <a:rPr lang="en-US" sz="1200" dirty="0"/>
+              <a:t>- filtered for relevant attributes – substance carried (crude vs. non crude), what happened, detailed what happened, and incident types</a:t>
+            </a:r>
+          </a:p>
+          <a:p>
+            <a:r>
+              <a:rPr lang="en-US" sz="1200" dirty="0"/>
+              <a:t>- expanded what happened columns into multiple binary columns (e.g., mapped “corrosion; damage to pipe” to corrosion = 1 and damage to pipe = 1)</a:t>
+            </a:r>
+          </a:p>
+          <a:p>
+            <a:r>
+              <a:rPr lang="en-US" sz="1200" dirty="0"/>
+              <a:t>- made correlation matrix and removed pairs &gt;0.8; dropped 1 of 2 cols in these pairs based on which occurred less</a:t>
+            </a:r>
+          </a:p>
+          <a:p>
+            <a:r>
+              <a:rPr lang="en-US" sz="1200" dirty="0"/>
+              <a:t>- ran regression model using </a:t>
+            </a:r>
+            <a:r>
+              <a:rPr lang="en-US" sz="1200" dirty="0" err="1"/>
+              <a:t>sklearn</a:t>
+            </a:r>
+            <a:endParaRPr lang="en-US" sz="1200" dirty="0"/>
+          </a:p>
+          <a:p>
+            <a:r>
+              <a:rPr lang="en-US" sz="1200" dirty="0"/>
+              <a:t>- Results: able to predict non-crude well but this is probably because this category has a larger sample</a:t>
+            </a:r>
+          </a:p>
+          <a:p>
+            <a:endParaRPr lang="en-US" sz="1200" dirty="0"/>
+          </a:p>
+          <a:p>
+            <a:r>
+              <a:rPr lang="en-US" sz="1200" b="1" dirty="0"/>
+              <a:t>Step 2 – Crude Only</a:t>
+            </a:r>
+          </a:p>
+          <a:p>
+            <a:r>
+              <a:rPr lang="en-US" sz="1200" dirty="0"/>
+              <a:t> - ….</a:t>
+            </a:r>
+          </a:p>
+        </p:txBody>
+      </p:sp>
+      <p:cxnSp>
+        <p:nvCxnSpPr>
+          <p:cNvPr id="8" name="Straight Connector 7">
+            <a:extLst>
+              <a:ext uri="{FF2B5EF4-FFF2-40B4-BE49-F238E27FC236}">
+                <a16:creationId xmlns:a16="http://schemas.microsoft.com/office/drawing/2014/main" id="{367ED728-390F-3F8A-5857-EA1F707AD76B}"/>
+              </a:ext>
+            </a:extLst>
+          </p:cNvPr>
+          <p:cNvCxnSpPr>
+            <a:cxnSpLocks/>
+          </p:cNvCxnSpPr>
+          <p:nvPr/>
+        </p:nvCxnSpPr>
+        <p:spPr>
+          <a:xfrm>
+            <a:off x="348343" y="923109"/>
+            <a:ext cx="11625311" cy="0"/>
+          </a:xfrm>
+          <a:prstGeom prst="line">
+            <a:avLst/>
+          </a:prstGeom>
+          <a:ln w="38100">
+            <a:solidFill>
+              <a:srgbClr val="213442"/>
+            </a:solidFill>
+          </a:ln>
+        </p:spPr>
+        <p:style>
+          <a:lnRef idx="1">
+            <a:schemeClr val="accent1"/>
+          </a:lnRef>
+          <a:fillRef idx="0">
+            <a:schemeClr val="accent1"/>
+          </a:fillRef>
+          <a:effectRef idx="0">
+            <a:schemeClr val="accent1"/>
+          </a:effectRef>
+          <a:fontRef idx="minor">
+            <a:schemeClr val="tx1"/>
+          </a:fontRef>
+        </p:style>
+      </p:cxnSp>
+      <p:sp>
+        <p:nvSpPr>
+          <p:cNvPr id="2" name="TextBox 1">
+            <a:extLst>
+              <a:ext uri="{FF2B5EF4-FFF2-40B4-BE49-F238E27FC236}">
+                <a16:creationId xmlns:a16="http://schemas.microsoft.com/office/drawing/2014/main" id="{8446A0DB-5D02-B35C-44C5-F05E5426C5DF}"/>
+              </a:ext>
+            </a:extLst>
+          </p:cNvPr>
+          <p:cNvSpPr txBox="1"/>
+          <p:nvPr/>
+        </p:nvSpPr>
+        <p:spPr>
+          <a:xfrm>
+            <a:off x="290763" y="1047347"/>
+            <a:ext cx="11682892" cy="369332"/>
+          </a:xfrm>
+          <a:prstGeom prst="rect">
+            <a:avLst/>
+          </a:prstGeom>
+          <a:noFill/>
+        </p:spPr>
+        <p:txBody>
+          <a:bodyPr wrap="square" rtlCol="0">
+            <a:spAutoFit/>
+          </a:bodyPr>
+          <a:lstStyle/>
+          <a:p>
+            <a:r>
+              <a:rPr lang="en-US" dirty="0"/>
+              <a:t>Looking at Canada data in 2 steps</a:t>
+            </a:r>
+          </a:p>
+        </p:txBody>
+      </p:sp>
+    </p:spTree>
+    <p:extLst>
+      <p:ext uri="{BB962C8B-B14F-4D97-AF65-F5344CB8AC3E}">
+        <p14:creationId xmlns:p14="http://schemas.microsoft.com/office/powerpoint/2010/main" val="2724706639"/>
+      </p:ext>
+    </p:extLst>
+  </p:cSld>
+  <p:clrMapOvr>
+    <a:masterClrMapping/>
+  </p:clrMapOvr>
+</p:sld>
+</file>
+
+<file path=ppt/slides/slide9.xml><?xml version="1.0" encoding="utf-8"?>
+<p:sld xmlns:a="http://schemas.openxmlformats.org/drawingml/2006/main" xmlns:r="http://schemas.openxmlformats.org/officeDocument/2006/relationships" xmlns:p="http://schemas.openxmlformats.org/presentationml/2006/main">
+  <p:cSld>
+    <p:spTree>
+      <p:nvGrpSpPr>
+        <p:cNvPr id="1" name=""/>
+        <p:cNvGrpSpPr/>
+        <p:nvPr/>
+      </p:nvGrpSpPr>
+      <p:grpSpPr>
+        <a:xfrm>
+          <a:off x="0" y="0"/>
+          <a:ext cx="0" cy="0"/>
+          <a:chOff x="0" y="0"/>
+          <a:chExt cx="0" cy="0"/>
+        </a:xfrm>
+      </p:grpSpPr>
+      <p:pic>
+        <p:nvPicPr>
+          <p:cNvPr id="4" name="Picture 2" descr="Validere Acquires Regulatory Reporting Platform Clairifi - Validere">
+            <a:extLst>
+              <a:ext uri="{FF2B5EF4-FFF2-40B4-BE49-F238E27FC236}">
+                <a16:creationId xmlns:a16="http://schemas.microsoft.com/office/drawing/2014/main" id="{FB7EE65E-8925-81A8-2BFC-A529915986B8}"/>
+              </a:ext>
+            </a:extLst>
+          </p:cNvPr>
+          <p:cNvPicPr>
+            <a:picLocks noChangeAspect="1" noChangeArrowheads="1"/>
+          </p:cNvPicPr>
+          <p:nvPr/>
+        </p:nvPicPr>
+        <p:blipFill>
+          <a:blip r:embed="rId2">
+            <a:extLst>
+              <a:ext uri="{28A0092B-C50C-407E-A947-70E740481C1C}">
+                <a14:useLocalDpi xmlns:a14="http://schemas.microsoft.com/office/drawing/2010/main" val="0"/>
+              </a:ext>
+            </a:extLst>
+          </a:blip>
+          <a:srcRect/>
+          <a:stretch>
+            <a:fillRect/>
+          </a:stretch>
+        </p:blipFill>
+        <p:spPr bwMode="auto">
+          <a:xfrm>
+            <a:off x="9588137" y="6313713"/>
+            <a:ext cx="2377441" cy="247559"/>
+          </a:xfrm>
+          <a:prstGeom prst="rect">
+            <a:avLst/>
+          </a:prstGeom>
+          <a:noFill/>
+          <a:extLst>
+            <a:ext uri="{909E8E84-426E-40DD-AFC4-6F175D3DCCD1}">
+              <a14:hiddenFill xmlns:a14="http://schemas.microsoft.com/office/drawing/2010/main">
+                <a:solidFill>
+                  <a:srgbClr val="FFFFFF"/>
+                </a:solidFill>
+              </a14:hiddenFill>
+            </a:ext>
+          </a:extLst>
+        </p:spPr>
+      </p:pic>
+      <p:sp>
+        <p:nvSpPr>
+          <p:cNvPr id="6" name="Rectangle 5">
+            <a:extLst>
+              <a:ext uri="{FF2B5EF4-FFF2-40B4-BE49-F238E27FC236}">
+                <a16:creationId xmlns:a16="http://schemas.microsoft.com/office/drawing/2014/main" id="{07F40E04-0FF0-4058-E5B2-051685ADDEDB}"/>
+              </a:ext>
+            </a:extLst>
+          </p:cNvPr>
+          <p:cNvSpPr/>
+          <p:nvPr/>
+        </p:nvSpPr>
+        <p:spPr>
+          <a:xfrm>
+            <a:off x="0" y="7622"/>
+            <a:ext cx="12192000" cy="1220287"/>
+          </a:xfrm>
+          <a:prstGeom prst="rect">
+            <a:avLst/>
+          </a:prstGeom>
+          <a:noFill/>
+          <a:ln>
+            <a:noFill/>
+          </a:ln>
+        </p:spPr>
+        <p:style>
+          <a:lnRef idx="2">
+            <a:schemeClr val="accent1">
+              <a:shade val="15000"/>
+            </a:schemeClr>
+          </a:lnRef>
+          <a:fillRef idx="1">
+            <a:schemeClr val="accent1"/>
+          </a:fillRef>
+          <a:effectRef idx="0">
+            <a:schemeClr val="accent1"/>
+          </a:effectRef>
+          <a:fontRef idx="minor">
+            <a:schemeClr val="lt1"/>
+          </a:fontRef>
+        </p:style>
+        <p:txBody>
+          <a:bodyPr rtlCol="0" anchor="ctr"/>
+          <a:lstStyle/>
+          <a:p>
+            <a:r>
+              <a:rPr lang="en-US" sz="3600" dirty="0">
+                <a:solidFill>
+                  <a:srgbClr val="1D2C33"/>
+                </a:solidFill>
+              </a:rPr>
+              <a:t>Properties of Crude Oil Responsible for Pipeline Accidents</a:t>
+            </a:r>
+          </a:p>
+        </p:txBody>
+      </p:sp>
+      <p:pic>
+        <p:nvPicPr>
+          <p:cNvPr id="7" name="Picture 4" descr="Validere expands market fundamentals team with key new hires - Validere">
+            <a:extLst>
+              <a:ext uri="{FF2B5EF4-FFF2-40B4-BE49-F238E27FC236}">
+                <a16:creationId xmlns:a16="http://schemas.microsoft.com/office/drawing/2014/main" id="{8C793E36-BE88-9323-69E1-1A63865EF65C}"/>
+              </a:ext>
+            </a:extLst>
+          </p:cNvPr>
+          <p:cNvPicPr>
+            <a:picLocks noChangeAspect="1" noChangeArrowheads="1"/>
+          </p:cNvPicPr>
+          <p:nvPr/>
+        </p:nvPicPr>
+        <p:blipFill>
+          <a:blip r:embed="rId3">
+            <a:extLst>
+              <a:ext uri="{28A0092B-C50C-407E-A947-70E740481C1C}">
+                <a14:useLocalDpi xmlns:a14="http://schemas.microsoft.com/office/drawing/2010/main" val="0"/>
+              </a:ext>
+            </a:extLst>
+          </a:blip>
+          <a:srcRect/>
+          <a:stretch>
+            <a:fillRect/>
+          </a:stretch>
+        </p:blipFill>
+        <p:spPr bwMode="auto">
+          <a:xfrm>
+            <a:off x="0" y="1227909"/>
+            <a:ext cx="12192000" cy="4762500"/>
+          </a:xfrm>
+          <a:prstGeom prst="rect">
+            <a:avLst/>
+          </a:prstGeom>
+          <a:noFill/>
+          <a:extLst>
+            <a:ext uri="{909E8E84-426E-40DD-AFC4-6F175D3DCCD1}">
+              <a14:hiddenFill xmlns:a14="http://schemas.microsoft.com/office/drawing/2010/main">
+                <a:solidFill>
+                  <a:srgbClr val="FFFFFF"/>
+                </a:solidFill>
+              </a14:hiddenFill>
+            </a:ext>
+          </a:extLst>
+        </p:spPr>
+      </p:pic>
+    </p:spTree>
+    <p:extLst>
+      <p:ext uri="{BB962C8B-B14F-4D97-AF65-F5344CB8AC3E}">
+        <p14:creationId xmlns:p14="http://schemas.microsoft.com/office/powerpoint/2010/main" val="1026089983"/>
       </p:ext>
     </p:extLst>
   </p:cSld>

--- a/presentations/Pipeline Accidents Presentation v0.pptx
+++ b/presentations/Pipeline Accidents Presentation v0.pptx
@@ -4,6 +4,9 @@
   <p:sldMasterIdLst>
     <p:sldMasterId id="2147483648" r:id="rId1"/>
   </p:sldMasterIdLst>
+  <p:notesMasterIdLst>
+    <p:notesMasterId r:id="rId22"/>
+  </p:notesMasterIdLst>
   <p:sldIdLst>
     <p:sldId id="260" r:id="rId2"/>
     <p:sldId id="256" r:id="rId3"/>
@@ -15,14 +18,16 @@
     <p:sldId id="288" r:id="rId9"/>
     <p:sldId id="271" r:id="rId10"/>
     <p:sldId id="283" r:id="rId11"/>
-    <p:sldId id="282" r:id="rId12"/>
+    <p:sldId id="289" r:id="rId12"/>
     <p:sldId id="286" r:id="rId13"/>
-    <p:sldId id="274" r:id="rId14"/>
-    <p:sldId id="267" r:id="rId15"/>
-    <p:sldId id="263" r:id="rId16"/>
-    <p:sldId id="277" r:id="rId17"/>
-    <p:sldId id="287" r:id="rId18"/>
-    <p:sldId id="284" r:id="rId19"/>
+    <p:sldId id="290" r:id="rId14"/>
+    <p:sldId id="291" r:id="rId15"/>
+    <p:sldId id="274" r:id="rId16"/>
+    <p:sldId id="292" r:id="rId17"/>
+    <p:sldId id="263" r:id="rId18"/>
+    <p:sldId id="277" r:id="rId19"/>
+    <p:sldId id="287" r:id="rId20"/>
+    <p:sldId id="284" r:id="rId21"/>
   </p:sldIdLst>
   <p:sldSz cx="12192000" cy="6858000"/>
   <p:notesSz cx="6858000" cy="9144000"/>
@@ -129,6 +134,439 @@
 </p:presentation>
 </file>
 
+<file path=ppt/notesMasters/notesMaster1.xml><?xml version="1.0" encoding="utf-8"?>
+<p:notesMaster xmlns:a="http://schemas.openxmlformats.org/drawingml/2006/main" xmlns:r="http://schemas.openxmlformats.org/officeDocument/2006/relationships" xmlns:p="http://schemas.openxmlformats.org/presentationml/2006/main">
+  <p:cSld>
+    <p:bg>
+      <p:bgRef idx="1001">
+        <a:schemeClr val="bg1"/>
+      </p:bgRef>
+    </p:bg>
+    <p:spTree>
+      <p:nvGrpSpPr>
+        <p:cNvPr id="1" name=""/>
+        <p:cNvGrpSpPr/>
+        <p:nvPr/>
+      </p:nvGrpSpPr>
+      <p:grpSpPr>
+        <a:xfrm>
+          <a:off x="0" y="0"/>
+          <a:ext cx="0" cy="0"/>
+          <a:chOff x="0" y="0"/>
+          <a:chExt cx="0" cy="0"/>
+        </a:xfrm>
+      </p:grpSpPr>
+      <p:sp>
+        <p:nvSpPr>
+          <p:cNvPr id="2" name="Header Placeholder 1"/>
+          <p:cNvSpPr>
+            <a:spLocks noGrp="1"/>
+          </p:cNvSpPr>
+          <p:nvPr>
+            <p:ph type="hdr" sz="quarter"/>
+          </p:nvPr>
+        </p:nvSpPr>
+        <p:spPr>
+          <a:xfrm>
+            <a:off x="0" y="0"/>
+            <a:ext cx="2971800" cy="458788"/>
+          </a:xfrm>
+          <a:prstGeom prst="rect">
+            <a:avLst/>
+          </a:prstGeom>
+        </p:spPr>
+        <p:txBody>
+          <a:bodyPr vert="horz" lIns="91440" tIns="45720" rIns="91440" bIns="45720" rtlCol="0"/>
+          <a:lstStyle>
+            <a:lvl1pPr algn="l">
+              <a:defRPr sz="1200"/>
+            </a:lvl1pPr>
+          </a:lstStyle>
+          <a:p>
+            <a:endParaRPr lang="en-US"/>
+          </a:p>
+        </p:txBody>
+      </p:sp>
+      <p:sp>
+        <p:nvSpPr>
+          <p:cNvPr id="3" name="Date Placeholder 2"/>
+          <p:cNvSpPr>
+            <a:spLocks noGrp="1"/>
+          </p:cNvSpPr>
+          <p:nvPr>
+            <p:ph type="dt" idx="1"/>
+          </p:nvPr>
+        </p:nvSpPr>
+        <p:spPr>
+          <a:xfrm>
+            <a:off x="3884613" y="0"/>
+            <a:ext cx="2971800" cy="458788"/>
+          </a:xfrm>
+          <a:prstGeom prst="rect">
+            <a:avLst/>
+          </a:prstGeom>
+        </p:spPr>
+        <p:txBody>
+          <a:bodyPr vert="horz" lIns="91440" tIns="45720" rIns="91440" bIns="45720" rtlCol="0"/>
+          <a:lstStyle>
+            <a:lvl1pPr algn="r">
+              <a:defRPr sz="1200"/>
+            </a:lvl1pPr>
+          </a:lstStyle>
+          <a:p>
+            <a:fld id="{BDEE2377-3DBA-374A-A524-04C0678CA0C0}" type="datetimeFigureOut">
+              <a:rPr lang="en-US" smtClean="0"/>
+              <a:t>1/29/24</a:t>
+            </a:fld>
+            <a:endParaRPr lang="en-US"/>
+          </a:p>
+        </p:txBody>
+      </p:sp>
+      <p:sp>
+        <p:nvSpPr>
+          <p:cNvPr id="4" name="Slide Image Placeholder 3"/>
+          <p:cNvSpPr>
+            <a:spLocks noGrp="1" noRot="1" noChangeAspect="1"/>
+          </p:cNvSpPr>
+          <p:nvPr>
+            <p:ph type="sldImg" idx="2"/>
+          </p:nvPr>
+        </p:nvSpPr>
+        <p:spPr>
+          <a:xfrm>
+            <a:off x="685800" y="1143000"/>
+            <a:ext cx="5486400" cy="3086100"/>
+          </a:xfrm>
+          <a:prstGeom prst="rect">
+            <a:avLst/>
+          </a:prstGeom>
+          <a:noFill/>
+          <a:ln w="12700">
+            <a:solidFill>
+              <a:prstClr val="black"/>
+            </a:solidFill>
+          </a:ln>
+        </p:spPr>
+        <p:txBody>
+          <a:bodyPr vert="horz" lIns="91440" tIns="45720" rIns="91440" bIns="45720" rtlCol="0" anchor="ctr"/>
+          <a:lstStyle/>
+          <a:p>
+            <a:endParaRPr lang="en-US"/>
+          </a:p>
+        </p:txBody>
+      </p:sp>
+      <p:sp>
+        <p:nvSpPr>
+          <p:cNvPr id="5" name="Notes Placeholder 4"/>
+          <p:cNvSpPr>
+            <a:spLocks noGrp="1"/>
+          </p:cNvSpPr>
+          <p:nvPr>
+            <p:ph type="body" sz="quarter" idx="3"/>
+          </p:nvPr>
+        </p:nvSpPr>
+        <p:spPr>
+          <a:xfrm>
+            <a:off x="685800" y="4400550"/>
+            <a:ext cx="5486400" cy="3600450"/>
+          </a:xfrm>
+          <a:prstGeom prst="rect">
+            <a:avLst/>
+          </a:prstGeom>
+        </p:spPr>
+        <p:txBody>
+          <a:bodyPr vert="horz" lIns="91440" tIns="45720" rIns="91440" bIns="45720" rtlCol="0"/>
+          <a:lstStyle/>
+          <a:p>
+            <a:pPr lvl="0"/>
+            <a:r>
+              <a:rPr lang="en-US"/>
+              <a:t>Click to edit Master text styles</a:t>
+            </a:r>
+          </a:p>
+          <a:p>
+            <a:pPr lvl="1"/>
+            <a:r>
+              <a:rPr lang="en-US"/>
+              <a:t>Second level</a:t>
+            </a:r>
+          </a:p>
+          <a:p>
+            <a:pPr lvl="2"/>
+            <a:r>
+              <a:rPr lang="en-US"/>
+              <a:t>Third level</a:t>
+            </a:r>
+          </a:p>
+          <a:p>
+            <a:pPr lvl="3"/>
+            <a:r>
+              <a:rPr lang="en-US"/>
+              <a:t>Fourth level</a:t>
+            </a:r>
+          </a:p>
+          <a:p>
+            <a:pPr lvl="4"/>
+            <a:r>
+              <a:rPr lang="en-US"/>
+              <a:t>Fifth level</a:t>
+            </a:r>
+          </a:p>
+        </p:txBody>
+      </p:sp>
+      <p:sp>
+        <p:nvSpPr>
+          <p:cNvPr id="6" name="Footer Placeholder 5"/>
+          <p:cNvSpPr>
+            <a:spLocks noGrp="1"/>
+          </p:cNvSpPr>
+          <p:nvPr>
+            <p:ph type="ftr" sz="quarter" idx="4"/>
+          </p:nvPr>
+        </p:nvSpPr>
+        <p:spPr>
+          <a:xfrm>
+            <a:off x="0" y="8685213"/>
+            <a:ext cx="2971800" cy="458787"/>
+          </a:xfrm>
+          <a:prstGeom prst="rect">
+            <a:avLst/>
+          </a:prstGeom>
+        </p:spPr>
+        <p:txBody>
+          <a:bodyPr vert="horz" lIns="91440" tIns="45720" rIns="91440" bIns="45720" rtlCol="0" anchor="b"/>
+          <a:lstStyle>
+            <a:lvl1pPr algn="l">
+              <a:defRPr sz="1200"/>
+            </a:lvl1pPr>
+          </a:lstStyle>
+          <a:p>
+            <a:endParaRPr lang="en-US"/>
+          </a:p>
+        </p:txBody>
+      </p:sp>
+      <p:sp>
+        <p:nvSpPr>
+          <p:cNvPr id="7" name="Slide Number Placeholder 6"/>
+          <p:cNvSpPr>
+            <a:spLocks noGrp="1"/>
+          </p:cNvSpPr>
+          <p:nvPr>
+            <p:ph type="sldNum" sz="quarter" idx="5"/>
+          </p:nvPr>
+        </p:nvSpPr>
+        <p:spPr>
+          <a:xfrm>
+            <a:off x="3884613" y="8685213"/>
+            <a:ext cx="2971800" cy="458787"/>
+          </a:xfrm>
+          <a:prstGeom prst="rect">
+            <a:avLst/>
+          </a:prstGeom>
+        </p:spPr>
+        <p:txBody>
+          <a:bodyPr vert="horz" lIns="91440" tIns="45720" rIns="91440" bIns="45720" rtlCol="0" anchor="b"/>
+          <a:lstStyle>
+            <a:lvl1pPr algn="r">
+              <a:defRPr sz="1200"/>
+            </a:lvl1pPr>
+          </a:lstStyle>
+          <a:p>
+            <a:fld id="{75EDB367-7F98-D348-A87E-6855B8BF4B11}" type="slidenum">
+              <a:rPr lang="en-US" smtClean="0"/>
+              <a:t>‹#›</a:t>
+            </a:fld>
+            <a:endParaRPr lang="en-US"/>
+          </a:p>
+        </p:txBody>
+      </p:sp>
+    </p:spTree>
+    <p:extLst>
+      <p:ext uri="{BB962C8B-B14F-4D97-AF65-F5344CB8AC3E}">
+        <p14:creationId xmlns:p14="http://schemas.microsoft.com/office/powerpoint/2010/main" val="2196928065"/>
+      </p:ext>
+    </p:extLst>
+  </p:cSld>
+  <p:clrMap bg1="lt1" tx1="dk1" bg2="lt2" tx2="dk2" accent1="accent1" accent2="accent2" accent3="accent3" accent4="accent4" accent5="accent5" accent6="accent6" hlink="hlink" folHlink="folHlink"/>
+  <p:notesStyle>
+    <a:lvl1pPr marL="0" algn="l" defTabSz="914400" rtl="0" eaLnBrk="1" latinLnBrk="0" hangingPunct="1">
+      <a:defRPr sz="1200" kern="1200">
+        <a:solidFill>
+          <a:schemeClr val="tx1"/>
+        </a:solidFill>
+        <a:latin typeface="+mn-lt"/>
+        <a:ea typeface="+mn-ea"/>
+        <a:cs typeface="+mn-cs"/>
+      </a:defRPr>
+    </a:lvl1pPr>
+    <a:lvl2pPr marL="457200" algn="l" defTabSz="914400" rtl="0" eaLnBrk="1" latinLnBrk="0" hangingPunct="1">
+      <a:defRPr sz="1200" kern="1200">
+        <a:solidFill>
+          <a:schemeClr val="tx1"/>
+        </a:solidFill>
+        <a:latin typeface="+mn-lt"/>
+        <a:ea typeface="+mn-ea"/>
+        <a:cs typeface="+mn-cs"/>
+      </a:defRPr>
+    </a:lvl2pPr>
+    <a:lvl3pPr marL="914400" algn="l" defTabSz="914400" rtl="0" eaLnBrk="1" latinLnBrk="0" hangingPunct="1">
+      <a:defRPr sz="1200" kern="1200">
+        <a:solidFill>
+          <a:schemeClr val="tx1"/>
+        </a:solidFill>
+        <a:latin typeface="+mn-lt"/>
+        <a:ea typeface="+mn-ea"/>
+        <a:cs typeface="+mn-cs"/>
+      </a:defRPr>
+    </a:lvl3pPr>
+    <a:lvl4pPr marL="1371600" algn="l" defTabSz="914400" rtl="0" eaLnBrk="1" latinLnBrk="0" hangingPunct="1">
+      <a:defRPr sz="1200" kern="1200">
+        <a:solidFill>
+          <a:schemeClr val="tx1"/>
+        </a:solidFill>
+        <a:latin typeface="+mn-lt"/>
+        <a:ea typeface="+mn-ea"/>
+        <a:cs typeface="+mn-cs"/>
+      </a:defRPr>
+    </a:lvl4pPr>
+    <a:lvl5pPr marL="1828800" algn="l" defTabSz="914400" rtl="0" eaLnBrk="1" latinLnBrk="0" hangingPunct="1">
+      <a:defRPr sz="1200" kern="1200">
+        <a:solidFill>
+          <a:schemeClr val="tx1"/>
+        </a:solidFill>
+        <a:latin typeface="+mn-lt"/>
+        <a:ea typeface="+mn-ea"/>
+        <a:cs typeface="+mn-cs"/>
+      </a:defRPr>
+    </a:lvl5pPr>
+    <a:lvl6pPr marL="2286000" algn="l" defTabSz="914400" rtl="0" eaLnBrk="1" latinLnBrk="0" hangingPunct="1">
+      <a:defRPr sz="1200" kern="1200">
+        <a:solidFill>
+          <a:schemeClr val="tx1"/>
+        </a:solidFill>
+        <a:latin typeface="+mn-lt"/>
+        <a:ea typeface="+mn-ea"/>
+        <a:cs typeface="+mn-cs"/>
+      </a:defRPr>
+    </a:lvl6pPr>
+    <a:lvl7pPr marL="2743200" algn="l" defTabSz="914400" rtl="0" eaLnBrk="1" latinLnBrk="0" hangingPunct="1">
+      <a:defRPr sz="1200" kern="1200">
+        <a:solidFill>
+          <a:schemeClr val="tx1"/>
+        </a:solidFill>
+        <a:latin typeface="+mn-lt"/>
+        <a:ea typeface="+mn-ea"/>
+        <a:cs typeface="+mn-cs"/>
+      </a:defRPr>
+    </a:lvl7pPr>
+    <a:lvl8pPr marL="3200400" algn="l" defTabSz="914400" rtl="0" eaLnBrk="1" latinLnBrk="0" hangingPunct="1">
+      <a:defRPr sz="1200" kern="1200">
+        <a:solidFill>
+          <a:schemeClr val="tx1"/>
+        </a:solidFill>
+        <a:latin typeface="+mn-lt"/>
+        <a:ea typeface="+mn-ea"/>
+        <a:cs typeface="+mn-cs"/>
+      </a:defRPr>
+    </a:lvl8pPr>
+    <a:lvl9pPr marL="3657600" algn="l" defTabSz="914400" rtl="0" eaLnBrk="1" latinLnBrk="0" hangingPunct="1">
+      <a:defRPr sz="1200" kern="1200">
+        <a:solidFill>
+          <a:schemeClr val="tx1"/>
+        </a:solidFill>
+        <a:latin typeface="+mn-lt"/>
+        <a:ea typeface="+mn-ea"/>
+        <a:cs typeface="+mn-cs"/>
+      </a:defRPr>
+    </a:lvl9pPr>
+  </p:notesStyle>
+</p:notesMaster>
+</file>
+
+<file path=ppt/notesSlides/notesSlide1.xml><?xml version="1.0" encoding="utf-8"?>
+<p:notes xmlns:a="http://schemas.openxmlformats.org/drawingml/2006/main" xmlns:r="http://schemas.openxmlformats.org/officeDocument/2006/relationships" xmlns:p="http://schemas.openxmlformats.org/presentationml/2006/main">
+  <p:cSld>
+    <p:spTree>
+      <p:nvGrpSpPr>
+        <p:cNvPr id="1" name=""/>
+        <p:cNvGrpSpPr/>
+        <p:nvPr/>
+      </p:nvGrpSpPr>
+      <p:grpSpPr>
+        <a:xfrm>
+          <a:off x="0" y="0"/>
+          <a:ext cx="0" cy="0"/>
+          <a:chOff x="0" y="0"/>
+          <a:chExt cx="0" cy="0"/>
+        </a:xfrm>
+      </p:grpSpPr>
+      <p:sp>
+        <p:nvSpPr>
+          <p:cNvPr id="2" name="Slide Image Placeholder 1"/>
+          <p:cNvSpPr>
+            <a:spLocks noGrp="1" noRot="1" noChangeAspect="1"/>
+          </p:cNvSpPr>
+          <p:nvPr>
+            <p:ph type="sldImg"/>
+          </p:nvPr>
+        </p:nvSpPr>
+        <p:spPr/>
+      </p:sp>
+      <p:sp>
+        <p:nvSpPr>
+          <p:cNvPr id="3" name="Notes Placeholder 2"/>
+          <p:cNvSpPr>
+            <a:spLocks noGrp="1"/>
+          </p:cNvSpPr>
+          <p:nvPr>
+            <p:ph type="body" idx="1"/>
+          </p:nvPr>
+        </p:nvSpPr>
+        <p:spPr/>
+        <p:txBody>
+          <a:bodyPr/>
+          <a:lstStyle/>
+          <a:p>
+            <a:endParaRPr lang="en-US" dirty="0"/>
+          </a:p>
+        </p:txBody>
+      </p:sp>
+      <p:sp>
+        <p:nvSpPr>
+          <p:cNvPr id="4" name="Slide Number Placeholder 3"/>
+          <p:cNvSpPr>
+            <a:spLocks noGrp="1"/>
+          </p:cNvSpPr>
+          <p:nvPr>
+            <p:ph type="sldNum" sz="quarter" idx="5"/>
+          </p:nvPr>
+        </p:nvSpPr>
+        <p:spPr/>
+        <p:txBody>
+          <a:bodyPr/>
+          <a:lstStyle/>
+          <a:p>
+            <a:fld id="{75EDB367-7F98-D348-A87E-6855B8BF4B11}" type="slidenum">
+              <a:rPr lang="en-US" smtClean="0"/>
+              <a:t>13</a:t>
+            </a:fld>
+            <a:endParaRPr lang="en-US"/>
+          </a:p>
+        </p:txBody>
+      </p:sp>
+    </p:spTree>
+    <p:extLst>
+      <p:ext uri="{BB962C8B-B14F-4D97-AF65-F5344CB8AC3E}">
+        <p14:creationId xmlns:p14="http://schemas.microsoft.com/office/powerpoint/2010/main" val="3267790145"/>
+      </p:ext>
+    </p:extLst>
+  </p:cSld>
+  <p:clrMapOvr>
+    <a:masterClrMapping/>
+  </p:clrMapOvr>
+</p:notes>
+</file>
+
 <file path=ppt/slideLayouts/slideLayout1.xml><?xml version="1.0" encoding="utf-8"?>
 <p:sldLayout xmlns:a="http://schemas.openxmlformats.org/drawingml/2006/main" xmlns:r="http://schemas.openxmlformats.org/officeDocument/2006/relationships" xmlns:p="http://schemas.openxmlformats.org/presentationml/2006/main" type="title" preserve="1">
   <p:cSld name="Title Slide">
@@ -276,7 +714,7 @@
           <a:p>
             <a:fld id="{F2B6BF67-2978-CE4D-8D5C-6E816D1CE5DA}" type="datetimeFigureOut">
               <a:rPr lang="en-US" smtClean="0"/>
-              <a:t>1/28/24</a:t>
+              <a:t>1/29/24</a:t>
             </a:fld>
             <a:endParaRPr lang="en-US"/>
           </a:p>
@@ -474,7 +912,7 @@
           <a:p>
             <a:fld id="{F2B6BF67-2978-CE4D-8D5C-6E816D1CE5DA}" type="datetimeFigureOut">
               <a:rPr lang="en-US" smtClean="0"/>
-              <a:t>1/28/24</a:t>
+              <a:t>1/29/24</a:t>
             </a:fld>
             <a:endParaRPr lang="en-US"/>
           </a:p>
@@ -682,7 +1120,7 @@
           <a:p>
             <a:fld id="{F2B6BF67-2978-CE4D-8D5C-6E816D1CE5DA}" type="datetimeFigureOut">
               <a:rPr lang="en-US" smtClean="0"/>
-              <a:t>1/28/24</a:t>
+              <a:t>1/29/24</a:t>
             </a:fld>
             <a:endParaRPr lang="en-US"/>
           </a:p>
@@ -880,7 +1318,7 @@
           <a:p>
             <a:fld id="{F2B6BF67-2978-CE4D-8D5C-6E816D1CE5DA}" type="datetimeFigureOut">
               <a:rPr lang="en-US" smtClean="0"/>
-              <a:t>1/28/24</a:t>
+              <a:t>1/29/24</a:t>
             </a:fld>
             <a:endParaRPr lang="en-US"/>
           </a:p>
@@ -1155,7 +1593,7 @@
           <a:p>
             <a:fld id="{F2B6BF67-2978-CE4D-8D5C-6E816D1CE5DA}" type="datetimeFigureOut">
               <a:rPr lang="en-US" smtClean="0"/>
-              <a:t>1/28/24</a:t>
+              <a:t>1/29/24</a:t>
             </a:fld>
             <a:endParaRPr lang="en-US"/>
           </a:p>
@@ -1420,7 +1858,7 @@
           <a:p>
             <a:fld id="{F2B6BF67-2978-CE4D-8D5C-6E816D1CE5DA}" type="datetimeFigureOut">
               <a:rPr lang="en-US" smtClean="0"/>
-              <a:t>1/28/24</a:t>
+              <a:t>1/29/24</a:t>
             </a:fld>
             <a:endParaRPr lang="en-US"/>
           </a:p>
@@ -1832,7 +2270,7 @@
           <a:p>
             <a:fld id="{F2B6BF67-2978-CE4D-8D5C-6E816D1CE5DA}" type="datetimeFigureOut">
               <a:rPr lang="en-US" smtClean="0"/>
-              <a:t>1/28/24</a:t>
+              <a:t>1/29/24</a:t>
             </a:fld>
             <a:endParaRPr lang="en-US"/>
           </a:p>
@@ -1973,7 +2411,7 @@
           <a:p>
             <a:fld id="{F2B6BF67-2978-CE4D-8D5C-6E816D1CE5DA}" type="datetimeFigureOut">
               <a:rPr lang="en-US" smtClean="0"/>
-              <a:t>1/28/24</a:t>
+              <a:t>1/29/24</a:t>
             </a:fld>
             <a:endParaRPr lang="en-US"/>
           </a:p>
@@ -2086,7 +2524,7 @@
           <a:p>
             <a:fld id="{F2B6BF67-2978-CE4D-8D5C-6E816D1CE5DA}" type="datetimeFigureOut">
               <a:rPr lang="en-US" smtClean="0"/>
-              <a:t>1/28/24</a:t>
+              <a:t>1/29/24</a:t>
             </a:fld>
             <a:endParaRPr lang="en-US"/>
           </a:p>
@@ -2397,7 +2835,7 @@
           <a:p>
             <a:fld id="{F2B6BF67-2978-CE4D-8D5C-6E816D1CE5DA}" type="datetimeFigureOut">
               <a:rPr lang="en-US" smtClean="0"/>
-              <a:t>1/28/24</a:t>
+              <a:t>1/29/24</a:t>
             </a:fld>
             <a:endParaRPr lang="en-US"/>
           </a:p>
@@ -2685,7 +3123,7 @@
           <a:p>
             <a:fld id="{F2B6BF67-2978-CE4D-8D5C-6E816D1CE5DA}" type="datetimeFigureOut">
               <a:rPr lang="en-US" smtClean="0"/>
-              <a:t>1/28/24</a:t>
+              <a:t>1/29/24</a:t>
             </a:fld>
             <a:endParaRPr lang="en-US"/>
           </a:p>
@@ -2926,7 +3364,7 @@
           <a:p>
             <a:fld id="{F2B6BF67-2978-CE4D-8D5C-6E816D1CE5DA}" type="datetimeFigureOut">
               <a:rPr lang="en-US" smtClean="0"/>
-              <a:t>1/28/24</a:t>
+              <a:t>1/29/24</a:t>
             </a:fld>
             <a:endParaRPr lang="en-US"/>
           </a:p>
@@ -3910,14 +4348,14 @@
           <p:nvPr>
             <p:extLst>
               <p:ext uri="{D42A27DB-BD31-4B8C-83A1-F6EECF244321}">
-                <p14:modId xmlns:p14="http://schemas.microsoft.com/office/powerpoint/2010/main" val="3716964350"/>
+                <p14:modId xmlns:p14="http://schemas.microsoft.com/office/powerpoint/2010/main" val="2814815693"/>
               </p:ext>
             </p:extLst>
           </p:nvPr>
         </p:nvGraphicFramePr>
         <p:xfrm>
           <a:off x="348342" y="1694803"/>
-          <a:ext cx="11408226" cy="3138166"/>
+          <a:ext cx="11408226" cy="3153406"/>
         </p:xfrm>
         <a:graphic>
           <a:graphicData uri="http://schemas.openxmlformats.org/drawingml/2006/table">
@@ -3948,7 +4386,7 @@
                     <a:lstStyle/>
                     <a:p>
                       <a:r>
-                        <a:rPr lang="en-US" sz="1000" b="0">
+                        <a:rPr lang="en-US" sz="1100" b="0">
                           <a:solidFill>
                             <a:schemeClr val="bg1"/>
                           </a:solidFill>
@@ -3956,7 +4394,7 @@
                         </a:rPr>
                         <a:t>Step</a:t>
                       </a:r>
-                      <a:endParaRPr lang="en-US" sz="1000" b="0" dirty="0">
+                      <a:endParaRPr lang="en-US" sz="1100" b="0" dirty="0">
                         <a:solidFill>
                           <a:schemeClr val="bg1"/>
                         </a:solidFill>
@@ -3985,7 +4423,7 @@
                     <a:lstStyle/>
                     <a:p>
                       <a:r>
-                        <a:rPr lang="en-US" sz="1000" b="0" dirty="0">
+                        <a:rPr lang="en-US" sz="1100" b="0" dirty="0">
                           <a:solidFill>
                             <a:schemeClr val="bg1"/>
                           </a:solidFill>
@@ -4747,6 +5185,3436 @@
   <p:cSld>
     <p:spTree>
       <p:nvGrpSpPr>
+        <p:cNvPr id="1" name="">
+          <a:extLst>
+            <a:ext uri="{FF2B5EF4-FFF2-40B4-BE49-F238E27FC236}">
+              <a16:creationId xmlns:a16="http://schemas.microsoft.com/office/drawing/2014/main" id="{50659DE6-2381-CD96-FB51-89760579CB00}"/>
+            </a:ext>
+          </a:extLst>
+        </p:cNvPr>
+        <p:cNvGrpSpPr/>
+        <p:nvPr/>
+      </p:nvGrpSpPr>
+      <p:grpSpPr>
+        <a:xfrm>
+          <a:off x="0" y="0"/>
+          <a:ext cx="0" cy="0"/>
+          <a:chOff x="0" y="0"/>
+          <a:chExt cx="0" cy="0"/>
+        </a:xfrm>
+      </p:grpSpPr>
+      <p:sp>
+        <p:nvSpPr>
+          <p:cNvPr id="4" name="Rectangle 3">
+            <a:extLst>
+              <a:ext uri="{FF2B5EF4-FFF2-40B4-BE49-F238E27FC236}">
+                <a16:creationId xmlns:a16="http://schemas.microsoft.com/office/drawing/2014/main" id="{125A25C7-6EF9-F972-412B-8FAF69CE1107}"/>
+              </a:ext>
+            </a:extLst>
+          </p:cNvPr>
+          <p:cNvSpPr/>
+          <p:nvPr/>
+        </p:nvSpPr>
+        <p:spPr>
+          <a:xfrm>
+            <a:off x="233183" y="304280"/>
+            <a:ext cx="11523387" cy="618829"/>
+          </a:xfrm>
+          <a:prstGeom prst="rect">
+            <a:avLst/>
+          </a:prstGeom>
+          <a:noFill/>
+          <a:ln>
+            <a:noFill/>
+          </a:ln>
+        </p:spPr>
+        <p:style>
+          <a:lnRef idx="2">
+            <a:schemeClr val="accent1">
+              <a:shade val="15000"/>
+            </a:schemeClr>
+          </a:lnRef>
+          <a:fillRef idx="1">
+            <a:schemeClr val="accent1"/>
+          </a:fillRef>
+          <a:effectRef idx="0">
+            <a:schemeClr val="accent1"/>
+          </a:effectRef>
+          <a:fontRef idx="minor">
+            <a:schemeClr val="lt1"/>
+          </a:fontRef>
+        </p:style>
+        <p:txBody>
+          <a:bodyPr rtlCol="0" anchor="ctr"/>
+          <a:lstStyle/>
+          <a:p>
+            <a:r>
+              <a:rPr lang="en-US" sz="3600" dirty="0">
+                <a:solidFill>
+                  <a:srgbClr val="0A2636"/>
+                </a:solidFill>
+                <a:latin typeface="Spectral" panose="02020502060000000000" pitchFamily="18" charset="77"/>
+              </a:rPr>
+              <a:t>Results – Approach #1</a:t>
+            </a:r>
+          </a:p>
+        </p:txBody>
+      </p:sp>
+      <p:pic>
+        <p:nvPicPr>
+          <p:cNvPr id="6" name="Picture 2" descr="Validere Acquires Regulatory Reporting Platform Clairifi - Validere">
+            <a:extLst>
+              <a:ext uri="{FF2B5EF4-FFF2-40B4-BE49-F238E27FC236}">
+                <a16:creationId xmlns:a16="http://schemas.microsoft.com/office/drawing/2014/main" id="{57CC82FD-E075-58DF-F79E-37646A3951DA}"/>
+              </a:ext>
+            </a:extLst>
+          </p:cNvPr>
+          <p:cNvPicPr>
+            <a:picLocks noChangeAspect="1" noChangeArrowheads="1"/>
+          </p:cNvPicPr>
+          <p:nvPr/>
+        </p:nvPicPr>
+        <p:blipFill>
+          <a:blip r:embed="rId2">
+            <a:extLst>
+              <a:ext uri="{28A0092B-C50C-407E-A947-70E740481C1C}">
+                <a14:useLocalDpi xmlns:a14="http://schemas.microsoft.com/office/drawing/2010/main" val="0"/>
+              </a:ext>
+            </a:extLst>
+          </a:blip>
+          <a:srcRect/>
+          <a:stretch>
+            <a:fillRect/>
+          </a:stretch>
+        </p:blipFill>
+        <p:spPr bwMode="auto">
+          <a:xfrm>
+            <a:off x="9588136" y="6313712"/>
+            <a:ext cx="2385518" cy="248400"/>
+          </a:xfrm>
+          <a:prstGeom prst="rect">
+            <a:avLst/>
+          </a:prstGeom>
+          <a:noFill/>
+          <a:extLst>
+            <a:ext uri="{909E8E84-426E-40DD-AFC4-6F175D3DCCD1}">
+              <a14:hiddenFill xmlns:a14="http://schemas.microsoft.com/office/drawing/2010/main">
+                <a:solidFill>
+                  <a:srgbClr val="FFFFFF"/>
+                </a:solidFill>
+              </a14:hiddenFill>
+            </a:ext>
+          </a:extLst>
+        </p:spPr>
+      </p:pic>
+      <p:sp>
+        <p:nvSpPr>
+          <p:cNvPr id="3" name="TextBox 2">
+            <a:extLst>
+              <a:ext uri="{FF2B5EF4-FFF2-40B4-BE49-F238E27FC236}">
+                <a16:creationId xmlns:a16="http://schemas.microsoft.com/office/drawing/2014/main" id="{81F6B205-12B8-B046-4F9E-AA9C4216C450}"/>
+              </a:ext>
+            </a:extLst>
+          </p:cNvPr>
+          <p:cNvSpPr txBox="1"/>
+          <p:nvPr/>
+        </p:nvSpPr>
+        <p:spPr>
+          <a:xfrm>
+            <a:off x="348342" y="1047347"/>
+            <a:ext cx="11408227" cy="307777"/>
+          </a:xfrm>
+          <a:prstGeom prst="rect">
+            <a:avLst/>
+          </a:prstGeom>
+          <a:noFill/>
+        </p:spPr>
+        <p:txBody>
+          <a:bodyPr wrap="square" rtlCol="0">
+            <a:spAutoFit/>
+          </a:bodyPr>
+          <a:lstStyle/>
+          <a:p>
+            <a:r>
+              <a:rPr lang="en-US" sz="1400" dirty="0">
+                <a:latin typeface="IBM Plex Sans Condensed" panose="020B0506050203000203" pitchFamily="34" charset="77"/>
+              </a:rPr>
+              <a:t>Four machine learning models were run on the cleaned dataset from Approach #1. An interpretation of their results is given below. </a:t>
+            </a:r>
+          </a:p>
+        </p:txBody>
+      </p:sp>
+      <p:cxnSp>
+        <p:nvCxnSpPr>
+          <p:cNvPr id="2" name="Straight Connector 1">
+            <a:extLst>
+              <a:ext uri="{FF2B5EF4-FFF2-40B4-BE49-F238E27FC236}">
+                <a16:creationId xmlns:a16="http://schemas.microsoft.com/office/drawing/2014/main" id="{041FF926-5D84-7344-3BDD-09EDEE850A5E}"/>
+              </a:ext>
+            </a:extLst>
+          </p:cNvPr>
+          <p:cNvCxnSpPr>
+            <a:cxnSpLocks/>
+          </p:cNvCxnSpPr>
+          <p:nvPr/>
+        </p:nvCxnSpPr>
+        <p:spPr>
+          <a:xfrm>
+            <a:off x="-78377" y="923109"/>
+            <a:ext cx="11834947" cy="0"/>
+          </a:xfrm>
+          <a:prstGeom prst="line">
+            <a:avLst/>
+          </a:prstGeom>
+          <a:ln w="12700">
+            <a:solidFill>
+              <a:srgbClr val="0A2636"/>
+            </a:solidFill>
+          </a:ln>
+        </p:spPr>
+        <p:style>
+          <a:lnRef idx="1">
+            <a:schemeClr val="accent1"/>
+          </a:lnRef>
+          <a:fillRef idx="0">
+            <a:schemeClr val="accent1"/>
+          </a:fillRef>
+          <a:effectRef idx="0">
+            <a:schemeClr val="accent1"/>
+          </a:effectRef>
+          <a:fontRef idx="minor">
+            <a:schemeClr val="tx1"/>
+          </a:fontRef>
+        </p:style>
+      </p:cxnSp>
+      <p:sp>
+        <p:nvSpPr>
+          <p:cNvPr id="7" name="Rectangle 6">
+            <a:extLst>
+              <a:ext uri="{FF2B5EF4-FFF2-40B4-BE49-F238E27FC236}">
+                <a16:creationId xmlns:a16="http://schemas.microsoft.com/office/drawing/2014/main" id="{483DEF61-9B59-1DE8-5372-5890CA64FB75}"/>
+              </a:ext>
+            </a:extLst>
+          </p:cNvPr>
+          <p:cNvSpPr/>
+          <p:nvPr/>
+        </p:nvSpPr>
+        <p:spPr>
+          <a:xfrm>
+            <a:off x="431073" y="1578454"/>
+            <a:ext cx="5408015" cy="274480"/>
+          </a:xfrm>
+          <a:prstGeom prst="rect">
+            <a:avLst/>
+          </a:prstGeom>
+          <a:solidFill>
+            <a:srgbClr val="213442"/>
+          </a:solidFill>
+        </p:spPr>
+        <p:style>
+          <a:lnRef idx="2">
+            <a:schemeClr val="accent1">
+              <a:shade val="15000"/>
+            </a:schemeClr>
+          </a:lnRef>
+          <a:fillRef idx="1">
+            <a:schemeClr val="accent1"/>
+          </a:fillRef>
+          <a:effectRef idx="0">
+            <a:schemeClr val="accent1"/>
+          </a:effectRef>
+          <a:fontRef idx="minor">
+            <a:schemeClr val="lt1"/>
+          </a:fontRef>
+        </p:style>
+        <p:txBody>
+          <a:bodyPr rtlCol="0" anchor="ctr"/>
+          <a:lstStyle/>
+          <a:p>
+            <a:r>
+              <a:rPr lang="en-US" sz="1400" dirty="0">
+                <a:solidFill>
+                  <a:schemeClr val="bg1"/>
+                </a:solidFill>
+                <a:latin typeface="Spectral" panose="02020502060000000000" pitchFamily="18" charset="77"/>
+              </a:rPr>
+              <a:t>Random Forest / Decision Tree</a:t>
+            </a:r>
+          </a:p>
+        </p:txBody>
+      </p:sp>
+      <p:sp>
+        <p:nvSpPr>
+          <p:cNvPr id="8" name="Rectangle 7">
+            <a:extLst>
+              <a:ext uri="{FF2B5EF4-FFF2-40B4-BE49-F238E27FC236}">
+                <a16:creationId xmlns:a16="http://schemas.microsoft.com/office/drawing/2014/main" id="{FC03CF19-0200-03B4-0561-4E66A2C563C3}"/>
+              </a:ext>
+            </a:extLst>
+          </p:cNvPr>
+          <p:cNvSpPr/>
+          <p:nvPr/>
+        </p:nvSpPr>
+        <p:spPr>
+          <a:xfrm>
+            <a:off x="5839088" y="1578454"/>
+            <a:ext cx="5917480" cy="274480"/>
+          </a:xfrm>
+          <a:prstGeom prst="rect">
+            <a:avLst/>
+          </a:prstGeom>
+          <a:solidFill>
+            <a:srgbClr val="213442"/>
+          </a:solidFill>
+        </p:spPr>
+        <p:style>
+          <a:lnRef idx="2">
+            <a:schemeClr val="accent1">
+              <a:shade val="15000"/>
+            </a:schemeClr>
+          </a:lnRef>
+          <a:fillRef idx="1">
+            <a:schemeClr val="accent1"/>
+          </a:fillRef>
+          <a:effectRef idx="0">
+            <a:schemeClr val="accent1"/>
+          </a:effectRef>
+          <a:fontRef idx="minor">
+            <a:schemeClr val="lt1"/>
+          </a:fontRef>
+        </p:style>
+        <p:txBody>
+          <a:bodyPr rtlCol="0" anchor="ctr"/>
+          <a:lstStyle/>
+          <a:p>
+            <a:r>
+              <a:rPr lang="en-US" sz="1400" dirty="0">
+                <a:solidFill>
+                  <a:schemeClr val="bg1"/>
+                </a:solidFill>
+                <a:latin typeface="Spectral" panose="02020502060000000000" pitchFamily="18" charset="77"/>
+              </a:rPr>
+              <a:t>Logistic Regression / SVM</a:t>
+            </a:r>
+          </a:p>
+        </p:txBody>
+      </p:sp>
+      <p:graphicFrame>
+        <p:nvGraphicFramePr>
+          <p:cNvPr id="10" name="Table 9">
+            <a:extLst>
+              <a:ext uri="{FF2B5EF4-FFF2-40B4-BE49-F238E27FC236}">
+                <a16:creationId xmlns:a16="http://schemas.microsoft.com/office/drawing/2014/main" id="{9CE42660-7314-BBAE-768C-C7A3525DD0F0}"/>
+              </a:ext>
+            </a:extLst>
+          </p:cNvPr>
+          <p:cNvGraphicFramePr>
+            <a:graphicFrameLocks noGrp="1"/>
+          </p:cNvGraphicFramePr>
+          <p:nvPr>
+            <p:extLst>
+              <p:ext uri="{D42A27DB-BD31-4B8C-83A1-F6EECF244321}">
+                <p14:modId xmlns:p14="http://schemas.microsoft.com/office/powerpoint/2010/main" val="3291669908"/>
+              </p:ext>
+            </p:extLst>
+          </p:nvPr>
+        </p:nvGraphicFramePr>
+        <p:xfrm>
+          <a:off x="174159" y="2070164"/>
+          <a:ext cx="2960915" cy="975360"/>
+        </p:xfrm>
+        <a:graphic>
+          <a:graphicData uri="http://schemas.openxmlformats.org/drawingml/2006/table">
+            <a:tbl>
+              <a:tblPr firstRow="1" bandRow="1">
+                <a:tableStyleId>{5C22544A-7EE6-4342-B048-85BDC9FD1C3A}</a:tableStyleId>
+              </a:tblPr>
+              <a:tblGrid>
+                <a:gridCol w="290945">
+                  <a:extLst>
+                    <a:ext uri="{9D8B030D-6E8A-4147-A177-3AD203B41FA5}">
+                      <a16:colId xmlns:a16="http://schemas.microsoft.com/office/drawing/2014/main" val="2512838458"/>
+                    </a:ext>
+                  </a:extLst>
+                </a:gridCol>
+                <a:gridCol w="971798">
+                  <a:extLst>
+                    <a:ext uri="{9D8B030D-6E8A-4147-A177-3AD203B41FA5}">
+                      <a16:colId xmlns:a16="http://schemas.microsoft.com/office/drawing/2014/main" val="1161587960"/>
+                    </a:ext>
+                  </a:extLst>
+                </a:gridCol>
+                <a:gridCol w="992777">
+                  <a:extLst>
+                    <a:ext uri="{9D8B030D-6E8A-4147-A177-3AD203B41FA5}">
+                      <a16:colId xmlns:a16="http://schemas.microsoft.com/office/drawing/2014/main" val="2071456267"/>
+                    </a:ext>
+                  </a:extLst>
+                </a:gridCol>
+                <a:gridCol w="705395">
+                  <a:extLst>
+                    <a:ext uri="{9D8B030D-6E8A-4147-A177-3AD203B41FA5}">
+                      <a16:colId xmlns:a16="http://schemas.microsoft.com/office/drawing/2014/main" val="476015398"/>
+                    </a:ext>
+                  </a:extLst>
+                </a:gridCol>
+              </a:tblGrid>
+              <a:tr h="156818">
+                <a:tc>
+                  <a:txBody>
+                    <a:bodyPr/>
+                    <a:lstStyle/>
+                    <a:p>
+                      <a:pPr algn="ctr"/>
+                      <a:endParaRPr lang="en-US" sz="1000" b="0" dirty="0"/>
+                    </a:p>
+                  </a:txBody>
+                  <a:tcPr anchor="ctr">
+                    <a:lnL w="12700" cmpd="sng">
+                      <a:noFill/>
+                    </a:lnL>
+                    <a:lnR w="12700" cmpd="sng">
+                      <a:noFill/>
+                    </a:lnR>
+                    <a:lnT w="12700" cmpd="sng">
+                      <a:noFill/>
+                    </a:lnT>
+                    <a:lnB w="38100" cmpd="sng">
+                      <a:noFill/>
+                    </a:lnB>
+                    <a:lnTlToBr w="12700" cmpd="sng">
+                      <a:noFill/>
+                      <a:prstDash val="solid"/>
+                    </a:lnTlToBr>
+                    <a:lnBlToTr w="12700" cmpd="sng">
+                      <a:noFill/>
+                      <a:prstDash val="solid"/>
+                    </a:lnBlToTr>
+                    <a:noFill/>
+                  </a:tcPr>
+                </a:tc>
+                <a:tc>
+                  <a:txBody>
+                    <a:bodyPr/>
+                    <a:lstStyle/>
+                    <a:p>
+                      <a:pPr algn="ctr"/>
+                      <a:endParaRPr lang="en-US" sz="1000" b="0" dirty="0"/>
+                    </a:p>
+                  </a:txBody>
+                  <a:tcPr anchor="ctr">
+                    <a:lnL w="12700" cmpd="sng">
+                      <a:noFill/>
+                    </a:lnL>
+                    <a:lnR w="12700" cmpd="sng">
+                      <a:noFill/>
+                    </a:lnR>
+                    <a:lnT w="12700" cmpd="sng">
+                      <a:noFill/>
+                    </a:lnT>
+                    <a:lnB w="38100" cmpd="sng">
+                      <a:noFill/>
+                    </a:lnB>
+                    <a:lnTlToBr w="12700" cmpd="sng">
+                      <a:noFill/>
+                      <a:prstDash val="solid"/>
+                    </a:lnTlToBr>
+                    <a:lnBlToTr w="12700" cmpd="sng">
+                      <a:noFill/>
+                      <a:prstDash val="solid"/>
+                    </a:lnBlToTr>
+                    <a:noFill/>
+                  </a:tcPr>
+                </a:tc>
+                <a:tc gridSpan="2">
+                  <a:txBody>
+                    <a:bodyPr/>
+                    <a:lstStyle/>
+                    <a:p>
+                      <a:pPr algn="ctr"/>
+                      <a:r>
+                        <a:rPr lang="en-US" sz="1000" b="0" dirty="0">
+                          <a:solidFill>
+                            <a:schemeClr val="tx1"/>
+                          </a:solidFill>
+                        </a:rPr>
+                        <a:t>Predicted</a:t>
+                      </a:r>
+                    </a:p>
+                  </a:txBody>
+                  <a:tcPr anchor="ctr">
+                    <a:lnL w="12700" cmpd="sng">
+                      <a:noFill/>
+                    </a:lnL>
+                    <a:lnR w="12700" cmpd="sng">
+                      <a:noFill/>
+                    </a:lnR>
+                    <a:lnT w="12700" cmpd="sng">
+                      <a:noFill/>
+                    </a:lnT>
+                    <a:lnB w="6350" cap="flat" cmpd="sng" algn="ctr">
+                      <a:solidFill>
+                        <a:schemeClr val="tx1"/>
+                      </a:solidFill>
+                      <a:prstDash val="solid"/>
+                      <a:round/>
+                      <a:headEnd type="none" w="med" len="med"/>
+                      <a:tailEnd type="none" w="med" len="med"/>
+                    </a:lnB>
+                    <a:lnTlToBr w="12700" cmpd="sng">
+                      <a:noFill/>
+                      <a:prstDash val="solid"/>
+                    </a:lnTlToBr>
+                    <a:lnBlToTr w="12700" cmpd="sng">
+                      <a:noFill/>
+                      <a:prstDash val="solid"/>
+                    </a:lnBlToTr>
+                    <a:noFill/>
+                  </a:tcPr>
+                </a:tc>
+                <a:tc hMerge="1">
+                  <a:txBody>
+                    <a:bodyPr/>
+                    <a:lstStyle/>
+                    <a:p>
+                      <a:endParaRPr lang="en-US" dirty="0"/>
+                    </a:p>
+                  </a:txBody>
+                  <a:tcPr>
+                    <a:lnL w="12700" cmpd="sng">
+                      <a:noFill/>
+                    </a:lnL>
+                    <a:lnR w="12700" cmpd="sng">
+                      <a:noFill/>
+                    </a:lnR>
+                    <a:lnT w="12700" cmpd="sng">
+                      <a:noFill/>
+                    </a:lnT>
+                    <a:lnB w="38100" cmpd="sng">
+                      <a:noFill/>
+                    </a:lnB>
+                    <a:lnTlToBr w="12700" cmpd="sng">
+                      <a:noFill/>
+                      <a:prstDash val="solid"/>
+                    </a:lnTlToBr>
+                    <a:lnBlToTr w="12700" cmpd="sng">
+                      <a:noFill/>
+                      <a:prstDash val="solid"/>
+                    </a:lnBlToTr>
+                    <a:noFill/>
+                  </a:tcPr>
+                </a:tc>
+                <a:extLst>
+                  <a:ext uri="{0D108BD9-81ED-4DB2-BD59-A6C34878D82A}">
+                    <a16:rowId xmlns:a16="http://schemas.microsoft.com/office/drawing/2014/main" val="1537043316"/>
+                  </a:ext>
+                </a:extLst>
+              </a:tr>
+              <a:tr h="240280">
+                <a:tc>
+                  <a:txBody>
+                    <a:bodyPr/>
+                    <a:lstStyle/>
+                    <a:p>
+                      <a:pPr algn="ctr"/>
+                      <a:endParaRPr lang="en-US" sz="1000" b="0"/>
+                    </a:p>
+                  </a:txBody>
+                  <a:tcPr anchor="ctr">
+                    <a:lnL w="12700" cmpd="sng">
+                      <a:noFill/>
+                    </a:lnL>
+                    <a:lnR w="12700" cmpd="sng">
+                      <a:noFill/>
+                    </a:lnR>
+                    <a:lnT w="38100" cmpd="sng">
+                      <a:noFill/>
+                    </a:lnT>
+                    <a:lnB w="12700" cmpd="sng">
+                      <a:noFill/>
+                    </a:lnB>
+                    <a:lnTlToBr w="12700" cmpd="sng">
+                      <a:noFill/>
+                      <a:prstDash val="solid"/>
+                    </a:lnTlToBr>
+                    <a:lnBlToTr w="12700" cmpd="sng">
+                      <a:noFill/>
+                      <a:prstDash val="solid"/>
+                    </a:lnBlToTr>
+                    <a:noFill/>
+                  </a:tcPr>
+                </a:tc>
+                <a:tc>
+                  <a:txBody>
+                    <a:bodyPr/>
+                    <a:lstStyle/>
+                    <a:p>
+                      <a:pPr algn="ctr"/>
+                      <a:endParaRPr lang="en-US" sz="1000" b="0" dirty="0"/>
+                    </a:p>
+                  </a:txBody>
+                  <a:tcPr anchor="ctr">
+                    <a:lnL w="12700" cmpd="sng">
+                      <a:noFill/>
+                    </a:lnL>
+                    <a:lnR w="6350" cap="flat" cmpd="sng" algn="ctr">
+                      <a:solidFill>
+                        <a:schemeClr val="tx1"/>
+                      </a:solidFill>
+                      <a:prstDash val="solid"/>
+                      <a:round/>
+                      <a:headEnd type="none" w="med" len="med"/>
+                      <a:tailEnd type="none" w="med" len="med"/>
+                    </a:lnR>
+                    <a:lnT w="38100" cmpd="sng">
+                      <a:noFill/>
+                    </a:lnT>
+                    <a:lnB w="6350" cap="flat" cmpd="sng" algn="ctr">
+                      <a:solidFill>
+                        <a:schemeClr val="tx1"/>
+                      </a:solidFill>
+                      <a:prstDash val="solid"/>
+                      <a:round/>
+                      <a:headEnd type="none" w="med" len="med"/>
+                      <a:tailEnd type="none" w="med" len="med"/>
+                    </a:lnB>
+                    <a:lnTlToBr w="12700" cmpd="sng">
+                      <a:noFill/>
+                      <a:prstDash val="solid"/>
+                    </a:lnTlToBr>
+                    <a:lnBlToTr w="12700" cmpd="sng">
+                      <a:noFill/>
+                      <a:prstDash val="solid"/>
+                    </a:lnBlToTr>
+                    <a:noFill/>
+                  </a:tcPr>
+                </a:tc>
+                <a:tc>
+                  <a:txBody>
+                    <a:bodyPr/>
+                    <a:lstStyle/>
+                    <a:p>
+                      <a:pPr algn="ctr"/>
+                      <a:r>
+                        <a:rPr lang="en-US" sz="1000" b="0" dirty="0"/>
+                        <a:t>NOT Crude Oil</a:t>
+                      </a:r>
+                    </a:p>
+                  </a:txBody>
+                  <a:tcPr anchor="ctr">
+                    <a:lnL w="6350" cap="flat" cmpd="sng" algn="ctr">
+                      <a:solidFill>
+                        <a:schemeClr val="tx1"/>
+                      </a:solidFill>
+                      <a:prstDash val="solid"/>
+                      <a:round/>
+                      <a:headEnd type="none" w="med" len="med"/>
+                      <a:tailEnd type="none" w="med" len="med"/>
+                    </a:lnL>
+                    <a:lnR w="12700" cmpd="sng">
+                      <a:noFill/>
+                    </a:lnR>
+                    <a:lnT w="6350" cap="flat" cmpd="sng" algn="ctr">
+                      <a:solidFill>
+                        <a:schemeClr val="tx1"/>
+                      </a:solidFill>
+                      <a:prstDash val="solid"/>
+                      <a:round/>
+                      <a:headEnd type="none" w="med" len="med"/>
+                      <a:tailEnd type="none" w="med" len="med"/>
+                    </a:lnT>
+                    <a:lnB w="6350" cap="flat" cmpd="sng" algn="ctr">
+                      <a:solidFill>
+                        <a:schemeClr val="tx1"/>
+                      </a:solidFill>
+                      <a:prstDash val="solid"/>
+                      <a:round/>
+                      <a:headEnd type="none" w="med" len="med"/>
+                      <a:tailEnd type="none" w="med" len="med"/>
+                    </a:lnB>
+                    <a:lnTlToBr w="12700" cmpd="sng">
+                      <a:noFill/>
+                      <a:prstDash val="solid"/>
+                    </a:lnTlToBr>
+                    <a:lnBlToTr w="12700" cmpd="sng">
+                      <a:noFill/>
+                      <a:prstDash val="solid"/>
+                    </a:lnBlToTr>
+                    <a:noFill/>
+                  </a:tcPr>
+                </a:tc>
+                <a:tc>
+                  <a:txBody>
+                    <a:bodyPr/>
+                    <a:lstStyle/>
+                    <a:p>
+                      <a:pPr algn="ctr"/>
+                      <a:r>
+                        <a:rPr lang="en-US" sz="1000" b="0" dirty="0"/>
+                        <a:t>Crude Oil</a:t>
+                      </a:r>
+                    </a:p>
+                  </a:txBody>
+                  <a:tcPr anchor="ctr">
+                    <a:lnL w="12700" cmpd="sng">
+                      <a:noFill/>
+                    </a:lnL>
+                    <a:lnR w="6350" cap="flat" cmpd="sng" algn="ctr">
+                      <a:solidFill>
+                        <a:schemeClr val="tx1"/>
+                      </a:solidFill>
+                      <a:prstDash val="solid"/>
+                      <a:round/>
+                      <a:headEnd type="none" w="med" len="med"/>
+                      <a:tailEnd type="none" w="med" len="med"/>
+                    </a:lnR>
+                    <a:lnT w="6350" cap="flat" cmpd="sng" algn="ctr">
+                      <a:solidFill>
+                        <a:schemeClr val="tx1"/>
+                      </a:solidFill>
+                      <a:prstDash val="solid"/>
+                      <a:round/>
+                      <a:headEnd type="none" w="med" len="med"/>
+                      <a:tailEnd type="none" w="med" len="med"/>
+                    </a:lnT>
+                    <a:lnB w="6350" cap="flat" cmpd="sng" algn="ctr">
+                      <a:solidFill>
+                        <a:schemeClr val="tx1"/>
+                      </a:solidFill>
+                      <a:prstDash val="solid"/>
+                      <a:round/>
+                      <a:headEnd type="none" w="med" len="med"/>
+                      <a:tailEnd type="none" w="med" len="med"/>
+                    </a:lnB>
+                    <a:lnTlToBr w="12700" cmpd="sng">
+                      <a:noFill/>
+                      <a:prstDash val="solid"/>
+                    </a:lnTlToBr>
+                    <a:lnBlToTr w="12700" cmpd="sng">
+                      <a:noFill/>
+                      <a:prstDash val="solid"/>
+                    </a:lnBlToTr>
+                    <a:noFill/>
+                  </a:tcPr>
+                </a:tc>
+                <a:extLst>
+                  <a:ext uri="{0D108BD9-81ED-4DB2-BD59-A6C34878D82A}">
+                    <a16:rowId xmlns:a16="http://schemas.microsoft.com/office/drawing/2014/main" val="1468601158"/>
+                  </a:ext>
+                </a:extLst>
+              </a:tr>
+              <a:tr h="156818">
+                <a:tc rowSpan="2">
+                  <a:txBody>
+                    <a:bodyPr/>
+                    <a:lstStyle/>
+                    <a:p>
+                      <a:pPr algn="ctr"/>
+                      <a:r>
+                        <a:rPr lang="en-US" sz="1000" b="0" dirty="0"/>
+                        <a:t>Actual</a:t>
+                      </a:r>
+                    </a:p>
+                  </a:txBody>
+                  <a:tcPr vert="vert270" anchor="ctr">
+                    <a:lnL w="12700" cmpd="sng">
+                      <a:noFill/>
+                    </a:lnL>
+                    <a:lnR w="6350" cap="flat" cmpd="sng" algn="ctr">
+                      <a:solidFill>
+                        <a:schemeClr val="tx1"/>
+                      </a:solidFill>
+                      <a:prstDash val="solid"/>
+                      <a:round/>
+                      <a:headEnd type="none" w="med" len="med"/>
+                      <a:tailEnd type="none" w="med" len="med"/>
+                    </a:lnR>
+                    <a:lnT w="12700" cmpd="sng">
+                      <a:noFill/>
+                    </a:lnT>
+                    <a:lnB w="12700" cmpd="sng">
+                      <a:noFill/>
+                    </a:lnB>
+                    <a:lnTlToBr w="12700" cmpd="sng">
+                      <a:noFill/>
+                      <a:prstDash val="solid"/>
+                    </a:lnTlToBr>
+                    <a:lnBlToTr w="12700" cmpd="sng">
+                      <a:noFill/>
+                      <a:prstDash val="solid"/>
+                    </a:lnBlToTr>
+                    <a:noFill/>
+                  </a:tcPr>
+                </a:tc>
+                <a:tc>
+                  <a:txBody>
+                    <a:bodyPr/>
+                    <a:lstStyle/>
+                    <a:p>
+                      <a:pPr algn="ctr"/>
+                      <a:r>
+                        <a:rPr lang="en-US" sz="1000" b="0" dirty="0"/>
+                        <a:t>NOT Crude Oil</a:t>
+                      </a:r>
+                    </a:p>
+                  </a:txBody>
+                  <a:tcPr anchor="ctr">
+                    <a:lnL w="6350" cap="flat" cmpd="sng" algn="ctr">
+                      <a:solidFill>
+                        <a:schemeClr val="tx1"/>
+                      </a:solidFill>
+                      <a:prstDash val="solid"/>
+                      <a:round/>
+                      <a:headEnd type="none" w="med" len="med"/>
+                      <a:tailEnd type="none" w="med" len="med"/>
+                    </a:lnL>
+                    <a:lnR w="6350" cap="flat" cmpd="sng" algn="ctr">
+                      <a:solidFill>
+                        <a:schemeClr val="tx1"/>
+                      </a:solidFill>
+                      <a:prstDash val="solid"/>
+                      <a:round/>
+                      <a:headEnd type="none" w="med" len="med"/>
+                      <a:tailEnd type="none" w="med" len="med"/>
+                    </a:lnR>
+                    <a:lnT w="6350" cap="flat" cmpd="sng" algn="ctr">
+                      <a:solidFill>
+                        <a:schemeClr val="tx1"/>
+                      </a:solidFill>
+                      <a:prstDash val="solid"/>
+                      <a:round/>
+                      <a:headEnd type="none" w="med" len="med"/>
+                      <a:tailEnd type="none" w="med" len="med"/>
+                    </a:lnT>
+                    <a:lnB w="12700" cmpd="sng">
+                      <a:noFill/>
+                    </a:lnB>
+                    <a:lnTlToBr w="12700" cmpd="sng">
+                      <a:noFill/>
+                      <a:prstDash val="solid"/>
+                    </a:lnTlToBr>
+                    <a:lnBlToTr w="12700" cmpd="sng">
+                      <a:noFill/>
+                      <a:prstDash val="solid"/>
+                    </a:lnBlToTr>
+                    <a:noFill/>
+                  </a:tcPr>
+                </a:tc>
+                <a:tc>
+                  <a:txBody>
+                    <a:bodyPr/>
+                    <a:lstStyle/>
+                    <a:p>
+                      <a:pPr algn="ctr"/>
+                      <a:r>
+                        <a:rPr lang="en-US" sz="1000" b="0" dirty="0">
+                          <a:solidFill>
+                            <a:schemeClr val="bg1"/>
+                          </a:solidFill>
+                        </a:rPr>
+                        <a:t>82</a:t>
+                      </a:r>
+                    </a:p>
+                  </a:txBody>
+                  <a:tcPr anchor="ctr">
+                    <a:lnL w="6350" cap="flat" cmpd="sng" algn="ctr">
+                      <a:solidFill>
+                        <a:schemeClr val="tx1"/>
+                      </a:solidFill>
+                      <a:prstDash val="solid"/>
+                      <a:round/>
+                      <a:headEnd type="none" w="med" len="med"/>
+                      <a:tailEnd type="none" w="med" len="med"/>
+                    </a:lnL>
+                    <a:lnR w="12700" cmpd="sng">
+                      <a:noFill/>
+                    </a:lnR>
+                    <a:lnT w="6350" cap="flat" cmpd="sng" algn="ctr">
+                      <a:solidFill>
+                        <a:schemeClr val="tx1"/>
+                      </a:solidFill>
+                      <a:prstDash val="solid"/>
+                      <a:round/>
+                      <a:headEnd type="none" w="med" len="med"/>
+                      <a:tailEnd type="none" w="med" len="med"/>
+                    </a:lnT>
+                    <a:lnB w="12700" cmpd="sng">
+                      <a:noFill/>
+                    </a:lnB>
+                    <a:lnTlToBr w="12700" cmpd="sng">
+                      <a:noFill/>
+                      <a:prstDash val="solid"/>
+                    </a:lnTlToBr>
+                    <a:lnBlToTr w="12700" cmpd="sng">
+                      <a:noFill/>
+                      <a:prstDash val="solid"/>
+                    </a:lnBlToTr>
+                    <a:solidFill>
+                      <a:srgbClr val="2DAAAF"/>
+                    </a:solidFill>
+                  </a:tcPr>
+                </a:tc>
+                <a:tc>
+                  <a:txBody>
+                    <a:bodyPr/>
+                    <a:lstStyle/>
+                    <a:p>
+                      <a:pPr algn="ctr"/>
+                      <a:r>
+                        <a:rPr lang="en-US" sz="1000" b="0" dirty="0">
+                          <a:solidFill>
+                            <a:schemeClr val="bg1"/>
+                          </a:solidFill>
+                        </a:rPr>
+                        <a:t>1</a:t>
+                      </a:r>
+                    </a:p>
+                  </a:txBody>
+                  <a:tcPr anchor="ctr">
+                    <a:lnL w="12700" cmpd="sng">
+                      <a:noFill/>
+                    </a:lnL>
+                    <a:lnR w="6350" cap="flat" cmpd="sng" algn="ctr">
+                      <a:solidFill>
+                        <a:schemeClr val="tx1"/>
+                      </a:solidFill>
+                      <a:prstDash val="solid"/>
+                      <a:round/>
+                      <a:headEnd type="none" w="med" len="med"/>
+                      <a:tailEnd type="none" w="med" len="med"/>
+                    </a:lnR>
+                    <a:lnT w="6350" cap="flat" cmpd="sng" algn="ctr">
+                      <a:solidFill>
+                        <a:schemeClr val="tx1"/>
+                      </a:solidFill>
+                      <a:prstDash val="solid"/>
+                      <a:round/>
+                      <a:headEnd type="none" w="med" len="med"/>
+                      <a:tailEnd type="none" w="med" len="med"/>
+                    </a:lnT>
+                    <a:lnB w="12700" cmpd="sng">
+                      <a:noFill/>
+                    </a:lnB>
+                    <a:lnTlToBr w="12700" cmpd="sng">
+                      <a:noFill/>
+                      <a:prstDash val="solid"/>
+                    </a:lnTlToBr>
+                    <a:lnBlToTr w="12700" cmpd="sng">
+                      <a:noFill/>
+                      <a:prstDash val="solid"/>
+                    </a:lnBlToTr>
+                    <a:solidFill>
+                      <a:srgbClr val="175C61"/>
+                    </a:solidFill>
+                  </a:tcPr>
+                </a:tc>
+                <a:extLst>
+                  <a:ext uri="{0D108BD9-81ED-4DB2-BD59-A6C34878D82A}">
+                    <a16:rowId xmlns:a16="http://schemas.microsoft.com/office/drawing/2014/main" val="4050004438"/>
+                  </a:ext>
+                </a:extLst>
+              </a:tr>
+              <a:tr h="156818">
+                <a:tc vMerge="1">
+                  <a:txBody>
+                    <a:bodyPr/>
+                    <a:lstStyle/>
+                    <a:p>
+                      <a:endParaRPr lang="en-US" dirty="0"/>
+                    </a:p>
+                  </a:txBody>
+                  <a:tcPr>
+                    <a:lnL w="12700" cmpd="sng">
+                      <a:noFill/>
+                    </a:lnL>
+                    <a:lnR w="12700" cmpd="sng">
+                      <a:noFill/>
+                    </a:lnR>
+                    <a:lnT w="12700" cmpd="sng">
+                      <a:noFill/>
+                    </a:lnT>
+                    <a:lnB w="12700" cmpd="sng">
+                      <a:noFill/>
+                    </a:lnB>
+                    <a:lnTlToBr w="12700" cmpd="sng">
+                      <a:noFill/>
+                      <a:prstDash val="solid"/>
+                    </a:lnTlToBr>
+                    <a:lnBlToTr w="12700" cmpd="sng">
+                      <a:noFill/>
+                      <a:prstDash val="solid"/>
+                    </a:lnBlToTr>
+                    <a:noFill/>
+                  </a:tcPr>
+                </a:tc>
+                <a:tc>
+                  <a:txBody>
+                    <a:bodyPr/>
+                    <a:lstStyle/>
+                    <a:p>
+                      <a:pPr algn="ctr"/>
+                      <a:r>
+                        <a:rPr lang="en-US" sz="1000" b="0" dirty="0"/>
+                        <a:t>Crude Oil</a:t>
+                      </a:r>
+                    </a:p>
+                  </a:txBody>
+                  <a:tcPr anchor="ctr">
+                    <a:lnL w="6350" cap="flat" cmpd="sng" algn="ctr">
+                      <a:solidFill>
+                        <a:schemeClr val="tx1"/>
+                      </a:solidFill>
+                      <a:prstDash val="solid"/>
+                      <a:round/>
+                      <a:headEnd type="none" w="med" len="med"/>
+                      <a:tailEnd type="none" w="med" len="med"/>
+                    </a:lnL>
+                    <a:lnR w="6350" cap="flat" cmpd="sng" algn="ctr">
+                      <a:solidFill>
+                        <a:schemeClr val="tx1"/>
+                      </a:solidFill>
+                      <a:prstDash val="solid"/>
+                      <a:round/>
+                      <a:headEnd type="none" w="med" len="med"/>
+                      <a:tailEnd type="none" w="med" len="med"/>
+                    </a:lnR>
+                    <a:lnT w="12700" cmpd="sng">
+                      <a:noFill/>
+                    </a:lnT>
+                    <a:lnB w="6350" cap="flat" cmpd="sng" algn="ctr">
+                      <a:solidFill>
+                        <a:schemeClr val="tx1"/>
+                      </a:solidFill>
+                      <a:prstDash val="solid"/>
+                      <a:round/>
+                      <a:headEnd type="none" w="med" len="med"/>
+                      <a:tailEnd type="none" w="med" len="med"/>
+                    </a:lnB>
+                    <a:lnTlToBr w="12700" cmpd="sng">
+                      <a:noFill/>
+                      <a:prstDash val="solid"/>
+                    </a:lnTlToBr>
+                    <a:lnBlToTr w="12700" cmpd="sng">
+                      <a:noFill/>
+                      <a:prstDash val="solid"/>
+                    </a:lnBlToTr>
+                    <a:noFill/>
+                  </a:tcPr>
+                </a:tc>
+                <a:tc>
+                  <a:txBody>
+                    <a:bodyPr/>
+                    <a:lstStyle/>
+                    <a:p>
+                      <a:pPr algn="ctr"/>
+                      <a:r>
+                        <a:rPr lang="en-US" sz="1000" b="0" dirty="0">
+                          <a:solidFill>
+                            <a:schemeClr val="bg1"/>
+                          </a:solidFill>
+                        </a:rPr>
+                        <a:t>4</a:t>
+                      </a:r>
+                    </a:p>
+                  </a:txBody>
+                  <a:tcPr anchor="ctr">
+                    <a:lnL w="6350" cap="flat" cmpd="sng" algn="ctr">
+                      <a:solidFill>
+                        <a:schemeClr val="tx1"/>
+                      </a:solidFill>
+                      <a:prstDash val="solid"/>
+                      <a:round/>
+                      <a:headEnd type="none" w="med" len="med"/>
+                      <a:tailEnd type="none" w="med" len="med"/>
+                    </a:lnL>
+                    <a:lnR w="12700" cmpd="sng">
+                      <a:noFill/>
+                    </a:lnR>
+                    <a:lnT w="12700" cmpd="sng">
+                      <a:noFill/>
+                    </a:lnT>
+                    <a:lnB w="6350" cap="flat" cmpd="sng" algn="ctr">
+                      <a:solidFill>
+                        <a:schemeClr val="tx1"/>
+                      </a:solidFill>
+                      <a:prstDash val="solid"/>
+                      <a:round/>
+                      <a:headEnd type="none" w="med" len="med"/>
+                      <a:tailEnd type="none" w="med" len="med"/>
+                    </a:lnB>
+                    <a:lnTlToBr w="12700" cmpd="sng">
+                      <a:noFill/>
+                      <a:prstDash val="solid"/>
+                    </a:lnTlToBr>
+                    <a:lnBlToTr w="12700" cmpd="sng">
+                      <a:noFill/>
+                      <a:prstDash val="solid"/>
+                    </a:lnBlToTr>
+                    <a:solidFill>
+                      <a:srgbClr val="175C61"/>
+                    </a:solidFill>
+                  </a:tcPr>
+                </a:tc>
+                <a:tc>
+                  <a:txBody>
+                    <a:bodyPr/>
+                    <a:lstStyle/>
+                    <a:p>
+                      <a:pPr algn="ctr"/>
+                      <a:r>
+                        <a:rPr lang="en-US" sz="1000" b="0" dirty="0">
+                          <a:solidFill>
+                            <a:schemeClr val="bg1"/>
+                          </a:solidFill>
+                        </a:rPr>
+                        <a:t>19</a:t>
+                      </a:r>
+                    </a:p>
+                  </a:txBody>
+                  <a:tcPr anchor="ctr">
+                    <a:lnL w="12700" cmpd="sng">
+                      <a:noFill/>
+                    </a:lnL>
+                    <a:lnR w="6350" cap="flat" cmpd="sng" algn="ctr">
+                      <a:solidFill>
+                        <a:schemeClr val="tx1"/>
+                      </a:solidFill>
+                      <a:prstDash val="solid"/>
+                      <a:round/>
+                      <a:headEnd type="none" w="med" len="med"/>
+                      <a:tailEnd type="none" w="med" len="med"/>
+                    </a:lnR>
+                    <a:lnT w="12700" cmpd="sng">
+                      <a:noFill/>
+                    </a:lnT>
+                    <a:lnB w="6350" cap="flat" cmpd="sng" algn="ctr">
+                      <a:solidFill>
+                        <a:schemeClr val="tx1"/>
+                      </a:solidFill>
+                      <a:prstDash val="solid"/>
+                      <a:round/>
+                      <a:headEnd type="none" w="med" len="med"/>
+                      <a:tailEnd type="none" w="med" len="med"/>
+                    </a:lnB>
+                    <a:lnTlToBr w="12700" cmpd="sng">
+                      <a:noFill/>
+                      <a:prstDash val="solid"/>
+                    </a:lnTlToBr>
+                    <a:lnBlToTr w="12700" cmpd="sng">
+                      <a:noFill/>
+                      <a:prstDash val="solid"/>
+                    </a:lnBlToTr>
+                    <a:solidFill>
+                      <a:srgbClr val="2DAAAF"/>
+                    </a:solidFill>
+                  </a:tcPr>
+                </a:tc>
+                <a:extLst>
+                  <a:ext uri="{0D108BD9-81ED-4DB2-BD59-A6C34878D82A}">
+                    <a16:rowId xmlns:a16="http://schemas.microsoft.com/office/drawing/2014/main" val="2258521280"/>
+                  </a:ext>
+                </a:extLst>
+              </a:tr>
+            </a:tbl>
+          </a:graphicData>
+        </a:graphic>
+      </p:graphicFrame>
+      <p:graphicFrame>
+        <p:nvGraphicFramePr>
+          <p:cNvPr id="12" name="Table 11">
+            <a:extLst>
+              <a:ext uri="{FF2B5EF4-FFF2-40B4-BE49-F238E27FC236}">
+                <a16:creationId xmlns:a16="http://schemas.microsoft.com/office/drawing/2014/main" id="{8436088A-5372-55CC-A33B-A8E9E1B85FB5}"/>
+              </a:ext>
+            </a:extLst>
+          </p:cNvPr>
+          <p:cNvGraphicFramePr>
+            <a:graphicFrameLocks noGrp="1"/>
+          </p:cNvGraphicFramePr>
+          <p:nvPr>
+            <p:extLst>
+              <p:ext uri="{D42A27DB-BD31-4B8C-83A1-F6EECF244321}">
+                <p14:modId xmlns:p14="http://schemas.microsoft.com/office/powerpoint/2010/main" val="2379340184"/>
+              </p:ext>
+            </p:extLst>
+          </p:nvPr>
+        </p:nvGraphicFramePr>
+        <p:xfrm>
+          <a:off x="3395608" y="2320104"/>
+          <a:ext cx="2182948" cy="731520"/>
+        </p:xfrm>
+        <a:graphic>
+          <a:graphicData uri="http://schemas.openxmlformats.org/drawingml/2006/table">
+            <a:tbl>
+              <a:tblPr firstRow="1" bandRow="1">
+                <a:tableStyleId>{5C22544A-7EE6-4342-B048-85BDC9FD1C3A}</a:tableStyleId>
+              </a:tblPr>
+              <a:tblGrid>
+                <a:gridCol w="927946">
+                  <a:extLst>
+                    <a:ext uri="{9D8B030D-6E8A-4147-A177-3AD203B41FA5}">
+                      <a16:colId xmlns:a16="http://schemas.microsoft.com/office/drawing/2014/main" val="1561686530"/>
+                    </a:ext>
+                  </a:extLst>
+                </a:gridCol>
+                <a:gridCol w="662819">
+                  <a:extLst>
+                    <a:ext uri="{9D8B030D-6E8A-4147-A177-3AD203B41FA5}">
+                      <a16:colId xmlns:a16="http://schemas.microsoft.com/office/drawing/2014/main" val="933617151"/>
+                    </a:ext>
+                  </a:extLst>
+                </a:gridCol>
+                <a:gridCol w="592183">
+                  <a:extLst>
+                    <a:ext uri="{9D8B030D-6E8A-4147-A177-3AD203B41FA5}">
+                      <a16:colId xmlns:a16="http://schemas.microsoft.com/office/drawing/2014/main" val="800553664"/>
+                    </a:ext>
+                  </a:extLst>
+                </a:gridCol>
+              </a:tblGrid>
+              <a:tr h="135101">
+                <a:tc>
+                  <a:txBody>
+                    <a:bodyPr/>
+                    <a:lstStyle/>
+                    <a:p>
+                      <a:pPr algn="ctr"/>
+                      <a:endParaRPr lang="en-US" sz="1000" b="0" dirty="0">
+                        <a:solidFill>
+                          <a:schemeClr val="tx1"/>
+                        </a:solidFill>
+                      </a:endParaRPr>
+                    </a:p>
+                  </a:txBody>
+                  <a:tcPr anchor="ctr">
+                    <a:lnR w="6350" cap="flat" cmpd="sng" algn="ctr">
+                      <a:solidFill>
+                        <a:schemeClr val="tx1"/>
+                      </a:solidFill>
+                      <a:prstDash val="solid"/>
+                      <a:round/>
+                      <a:headEnd type="none" w="med" len="med"/>
+                      <a:tailEnd type="none" w="med" len="med"/>
+                    </a:lnR>
+                    <a:lnB w="6350" cap="flat" cmpd="sng" algn="ctr">
+                      <a:solidFill>
+                        <a:schemeClr val="tx1"/>
+                      </a:solidFill>
+                      <a:prstDash val="solid"/>
+                      <a:round/>
+                      <a:headEnd type="none" w="med" len="med"/>
+                      <a:tailEnd type="none" w="med" len="med"/>
+                    </a:lnB>
+                    <a:noFill/>
+                  </a:tcPr>
+                </a:tc>
+                <a:tc>
+                  <a:txBody>
+                    <a:bodyPr/>
+                    <a:lstStyle/>
+                    <a:p>
+                      <a:pPr algn="ctr"/>
+                      <a:r>
+                        <a:rPr lang="en-US" sz="1000" b="0" dirty="0">
+                          <a:solidFill>
+                            <a:schemeClr val="tx1"/>
+                          </a:solidFill>
+                        </a:rPr>
+                        <a:t>Precision</a:t>
+                      </a:r>
+                    </a:p>
+                  </a:txBody>
+                  <a:tcPr anchor="ctr">
+                    <a:lnL w="6350" cap="flat" cmpd="sng" algn="ctr">
+                      <a:solidFill>
+                        <a:schemeClr val="tx1"/>
+                      </a:solidFill>
+                      <a:prstDash val="solid"/>
+                      <a:round/>
+                      <a:headEnd type="none" w="med" len="med"/>
+                      <a:tailEnd type="none" w="med" len="med"/>
+                    </a:lnL>
+                    <a:lnT w="6350" cap="flat" cmpd="sng" algn="ctr">
+                      <a:solidFill>
+                        <a:schemeClr val="tx1"/>
+                      </a:solidFill>
+                      <a:prstDash val="solid"/>
+                      <a:round/>
+                      <a:headEnd type="none" w="med" len="med"/>
+                      <a:tailEnd type="none" w="med" len="med"/>
+                    </a:lnT>
+                    <a:lnB w="6350" cap="flat" cmpd="sng" algn="ctr">
+                      <a:solidFill>
+                        <a:schemeClr val="tx1"/>
+                      </a:solidFill>
+                      <a:prstDash val="solid"/>
+                      <a:round/>
+                      <a:headEnd type="none" w="med" len="med"/>
+                      <a:tailEnd type="none" w="med" len="med"/>
+                    </a:lnB>
+                    <a:noFill/>
+                  </a:tcPr>
+                </a:tc>
+                <a:tc>
+                  <a:txBody>
+                    <a:bodyPr/>
+                    <a:lstStyle/>
+                    <a:p>
+                      <a:pPr algn="ctr"/>
+                      <a:r>
+                        <a:rPr lang="en-US" sz="1000" b="0" dirty="0">
+                          <a:solidFill>
+                            <a:schemeClr val="tx1"/>
+                          </a:solidFill>
+                        </a:rPr>
+                        <a:t>Recall</a:t>
+                      </a:r>
+                    </a:p>
+                  </a:txBody>
+                  <a:tcPr anchor="ctr">
+                    <a:lnR w="6350" cap="flat" cmpd="sng" algn="ctr">
+                      <a:solidFill>
+                        <a:schemeClr val="tx1"/>
+                      </a:solidFill>
+                      <a:prstDash val="solid"/>
+                      <a:round/>
+                      <a:headEnd type="none" w="med" len="med"/>
+                      <a:tailEnd type="none" w="med" len="med"/>
+                    </a:lnR>
+                    <a:lnT w="6350" cap="flat" cmpd="sng" algn="ctr">
+                      <a:solidFill>
+                        <a:schemeClr val="tx1"/>
+                      </a:solidFill>
+                      <a:prstDash val="solid"/>
+                      <a:round/>
+                      <a:headEnd type="none" w="med" len="med"/>
+                      <a:tailEnd type="none" w="med" len="med"/>
+                    </a:lnT>
+                    <a:lnB w="6350" cap="flat" cmpd="sng" algn="ctr">
+                      <a:solidFill>
+                        <a:schemeClr val="tx1"/>
+                      </a:solidFill>
+                      <a:prstDash val="solid"/>
+                      <a:round/>
+                      <a:headEnd type="none" w="med" len="med"/>
+                      <a:tailEnd type="none" w="med" len="med"/>
+                    </a:lnB>
+                    <a:noFill/>
+                  </a:tcPr>
+                </a:tc>
+                <a:extLst>
+                  <a:ext uri="{0D108BD9-81ED-4DB2-BD59-A6C34878D82A}">
+                    <a16:rowId xmlns:a16="http://schemas.microsoft.com/office/drawing/2014/main" val="1774489592"/>
+                  </a:ext>
+                </a:extLst>
+              </a:tr>
+              <a:tr h="135101">
+                <a:tc>
+                  <a:txBody>
+                    <a:bodyPr/>
+                    <a:lstStyle/>
+                    <a:p>
+                      <a:pPr algn="ctr"/>
+                      <a:r>
+                        <a:rPr lang="en-US" sz="1000" b="0" dirty="0">
+                          <a:solidFill>
+                            <a:schemeClr val="tx1"/>
+                          </a:solidFill>
+                        </a:rPr>
+                        <a:t>NOT Crude Oil</a:t>
+                      </a:r>
+                    </a:p>
+                  </a:txBody>
+                  <a:tcPr anchor="ctr">
+                    <a:lnL w="6350" cap="flat" cmpd="sng" algn="ctr">
+                      <a:solidFill>
+                        <a:schemeClr val="tx1"/>
+                      </a:solidFill>
+                      <a:prstDash val="solid"/>
+                      <a:round/>
+                      <a:headEnd type="none" w="med" len="med"/>
+                      <a:tailEnd type="none" w="med" len="med"/>
+                    </a:lnL>
+                    <a:lnR w="6350" cap="flat" cmpd="sng" algn="ctr">
+                      <a:solidFill>
+                        <a:schemeClr val="tx1"/>
+                      </a:solidFill>
+                      <a:prstDash val="solid"/>
+                      <a:round/>
+                      <a:headEnd type="none" w="med" len="med"/>
+                      <a:tailEnd type="none" w="med" len="med"/>
+                    </a:lnR>
+                    <a:lnT w="6350" cap="flat" cmpd="sng" algn="ctr">
+                      <a:solidFill>
+                        <a:schemeClr val="tx1"/>
+                      </a:solidFill>
+                      <a:prstDash val="solid"/>
+                      <a:round/>
+                      <a:headEnd type="none" w="med" len="med"/>
+                      <a:tailEnd type="none" w="med" len="med"/>
+                    </a:lnT>
+                    <a:noFill/>
+                  </a:tcPr>
+                </a:tc>
+                <a:tc>
+                  <a:txBody>
+                    <a:bodyPr/>
+                    <a:lstStyle/>
+                    <a:p>
+                      <a:pPr algn="ctr"/>
+                      <a:r>
+                        <a:rPr lang="en-US" sz="1000" b="0" dirty="0">
+                          <a:solidFill>
+                            <a:schemeClr val="tx1"/>
+                          </a:solidFill>
+                        </a:rPr>
+                        <a:t>0.95</a:t>
+                      </a:r>
+                    </a:p>
+                  </a:txBody>
+                  <a:tcPr anchor="ctr">
+                    <a:lnL w="6350" cap="flat" cmpd="sng" algn="ctr">
+                      <a:solidFill>
+                        <a:schemeClr val="tx1"/>
+                      </a:solidFill>
+                      <a:prstDash val="solid"/>
+                      <a:round/>
+                      <a:headEnd type="none" w="med" len="med"/>
+                      <a:tailEnd type="none" w="med" len="med"/>
+                    </a:lnL>
+                    <a:lnT w="6350" cap="flat" cmpd="sng" algn="ctr">
+                      <a:solidFill>
+                        <a:schemeClr val="tx1"/>
+                      </a:solidFill>
+                      <a:prstDash val="solid"/>
+                      <a:round/>
+                      <a:headEnd type="none" w="med" len="med"/>
+                      <a:tailEnd type="none" w="med" len="med"/>
+                    </a:lnT>
+                    <a:noFill/>
+                  </a:tcPr>
+                </a:tc>
+                <a:tc>
+                  <a:txBody>
+                    <a:bodyPr/>
+                    <a:lstStyle/>
+                    <a:p>
+                      <a:pPr algn="ctr"/>
+                      <a:r>
+                        <a:rPr lang="en-US" sz="1000" b="0" dirty="0">
+                          <a:solidFill>
+                            <a:schemeClr val="tx1"/>
+                          </a:solidFill>
+                        </a:rPr>
+                        <a:t>0.99</a:t>
+                      </a:r>
+                    </a:p>
+                  </a:txBody>
+                  <a:tcPr anchor="ctr">
+                    <a:lnR w="6350" cap="flat" cmpd="sng" algn="ctr">
+                      <a:solidFill>
+                        <a:schemeClr val="tx1"/>
+                      </a:solidFill>
+                      <a:prstDash val="solid"/>
+                      <a:round/>
+                      <a:headEnd type="none" w="med" len="med"/>
+                      <a:tailEnd type="none" w="med" len="med"/>
+                    </a:lnR>
+                    <a:lnT w="6350" cap="flat" cmpd="sng" algn="ctr">
+                      <a:solidFill>
+                        <a:schemeClr val="tx1"/>
+                      </a:solidFill>
+                      <a:prstDash val="solid"/>
+                      <a:round/>
+                      <a:headEnd type="none" w="med" len="med"/>
+                      <a:tailEnd type="none" w="med" len="med"/>
+                    </a:lnT>
+                    <a:noFill/>
+                  </a:tcPr>
+                </a:tc>
+                <a:extLst>
+                  <a:ext uri="{0D108BD9-81ED-4DB2-BD59-A6C34878D82A}">
+                    <a16:rowId xmlns:a16="http://schemas.microsoft.com/office/drawing/2014/main" val="1959904668"/>
+                  </a:ext>
+                </a:extLst>
+              </a:tr>
+              <a:tr h="135101">
+                <a:tc>
+                  <a:txBody>
+                    <a:bodyPr/>
+                    <a:lstStyle/>
+                    <a:p>
+                      <a:pPr algn="ctr"/>
+                      <a:r>
+                        <a:rPr lang="en-US" sz="1000" b="0" dirty="0">
+                          <a:solidFill>
+                            <a:schemeClr val="tx1"/>
+                          </a:solidFill>
+                        </a:rPr>
+                        <a:t>Crude Oil</a:t>
+                      </a:r>
+                    </a:p>
+                  </a:txBody>
+                  <a:tcPr anchor="ctr">
+                    <a:lnL w="6350" cap="flat" cmpd="sng" algn="ctr">
+                      <a:solidFill>
+                        <a:schemeClr val="tx1"/>
+                      </a:solidFill>
+                      <a:prstDash val="solid"/>
+                      <a:round/>
+                      <a:headEnd type="none" w="med" len="med"/>
+                      <a:tailEnd type="none" w="med" len="med"/>
+                    </a:lnL>
+                    <a:lnR w="6350" cap="flat" cmpd="sng" algn="ctr">
+                      <a:solidFill>
+                        <a:schemeClr val="tx1"/>
+                      </a:solidFill>
+                      <a:prstDash val="solid"/>
+                      <a:round/>
+                      <a:headEnd type="none" w="med" len="med"/>
+                      <a:tailEnd type="none" w="med" len="med"/>
+                    </a:lnR>
+                    <a:lnB w="6350" cap="flat" cmpd="sng" algn="ctr">
+                      <a:solidFill>
+                        <a:schemeClr val="tx1"/>
+                      </a:solidFill>
+                      <a:prstDash val="solid"/>
+                      <a:round/>
+                      <a:headEnd type="none" w="med" len="med"/>
+                      <a:tailEnd type="none" w="med" len="med"/>
+                    </a:lnB>
+                    <a:noFill/>
+                  </a:tcPr>
+                </a:tc>
+                <a:tc>
+                  <a:txBody>
+                    <a:bodyPr/>
+                    <a:lstStyle/>
+                    <a:p>
+                      <a:pPr algn="ctr"/>
+                      <a:r>
+                        <a:rPr lang="en-US" sz="1000" b="0" dirty="0">
+                          <a:solidFill>
+                            <a:schemeClr val="tx1"/>
+                          </a:solidFill>
+                        </a:rPr>
+                        <a:t>0.95</a:t>
+                      </a:r>
+                    </a:p>
+                  </a:txBody>
+                  <a:tcPr anchor="ctr">
+                    <a:lnL w="6350" cap="flat" cmpd="sng" algn="ctr">
+                      <a:solidFill>
+                        <a:schemeClr val="tx1"/>
+                      </a:solidFill>
+                      <a:prstDash val="solid"/>
+                      <a:round/>
+                      <a:headEnd type="none" w="med" len="med"/>
+                      <a:tailEnd type="none" w="med" len="med"/>
+                    </a:lnL>
+                    <a:lnB w="6350" cap="flat" cmpd="sng" algn="ctr">
+                      <a:solidFill>
+                        <a:schemeClr val="tx1"/>
+                      </a:solidFill>
+                      <a:prstDash val="solid"/>
+                      <a:round/>
+                      <a:headEnd type="none" w="med" len="med"/>
+                      <a:tailEnd type="none" w="med" len="med"/>
+                    </a:lnB>
+                    <a:noFill/>
+                  </a:tcPr>
+                </a:tc>
+                <a:tc>
+                  <a:txBody>
+                    <a:bodyPr/>
+                    <a:lstStyle/>
+                    <a:p>
+                      <a:pPr algn="ctr"/>
+                      <a:r>
+                        <a:rPr lang="en-US" sz="1000" b="0" dirty="0">
+                          <a:solidFill>
+                            <a:schemeClr val="tx1"/>
+                          </a:solidFill>
+                        </a:rPr>
+                        <a:t>0.83</a:t>
+                      </a:r>
+                    </a:p>
+                  </a:txBody>
+                  <a:tcPr anchor="ctr">
+                    <a:lnR w="6350" cap="flat" cmpd="sng" algn="ctr">
+                      <a:solidFill>
+                        <a:schemeClr val="tx1"/>
+                      </a:solidFill>
+                      <a:prstDash val="solid"/>
+                      <a:round/>
+                      <a:headEnd type="none" w="med" len="med"/>
+                      <a:tailEnd type="none" w="med" len="med"/>
+                    </a:lnR>
+                    <a:lnB w="6350" cap="flat" cmpd="sng" algn="ctr">
+                      <a:solidFill>
+                        <a:schemeClr val="tx1"/>
+                      </a:solidFill>
+                      <a:prstDash val="solid"/>
+                      <a:round/>
+                      <a:headEnd type="none" w="med" len="med"/>
+                      <a:tailEnd type="none" w="med" len="med"/>
+                    </a:lnB>
+                    <a:noFill/>
+                  </a:tcPr>
+                </a:tc>
+                <a:extLst>
+                  <a:ext uri="{0D108BD9-81ED-4DB2-BD59-A6C34878D82A}">
+                    <a16:rowId xmlns:a16="http://schemas.microsoft.com/office/drawing/2014/main" val="727921922"/>
+                  </a:ext>
+                </a:extLst>
+              </a:tr>
+            </a:tbl>
+          </a:graphicData>
+        </a:graphic>
+      </p:graphicFrame>
+      <p:cxnSp>
+        <p:nvCxnSpPr>
+          <p:cNvPr id="15" name="Straight Connector 14">
+            <a:extLst>
+              <a:ext uri="{FF2B5EF4-FFF2-40B4-BE49-F238E27FC236}">
+                <a16:creationId xmlns:a16="http://schemas.microsoft.com/office/drawing/2014/main" id="{DBB26C94-E864-02B1-EB8E-45EE3016C15D}"/>
+              </a:ext>
+            </a:extLst>
+          </p:cNvPr>
+          <p:cNvCxnSpPr/>
+          <p:nvPr/>
+        </p:nvCxnSpPr>
+        <p:spPr>
+          <a:xfrm>
+            <a:off x="5839096" y="1578454"/>
+            <a:ext cx="0" cy="4604632"/>
+          </a:xfrm>
+          <a:prstGeom prst="line">
+            <a:avLst/>
+          </a:prstGeom>
+          <a:ln>
+            <a:solidFill>
+              <a:schemeClr val="tx1"/>
+            </a:solidFill>
+            <a:prstDash val="lgDash"/>
+          </a:ln>
+        </p:spPr>
+        <p:style>
+          <a:lnRef idx="1">
+            <a:schemeClr val="accent1"/>
+          </a:lnRef>
+          <a:fillRef idx="0">
+            <a:schemeClr val="accent1"/>
+          </a:fillRef>
+          <a:effectRef idx="0">
+            <a:schemeClr val="accent1"/>
+          </a:effectRef>
+          <a:fontRef idx="minor">
+            <a:schemeClr val="tx1"/>
+          </a:fontRef>
+        </p:style>
+      </p:cxnSp>
+      <p:sp>
+        <p:nvSpPr>
+          <p:cNvPr id="16" name="Rounded Rectangle 15">
+            <a:extLst>
+              <a:ext uri="{FF2B5EF4-FFF2-40B4-BE49-F238E27FC236}">
+                <a16:creationId xmlns:a16="http://schemas.microsoft.com/office/drawing/2014/main" id="{BD1A5873-D45F-839A-44F2-6C65D34B6B89}"/>
+              </a:ext>
+            </a:extLst>
+          </p:cNvPr>
+          <p:cNvSpPr/>
+          <p:nvPr/>
+        </p:nvSpPr>
+        <p:spPr>
+          <a:xfrm>
+            <a:off x="431074" y="3274954"/>
+            <a:ext cx="5147477" cy="1551420"/>
+          </a:xfrm>
+          <a:prstGeom prst="roundRect">
+            <a:avLst/>
+          </a:prstGeom>
+          <a:solidFill>
+            <a:srgbClr val="F7F9FC"/>
+          </a:solidFill>
+          <a:ln>
+            <a:noFill/>
+          </a:ln>
+        </p:spPr>
+        <p:style>
+          <a:lnRef idx="2">
+            <a:schemeClr val="accent1">
+              <a:shade val="15000"/>
+            </a:schemeClr>
+          </a:lnRef>
+          <a:fillRef idx="1">
+            <a:schemeClr val="accent1"/>
+          </a:fillRef>
+          <a:effectRef idx="0">
+            <a:schemeClr val="accent1"/>
+          </a:effectRef>
+          <a:fontRef idx="minor">
+            <a:schemeClr val="lt1"/>
+          </a:fontRef>
+        </p:style>
+        <p:txBody>
+          <a:bodyPr rtlCol="0" anchor="ctr"/>
+          <a:lstStyle/>
+          <a:p>
+            <a:r>
+              <a:rPr lang="en-US" sz="1200" dirty="0">
+                <a:solidFill>
+                  <a:srgbClr val="0A2636"/>
+                </a:solidFill>
+                <a:latin typeface="Spectral" panose="02020502060000000000" pitchFamily="18" charset="77"/>
+              </a:rPr>
+              <a:t>Feature Importance</a:t>
+            </a:r>
+          </a:p>
+          <a:p>
+            <a:endParaRPr lang="en-US" sz="1100" dirty="0">
+              <a:solidFill>
+                <a:schemeClr val="tx1"/>
+              </a:solidFill>
+              <a:latin typeface="IBM Plex Sans Condensed" panose="020B0506050203000203" pitchFamily="34" charset="77"/>
+            </a:endParaRPr>
+          </a:p>
+          <a:p>
+            <a:r>
+              <a:rPr lang="en-US" sz="1100" dirty="0">
+                <a:solidFill>
+                  <a:schemeClr val="tx1"/>
+                </a:solidFill>
+                <a:latin typeface="IBM Plex Sans Condensed" panose="020B0506050203000203" pitchFamily="34" charset="77"/>
+              </a:rPr>
+              <a:t>After evaluating feature importance for the random forest, as seen below, it revealed that longitude and latitude, and pipeline length and diameter are the four biggest predictors of crude oil vs. not crude oil incidents. </a:t>
+            </a:r>
+          </a:p>
+          <a:p>
+            <a:endParaRPr lang="en-US" sz="1100" dirty="0">
+              <a:solidFill>
+                <a:schemeClr val="tx1"/>
+              </a:solidFill>
+              <a:latin typeface="IBM Plex Sans Condensed" panose="020B0506050203000203" pitchFamily="34" charset="77"/>
+            </a:endParaRPr>
+          </a:p>
+          <a:p>
+            <a:r>
+              <a:rPr lang="en-US" sz="1100" dirty="0">
+                <a:solidFill>
+                  <a:schemeClr val="tx1"/>
+                </a:solidFill>
+                <a:latin typeface="IBM Plex Sans Condensed" panose="020B0506050203000203" pitchFamily="34" charset="77"/>
+              </a:rPr>
+              <a:t>This implies that crude oil pipelines exist at different locations than non-crude oil pipelines and that they have different pipeline dimensions. </a:t>
+            </a:r>
+          </a:p>
+        </p:txBody>
+      </p:sp>
+      <p:pic>
+        <p:nvPicPr>
+          <p:cNvPr id="20" name="Picture 19" descr="A graph with blue bars&#10;&#10;Description automatically generated">
+            <a:extLst>
+              <a:ext uri="{FF2B5EF4-FFF2-40B4-BE49-F238E27FC236}">
+                <a16:creationId xmlns:a16="http://schemas.microsoft.com/office/drawing/2014/main" id="{64032443-2328-470C-1315-2F4B8AEFF6C0}"/>
+              </a:ext>
+            </a:extLst>
+          </p:cNvPr>
+          <p:cNvPicPr>
+            <a:picLocks noChangeAspect="1"/>
+          </p:cNvPicPr>
+          <p:nvPr/>
+        </p:nvPicPr>
+        <p:blipFill>
+          <a:blip r:embed="rId3"/>
+          <a:stretch>
+            <a:fillRect/>
+          </a:stretch>
+        </p:blipFill>
+        <p:spPr>
+          <a:xfrm>
+            <a:off x="431074" y="4927591"/>
+            <a:ext cx="2137956" cy="1626506"/>
+          </a:xfrm>
+          <a:prstGeom prst="rect">
+            <a:avLst/>
+          </a:prstGeom>
+        </p:spPr>
+      </p:pic>
+      <p:sp>
+        <p:nvSpPr>
+          <p:cNvPr id="21" name="Rounded Rectangle 20">
+            <a:extLst>
+              <a:ext uri="{FF2B5EF4-FFF2-40B4-BE49-F238E27FC236}">
+                <a16:creationId xmlns:a16="http://schemas.microsoft.com/office/drawing/2014/main" id="{CE863CD3-AA23-3AA5-8B22-CA2D811A5262}"/>
+              </a:ext>
+            </a:extLst>
+          </p:cNvPr>
+          <p:cNvSpPr/>
+          <p:nvPr/>
+        </p:nvSpPr>
+        <p:spPr>
+          <a:xfrm>
+            <a:off x="2829566" y="4927591"/>
+            <a:ext cx="2748993" cy="1386120"/>
+          </a:xfrm>
+          <a:prstGeom prst="roundRect">
+            <a:avLst/>
+          </a:prstGeom>
+          <a:noFill/>
+          <a:ln>
+            <a:noFill/>
+            <a:prstDash val="dash"/>
+          </a:ln>
+        </p:spPr>
+        <p:style>
+          <a:lnRef idx="2">
+            <a:schemeClr val="accent1">
+              <a:shade val="15000"/>
+            </a:schemeClr>
+          </a:lnRef>
+          <a:fillRef idx="1">
+            <a:schemeClr val="accent1"/>
+          </a:fillRef>
+          <a:effectRef idx="0">
+            <a:schemeClr val="accent1"/>
+          </a:effectRef>
+          <a:fontRef idx="minor">
+            <a:schemeClr val="lt1"/>
+          </a:fontRef>
+        </p:style>
+        <p:txBody>
+          <a:bodyPr rtlCol="0" anchor="t"/>
+          <a:lstStyle/>
+          <a:p>
+            <a:r>
+              <a:rPr lang="en-US" sz="1100" dirty="0">
+                <a:solidFill>
+                  <a:srgbClr val="2DAAAF"/>
+                </a:solidFill>
+                <a:latin typeface="IBM Plex Sans Condensed" panose="020B0506050203000203" pitchFamily="34" charset="77"/>
+              </a:rPr>
+              <a:t>DROPPING COLS &amp; RE-RUNNING MODEL</a:t>
+            </a:r>
+          </a:p>
+          <a:p>
+            <a:endParaRPr lang="en-US" sz="1100" dirty="0">
+              <a:solidFill>
+                <a:schemeClr val="tx1"/>
+              </a:solidFill>
+              <a:latin typeface="IBM Plex Sans Condensed" panose="020B0506050203000203" pitchFamily="34" charset="77"/>
+            </a:endParaRPr>
+          </a:p>
+          <a:p>
+            <a:r>
+              <a:rPr lang="en-US" sz="1100" dirty="0">
+                <a:solidFill>
+                  <a:schemeClr val="tx1"/>
+                </a:solidFill>
+                <a:latin typeface="IBM Plex Sans Condensed" panose="020B0506050203000203" pitchFamily="34" charset="77"/>
+              </a:rPr>
+              <a:t>After dropping these four columns (as they cannot be directly related to a substance-induced incident), the model produces mediocre results, similar to those of the logistic regression and SVM models. </a:t>
+            </a:r>
+          </a:p>
+        </p:txBody>
+      </p:sp>
+      <p:graphicFrame>
+        <p:nvGraphicFramePr>
+          <p:cNvPr id="22" name="Table 21">
+            <a:extLst>
+              <a:ext uri="{FF2B5EF4-FFF2-40B4-BE49-F238E27FC236}">
+                <a16:creationId xmlns:a16="http://schemas.microsoft.com/office/drawing/2014/main" id="{D49390B3-84AF-EE84-A5B0-2F6E546C0523}"/>
+              </a:ext>
+            </a:extLst>
+          </p:cNvPr>
+          <p:cNvGraphicFramePr>
+            <a:graphicFrameLocks noGrp="1"/>
+          </p:cNvGraphicFramePr>
+          <p:nvPr>
+            <p:extLst>
+              <p:ext uri="{D42A27DB-BD31-4B8C-83A1-F6EECF244321}">
+                <p14:modId xmlns:p14="http://schemas.microsoft.com/office/powerpoint/2010/main" val="1761548070"/>
+              </p:ext>
+            </p:extLst>
+          </p:nvPr>
+        </p:nvGraphicFramePr>
+        <p:xfrm>
+          <a:off x="5995845" y="2076264"/>
+          <a:ext cx="2960915" cy="975360"/>
+        </p:xfrm>
+        <a:graphic>
+          <a:graphicData uri="http://schemas.openxmlformats.org/drawingml/2006/table">
+            <a:tbl>
+              <a:tblPr firstRow="1" bandRow="1">
+                <a:tableStyleId>{5C22544A-7EE6-4342-B048-85BDC9FD1C3A}</a:tableStyleId>
+              </a:tblPr>
+              <a:tblGrid>
+                <a:gridCol w="290945">
+                  <a:extLst>
+                    <a:ext uri="{9D8B030D-6E8A-4147-A177-3AD203B41FA5}">
+                      <a16:colId xmlns:a16="http://schemas.microsoft.com/office/drawing/2014/main" val="2512838458"/>
+                    </a:ext>
+                  </a:extLst>
+                </a:gridCol>
+                <a:gridCol w="971798">
+                  <a:extLst>
+                    <a:ext uri="{9D8B030D-6E8A-4147-A177-3AD203B41FA5}">
+                      <a16:colId xmlns:a16="http://schemas.microsoft.com/office/drawing/2014/main" val="1161587960"/>
+                    </a:ext>
+                  </a:extLst>
+                </a:gridCol>
+                <a:gridCol w="992777">
+                  <a:extLst>
+                    <a:ext uri="{9D8B030D-6E8A-4147-A177-3AD203B41FA5}">
+                      <a16:colId xmlns:a16="http://schemas.microsoft.com/office/drawing/2014/main" val="2071456267"/>
+                    </a:ext>
+                  </a:extLst>
+                </a:gridCol>
+                <a:gridCol w="705395">
+                  <a:extLst>
+                    <a:ext uri="{9D8B030D-6E8A-4147-A177-3AD203B41FA5}">
+                      <a16:colId xmlns:a16="http://schemas.microsoft.com/office/drawing/2014/main" val="476015398"/>
+                    </a:ext>
+                  </a:extLst>
+                </a:gridCol>
+              </a:tblGrid>
+              <a:tr h="156818">
+                <a:tc>
+                  <a:txBody>
+                    <a:bodyPr/>
+                    <a:lstStyle/>
+                    <a:p>
+                      <a:pPr algn="ctr"/>
+                      <a:endParaRPr lang="en-US" sz="1000" b="0" dirty="0"/>
+                    </a:p>
+                  </a:txBody>
+                  <a:tcPr anchor="ctr">
+                    <a:lnL w="12700" cmpd="sng">
+                      <a:noFill/>
+                    </a:lnL>
+                    <a:lnR w="12700" cmpd="sng">
+                      <a:noFill/>
+                    </a:lnR>
+                    <a:lnT w="12700" cmpd="sng">
+                      <a:noFill/>
+                    </a:lnT>
+                    <a:lnB w="38100" cmpd="sng">
+                      <a:noFill/>
+                    </a:lnB>
+                    <a:lnTlToBr w="12700" cmpd="sng">
+                      <a:noFill/>
+                      <a:prstDash val="solid"/>
+                    </a:lnTlToBr>
+                    <a:lnBlToTr w="12700" cmpd="sng">
+                      <a:noFill/>
+                      <a:prstDash val="solid"/>
+                    </a:lnBlToTr>
+                    <a:noFill/>
+                  </a:tcPr>
+                </a:tc>
+                <a:tc>
+                  <a:txBody>
+                    <a:bodyPr/>
+                    <a:lstStyle/>
+                    <a:p>
+                      <a:pPr algn="ctr"/>
+                      <a:endParaRPr lang="en-US" sz="1000" b="0" dirty="0"/>
+                    </a:p>
+                  </a:txBody>
+                  <a:tcPr anchor="ctr">
+                    <a:lnL w="12700" cmpd="sng">
+                      <a:noFill/>
+                    </a:lnL>
+                    <a:lnR w="12700" cmpd="sng">
+                      <a:noFill/>
+                    </a:lnR>
+                    <a:lnT w="12700" cmpd="sng">
+                      <a:noFill/>
+                    </a:lnT>
+                    <a:lnB w="38100" cmpd="sng">
+                      <a:noFill/>
+                    </a:lnB>
+                    <a:lnTlToBr w="12700" cmpd="sng">
+                      <a:noFill/>
+                      <a:prstDash val="solid"/>
+                    </a:lnTlToBr>
+                    <a:lnBlToTr w="12700" cmpd="sng">
+                      <a:noFill/>
+                      <a:prstDash val="solid"/>
+                    </a:lnBlToTr>
+                    <a:noFill/>
+                  </a:tcPr>
+                </a:tc>
+                <a:tc gridSpan="2">
+                  <a:txBody>
+                    <a:bodyPr/>
+                    <a:lstStyle/>
+                    <a:p>
+                      <a:pPr algn="ctr"/>
+                      <a:r>
+                        <a:rPr lang="en-US" sz="1000" b="0" dirty="0">
+                          <a:solidFill>
+                            <a:schemeClr val="tx1"/>
+                          </a:solidFill>
+                        </a:rPr>
+                        <a:t>Predicted</a:t>
+                      </a:r>
+                    </a:p>
+                  </a:txBody>
+                  <a:tcPr anchor="ctr">
+                    <a:lnL w="12700" cmpd="sng">
+                      <a:noFill/>
+                    </a:lnL>
+                    <a:lnR w="12700" cmpd="sng">
+                      <a:noFill/>
+                    </a:lnR>
+                    <a:lnT w="12700" cmpd="sng">
+                      <a:noFill/>
+                    </a:lnT>
+                    <a:lnB w="6350" cap="flat" cmpd="sng" algn="ctr">
+                      <a:solidFill>
+                        <a:schemeClr val="tx1"/>
+                      </a:solidFill>
+                      <a:prstDash val="solid"/>
+                      <a:round/>
+                      <a:headEnd type="none" w="med" len="med"/>
+                      <a:tailEnd type="none" w="med" len="med"/>
+                    </a:lnB>
+                    <a:lnTlToBr w="12700" cmpd="sng">
+                      <a:noFill/>
+                      <a:prstDash val="solid"/>
+                    </a:lnTlToBr>
+                    <a:lnBlToTr w="12700" cmpd="sng">
+                      <a:noFill/>
+                      <a:prstDash val="solid"/>
+                    </a:lnBlToTr>
+                    <a:noFill/>
+                  </a:tcPr>
+                </a:tc>
+                <a:tc hMerge="1">
+                  <a:txBody>
+                    <a:bodyPr/>
+                    <a:lstStyle/>
+                    <a:p>
+                      <a:endParaRPr lang="en-US" dirty="0"/>
+                    </a:p>
+                  </a:txBody>
+                  <a:tcPr>
+                    <a:lnL w="12700" cmpd="sng">
+                      <a:noFill/>
+                    </a:lnL>
+                    <a:lnR w="12700" cmpd="sng">
+                      <a:noFill/>
+                    </a:lnR>
+                    <a:lnT w="12700" cmpd="sng">
+                      <a:noFill/>
+                    </a:lnT>
+                    <a:lnB w="38100" cmpd="sng">
+                      <a:noFill/>
+                    </a:lnB>
+                    <a:lnTlToBr w="12700" cmpd="sng">
+                      <a:noFill/>
+                      <a:prstDash val="solid"/>
+                    </a:lnTlToBr>
+                    <a:lnBlToTr w="12700" cmpd="sng">
+                      <a:noFill/>
+                      <a:prstDash val="solid"/>
+                    </a:lnBlToTr>
+                    <a:noFill/>
+                  </a:tcPr>
+                </a:tc>
+                <a:extLst>
+                  <a:ext uri="{0D108BD9-81ED-4DB2-BD59-A6C34878D82A}">
+                    <a16:rowId xmlns:a16="http://schemas.microsoft.com/office/drawing/2014/main" val="1537043316"/>
+                  </a:ext>
+                </a:extLst>
+              </a:tr>
+              <a:tr h="240280">
+                <a:tc>
+                  <a:txBody>
+                    <a:bodyPr/>
+                    <a:lstStyle/>
+                    <a:p>
+                      <a:pPr algn="ctr"/>
+                      <a:endParaRPr lang="en-US" sz="1000" b="0"/>
+                    </a:p>
+                  </a:txBody>
+                  <a:tcPr anchor="ctr">
+                    <a:lnL w="12700" cmpd="sng">
+                      <a:noFill/>
+                    </a:lnL>
+                    <a:lnR w="12700" cmpd="sng">
+                      <a:noFill/>
+                    </a:lnR>
+                    <a:lnT w="38100" cmpd="sng">
+                      <a:noFill/>
+                    </a:lnT>
+                    <a:lnB w="12700" cmpd="sng">
+                      <a:noFill/>
+                    </a:lnB>
+                    <a:lnTlToBr w="12700" cmpd="sng">
+                      <a:noFill/>
+                      <a:prstDash val="solid"/>
+                    </a:lnTlToBr>
+                    <a:lnBlToTr w="12700" cmpd="sng">
+                      <a:noFill/>
+                      <a:prstDash val="solid"/>
+                    </a:lnBlToTr>
+                    <a:noFill/>
+                  </a:tcPr>
+                </a:tc>
+                <a:tc>
+                  <a:txBody>
+                    <a:bodyPr/>
+                    <a:lstStyle/>
+                    <a:p>
+                      <a:pPr algn="ctr"/>
+                      <a:endParaRPr lang="en-US" sz="1000" b="0" dirty="0"/>
+                    </a:p>
+                  </a:txBody>
+                  <a:tcPr anchor="ctr">
+                    <a:lnL w="12700" cmpd="sng">
+                      <a:noFill/>
+                    </a:lnL>
+                    <a:lnR w="6350" cap="flat" cmpd="sng" algn="ctr">
+                      <a:solidFill>
+                        <a:schemeClr val="tx1"/>
+                      </a:solidFill>
+                      <a:prstDash val="solid"/>
+                      <a:round/>
+                      <a:headEnd type="none" w="med" len="med"/>
+                      <a:tailEnd type="none" w="med" len="med"/>
+                    </a:lnR>
+                    <a:lnT w="38100" cmpd="sng">
+                      <a:noFill/>
+                    </a:lnT>
+                    <a:lnB w="6350" cap="flat" cmpd="sng" algn="ctr">
+                      <a:solidFill>
+                        <a:schemeClr val="tx1"/>
+                      </a:solidFill>
+                      <a:prstDash val="solid"/>
+                      <a:round/>
+                      <a:headEnd type="none" w="med" len="med"/>
+                      <a:tailEnd type="none" w="med" len="med"/>
+                    </a:lnB>
+                    <a:lnTlToBr w="12700" cmpd="sng">
+                      <a:noFill/>
+                      <a:prstDash val="solid"/>
+                    </a:lnTlToBr>
+                    <a:lnBlToTr w="12700" cmpd="sng">
+                      <a:noFill/>
+                      <a:prstDash val="solid"/>
+                    </a:lnBlToTr>
+                    <a:noFill/>
+                  </a:tcPr>
+                </a:tc>
+                <a:tc>
+                  <a:txBody>
+                    <a:bodyPr/>
+                    <a:lstStyle/>
+                    <a:p>
+                      <a:pPr algn="ctr"/>
+                      <a:r>
+                        <a:rPr lang="en-US" sz="1000" b="0" dirty="0"/>
+                        <a:t>NOT Crude Oil</a:t>
+                      </a:r>
+                    </a:p>
+                  </a:txBody>
+                  <a:tcPr anchor="ctr">
+                    <a:lnL w="6350" cap="flat" cmpd="sng" algn="ctr">
+                      <a:solidFill>
+                        <a:schemeClr val="tx1"/>
+                      </a:solidFill>
+                      <a:prstDash val="solid"/>
+                      <a:round/>
+                      <a:headEnd type="none" w="med" len="med"/>
+                      <a:tailEnd type="none" w="med" len="med"/>
+                    </a:lnL>
+                    <a:lnR w="12700" cmpd="sng">
+                      <a:noFill/>
+                    </a:lnR>
+                    <a:lnT w="6350" cap="flat" cmpd="sng" algn="ctr">
+                      <a:solidFill>
+                        <a:schemeClr val="tx1"/>
+                      </a:solidFill>
+                      <a:prstDash val="solid"/>
+                      <a:round/>
+                      <a:headEnd type="none" w="med" len="med"/>
+                      <a:tailEnd type="none" w="med" len="med"/>
+                    </a:lnT>
+                    <a:lnB w="6350" cap="flat" cmpd="sng" algn="ctr">
+                      <a:solidFill>
+                        <a:schemeClr val="tx1"/>
+                      </a:solidFill>
+                      <a:prstDash val="solid"/>
+                      <a:round/>
+                      <a:headEnd type="none" w="med" len="med"/>
+                      <a:tailEnd type="none" w="med" len="med"/>
+                    </a:lnB>
+                    <a:lnTlToBr w="12700" cmpd="sng">
+                      <a:noFill/>
+                      <a:prstDash val="solid"/>
+                    </a:lnTlToBr>
+                    <a:lnBlToTr w="12700" cmpd="sng">
+                      <a:noFill/>
+                      <a:prstDash val="solid"/>
+                    </a:lnBlToTr>
+                    <a:noFill/>
+                  </a:tcPr>
+                </a:tc>
+                <a:tc>
+                  <a:txBody>
+                    <a:bodyPr/>
+                    <a:lstStyle/>
+                    <a:p>
+                      <a:pPr algn="ctr"/>
+                      <a:r>
+                        <a:rPr lang="en-US" sz="1000" b="0" dirty="0"/>
+                        <a:t>Crude Oil</a:t>
+                      </a:r>
+                    </a:p>
+                  </a:txBody>
+                  <a:tcPr anchor="ctr">
+                    <a:lnL w="12700" cmpd="sng">
+                      <a:noFill/>
+                    </a:lnL>
+                    <a:lnR w="6350" cap="flat" cmpd="sng" algn="ctr">
+                      <a:solidFill>
+                        <a:schemeClr val="tx1"/>
+                      </a:solidFill>
+                      <a:prstDash val="solid"/>
+                      <a:round/>
+                      <a:headEnd type="none" w="med" len="med"/>
+                      <a:tailEnd type="none" w="med" len="med"/>
+                    </a:lnR>
+                    <a:lnT w="6350" cap="flat" cmpd="sng" algn="ctr">
+                      <a:solidFill>
+                        <a:schemeClr val="tx1"/>
+                      </a:solidFill>
+                      <a:prstDash val="solid"/>
+                      <a:round/>
+                      <a:headEnd type="none" w="med" len="med"/>
+                      <a:tailEnd type="none" w="med" len="med"/>
+                    </a:lnT>
+                    <a:lnB w="6350" cap="flat" cmpd="sng" algn="ctr">
+                      <a:solidFill>
+                        <a:schemeClr val="tx1"/>
+                      </a:solidFill>
+                      <a:prstDash val="solid"/>
+                      <a:round/>
+                      <a:headEnd type="none" w="med" len="med"/>
+                      <a:tailEnd type="none" w="med" len="med"/>
+                    </a:lnB>
+                    <a:lnTlToBr w="12700" cmpd="sng">
+                      <a:noFill/>
+                      <a:prstDash val="solid"/>
+                    </a:lnTlToBr>
+                    <a:lnBlToTr w="12700" cmpd="sng">
+                      <a:noFill/>
+                      <a:prstDash val="solid"/>
+                    </a:lnBlToTr>
+                    <a:noFill/>
+                  </a:tcPr>
+                </a:tc>
+                <a:extLst>
+                  <a:ext uri="{0D108BD9-81ED-4DB2-BD59-A6C34878D82A}">
+                    <a16:rowId xmlns:a16="http://schemas.microsoft.com/office/drawing/2014/main" val="1468601158"/>
+                  </a:ext>
+                </a:extLst>
+              </a:tr>
+              <a:tr h="156818">
+                <a:tc rowSpan="2">
+                  <a:txBody>
+                    <a:bodyPr/>
+                    <a:lstStyle/>
+                    <a:p>
+                      <a:pPr algn="ctr"/>
+                      <a:r>
+                        <a:rPr lang="en-US" sz="1000" b="0" dirty="0"/>
+                        <a:t>Actual</a:t>
+                      </a:r>
+                    </a:p>
+                  </a:txBody>
+                  <a:tcPr vert="vert270" anchor="ctr">
+                    <a:lnL w="12700" cmpd="sng">
+                      <a:noFill/>
+                    </a:lnL>
+                    <a:lnR w="6350" cap="flat" cmpd="sng" algn="ctr">
+                      <a:solidFill>
+                        <a:schemeClr val="tx1"/>
+                      </a:solidFill>
+                      <a:prstDash val="solid"/>
+                      <a:round/>
+                      <a:headEnd type="none" w="med" len="med"/>
+                      <a:tailEnd type="none" w="med" len="med"/>
+                    </a:lnR>
+                    <a:lnT w="12700" cmpd="sng">
+                      <a:noFill/>
+                    </a:lnT>
+                    <a:lnB w="12700" cmpd="sng">
+                      <a:noFill/>
+                    </a:lnB>
+                    <a:lnTlToBr w="12700" cmpd="sng">
+                      <a:noFill/>
+                      <a:prstDash val="solid"/>
+                    </a:lnTlToBr>
+                    <a:lnBlToTr w="12700" cmpd="sng">
+                      <a:noFill/>
+                      <a:prstDash val="solid"/>
+                    </a:lnBlToTr>
+                    <a:noFill/>
+                  </a:tcPr>
+                </a:tc>
+                <a:tc>
+                  <a:txBody>
+                    <a:bodyPr/>
+                    <a:lstStyle/>
+                    <a:p>
+                      <a:pPr algn="ctr"/>
+                      <a:r>
+                        <a:rPr lang="en-US" sz="1000" b="0" dirty="0"/>
+                        <a:t>NOT Crude Oil</a:t>
+                      </a:r>
+                    </a:p>
+                  </a:txBody>
+                  <a:tcPr anchor="ctr">
+                    <a:lnL w="6350" cap="flat" cmpd="sng" algn="ctr">
+                      <a:solidFill>
+                        <a:schemeClr val="tx1"/>
+                      </a:solidFill>
+                      <a:prstDash val="solid"/>
+                      <a:round/>
+                      <a:headEnd type="none" w="med" len="med"/>
+                      <a:tailEnd type="none" w="med" len="med"/>
+                    </a:lnL>
+                    <a:lnR w="6350" cap="flat" cmpd="sng" algn="ctr">
+                      <a:solidFill>
+                        <a:schemeClr val="tx1"/>
+                      </a:solidFill>
+                      <a:prstDash val="solid"/>
+                      <a:round/>
+                      <a:headEnd type="none" w="med" len="med"/>
+                      <a:tailEnd type="none" w="med" len="med"/>
+                    </a:lnR>
+                    <a:lnT w="6350" cap="flat" cmpd="sng" algn="ctr">
+                      <a:solidFill>
+                        <a:schemeClr val="tx1"/>
+                      </a:solidFill>
+                      <a:prstDash val="solid"/>
+                      <a:round/>
+                      <a:headEnd type="none" w="med" len="med"/>
+                      <a:tailEnd type="none" w="med" len="med"/>
+                    </a:lnT>
+                    <a:lnB w="12700" cmpd="sng">
+                      <a:noFill/>
+                    </a:lnB>
+                    <a:lnTlToBr w="12700" cmpd="sng">
+                      <a:noFill/>
+                      <a:prstDash val="solid"/>
+                    </a:lnTlToBr>
+                    <a:lnBlToTr w="12700" cmpd="sng">
+                      <a:noFill/>
+                      <a:prstDash val="solid"/>
+                    </a:lnBlToTr>
+                    <a:noFill/>
+                  </a:tcPr>
+                </a:tc>
+                <a:tc>
+                  <a:txBody>
+                    <a:bodyPr/>
+                    <a:lstStyle/>
+                    <a:p>
+                      <a:pPr algn="ctr"/>
+                      <a:r>
+                        <a:rPr lang="en-US" sz="1000" b="0" dirty="0">
+                          <a:solidFill>
+                            <a:schemeClr val="bg1"/>
+                          </a:solidFill>
+                        </a:rPr>
+                        <a:t>77</a:t>
+                      </a:r>
+                    </a:p>
+                  </a:txBody>
+                  <a:tcPr anchor="ctr">
+                    <a:lnL w="6350" cap="flat" cmpd="sng" algn="ctr">
+                      <a:solidFill>
+                        <a:schemeClr val="tx1"/>
+                      </a:solidFill>
+                      <a:prstDash val="solid"/>
+                      <a:round/>
+                      <a:headEnd type="none" w="med" len="med"/>
+                      <a:tailEnd type="none" w="med" len="med"/>
+                    </a:lnL>
+                    <a:lnR w="12700" cmpd="sng">
+                      <a:noFill/>
+                    </a:lnR>
+                    <a:lnT w="6350" cap="flat" cmpd="sng" algn="ctr">
+                      <a:solidFill>
+                        <a:schemeClr val="tx1"/>
+                      </a:solidFill>
+                      <a:prstDash val="solid"/>
+                      <a:round/>
+                      <a:headEnd type="none" w="med" len="med"/>
+                      <a:tailEnd type="none" w="med" len="med"/>
+                    </a:lnT>
+                    <a:lnB w="12700" cmpd="sng">
+                      <a:noFill/>
+                    </a:lnB>
+                    <a:lnTlToBr w="12700" cmpd="sng">
+                      <a:noFill/>
+                      <a:prstDash val="solid"/>
+                    </a:lnTlToBr>
+                    <a:lnBlToTr w="12700" cmpd="sng">
+                      <a:noFill/>
+                      <a:prstDash val="solid"/>
+                    </a:lnBlToTr>
+                    <a:solidFill>
+                      <a:srgbClr val="2DAAAF"/>
+                    </a:solidFill>
+                  </a:tcPr>
+                </a:tc>
+                <a:tc>
+                  <a:txBody>
+                    <a:bodyPr/>
+                    <a:lstStyle/>
+                    <a:p>
+                      <a:pPr algn="ctr"/>
+                      <a:r>
+                        <a:rPr lang="en-US" sz="1000" b="0" dirty="0">
+                          <a:solidFill>
+                            <a:schemeClr val="bg1"/>
+                          </a:solidFill>
+                        </a:rPr>
+                        <a:t>6</a:t>
+                      </a:r>
+                    </a:p>
+                  </a:txBody>
+                  <a:tcPr anchor="ctr">
+                    <a:lnL w="12700" cmpd="sng">
+                      <a:noFill/>
+                    </a:lnL>
+                    <a:lnR w="6350" cap="flat" cmpd="sng" algn="ctr">
+                      <a:solidFill>
+                        <a:schemeClr val="tx1"/>
+                      </a:solidFill>
+                      <a:prstDash val="solid"/>
+                      <a:round/>
+                      <a:headEnd type="none" w="med" len="med"/>
+                      <a:tailEnd type="none" w="med" len="med"/>
+                    </a:lnR>
+                    <a:lnT w="6350" cap="flat" cmpd="sng" algn="ctr">
+                      <a:solidFill>
+                        <a:schemeClr val="tx1"/>
+                      </a:solidFill>
+                      <a:prstDash val="solid"/>
+                      <a:round/>
+                      <a:headEnd type="none" w="med" len="med"/>
+                      <a:tailEnd type="none" w="med" len="med"/>
+                    </a:lnT>
+                    <a:lnB w="12700" cmpd="sng">
+                      <a:noFill/>
+                    </a:lnB>
+                    <a:lnTlToBr w="12700" cmpd="sng">
+                      <a:noFill/>
+                      <a:prstDash val="solid"/>
+                    </a:lnTlToBr>
+                    <a:lnBlToTr w="12700" cmpd="sng">
+                      <a:noFill/>
+                      <a:prstDash val="solid"/>
+                    </a:lnBlToTr>
+                    <a:solidFill>
+                      <a:srgbClr val="175C61"/>
+                    </a:solidFill>
+                  </a:tcPr>
+                </a:tc>
+                <a:extLst>
+                  <a:ext uri="{0D108BD9-81ED-4DB2-BD59-A6C34878D82A}">
+                    <a16:rowId xmlns:a16="http://schemas.microsoft.com/office/drawing/2014/main" val="4050004438"/>
+                  </a:ext>
+                </a:extLst>
+              </a:tr>
+              <a:tr h="156818">
+                <a:tc vMerge="1">
+                  <a:txBody>
+                    <a:bodyPr/>
+                    <a:lstStyle/>
+                    <a:p>
+                      <a:endParaRPr lang="en-US" dirty="0"/>
+                    </a:p>
+                  </a:txBody>
+                  <a:tcPr>
+                    <a:lnL w="12700" cmpd="sng">
+                      <a:noFill/>
+                    </a:lnL>
+                    <a:lnR w="12700" cmpd="sng">
+                      <a:noFill/>
+                    </a:lnR>
+                    <a:lnT w="12700" cmpd="sng">
+                      <a:noFill/>
+                    </a:lnT>
+                    <a:lnB w="12700" cmpd="sng">
+                      <a:noFill/>
+                    </a:lnB>
+                    <a:lnTlToBr w="12700" cmpd="sng">
+                      <a:noFill/>
+                      <a:prstDash val="solid"/>
+                    </a:lnTlToBr>
+                    <a:lnBlToTr w="12700" cmpd="sng">
+                      <a:noFill/>
+                      <a:prstDash val="solid"/>
+                    </a:lnBlToTr>
+                    <a:noFill/>
+                  </a:tcPr>
+                </a:tc>
+                <a:tc>
+                  <a:txBody>
+                    <a:bodyPr/>
+                    <a:lstStyle/>
+                    <a:p>
+                      <a:pPr algn="ctr"/>
+                      <a:r>
+                        <a:rPr lang="en-US" sz="1000" b="0" dirty="0"/>
+                        <a:t>Crude Oil</a:t>
+                      </a:r>
+                    </a:p>
+                  </a:txBody>
+                  <a:tcPr anchor="ctr">
+                    <a:lnL w="6350" cap="flat" cmpd="sng" algn="ctr">
+                      <a:solidFill>
+                        <a:schemeClr val="tx1"/>
+                      </a:solidFill>
+                      <a:prstDash val="solid"/>
+                      <a:round/>
+                      <a:headEnd type="none" w="med" len="med"/>
+                      <a:tailEnd type="none" w="med" len="med"/>
+                    </a:lnL>
+                    <a:lnR w="6350" cap="flat" cmpd="sng" algn="ctr">
+                      <a:solidFill>
+                        <a:schemeClr val="tx1"/>
+                      </a:solidFill>
+                      <a:prstDash val="solid"/>
+                      <a:round/>
+                      <a:headEnd type="none" w="med" len="med"/>
+                      <a:tailEnd type="none" w="med" len="med"/>
+                    </a:lnR>
+                    <a:lnT w="12700" cmpd="sng">
+                      <a:noFill/>
+                    </a:lnT>
+                    <a:lnB w="6350" cap="flat" cmpd="sng" algn="ctr">
+                      <a:solidFill>
+                        <a:schemeClr val="tx1"/>
+                      </a:solidFill>
+                      <a:prstDash val="solid"/>
+                      <a:round/>
+                      <a:headEnd type="none" w="med" len="med"/>
+                      <a:tailEnd type="none" w="med" len="med"/>
+                    </a:lnB>
+                    <a:lnTlToBr w="12700" cmpd="sng">
+                      <a:noFill/>
+                      <a:prstDash val="solid"/>
+                    </a:lnTlToBr>
+                    <a:lnBlToTr w="12700" cmpd="sng">
+                      <a:noFill/>
+                      <a:prstDash val="solid"/>
+                    </a:lnBlToTr>
+                    <a:noFill/>
+                  </a:tcPr>
+                </a:tc>
+                <a:tc>
+                  <a:txBody>
+                    <a:bodyPr/>
+                    <a:lstStyle/>
+                    <a:p>
+                      <a:pPr algn="ctr"/>
+                      <a:r>
+                        <a:rPr lang="en-US" sz="1000" b="0" dirty="0">
+                          <a:solidFill>
+                            <a:schemeClr val="bg1"/>
+                          </a:solidFill>
+                        </a:rPr>
+                        <a:t>17</a:t>
+                      </a:r>
+                    </a:p>
+                  </a:txBody>
+                  <a:tcPr anchor="ctr">
+                    <a:lnL w="6350" cap="flat" cmpd="sng" algn="ctr">
+                      <a:solidFill>
+                        <a:schemeClr val="tx1"/>
+                      </a:solidFill>
+                      <a:prstDash val="solid"/>
+                      <a:round/>
+                      <a:headEnd type="none" w="med" len="med"/>
+                      <a:tailEnd type="none" w="med" len="med"/>
+                    </a:lnL>
+                    <a:lnR w="12700" cmpd="sng">
+                      <a:noFill/>
+                    </a:lnR>
+                    <a:lnT w="12700" cmpd="sng">
+                      <a:noFill/>
+                    </a:lnT>
+                    <a:lnB w="6350" cap="flat" cmpd="sng" algn="ctr">
+                      <a:solidFill>
+                        <a:schemeClr val="tx1"/>
+                      </a:solidFill>
+                      <a:prstDash val="solid"/>
+                      <a:round/>
+                      <a:headEnd type="none" w="med" len="med"/>
+                      <a:tailEnd type="none" w="med" len="med"/>
+                    </a:lnB>
+                    <a:lnTlToBr w="12700" cmpd="sng">
+                      <a:noFill/>
+                      <a:prstDash val="solid"/>
+                    </a:lnTlToBr>
+                    <a:lnBlToTr w="12700" cmpd="sng">
+                      <a:noFill/>
+                      <a:prstDash val="solid"/>
+                    </a:lnBlToTr>
+                    <a:solidFill>
+                      <a:srgbClr val="175C61"/>
+                    </a:solidFill>
+                  </a:tcPr>
+                </a:tc>
+                <a:tc>
+                  <a:txBody>
+                    <a:bodyPr/>
+                    <a:lstStyle/>
+                    <a:p>
+                      <a:pPr algn="ctr"/>
+                      <a:r>
+                        <a:rPr lang="en-US" sz="1000" b="0" dirty="0">
+                          <a:solidFill>
+                            <a:schemeClr val="bg1"/>
+                          </a:solidFill>
+                        </a:rPr>
+                        <a:t>6</a:t>
+                      </a:r>
+                    </a:p>
+                  </a:txBody>
+                  <a:tcPr anchor="ctr">
+                    <a:lnL w="12700" cmpd="sng">
+                      <a:noFill/>
+                    </a:lnL>
+                    <a:lnR w="6350" cap="flat" cmpd="sng" algn="ctr">
+                      <a:solidFill>
+                        <a:schemeClr val="tx1"/>
+                      </a:solidFill>
+                      <a:prstDash val="solid"/>
+                      <a:round/>
+                      <a:headEnd type="none" w="med" len="med"/>
+                      <a:tailEnd type="none" w="med" len="med"/>
+                    </a:lnR>
+                    <a:lnT w="12700" cmpd="sng">
+                      <a:noFill/>
+                    </a:lnT>
+                    <a:lnB w="6350" cap="flat" cmpd="sng" algn="ctr">
+                      <a:solidFill>
+                        <a:schemeClr val="tx1"/>
+                      </a:solidFill>
+                      <a:prstDash val="solid"/>
+                      <a:round/>
+                      <a:headEnd type="none" w="med" len="med"/>
+                      <a:tailEnd type="none" w="med" len="med"/>
+                    </a:lnB>
+                    <a:lnTlToBr w="12700" cmpd="sng">
+                      <a:noFill/>
+                      <a:prstDash val="solid"/>
+                    </a:lnTlToBr>
+                    <a:lnBlToTr w="12700" cmpd="sng">
+                      <a:noFill/>
+                      <a:prstDash val="solid"/>
+                    </a:lnBlToTr>
+                    <a:solidFill>
+                      <a:srgbClr val="2DAAAF"/>
+                    </a:solidFill>
+                  </a:tcPr>
+                </a:tc>
+                <a:extLst>
+                  <a:ext uri="{0D108BD9-81ED-4DB2-BD59-A6C34878D82A}">
+                    <a16:rowId xmlns:a16="http://schemas.microsoft.com/office/drawing/2014/main" val="2258521280"/>
+                  </a:ext>
+                </a:extLst>
+              </a:tr>
+            </a:tbl>
+          </a:graphicData>
+        </a:graphic>
+      </p:graphicFrame>
+      <p:graphicFrame>
+        <p:nvGraphicFramePr>
+          <p:cNvPr id="23" name="Table 22">
+            <a:extLst>
+              <a:ext uri="{FF2B5EF4-FFF2-40B4-BE49-F238E27FC236}">
+                <a16:creationId xmlns:a16="http://schemas.microsoft.com/office/drawing/2014/main" id="{8652646B-0683-5830-436F-38C3221D428A}"/>
+              </a:ext>
+            </a:extLst>
+          </p:cNvPr>
+          <p:cNvGraphicFramePr>
+            <a:graphicFrameLocks noGrp="1"/>
+          </p:cNvGraphicFramePr>
+          <p:nvPr>
+            <p:extLst>
+              <p:ext uri="{D42A27DB-BD31-4B8C-83A1-F6EECF244321}">
+                <p14:modId xmlns:p14="http://schemas.microsoft.com/office/powerpoint/2010/main" val="2090693680"/>
+              </p:ext>
+            </p:extLst>
+          </p:nvPr>
+        </p:nvGraphicFramePr>
+        <p:xfrm>
+          <a:off x="9217294" y="2320104"/>
+          <a:ext cx="2182948" cy="731520"/>
+        </p:xfrm>
+        <a:graphic>
+          <a:graphicData uri="http://schemas.openxmlformats.org/drawingml/2006/table">
+            <a:tbl>
+              <a:tblPr firstRow="1" bandRow="1">
+                <a:tableStyleId>{5C22544A-7EE6-4342-B048-85BDC9FD1C3A}</a:tableStyleId>
+              </a:tblPr>
+              <a:tblGrid>
+                <a:gridCol w="927946">
+                  <a:extLst>
+                    <a:ext uri="{9D8B030D-6E8A-4147-A177-3AD203B41FA5}">
+                      <a16:colId xmlns:a16="http://schemas.microsoft.com/office/drawing/2014/main" val="1561686530"/>
+                    </a:ext>
+                  </a:extLst>
+                </a:gridCol>
+                <a:gridCol w="662819">
+                  <a:extLst>
+                    <a:ext uri="{9D8B030D-6E8A-4147-A177-3AD203B41FA5}">
+                      <a16:colId xmlns:a16="http://schemas.microsoft.com/office/drawing/2014/main" val="933617151"/>
+                    </a:ext>
+                  </a:extLst>
+                </a:gridCol>
+                <a:gridCol w="592183">
+                  <a:extLst>
+                    <a:ext uri="{9D8B030D-6E8A-4147-A177-3AD203B41FA5}">
+                      <a16:colId xmlns:a16="http://schemas.microsoft.com/office/drawing/2014/main" val="800553664"/>
+                    </a:ext>
+                  </a:extLst>
+                </a:gridCol>
+              </a:tblGrid>
+              <a:tr h="135101">
+                <a:tc>
+                  <a:txBody>
+                    <a:bodyPr/>
+                    <a:lstStyle/>
+                    <a:p>
+                      <a:pPr algn="ctr"/>
+                      <a:endParaRPr lang="en-US" sz="1000" b="0" dirty="0">
+                        <a:solidFill>
+                          <a:schemeClr val="tx1"/>
+                        </a:solidFill>
+                      </a:endParaRPr>
+                    </a:p>
+                  </a:txBody>
+                  <a:tcPr anchor="ctr">
+                    <a:lnR w="6350" cap="flat" cmpd="sng" algn="ctr">
+                      <a:solidFill>
+                        <a:schemeClr val="tx1"/>
+                      </a:solidFill>
+                      <a:prstDash val="solid"/>
+                      <a:round/>
+                      <a:headEnd type="none" w="med" len="med"/>
+                      <a:tailEnd type="none" w="med" len="med"/>
+                    </a:lnR>
+                    <a:lnB w="6350" cap="flat" cmpd="sng" algn="ctr">
+                      <a:solidFill>
+                        <a:schemeClr val="tx1"/>
+                      </a:solidFill>
+                      <a:prstDash val="solid"/>
+                      <a:round/>
+                      <a:headEnd type="none" w="med" len="med"/>
+                      <a:tailEnd type="none" w="med" len="med"/>
+                    </a:lnB>
+                    <a:noFill/>
+                  </a:tcPr>
+                </a:tc>
+                <a:tc>
+                  <a:txBody>
+                    <a:bodyPr/>
+                    <a:lstStyle/>
+                    <a:p>
+                      <a:pPr algn="ctr"/>
+                      <a:r>
+                        <a:rPr lang="en-US" sz="1000" b="0" dirty="0">
+                          <a:solidFill>
+                            <a:schemeClr val="tx1"/>
+                          </a:solidFill>
+                        </a:rPr>
+                        <a:t>Precision</a:t>
+                      </a:r>
+                    </a:p>
+                  </a:txBody>
+                  <a:tcPr anchor="ctr">
+                    <a:lnL w="6350" cap="flat" cmpd="sng" algn="ctr">
+                      <a:solidFill>
+                        <a:schemeClr val="tx1"/>
+                      </a:solidFill>
+                      <a:prstDash val="solid"/>
+                      <a:round/>
+                      <a:headEnd type="none" w="med" len="med"/>
+                      <a:tailEnd type="none" w="med" len="med"/>
+                    </a:lnL>
+                    <a:lnT w="6350" cap="flat" cmpd="sng" algn="ctr">
+                      <a:solidFill>
+                        <a:schemeClr val="tx1"/>
+                      </a:solidFill>
+                      <a:prstDash val="solid"/>
+                      <a:round/>
+                      <a:headEnd type="none" w="med" len="med"/>
+                      <a:tailEnd type="none" w="med" len="med"/>
+                    </a:lnT>
+                    <a:lnB w="6350" cap="flat" cmpd="sng" algn="ctr">
+                      <a:solidFill>
+                        <a:schemeClr val="tx1"/>
+                      </a:solidFill>
+                      <a:prstDash val="solid"/>
+                      <a:round/>
+                      <a:headEnd type="none" w="med" len="med"/>
+                      <a:tailEnd type="none" w="med" len="med"/>
+                    </a:lnB>
+                    <a:noFill/>
+                  </a:tcPr>
+                </a:tc>
+                <a:tc>
+                  <a:txBody>
+                    <a:bodyPr/>
+                    <a:lstStyle/>
+                    <a:p>
+                      <a:pPr algn="ctr"/>
+                      <a:r>
+                        <a:rPr lang="en-US" sz="1000" b="0" dirty="0">
+                          <a:solidFill>
+                            <a:schemeClr val="tx1"/>
+                          </a:solidFill>
+                        </a:rPr>
+                        <a:t>Recall</a:t>
+                      </a:r>
+                    </a:p>
+                  </a:txBody>
+                  <a:tcPr anchor="ctr">
+                    <a:lnR w="6350" cap="flat" cmpd="sng" algn="ctr">
+                      <a:solidFill>
+                        <a:schemeClr val="tx1"/>
+                      </a:solidFill>
+                      <a:prstDash val="solid"/>
+                      <a:round/>
+                      <a:headEnd type="none" w="med" len="med"/>
+                      <a:tailEnd type="none" w="med" len="med"/>
+                    </a:lnR>
+                    <a:lnT w="6350" cap="flat" cmpd="sng" algn="ctr">
+                      <a:solidFill>
+                        <a:schemeClr val="tx1"/>
+                      </a:solidFill>
+                      <a:prstDash val="solid"/>
+                      <a:round/>
+                      <a:headEnd type="none" w="med" len="med"/>
+                      <a:tailEnd type="none" w="med" len="med"/>
+                    </a:lnT>
+                    <a:lnB w="6350" cap="flat" cmpd="sng" algn="ctr">
+                      <a:solidFill>
+                        <a:schemeClr val="tx1"/>
+                      </a:solidFill>
+                      <a:prstDash val="solid"/>
+                      <a:round/>
+                      <a:headEnd type="none" w="med" len="med"/>
+                      <a:tailEnd type="none" w="med" len="med"/>
+                    </a:lnB>
+                    <a:noFill/>
+                  </a:tcPr>
+                </a:tc>
+                <a:extLst>
+                  <a:ext uri="{0D108BD9-81ED-4DB2-BD59-A6C34878D82A}">
+                    <a16:rowId xmlns:a16="http://schemas.microsoft.com/office/drawing/2014/main" val="1774489592"/>
+                  </a:ext>
+                </a:extLst>
+              </a:tr>
+              <a:tr h="135101">
+                <a:tc>
+                  <a:txBody>
+                    <a:bodyPr/>
+                    <a:lstStyle/>
+                    <a:p>
+                      <a:pPr algn="ctr"/>
+                      <a:r>
+                        <a:rPr lang="en-US" sz="1000" b="0" dirty="0">
+                          <a:solidFill>
+                            <a:schemeClr val="tx1"/>
+                          </a:solidFill>
+                        </a:rPr>
+                        <a:t>NOT Crude Oil</a:t>
+                      </a:r>
+                    </a:p>
+                  </a:txBody>
+                  <a:tcPr anchor="ctr">
+                    <a:lnL w="6350" cap="flat" cmpd="sng" algn="ctr">
+                      <a:solidFill>
+                        <a:schemeClr val="tx1"/>
+                      </a:solidFill>
+                      <a:prstDash val="solid"/>
+                      <a:round/>
+                      <a:headEnd type="none" w="med" len="med"/>
+                      <a:tailEnd type="none" w="med" len="med"/>
+                    </a:lnL>
+                    <a:lnR w="6350" cap="flat" cmpd="sng" algn="ctr">
+                      <a:solidFill>
+                        <a:schemeClr val="tx1"/>
+                      </a:solidFill>
+                      <a:prstDash val="solid"/>
+                      <a:round/>
+                      <a:headEnd type="none" w="med" len="med"/>
+                      <a:tailEnd type="none" w="med" len="med"/>
+                    </a:lnR>
+                    <a:lnT w="6350" cap="flat" cmpd="sng" algn="ctr">
+                      <a:solidFill>
+                        <a:schemeClr val="tx1"/>
+                      </a:solidFill>
+                      <a:prstDash val="solid"/>
+                      <a:round/>
+                      <a:headEnd type="none" w="med" len="med"/>
+                      <a:tailEnd type="none" w="med" len="med"/>
+                    </a:lnT>
+                    <a:noFill/>
+                  </a:tcPr>
+                </a:tc>
+                <a:tc>
+                  <a:txBody>
+                    <a:bodyPr/>
+                    <a:lstStyle/>
+                    <a:p>
+                      <a:pPr algn="ctr"/>
+                      <a:r>
+                        <a:rPr lang="en-US" sz="1000" b="0" dirty="0">
+                          <a:solidFill>
+                            <a:schemeClr val="tx1"/>
+                          </a:solidFill>
+                        </a:rPr>
+                        <a:t>0.82</a:t>
+                      </a:r>
+                    </a:p>
+                  </a:txBody>
+                  <a:tcPr anchor="ctr">
+                    <a:lnL w="6350" cap="flat" cmpd="sng" algn="ctr">
+                      <a:solidFill>
+                        <a:schemeClr val="tx1"/>
+                      </a:solidFill>
+                      <a:prstDash val="solid"/>
+                      <a:round/>
+                      <a:headEnd type="none" w="med" len="med"/>
+                      <a:tailEnd type="none" w="med" len="med"/>
+                    </a:lnL>
+                    <a:lnT w="6350" cap="flat" cmpd="sng" algn="ctr">
+                      <a:solidFill>
+                        <a:schemeClr val="tx1"/>
+                      </a:solidFill>
+                      <a:prstDash val="solid"/>
+                      <a:round/>
+                      <a:headEnd type="none" w="med" len="med"/>
+                      <a:tailEnd type="none" w="med" len="med"/>
+                    </a:lnT>
+                    <a:noFill/>
+                  </a:tcPr>
+                </a:tc>
+                <a:tc>
+                  <a:txBody>
+                    <a:bodyPr/>
+                    <a:lstStyle/>
+                    <a:p>
+                      <a:pPr algn="ctr"/>
+                      <a:r>
+                        <a:rPr lang="en-US" sz="1000" b="0" dirty="0">
+                          <a:solidFill>
+                            <a:schemeClr val="tx1"/>
+                          </a:solidFill>
+                        </a:rPr>
+                        <a:t>0.93</a:t>
+                      </a:r>
+                    </a:p>
+                  </a:txBody>
+                  <a:tcPr anchor="ctr">
+                    <a:lnR w="6350" cap="flat" cmpd="sng" algn="ctr">
+                      <a:solidFill>
+                        <a:schemeClr val="tx1"/>
+                      </a:solidFill>
+                      <a:prstDash val="solid"/>
+                      <a:round/>
+                      <a:headEnd type="none" w="med" len="med"/>
+                      <a:tailEnd type="none" w="med" len="med"/>
+                    </a:lnR>
+                    <a:lnT w="6350" cap="flat" cmpd="sng" algn="ctr">
+                      <a:solidFill>
+                        <a:schemeClr val="tx1"/>
+                      </a:solidFill>
+                      <a:prstDash val="solid"/>
+                      <a:round/>
+                      <a:headEnd type="none" w="med" len="med"/>
+                      <a:tailEnd type="none" w="med" len="med"/>
+                    </a:lnT>
+                    <a:noFill/>
+                  </a:tcPr>
+                </a:tc>
+                <a:extLst>
+                  <a:ext uri="{0D108BD9-81ED-4DB2-BD59-A6C34878D82A}">
+                    <a16:rowId xmlns:a16="http://schemas.microsoft.com/office/drawing/2014/main" val="1959904668"/>
+                  </a:ext>
+                </a:extLst>
+              </a:tr>
+              <a:tr h="135101">
+                <a:tc>
+                  <a:txBody>
+                    <a:bodyPr/>
+                    <a:lstStyle/>
+                    <a:p>
+                      <a:pPr algn="ctr"/>
+                      <a:r>
+                        <a:rPr lang="en-US" sz="1000" b="0" dirty="0">
+                          <a:solidFill>
+                            <a:schemeClr val="tx1"/>
+                          </a:solidFill>
+                        </a:rPr>
+                        <a:t>Crude Oil</a:t>
+                      </a:r>
+                    </a:p>
+                  </a:txBody>
+                  <a:tcPr anchor="ctr">
+                    <a:lnL w="6350" cap="flat" cmpd="sng" algn="ctr">
+                      <a:solidFill>
+                        <a:schemeClr val="tx1"/>
+                      </a:solidFill>
+                      <a:prstDash val="solid"/>
+                      <a:round/>
+                      <a:headEnd type="none" w="med" len="med"/>
+                      <a:tailEnd type="none" w="med" len="med"/>
+                    </a:lnL>
+                    <a:lnR w="6350" cap="flat" cmpd="sng" algn="ctr">
+                      <a:solidFill>
+                        <a:schemeClr val="tx1"/>
+                      </a:solidFill>
+                      <a:prstDash val="solid"/>
+                      <a:round/>
+                      <a:headEnd type="none" w="med" len="med"/>
+                      <a:tailEnd type="none" w="med" len="med"/>
+                    </a:lnR>
+                    <a:lnB w="6350" cap="flat" cmpd="sng" algn="ctr">
+                      <a:solidFill>
+                        <a:schemeClr val="tx1"/>
+                      </a:solidFill>
+                      <a:prstDash val="solid"/>
+                      <a:round/>
+                      <a:headEnd type="none" w="med" len="med"/>
+                      <a:tailEnd type="none" w="med" len="med"/>
+                    </a:lnB>
+                    <a:noFill/>
+                  </a:tcPr>
+                </a:tc>
+                <a:tc>
+                  <a:txBody>
+                    <a:bodyPr/>
+                    <a:lstStyle/>
+                    <a:p>
+                      <a:pPr algn="ctr"/>
+                      <a:r>
+                        <a:rPr lang="en-US" sz="1000" b="0" dirty="0">
+                          <a:solidFill>
+                            <a:schemeClr val="tx1"/>
+                          </a:solidFill>
+                        </a:rPr>
+                        <a:t>0.50</a:t>
+                      </a:r>
+                    </a:p>
+                  </a:txBody>
+                  <a:tcPr anchor="ctr">
+                    <a:lnL w="6350" cap="flat" cmpd="sng" algn="ctr">
+                      <a:solidFill>
+                        <a:schemeClr val="tx1"/>
+                      </a:solidFill>
+                      <a:prstDash val="solid"/>
+                      <a:round/>
+                      <a:headEnd type="none" w="med" len="med"/>
+                      <a:tailEnd type="none" w="med" len="med"/>
+                    </a:lnL>
+                    <a:lnB w="6350" cap="flat" cmpd="sng" algn="ctr">
+                      <a:solidFill>
+                        <a:schemeClr val="tx1"/>
+                      </a:solidFill>
+                      <a:prstDash val="solid"/>
+                      <a:round/>
+                      <a:headEnd type="none" w="med" len="med"/>
+                      <a:tailEnd type="none" w="med" len="med"/>
+                    </a:lnB>
+                    <a:noFill/>
+                  </a:tcPr>
+                </a:tc>
+                <a:tc>
+                  <a:txBody>
+                    <a:bodyPr/>
+                    <a:lstStyle/>
+                    <a:p>
+                      <a:pPr algn="ctr"/>
+                      <a:r>
+                        <a:rPr lang="en-US" sz="1000" b="0" dirty="0">
+                          <a:solidFill>
+                            <a:schemeClr val="tx1"/>
+                          </a:solidFill>
+                        </a:rPr>
+                        <a:t>0.26</a:t>
+                      </a:r>
+                    </a:p>
+                  </a:txBody>
+                  <a:tcPr anchor="ctr">
+                    <a:lnR w="6350" cap="flat" cmpd="sng" algn="ctr">
+                      <a:solidFill>
+                        <a:schemeClr val="tx1"/>
+                      </a:solidFill>
+                      <a:prstDash val="solid"/>
+                      <a:round/>
+                      <a:headEnd type="none" w="med" len="med"/>
+                      <a:tailEnd type="none" w="med" len="med"/>
+                    </a:lnR>
+                    <a:lnB w="6350" cap="flat" cmpd="sng" algn="ctr">
+                      <a:solidFill>
+                        <a:schemeClr val="tx1"/>
+                      </a:solidFill>
+                      <a:prstDash val="solid"/>
+                      <a:round/>
+                      <a:headEnd type="none" w="med" len="med"/>
+                      <a:tailEnd type="none" w="med" len="med"/>
+                    </a:lnB>
+                    <a:noFill/>
+                  </a:tcPr>
+                </a:tc>
+                <a:extLst>
+                  <a:ext uri="{0D108BD9-81ED-4DB2-BD59-A6C34878D82A}">
+                    <a16:rowId xmlns:a16="http://schemas.microsoft.com/office/drawing/2014/main" val="727921922"/>
+                  </a:ext>
+                </a:extLst>
+              </a:tr>
+            </a:tbl>
+          </a:graphicData>
+        </a:graphic>
+      </p:graphicFrame>
+      <p:sp>
+        <p:nvSpPr>
+          <p:cNvPr id="24" name="Rectangle 23">
+            <a:extLst>
+              <a:ext uri="{FF2B5EF4-FFF2-40B4-BE49-F238E27FC236}">
+                <a16:creationId xmlns:a16="http://schemas.microsoft.com/office/drawing/2014/main" id="{26394FE2-0B37-E80A-AC3E-31C8692B4236}"/>
+              </a:ext>
+            </a:extLst>
+          </p:cNvPr>
+          <p:cNvSpPr/>
+          <p:nvPr/>
+        </p:nvSpPr>
+        <p:spPr>
+          <a:xfrm>
+            <a:off x="4686655" y="2103007"/>
+            <a:ext cx="891901" cy="161377"/>
+          </a:xfrm>
+          <a:prstGeom prst="rect">
+            <a:avLst/>
+          </a:prstGeom>
+          <a:noFill/>
+          <a:ln>
+            <a:noFill/>
+          </a:ln>
+        </p:spPr>
+        <p:style>
+          <a:lnRef idx="2">
+            <a:schemeClr val="accent1">
+              <a:shade val="15000"/>
+            </a:schemeClr>
+          </a:lnRef>
+          <a:fillRef idx="1">
+            <a:schemeClr val="accent1"/>
+          </a:fillRef>
+          <a:effectRef idx="0">
+            <a:schemeClr val="accent1"/>
+          </a:effectRef>
+          <a:fontRef idx="minor">
+            <a:schemeClr val="lt1"/>
+          </a:fontRef>
+        </p:style>
+        <p:txBody>
+          <a:bodyPr rtlCol="0" anchor="ctr"/>
+          <a:lstStyle/>
+          <a:p>
+            <a:pPr algn="ctr"/>
+            <a:r>
+              <a:rPr lang="en-US" sz="800" dirty="0">
+                <a:solidFill>
+                  <a:schemeClr val="tx1"/>
+                </a:solidFill>
+              </a:rPr>
+              <a:t>ACCURACY: 0.95</a:t>
+            </a:r>
+          </a:p>
+        </p:txBody>
+      </p:sp>
+      <p:sp>
+        <p:nvSpPr>
+          <p:cNvPr id="25" name="Rectangle 24">
+            <a:extLst>
+              <a:ext uri="{FF2B5EF4-FFF2-40B4-BE49-F238E27FC236}">
+                <a16:creationId xmlns:a16="http://schemas.microsoft.com/office/drawing/2014/main" id="{C98802B3-115C-224C-B952-B96E5C4AB2A1}"/>
+              </a:ext>
+            </a:extLst>
+          </p:cNvPr>
+          <p:cNvSpPr/>
+          <p:nvPr/>
+        </p:nvSpPr>
+        <p:spPr>
+          <a:xfrm>
+            <a:off x="10508341" y="2103006"/>
+            <a:ext cx="891901" cy="161377"/>
+          </a:xfrm>
+          <a:prstGeom prst="rect">
+            <a:avLst/>
+          </a:prstGeom>
+          <a:noFill/>
+          <a:ln>
+            <a:noFill/>
+          </a:ln>
+        </p:spPr>
+        <p:style>
+          <a:lnRef idx="2">
+            <a:schemeClr val="accent1">
+              <a:shade val="15000"/>
+            </a:schemeClr>
+          </a:lnRef>
+          <a:fillRef idx="1">
+            <a:schemeClr val="accent1"/>
+          </a:fillRef>
+          <a:effectRef idx="0">
+            <a:schemeClr val="accent1"/>
+          </a:effectRef>
+          <a:fontRef idx="minor">
+            <a:schemeClr val="lt1"/>
+          </a:fontRef>
+        </p:style>
+        <p:txBody>
+          <a:bodyPr rtlCol="0" anchor="ctr"/>
+          <a:lstStyle/>
+          <a:p>
+            <a:pPr algn="ctr"/>
+            <a:r>
+              <a:rPr lang="en-US" sz="800" dirty="0">
+                <a:solidFill>
+                  <a:schemeClr val="tx1"/>
+                </a:solidFill>
+              </a:rPr>
+              <a:t>ACCURACY: 0.80</a:t>
+            </a:r>
+          </a:p>
+        </p:txBody>
+      </p:sp>
+      <p:sp>
+        <p:nvSpPr>
+          <p:cNvPr id="26" name="Rounded Rectangle 25">
+            <a:extLst>
+              <a:ext uri="{FF2B5EF4-FFF2-40B4-BE49-F238E27FC236}">
+                <a16:creationId xmlns:a16="http://schemas.microsoft.com/office/drawing/2014/main" id="{40D5FA33-2481-B58B-48A4-1EFDFDF8CE66}"/>
+              </a:ext>
+            </a:extLst>
+          </p:cNvPr>
+          <p:cNvSpPr/>
+          <p:nvPr/>
+        </p:nvSpPr>
+        <p:spPr>
+          <a:xfrm>
+            <a:off x="6224083" y="3274954"/>
+            <a:ext cx="5176153" cy="1551420"/>
+          </a:xfrm>
+          <a:prstGeom prst="roundRect">
+            <a:avLst/>
+          </a:prstGeom>
+          <a:solidFill>
+            <a:srgbClr val="F7F9FC"/>
+          </a:solidFill>
+          <a:ln>
+            <a:noFill/>
+          </a:ln>
+        </p:spPr>
+        <p:style>
+          <a:lnRef idx="2">
+            <a:schemeClr val="accent1">
+              <a:shade val="15000"/>
+            </a:schemeClr>
+          </a:lnRef>
+          <a:fillRef idx="1">
+            <a:schemeClr val="accent1"/>
+          </a:fillRef>
+          <a:effectRef idx="0">
+            <a:schemeClr val="accent1"/>
+          </a:effectRef>
+          <a:fontRef idx="minor">
+            <a:schemeClr val="lt1"/>
+          </a:fontRef>
+        </p:style>
+        <p:txBody>
+          <a:bodyPr rtlCol="0" anchor="ctr"/>
+          <a:lstStyle/>
+          <a:p>
+            <a:r>
+              <a:rPr lang="en-US" sz="1200" dirty="0">
+                <a:solidFill>
+                  <a:srgbClr val="0A2636"/>
+                </a:solidFill>
+                <a:latin typeface="Spectral" panose="02020502060000000000" pitchFamily="18" charset="77"/>
+              </a:rPr>
+              <a:t>Interpretation</a:t>
+            </a:r>
+          </a:p>
+          <a:p>
+            <a:endParaRPr lang="en-US" sz="1100" dirty="0">
+              <a:solidFill>
+                <a:schemeClr val="tx1"/>
+              </a:solidFill>
+              <a:latin typeface="IBM Plex Sans Condensed" panose="020B0506050203000203" pitchFamily="34" charset="77"/>
+            </a:endParaRPr>
+          </a:p>
+          <a:p>
+            <a:r>
+              <a:rPr lang="en-US" sz="1100" b="1" dirty="0">
+                <a:solidFill>
+                  <a:schemeClr val="tx1"/>
+                </a:solidFill>
+                <a:latin typeface="IBM Plex Sans Condensed" panose="020B0506050203000203" pitchFamily="34" charset="77"/>
+              </a:rPr>
+              <a:t>Results: </a:t>
+            </a:r>
+            <a:r>
+              <a:rPr lang="en-US" sz="1100" dirty="0">
+                <a:solidFill>
+                  <a:schemeClr val="tx1"/>
+                </a:solidFill>
+                <a:latin typeface="IBM Plex Sans Condensed" panose="020B0506050203000203" pitchFamily="34" charset="77"/>
+              </a:rPr>
+              <a:t>The models are good at predicting NOT Crude Oil but they are not good at predicting Crude Oil. This could be a result of the imbalanced dataset, given that there are ~2x as many NOT Crude Oil records as there are Crude Oil. </a:t>
+            </a:r>
+          </a:p>
+          <a:p>
+            <a:endParaRPr lang="en-US" sz="1100" dirty="0">
+              <a:solidFill>
+                <a:schemeClr val="tx1"/>
+              </a:solidFill>
+              <a:latin typeface="IBM Plex Sans Condensed" panose="020B0506050203000203" pitchFamily="34" charset="77"/>
+            </a:endParaRPr>
+          </a:p>
+          <a:p>
+            <a:r>
+              <a:rPr lang="en-US" sz="1100" b="1" dirty="0">
+                <a:solidFill>
+                  <a:schemeClr val="tx1"/>
+                </a:solidFill>
+                <a:latin typeface="IBM Plex Sans Condensed" panose="020B0506050203000203" pitchFamily="34" charset="77"/>
+              </a:rPr>
+              <a:t>Coefficients: </a:t>
+            </a:r>
+            <a:r>
+              <a:rPr lang="en-US" sz="1100" dirty="0">
+                <a:solidFill>
+                  <a:schemeClr val="tx1"/>
+                </a:solidFill>
+                <a:latin typeface="IBM Plex Sans Condensed" panose="020B0506050203000203" pitchFamily="34" charset="77"/>
+              </a:rPr>
+              <a:t>Similar coefficients are predicting Crude Oil vs. NOT Crude Oil. Given our domain knowledge, they do not seem to be especially relevant. </a:t>
+            </a:r>
+          </a:p>
+        </p:txBody>
+      </p:sp>
+      <p:sp>
+        <p:nvSpPr>
+          <p:cNvPr id="27" name="Rounded Rectangle 26">
+            <a:extLst>
+              <a:ext uri="{FF2B5EF4-FFF2-40B4-BE49-F238E27FC236}">
+                <a16:creationId xmlns:a16="http://schemas.microsoft.com/office/drawing/2014/main" id="{EFDA89C6-E0CA-F1FB-EAB1-1388D25E37F3}"/>
+              </a:ext>
+            </a:extLst>
+          </p:cNvPr>
+          <p:cNvSpPr/>
+          <p:nvPr/>
+        </p:nvSpPr>
+        <p:spPr>
+          <a:xfrm>
+            <a:off x="6294115" y="4927591"/>
+            <a:ext cx="5109019" cy="1255495"/>
+          </a:xfrm>
+          <a:prstGeom prst="roundRect">
+            <a:avLst/>
+          </a:prstGeom>
+          <a:noFill/>
+          <a:ln>
+            <a:noFill/>
+            <a:prstDash val="dash"/>
+          </a:ln>
+        </p:spPr>
+        <p:style>
+          <a:lnRef idx="2">
+            <a:schemeClr val="accent1">
+              <a:shade val="15000"/>
+            </a:schemeClr>
+          </a:lnRef>
+          <a:fillRef idx="1">
+            <a:schemeClr val="accent1"/>
+          </a:fillRef>
+          <a:effectRef idx="0">
+            <a:schemeClr val="accent1"/>
+          </a:effectRef>
+          <a:fontRef idx="minor">
+            <a:schemeClr val="lt1"/>
+          </a:fontRef>
+        </p:style>
+        <p:txBody>
+          <a:bodyPr rtlCol="0" anchor="t"/>
+          <a:lstStyle/>
+          <a:p>
+            <a:r>
+              <a:rPr lang="en-US" sz="1100" dirty="0">
+                <a:solidFill>
+                  <a:srgbClr val="2DAAAF"/>
+                </a:solidFill>
+                <a:latin typeface="IBM Plex Sans Condensed" panose="020B0506050203000203" pitchFamily="34" charset="77"/>
+              </a:rPr>
+              <a:t>CONCLUSION</a:t>
+            </a:r>
+          </a:p>
+          <a:p>
+            <a:endParaRPr lang="en-US" sz="1100" dirty="0">
+              <a:solidFill>
+                <a:schemeClr val="tx1"/>
+              </a:solidFill>
+              <a:latin typeface="IBM Plex Sans Condensed" panose="020B0506050203000203" pitchFamily="34" charset="77"/>
+            </a:endParaRPr>
+          </a:p>
+          <a:p>
+            <a:r>
+              <a:rPr lang="en-US" sz="1100" dirty="0">
+                <a:solidFill>
+                  <a:schemeClr val="tx1"/>
+                </a:solidFill>
+                <a:latin typeface="IBM Plex Sans Condensed" panose="020B0506050203000203" pitchFamily="34" charset="77"/>
+              </a:rPr>
+              <a:t>Given the model’s ability to accurately predict NOT Crude Oil incidents, we could conclude that there are inherent differences in NOT Crude Oil accidents vs. Crude Oil accidents. However, further analysis needs to be performed to identify exactly what properties of Crude Oil (or of NOT Crude Oil) are contributing to these accidents. </a:t>
+            </a:r>
+          </a:p>
+        </p:txBody>
+      </p:sp>
+    </p:spTree>
+    <p:extLst>
+      <p:ext uri="{BB962C8B-B14F-4D97-AF65-F5344CB8AC3E}">
+        <p14:creationId xmlns:p14="http://schemas.microsoft.com/office/powerpoint/2010/main" val="4241895645"/>
+      </p:ext>
+    </p:extLst>
+  </p:cSld>
+  <p:clrMapOvr>
+    <a:masterClrMapping/>
+  </p:clrMapOvr>
+</p:sld>
+</file>
+
+<file path=ppt/slides/slide12.xml><?xml version="1.0" encoding="utf-8"?>
+<p:sld xmlns:a="http://schemas.openxmlformats.org/drawingml/2006/main" xmlns:r="http://schemas.openxmlformats.org/officeDocument/2006/relationships" xmlns:p="http://schemas.openxmlformats.org/presentationml/2006/main">
+  <p:cSld>
+    <p:spTree>
+      <p:nvGrpSpPr>
         <p:cNvPr id="1" name=""/>
         <p:cNvGrpSpPr/>
         <p:nvPr/>
@@ -4811,7 +8679,7 @@
                 </a:solidFill>
                 <a:latin typeface="Spectral" panose="02020502060000000000" pitchFamily="18" charset="77"/>
               </a:rPr>
-              <a:t>Conclusions / Key Takeaways – Approach #1</a:t>
+              <a:t>Results – Approach #2</a:t>
             </a:r>
           </a:p>
         </p:txBody>
@@ -4895,370 +8763,8 @@
               <a:rPr lang="en-US" sz="1400" dirty="0">
                 <a:latin typeface="IBM Plex Sans Condensed" panose="020B0506050203000203" pitchFamily="34" charset="77"/>
               </a:rPr>
-              <a:t>……</a:t>
-            </a:r>
-          </a:p>
-        </p:txBody>
-      </p:sp>
-      <p:sp>
-        <p:nvSpPr>
-          <p:cNvPr id="5" name="Rectangle 4">
-            <a:extLst>
-              <a:ext uri="{FF2B5EF4-FFF2-40B4-BE49-F238E27FC236}">
-                <a16:creationId xmlns:a16="http://schemas.microsoft.com/office/drawing/2014/main" id="{691D5CA9-32D1-38D1-B393-C42D202C3AF8}"/>
-              </a:ext>
-            </a:extLst>
-          </p:cNvPr>
-          <p:cNvSpPr/>
-          <p:nvPr/>
-        </p:nvSpPr>
-        <p:spPr>
-          <a:xfrm>
-            <a:off x="431074" y="1578454"/>
-            <a:ext cx="4343400" cy="274480"/>
-          </a:xfrm>
-          <a:prstGeom prst="rect">
-            <a:avLst/>
-          </a:prstGeom>
-          <a:solidFill>
-            <a:srgbClr val="213442"/>
-          </a:solidFill>
-        </p:spPr>
-        <p:style>
-          <a:lnRef idx="2">
-            <a:schemeClr val="accent1">
-              <a:shade val="15000"/>
-            </a:schemeClr>
-          </a:lnRef>
-          <a:fillRef idx="1">
-            <a:schemeClr val="accent1"/>
-          </a:fillRef>
-          <a:effectRef idx="0">
-            <a:schemeClr val="accent1"/>
-          </a:effectRef>
-          <a:fontRef idx="minor">
-            <a:schemeClr val="lt1"/>
-          </a:fontRef>
-        </p:style>
-        <p:txBody>
-          <a:bodyPr rtlCol="0" anchor="ctr"/>
-          <a:lstStyle/>
-          <a:p>
-            <a:r>
-              <a:rPr lang="en-US" sz="1400" dirty="0">
-                <a:solidFill>
-                  <a:schemeClr val="bg1"/>
-                </a:solidFill>
-                <a:latin typeface="IBM Plex Sans Condensed" panose="020B0506050203000203" pitchFamily="34" charset="77"/>
-              </a:rPr>
-              <a:t>Approach #1 – Crude Oil vs. NOT Crude Oil</a:t>
-            </a:r>
-          </a:p>
-        </p:txBody>
-      </p:sp>
-      <p:sp>
-        <p:nvSpPr>
-          <p:cNvPr id="9" name="Rectangle 8">
-            <a:extLst>
-              <a:ext uri="{FF2B5EF4-FFF2-40B4-BE49-F238E27FC236}">
-                <a16:creationId xmlns:a16="http://schemas.microsoft.com/office/drawing/2014/main" id="{4E98AB9A-73DB-552B-AEA2-F1183214CACB}"/>
-              </a:ext>
-            </a:extLst>
-          </p:cNvPr>
-          <p:cNvSpPr/>
-          <p:nvPr/>
-        </p:nvSpPr>
-        <p:spPr>
-          <a:xfrm>
-            <a:off x="431075" y="1852933"/>
-            <a:ext cx="11325494" cy="2600733"/>
-          </a:xfrm>
-          <a:prstGeom prst="rect">
-            <a:avLst/>
-          </a:prstGeom>
-          <a:noFill/>
-        </p:spPr>
-        <p:style>
-          <a:lnRef idx="2">
-            <a:schemeClr val="accent1">
-              <a:shade val="15000"/>
-            </a:schemeClr>
-          </a:lnRef>
-          <a:fillRef idx="1">
-            <a:schemeClr val="accent1"/>
-          </a:fillRef>
-          <a:effectRef idx="0">
-            <a:schemeClr val="accent1"/>
-          </a:effectRef>
-          <a:fontRef idx="minor">
-            <a:schemeClr val="lt1"/>
-          </a:fontRef>
-        </p:style>
-        <p:txBody>
-          <a:bodyPr rtlCol="0" anchor="ctr"/>
-          <a:lstStyle/>
-          <a:p>
-            <a:r>
-              <a:rPr lang="en-US" sz="1100" dirty="0">
-                <a:solidFill>
-                  <a:schemeClr val="tx1"/>
-                </a:solidFill>
-                <a:latin typeface="IBM Plex Sans Condensed" panose="020B0506050203000203" pitchFamily="34" charset="77"/>
-              </a:rPr>
-              <a:t>- able to predict crude oil vs. not crude oil using latitude and longitude, and pipeline diameter and length</a:t>
-            </a:r>
-          </a:p>
-          <a:p>
-            <a:r>
-              <a:rPr lang="en-US" sz="1100" dirty="0">
-                <a:solidFill>
-                  <a:schemeClr val="tx1"/>
-                </a:solidFill>
-                <a:latin typeface="IBM Plex Sans Condensed" panose="020B0506050203000203" pitchFamily="34" charset="77"/>
-              </a:rPr>
-              <a:t>- the success of the above implies that crude oil pipelines are in different locations than their counterparts and even have slightly different pipeline specifications – specifically the diameter and length of their pipelines</a:t>
-            </a:r>
-          </a:p>
-          <a:p>
-            <a:r>
-              <a:rPr lang="en-US" sz="1100" dirty="0">
-                <a:solidFill>
-                  <a:schemeClr val="tx1"/>
-                </a:solidFill>
-                <a:latin typeface="IBM Plex Sans Condensed" panose="020B0506050203000203" pitchFamily="34" charset="77"/>
-              </a:rPr>
-              <a:t>- But when I remove these attributes, I am left with mediocre results</a:t>
-            </a:r>
-          </a:p>
-          <a:p>
-            <a:endParaRPr lang="en-US" sz="1100" dirty="0">
-              <a:solidFill>
-                <a:schemeClr val="tx1"/>
-              </a:solidFill>
-              <a:latin typeface="IBM Plex Sans Condensed" panose="020B0506050203000203" pitchFamily="34" charset="77"/>
-            </a:endParaRPr>
-          </a:p>
-          <a:p>
-            <a:r>
-              <a:rPr lang="en-US" sz="1100" dirty="0">
-                <a:solidFill>
-                  <a:schemeClr val="tx1"/>
-                </a:solidFill>
-                <a:latin typeface="IBM Plex Sans Condensed" panose="020B0506050203000203" pitchFamily="34" charset="77"/>
-              </a:rPr>
-              <a:t>Sample of these results from Random Forest after the four above attributes have been removed:</a:t>
-            </a:r>
-          </a:p>
-          <a:p>
-            <a:r>
-              <a:rPr lang="en-US" sz="1100" dirty="0">
-                <a:solidFill>
-                  <a:schemeClr val="tx1"/>
-                </a:solidFill>
-                <a:latin typeface="IBM Plex Sans Condensed" panose="020B0506050203000203" pitchFamily="34" charset="77"/>
-              </a:rPr>
-              <a:t>Precision / recall / accuracy</a:t>
-            </a:r>
-          </a:p>
-          <a:p>
-            <a:endParaRPr lang="en-US" sz="1100" dirty="0">
-              <a:solidFill>
-                <a:schemeClr val="tx1"/>
-              </a:solidFill>
-              <a:latin typeface="IBM Plex Sans Condensed" panose="020B0506050203000203" pitchFamily="34" charset="77"/>
-            </a:endParaRPr>
-          </a:p>
-          <a:p>
-            <a:r>
-              <a:rPr lang="en-US" sz="1100" dirty="0">
-                <a:solidFill>
-                  <a:schemeClr val="tx1"/>
-                </a:solidFill>
-                <a:latin typeface="IBM Plex Sans Condensed" panose="020B0506050203000203" pitchFamily="34" charset="77"/>
-              </a:rPr>
-              <a:t>Interpretation:</a:t>
-            </a:r>
-          </a:p>
-          <a:p>
-            <a:endParaRPr lang="en-US" sz="1100" dirty="0">
-              <a:solidFill>
-                <a:schemeClr val="tx1"/>
-              </a:solidFill>
-              <a:latin typeface="IBM Plex Sans Condensed" panose="020B0506050203000203" pitchFamily="34" charset="77"/>
-            </a:endParaRPr>
-          </a:p>
-          <a:p>
-            <a:r>
-              <a:rPr lang="en-US" sz="1100" dirty="0">
-                <a:solidFill>
-                  <a:schemeClr val="tx1"/>
-                </a:solidFill>
-                <a:latin typeface="IBM Plex Sans Condensed" panose="020B0506050203000203" pitchFamily="34" charset="77"/>
-              </a:rPr>
-              <a:t># good at predicting not crude oil, not good at predicting crude oil</a:t>
-            </a:r>
-          </a:p>
-          <a:p>
-            <a:r>
-              <a:rPr lang="en-US" sz="1100" dirty="0">
-                <a:solidFill>
-                  <a:schemeClr val="tx1"/>
-                </a:solidFill>
-                <a:latin typeface="IBM Plex Sans Condensed" panose="020B0506050203000203" pitchFamily="34" charset="77"/>
-              </a:rPr>
-              <a:t># we could conclude that there are potentially inherent differences in not crude oil vs. crude oil accidents</a:t>
-            </a:r>
-          </a:p>
-          <a:p>
-            <a:r>
-              <a:rPr lang="en-US" sz="1100" dirty="0">
-                <a:solidFill>
-                  <a:schemeClr val="tx1"/>
-                </a:solidFill>
-                <a:latin typeface="IBM Plex Sans Condensed" panose="020B0506050203000203" pitchFamily="34" charset="77"/>
-              </a:rPr>
-              <a:t>## and therefore further investigation into their differences is warranted</a:t>
-            </a:r>
-          </a:p>
-          <a:p>
-            <a:endParaRPr lang="en-US" sz="1100" dirty="0">
-              <a:solidFill>
-                <a:schemeClr val="tx1"/>
-              </a:solidFill>
-              <a:latin typeface="IBM Plex Sans Condensed" panose="020B0506050203000203" pitchFamily="34" charset="77"/>
-            </a:endParaRPr>
-          </a:p>
-        </p:txBody>
-      </p:sp>
-      <p:sp>
-        <p:nvSpPr>
-          <p:cNvPr id="14" name="Rectangle 13">
-            <a:extLst>
-              <a:ext uri="{FF2B5EF4-FFF2-40B4-BE49-F238E27FC236}">
-                <a16:creationId xmlns:a16="http://schemas.microsoft.com/office/drawing/2014/main" id="{902C8C4F-C243-8793-93FC-62B41AEA2921}"/>
-              </a:ext>
-            </a:extLst>
-          </p:cNvPr>
-          <p:cNvSpPr/>
-          <p:nvPr/>
-        </p:nvSpPr>
-        <p:spPr>
-          <a:xfrm>
-            <a:off x="415518" y="4733556"/>
-            <a:ext cx="11325494" cy="1190581"/>
-          </a:xfrm>
-          <a:prstGeom prst="rect">
-            <a:avLst/>
-          </a:prstGeom>
-          <a:noFill/>
-        </p:spPr>
-        <p:style>
-          <a:lnRef idx="2">
-            <a:schemeClr val="accent1">
-              <a:shade val="15000"/>
-            </a:schemeClr>
-          </a:lnRef>
-          <a:fillRef idx="1">
-            <a:schemeClr val="accent1"/>
-          </a:fillRef>
-          <a:effectRef idx="0">
-            <a:schemeClr val="accent1"/>
-          </a:effectRef>
-          <a:fontRef idx="minor">
-            <a:schemeClr val="lt1"/>
-          </a:fontRef>
-        </p:style>
-        <p:txBody>
-          <a:bodyPr rtlCol="0" anchor="ctr"/>
-          <a:lstStyle/>
-          <a:p>
-            <a:r>
-              <a:rPr lang="en-US" sz="1100" dirty="0">
-                <a:solidFill>
-                  <a:schemeClr val="tx1"/>
-                </a:solidFill>
-                <a:latin typeface="IBM Plex Sans Condensed" panose="020B0506050203000203" pitchFamily="34" charset="77"/>
-              </a:rPr>
-              <a:t>Future investigation/analysis</a:t>
-            </a:r>
-          </a:p>
-          <a:p>
-            <a:r>
-              <a:rPr lang="en-US" sz="1100" dirty="0">
-                <a:solidFill>
-                  <a:schemeClr val="tx1"/>
-                </a:solidFill>
-                <a:latin typeface="IBM Plex Sans Condensed" panose="020B0506050203000203" pitchFamily="34" charset="77"/>
-              </a:rPr>
-              <a:t>## look into specific attributes contributing to NOT crude oil incidents to determine why these attributes are more pronounced than those of crude oil</a:t>
-            </a:r>
-          </a:p>
-          <a:p>
-            <a:r>
-              <a:rPr lang="en-US" sz="1100" dirty="0">
-                <a:solidFill>
-                  <a:schemeClr val="tx1"/>
-                </a:solidFill>
-                <a:latin typeface="IBM Plex Sans Condensed" panose="020B0506050203000203" pitchFamily="34" charset="77"/>
-              </a:rPr>
-              <a:t>## look into crude oil/not crude oil vs. NON-incidents to determine what properties of the substances are causing the accidents in the first place</a:t>
-            </a:r>
-          </a:p>
-          <a:p>
-            <a:r>
-              <a:rPr lang="en-US" sz="1100" dirty="0">
-                <a:solidFill>
-                  <a:schemeClr val="tx1"/>
-                </a:solidFill>
-                <a:latin typeface="IBM Plex Sans Condensed" panose="020B0506050203000203" pitchFamily="34" charset="77"/>
-              </a:rPr>
-              <a:t>## feature engineering - removing less important attributes based on domain knowledge; aggregating attributes if possible</a:t>
-            </a:r>
-          </a:p>
-          <a:p>
-            <a:r>
-              <a:rPr lang="en-US" sz="1100" dirty="0">
-                <a:solidFill>
-                  <a:schemeClr val="tx1"/>
-                </a:solidFill>
-                <a:latin typeface="IBM Plex Sans Condensed" panose="020B0506050203000203" pitchFamily="34" charset="77"/>
-              </a:rPr>
-              <a:t>## expanding dataset by </a:t>
-            </a:r>
-            <a:r>
-              <a:rPr lang="en-US" sz="1100" dirty="0" err="1">
-                <a:solidFill>
-                  <a:schemeClr val="tx1"/>
-                </a:solidFill>
-                <a:latin typeface="IBM Plex Sans Condensed" panose="020B0506050203000203" pitchFamily="34" charset="77"/>
-              </a:rPr>
-              <a:t>concating</a:t>
-            </a:r>
-            <a:r>
-              <a:rPr lang="en-US" sz="1100" dirty="0">
-                <a:solidFill>
-                  <a:schemeClr val="tx1"/>
-                </a:solidFill>
-                <a:latin typeface="IBM Plex Sans Condensed" panose="020B0506050203000203" pitchFamily="34" charset="77"/>
-              </a:rPr>
-              <a:t> other relevant data files</a:t>
-            </a:r>
-          </a:p>
-          <a:p>
-            <a:endParaRPr lang="en-US" sz="1100" dirty="0">
-              <a:solidFill>
-                <a:schemeClr val="tx1"/>
-              </a:solidFill>
-              <a:latin typeface="IBM Plex Sans Condensed" panose="020B0506050203000203" pitchFamily="34" charset="77"/>
-            </a:endParaRPr>
-          </a:p>
-          <a:p>
-            <a:endParaRPr lang="en-US" sz="1100" dirty="0">
-              <a:solidFill>
-                <a:schemeClr val="tx1"/>
-              </a:solidFill>
-              <a:latin typeface="IBM Plex Sans Condensed" panose="020B0506050203000203" pitchFamily="34" charset="77"/>
-            </a:endParaRPr>
+              <a:t>Less distinct results from Approach #2 necessitate a discussion and ideas for future investigation. </a:t>
+            </a:r>
           </a:p>
         </p:txBody>
       </p:sp>
@@ -5267,7 +8773,7 @@
           <p:cNvPr id="2" name="Straight Connector 1">
             <a:extLst>
               <a:ext uri="{FF2B5EF4-FFF2-40B4-BE49-F238E27FC236}">
-                <a16:creationId xmlns:a16="http://schemas.microsoft.com/office/drawing/2014/main" id="{8812767C-6D8C-A100-D385-2DF62F09F928}"/>
+                <a16:creationId xmlns:a16="http://schemas.microsoft.com/office/drawing/2014/main" id="{8E6A056F-CCD7-E973-BB13-E8C45637CED5}"/>
               </a:ext>
             </a:extLst>
           </p:cNvPr>
@@ -5305,10 +8811,296 @@
           </a:fontRef>
         </p:style>
       </p:cxnSp>
+      <p:sp>
+        <p:nvSpPr>
+          <p:cNvPr id="12" name="Rounded Rectangle 11">
+            <a:extLst>
+              <a:ext uri="{FF2B5EF4-FFF2-40B4-BE49-F238E27FC236}">
+                <a16:creationId xmlns:a16="http://schemas.microsoft.com/office/drawing/2014/main" id="{32C01F8C-51F1-67BA-C086-5689FD02E93B}"/>
+              </a:ext>
+            </a:extLst>
+          </p:cNvPr>
+          <p:cNvSpPr/>
+          <p:nvPr/>
+        </p:nvSpPr>
+        <p:spPr>
+          <a:xfrm>
+            <a:off x="348342" y="1598844"/>
+            <a:ext cx="11408227" cy="1224940"/>
+          </a:xfrm>
+          <a:prstGeom prst="roundRect">
+            <a:avLst/>
+          </a:prstGeom>
+          <a:solidFill>
+            <a:srgbClr val="F7F9FC"/>
+          </a:solidFill>
+          <a:ln>
+            <a:noFill/>
+          </a:ln>
+        </p:spPr>
+        <p:style>
+          <a:lnRef idx="2">
+            <a:schemeClr val="accent1">
+              <a:shade val="15000"/>
+            </a:schemeClr>
+          </a:lnRef>
+          <a:fillRef idx="1">
+            <a:schemeClr val="accent1"/>
+          </a:fillRef>
+          <a:effectRef idx="0">
+            <a:schemeClr val="accent1"/>
+          </a:effectRef>
+          <a:fontRef idx="minor">
+            <a:schemeClr val="lt1"/>
+          </a:fontRef>
+        </p:style>
+        <p:txBody>
+          <a:bodyPr rtlCol="0" anchor="ctr"/>
+          <a:lstStyle/>
+          <a:p>
+            <a:r>
+              <a:rPr lang="en-US" sz="1200" dirty="0">
+                <a:solidFill>
+                  <a:srgbClr val="0A2636"/>
+                </a:solidFill>
+                <a:latin typeface="Spectral" panose="02020502060000000000" pitchFamily="18" charset="77"/>
+              </a:rPr>
+              <a:t>Discussion</a:t>
+            </a:r>
+          </a:p>
+          <a:p>
+            <a:endParaRPr lang="en-US" sz="1100" dirty="0">
+              <a:solidFill>
+                <a:schemeClr val="tx1"/>
+              </a:solidFill>
+              <a:latin typeface="IBM Plex Sans Condensed" panose="020B0506050203000203" pitchFamily="34" charset="77"/>
+            </a:endParaRPr>
+          </a:p>
+          <a:p>
+            <a:r>
+              <a:rPr lang="en-US" sz="1100" dirty="0">
+                <a:solidFill>
+                  <a:schemeClr val="tx1"/>
+                </a:solidFill>
+                <a:latin typeface="IBM Plex Sans Condensed" panose="020B0506050203000203" pitchFamily="34" charset="77"/>
+              </a:rPr>
+              <a:t>Dataset E was the only dataset found for Canada / USA that contained property-specific information for crude oil pipeline accidents. Upon extracting this property-specific information, fewer than 50 records remained. Attempts to enhance the data were made, such as keeping in crude oil incidents that did not have specific chemical or physical properties. But proceeding with the analysis of this small sample size ultimately led to unusable results. The data exploration profiling report revealed that light and sour attributes were highly correlated and that the sweet attribute occurred most frequently. However, given the limited sample size, we cannot confidently make conclusions from these findings.</a:t>
+            </a:r>
+          </a:p>
+        </p:txBody>
+      </p:sp>
+      <p:sp>
+        <p:nvSpPr>
+          <p:cNvPr id="13" name="Rounded Rectangle 12">
+            <a:extLst>
+              <a:ext uri="{FF2B5EF4-FFF2-40B4-BE49-F238E27FC236}">
+                <a16:creationId xmlns:a16="http://schemas.microsoft.com/office/drawing/2014/main" id="{80131B04-F47E-93AC-3468-C1CC747E9E66}"/>
+              </a:ext>
+            </a:extLst>
+          </p:cNvPr>
+          <p:cNvSpPr/>
+          <p:nvPr/>
+        </p:nvSpPr>
+        <p:spPr>
+          <a:xfrm>
+            <a:off x="348342" y="3066295"/>
+            <a:ext cx="11408227" cy="1617590"/>
+          </a:xfrm>
+          <a:prstGeom prst="roundRect">
+            <a:avLst/>
+          </a:prstGeom>
+          <a:solidFill>
+            <a:srgbClr val="F7F9FC"/>
+          </a:solidFill>
+          <a:ln>
+            <a:noFill/>
+          </a:ln>
+        </p:spPr>
+        <p:style>
+          <a:lnRef idx="2">
+            <a:schemeClr val="accent1">
+              <a:shade val="15000"/>
+            </a:schemeClr>
+          </a:lnRef>
+          <a:fillRef idx="1">
+            <a:schemeClr val="accent1"/>
+          </a:fillRef>
+          <a:effectRef idx="0">
+            <a:schemeClr val="accent1"/>
+          </a:effectRef>
+          <a:fontRef idx="minor">
+            <a:schemeClr val="lt1"/>
+          </a:fontRef>
+        </p:style>
+        <p:txBody>
+          <a:bodyPr rtlCol="0" anchor="ctr"/>
+          <a:lstStyle/>
+          <a:p>
+            <a:r>
+              <a:rPr lang="en-US" sz="1200" dirty="0">
+                <a:solidFill>
+                  <a:srgbClr val="0A2636"/>
+                </a:solidFill>
+                <a:latin typeface="Spectral" panose="02020502060000000000" pitchFamily="18" charset="77"/>
+              </a:rPr>
+              <a:t>Enhanced Data</a:t>
+            </a:r>
+          </a:p>
+          <a:p>
+            <a:endParaRPr lang="en-US" sz="1100" dirty="0">
+              <a:solidFill>
+                <a:schemeClr val="tx1"/>
+              </a:solidFill>
+              <a:latin typeface="IBM Plex Sans Condensed" panose="020B0506050203000203" pitchFamily="34" charset="77"/>
+            </a:endParaRPr>
+          </a:p>
+          <a:p>
+            <a:pPr marL="171450" indent="-171450">
+              <a:buFont typeface="Arial" panose="020B0604020202020204" pitchFamily="34" charset="0"/>
+              <a:buChar char="•"/>
+            </a:pPr>
+            <a:r>
+              <a:rPr lang="en-US" sz="1100" dirty="0">
+                <a:solidFill>
+                  <a:schemeClr val="tx1"/>
+                </a:solidFill>
+                <a:latin typeface="IBM Plex Sans Condensed" panose="020B0506050203000203" pitchFamily="34" charset="77"/>
+              </a:rPr>
+              <a:t>With a larger dataset, we could have executed a process like that of Approach #1 to determine what properties of crude oil (if any) influence pipeline accidents. This would consist of further cleaning of relevant attributes and iterating upon models.</a:t>
+            </a:r>
+          </a:p>
+          <a:p>
+            <a:pPr marL="171450" indent="-171450">
+              <a:buFont typeface="Arial" panose="020B0604020202020204" pitchFamily="34" charset="0"/>
+              <a:buChar char="•"/>
+            </a:pPr>
+            <a:r>
+              <a:rPr lang="en-US" sz="1100" dirty="0">
+                <a:solidFill>
+                  <a:schemeClr val="tx1"/>
+                </a:solidFill>
+                <a:latin typeface="IBM Plex Sans Condensed" panose="020B0506050203000203" pitchFamily="34" charset="77"/>
+              </a:rPr>
+              <a:t>A beneficial dataset – which could not be found for this analysis – would contain information about the </a:t>
+            </a:r>
+            <a:r>
+              <a:rPr lang="en-US" sz="1100" b="1" dirty="0">
+                <a:solidFill>
+                  <a:schemeClr val="tx1"/>
+                </a:solidFill>
+                <a:latin typeface="IBM Plex Sans Condensed" panose="020B0506050203000203" pitchFamily="34" charset="77"/>
+              </a:rPr>
+              <a:t>successful transfer </a:t>
+            </a:r>
+            <a:r>
+              <a:rPr lang="en-US" sz="1100" dirty="0">
+                <a:solidFill>
+                  <a:schemeClr val="tx1"/>
+                </a:solidFill>
+                <a:latin typeface="IBM Plex Sans Condensed" panose="020B0506050203000203" pitchFamily="34" charset="77"/>
+              </a:rPr>
+              <a:t>of crude oil across pipelines. For example, if sour crude oil is being transferred the most frequently, but it is found in the least number of incidents, you could potentially conclude that sulfur is less responsible for crude oil-based pipeline accidents.</a:t>
+            </a:r>
+          </a:p>
+          <a:p>
+            <a:pPr marL="171450" indent="-171450">
+              <a:buFont typeface="Arial" panose="020B0604020202020204" pitchFamily="34" charset="0"/>
+              <a:buChar char="•"/>
+            </a:pPr>
+            <a:r>
+              <a:rPr lang="en-US" sz="1100" dirty="0">
+                <a:solidFill>
+                  <a:schemeClr val="tx1"/>
+                </a:solidFill>
+                <a:latin typeface="IBM Plex Sans Condensed" panose="020B0506050203000203" pitchFamily="34" charset="77"/>
+              </a:rPr>
+              <a:t>A method to manually enhance the data is to research the properties of the specific crude oils found in the dataset; for example, researching “ALASKAN NORTH SLOPE CRUDE OIL” to identify if it is sour or sweet, heavy or light. This method was not used in this analysis as the pay-off was not justified: it would have taken significant time and would have only added ~50 records. </a:t>
+            </a:r>
+          </a:p>
+        </p:txBody>
+      </p:sp>
+      <p:sp>
+        <p:nvSpPr>
+          <p:cNvPr id="14" name="Rounded Rectangle 13">
+            <a:extLst>
+              <a:ext uri="{FF2B5EF4-FFF2-40B4-BE49-F238E27FC236}">
+                <a16:creationId xmlns:a16="http://schemas.microsoft.com/office/drawing/2014/main" id="{FB4606B9-B129-F639-EAFB-C3BF8BDB623B}"/>
+              </a:ext>
+            </a:extLst>
+          </p:cNvPr>
+          <p:cNvSpPr/>
+          <p:nvPr/>
+        </p:nvSpPr>
+        <p:spPr>
+          <a:xfrm>
+            <a:off x="348342" y="4926396"/>
+            <a:ext cx="11408227" cy="1164061"/>
+          </a:xfrm>
+          <a:prstGeom prst="roundRect">
+            <a:avLst/>
+          </a:prstGeom>
+          <a:solidFill>
+            <a:srgbClr val="F7F9FC"/>
+          </a:solidFill>
+          <a:ln>
+            <a:noFill/>
+          </a:ln>
+        </p:spPr>
+        <p:style>
+          <a:lnRef idx="2">
+            <a:schemeClr val="accent1">
+              <a:shade val="15000"/>
+            </a:schemeClr>
+          </a:lnRef>
+          <a:fillRef idx="1">
+            <a:schemeClr val="accent1"/>
+          </a:fillRef>
+          <a:effectRef idx="0">
+            <a:schemeClr val="accent1"/>
+          </a:effectRef>
+          <a:fontRef idx="minor">
+            <a:schemeClr val="lt1"/>
+          </a:fontRef>
+        </p:style>
+        <p:txBody>
+          <a:bodyPr rtlCol="0" anchor="ctr"/>
+          <a:lstStyle/>
+          <a:p>
+            <a:r>
+              <a:rPr lang="en-US" sz="1200" dirty="0">
+                <a:solidFill>
+                  <a:srgbClr val="0A2636"/>
+                </a:solidFill>
+                <a:latin typeface="Spectral" panose="02020502060000000000" pitchFamily="18" charset="77"/>
+              </a:rPr>
+              <a:t>Isolating the Problem</a:t>
+            </a:r>
+          </a:p>
+          <a:p>
+            <a:endParaRPr lang="en-US" sz="1100" dirty="0">
+              <a:solidFill>
+                <a:schemeClr val="tx1"/>
+              </a:solidFill>
+              <a:latin typeface="IBM Plex Sans Condensed" panose="020B0506050203000203" pitchFamily="34" charset="77"/>
+            </a:endParaRPr>
+          </a:p>
+          <a:p>
+            <a:r>
+              <a:rPr lang="en-US" sz="1100" dirty="0">
+                <a:solidFill>
+                  <a:schemeClr val="tx1"/>
+                </a:solidFill>
+                <a:latin typeface="IBM Plex Sans Condensed" panose="020B0506050203000203" pitchFamily="34" charset="77"/>
+              </a:rPr>
+              <a:t>There are myriad factors involved in pipeline incidents which makes it difficult to identify how the properties of crude oil are contributing to the incidents. To isolate the problem, a controlled study could be conducted. This would consist of using various pipeline materials and sizes, running specific crude oils through them (crude oil – sour, crude oil – sweet, crude oil – sour and heavy, etc.), collecting the data, and performing a regression analysis to determine which components of the crude oil are affecting corrosion and wear and tear on the pipelines. </a:t>
+            </a:r>
+          </a:p>
+        </p:txBody>
+      </p:sp>
     </p:spTree>
     <p:extLst>
       <p:ext uri="{BB962C8B-B14F-4D97-AF65-F5344CB8AC3E}">
-        <p14:creationId xmlns:p14="http://schemas.microsoft.com/office/powerpoint/2010/main" val="3035542509"/>
+        <p14:creationId xmlns:p14="http://schemas.microsoft.com/office/powerpoint/2010/main" val="3229023963"/>
       </p:ext>
     </p:extLst>
   </p:cSld>
@@ -5318,7 +9110,876 @@
 </p:sld>
 </file>
 
-<file path=ppt/slides/slide12.xml><?xml version="1.0" encoding="utf-8"?>
+<file path=ppt/slides/slide13.xml><?xml version="1.0" encoding="utf-8"?>
+<p:sld xmlns:a="http://schemas.openxmlformats.org/drawingml/2006/main" xmlns:r="http://schemas.openxmlformats.org/officeDocument/2006/relationships" xmlns:p="http://schemas.openxmlformats.org/presentationml/2006/main">
+  <p:cSld>
+    <p:spTree>
+      <p:nvGrpSpPr>
+        <p:cNvPr id="1" name="">
+          <a:extLst>
+            <a:ext uri="{FF2B5EF4-FFF2-40B4-BE49-F238E27FC236}">
+              <a16:creationId xmlns:a16="http://schemas.microsoft.com/office/drawing/2014/main" id="{431EA97F-6833-FAE5-7980-93E301F9DA6F}"/>
+            </a:ext>
+          </a:extLst>
+        </p:cNvPr>
+        <p:cNvGrpSpPr/>
+        <p:nvPr/>
+      </p:nvGrpSpPr>
+      <p:grpSpPr>
+        <a:xfrm>
+          <a:off x="0" y="0"/>
+          <a:ext cx="0" cy="0"/>
+          <a:chOff x="0" y="0"/>
+          <a:chExt cx="0" cy="0"/>
+        </a:xfrm>
+      </p:grpSpPr>
+      <p:sp>
+        <p:nvSpPr>
+          <p:cNvPr id="4" name="Rectangle 3">
+            <a:extLst>
+              <a:ext uri="{FF2B5EF4-FFF2-40B4-BE49-F238E27FC236}">
+                <a16:creationId xmlns:a16="http://schemas.microsoft.com/office/drawing/2014/main" id="{85C91DFB-3909-82EF-CFD5-B78C5580DF26}"/>
+              </a:ext>
+            </a:extLst>
+          </p:cNvPr>
+          <p:cNvSpPr/>
+          <p:nvPr/>
+        </p:nvSpPr>
+        <p:spPr>
+          <a:xfrm>
+            <a:off x="233183" y="304280"/>
+            <a:ext cx="11523387" cy="618829"/>
+          </a:xfrm>
+          <a:prstGeom prst="rect">
+            <a:avLst/>
+          </a:prstGeom>
+          <a:noFill/>
+          <a:ln>
+            <a:noFill/>
+          </a:ln>
+        </p:spPr>
+        <p:style>
+          <a:lnRef idx="2">
+            <a:schemeClr val="accent1">
+              <a:shade val="15000"/>
+            </a:schemeClr>
+          </a:lnRef>
+          <a:fillRef idx="1">
+            <a:schemeClr val="accent1"/>
+          </a:fillRef>
+          <a:effectRef idx="0">
+            <a:schemeClr val="accent1"/>
+          </a:effectRef>
+          <a:fontRef idx="minor">
+            <a:schemeClr val="lt1"/>
+          </a:fontRef>
+        </p:style>
+        <p:txBody>
+          <a:bodyPr rtlCol="0" anchor="ctr"/>
+          <a:lstStyle/>
+          <a:p>
+            <a:r>
+              <a:rPr lang="en-US" sz="3600" dirty="0">
+                <a:solidFill>
+                  <a:srgbClr val="0A2636"/>
+                </a:solidFill>
+                <a:latin typeface="Spectral" panose="02020502060000000000" pitchFamily="18" charset="77"/>
+              </a:rPr>
+              <a:t>Conclusion &amp; Suggested Next Steps</a:t>
+            </a:r>
+          </a:p>
+        </p:txBody>
+      </p:sp>
+      <p:pic>
+        <p:nvPicPr>
+          <p:cNvPr id="6" name="Picture 2" descr="Validere Acquires Regulatory Reporting Platform Clairifi - Validere">
+            <a:extLst>
+              <a:ext uri="{FF2B5EF4-FFF2-40B4-BE49-F238E27FC236}">
+                <a16:creationId xmlns:a16="http://schemas.microsoft.com/office/drawing/2014/main" id="{377D52B8-6077-B9C9-8026-D21F181EEE80}"/>
+              </a:ext>
+            </a:extLst>
+          </p:cNvPr>
+          <p:cNvPicPr>
+            <a:picLocks noChangeAspect="1" noChangeArrowheads="1"/>
+          </p:cNvPicPr>
+          <p:nvPr/>
+        </p:nvPicPr>
+        <p:blipFill>
+          <a:blip r:embed="rId3">
+            <a:extLst>
+              <a:ext uri="{28A0092B-C50C-407E-A947-70E740481C1C}">
+                <a14:useLocalDpi xmlns:a14="http://schemas.microsoft.com/office/drawing/2010/main" val="0"/>
+              </a:ext>
+            </a:extLst>
+          </a:blip>
+          <a:srcRect/>
+          <a:stretch>
+            <a:fillRect/>
+          </a:stretch>
+        </p:blipFill>
+        <p:spPr bwMode="auto">
+          <a:xfrm>
+            <a:off x="9588136" y="6313712"/>
+            <a:ext cx="2385518" cy="248400"/>
+          </a:xfrm>
+          <a:prstGeom prst="rect">
+            <a:avLst/>
+          </a:prstGeom>
+          <a:noFill/>
+          <a:extLst>
+            <a:ext uri="{909E8E84-426E-40DD-AFC4-6F175D3DCCD1}">
+              <a14:hiddenFill xmlns:a14="http://schemas.microsoft.com/office/drawing/2010/main">
+                <a:solidFill>
+                  <a:srgbClr val="FFFFFF"/>
+                </a:solidFill>
+              </a14:hiddenFill>
+            </a:ext>
+          </a:extLst>
+        </p:spPr>
+      </p:pic>
+      <p:sp>
+        <p:nvSpPr>
+          <p:cNvPr id="3" name="TextBox 2">
+            <a:extLst>
+              <a:ext uri="{FF2B5EF4-FFF2-40B4-BE49-F238E27FC236}">
+                <a16:creationId xmlns:a16="http://schemas.microsoft.com/office/drawing/2014/main" id="{1743ACAB-1C0D-B0BA-CD73-E75C5B6EA939}"/>
+              </a:ext>
+            </a:extLst>
+          </p:cNvPr>
+          <p:cNvSpPr txBox="1"/>
+          <p:nvPr/>
+        </p:nvSpPr>
+        <p:spPr>
+          <a:xfrm>
+            <a:off x="348342" y="1047347"/>
+            <a:ext cx="11408227" cy="523220"/>
+          </a:xfrm>
+          <a:prstGeom prst="rect">
+            <a:avLst/>
+          </a:prstGeom>
+          <a:noFill/>
+        </p:spPr>
+        <p:txBody>
+          <a:bodyPr wrap="square" rtlCol="0">
+            <a:spAutoFit/>
+          </a:bodyPr>
+          <a:lstStyle/>
+          <a:p>
+            <a:r>
+              <a:rPr lang="en-US" sz="1400" dirty="0">
+                <a:latin typeface="IBM Plex Sans Condensed" panose="020B0506050203000203" pitchFamily="34" charset="77"/>
+              </a:rPr>
+              <a:t>Given the results from our two approaches, we cannot safely conclude which properties of crude oil, if any, are responsible for pipeline accidents. But we can provide four distinct next steps, in order of importance, that could facilitate further analysis of this topic.  </a:t>
+            </a:r>
+          </a:p>
+        </p:txBody>
+      </p:sp>
+      <p:cxnSp>
+        <p:nvCxnSpPr>
+          <p:cNvPr id="2" name="Straight Connector 1">
+            <a:extLst>
+              <a:ext uri="{FF2B5EF4-FFF2-40B4-BE49-F238E27FC236}">
+                <a16:creationId xmlns:a16="http://schemas.microsoft.com/office/drawing/2014/main" id="{1329072F-70E6-D0F7-5762-677130534514}"/>
+              </a:ext>
+            </a:extLst>
+          </p:cNvPr>
+          <p:cNvCxnSpPr>
+            <a:cxnSpLocks/>
+          </p:cNvCxnSpPr>
+          <p:nvPr/>
+        </p:nvCxnSpPr>
+        <p:spPr>
+          <a:xfrm>
+            <a:off x="-78377" y="923109"/>
+            <a:ext cx="11834947" cy="0"/>
+          </a:xfrm>
+          <a:prstGeom prst="line">
+            <a:avLst/>
+          </a:prstGeom>
+          <a:ln w="12700">
+            <a:solidFill>
+              <a:srgbClr val="0A2636"/>
+            </a:solidFill>
+          </a:ln>
+        </p:spPr>
+        <p:style>
+          <a:lnRef idx="1">
+            <a:schemeClr val="accent1"/>
+          </a:lnRef>
+          <a:fillRef idx="0">
+            <a:schemeClr val="accent1"/>
+          </a:fillRef>
+          <a:effectRef idx="0">
+            <a:schemeClr val="accent1"/>
+          </a:effectRef>
+          <a:fontRef idx="minor">
+            <a:schemeClr val="tx1"/>
+          </a:fontRef>
+        </p:style>
+      </p:cxnSp>
+      <p:sp>
+        <p:nvSpPr>
+          <p:cNvPr id="5" name="Rounded Rectangle 4">
+            <a:extLst>
+              <a:ext uri="{FF2B5EF4-FFF2-40B4-BE49-F238E27FC236}">
+                <a16:creationId xmlns:a16="http://schemas.microsoft.com/office/drawing/2014/main" id="{EFE90C46-7F7F-C64B-23FB-334A326D7286}"/>
+              </a:ext>
+            </a:extLst>
+          </p:cNvPr>
+          <p:cNvSpPr/>
+          <p:nvPr/>
+        </p:nvSpPr>
+        <p:spPr>
+          <a:xfrm>
+            <a:off x="348341" y="1814287"/>
+            <a:ext cx="11408227" cy="1023582"/>
+          </a:xfrm>
+          <a:prstGeom prst="roundRect">
+            <a:avLst/>
+          </a:prstGeom>
+          <a:solidFill>
+            <a:srgbClr val="F7F9FC"/>
+          </a:solidFill>
+          <a:ln>
+            <a:noFill/>
+          </a:ln>
+        </p:spPr>
+        <p:style>
+          <a:lnRef idx="2">
+            <a:schemeClr val="accent1">
+              <a:shade val="15000"/>
+            </a:schemeClr>
+          </a:lnRef>
+          <a:fillRef idx="1">
+            <a:schemeClr val="accent1"/>
+          </a:fillRef>
+          <a:effectRef idx="0">
+            <a:schemeClr val="accent1"/>
+          </a:effectRef>
+          <a:fontRef idx="minor">
+            <a:schemeClr val="lt1"/>
+          </a:fontRef>
+        </p:style>
+        <p:txBody>
+          <a:bodyPr rtlCol="0" anchor="ctr"/>
+          <a:lstStyle/>
+          <a:p>
+            <a:r>
+              <a:rPr lang="en-US" sz="1200" dirty="0">
+                <a:solidFill>
+                  <a:srgbClr val="0A2636"/>
+                </a:solidFill>
+                <a:latin typeface="Spectral" panose="02020502060000000000" pitchFamily="18" charset="77"/>
+              </a:rPr>
+              <a:t>Conclusion</a:t>
+            </a:r>
+          </a:p>
+          <a:p>
+            <a:endParaRPr lang="en-US" sz="1100" dirty="0">
+              <a:solidFill>
+                <a:schemeClr val="tx1"/>
+              </a:solidFill>
+              <a:latin typeface="IBM Plex Sans Condensed" panose="020B0506050203000203" pitchFamily="34" charset="77"/>
+            </a:endParaRPr>
+          </a:p>
+          <a:p>
+            <a:r>
+              <a:rPr lang="en-US" sz="1100" dirty="0">
+                <a:solidFill>
+                  <a:schemeClr val="tx1"/>
+                </a:solidFill>
+                <a:latin typeface="IBM Plex Sans Condensed" panose="020B0506050203000203" pitchFamily="34" charset="77"/>
+              </a:rPr>
+              <a:t>From Approach #1, we concluded that there are potential differences between pipeline accidents in which crude oil was the substance being transferred vs. other substances (e.g., natural gas). From Approach #2, we were unable to form a confident conclusion given our limited dataset. However, the collective analyses from these two approaches provided insight into how this problem can be isolated and investigated to a further extent. </a:t>
+            </a:r>
+          </a:p>
+        </p:txBody>
+      </p:sp>
+      <p:sp>
+        <p:nvSpPr>
+          <p:cNvPr id="7" name="Rounded Rectangle 6">
+            <a:extLst>
+              <a:ext uri="{FF2B5EF4-FFF2-40B4-BE49-F238E27FC236}">
+                <a16:creationId xmlns:a16="http://schemas.microsoft.com/office/drawing/2014/main" id="{5C886A06-4E1F-0014-7CAC-96638EC2958D}"/>
+              </a:ext>
+            </a:extLst>
+          </p:cNvPr>
+          <p:cNvSpPr/>
+          <p:nvPr/>
+        </p:nvSpPr>
+        <p:spPr>
+          <a:xfrm>
+            <a:off x="348342" y="3067504"/>
+            <a:ext cx="5490754" cy="1345533"/>
+          </a:xfrm>
+          <a:prstGeom prst="roundRect">
+            <a:avLst/>
+          </a:prstGeom>
+          <a:noFill/>
+          <a:ln>
+            <a:noFill/>
+            <a:prstDash val="dash"/>
+          </a:ln>
+        </p:spPr>
+        <p:style>
+          <a:lnRef idx="2">
+            <a:schemeClr val="accent1">
+              <a:shade val="15000"/>
+            </a:schemeClr>
+          </a:lnRef>
+          <a:fillRef idx="1">
+            <a:schemeClr val="accent1"/>
+          </a:fillRef>
+          <a:effectRef idx="0">
+            <a:schemeClr val="accent1"/>
+          </a:effectRef>
+          <a:fontRef idx="minor">
+            <a:schemeClr val="lt1"/>
+          </a:fontRef>
+        </p:style>
+        <p:txBody>
+          <a:bodyPr rtlCol="0" anchor="t"/>
+          <a:lstStyle/>
+          <a:p>
+            <a:pPr algn="just"/>
+            <a:r>
+              <a:rPr lang="en-US" sz="1100" dirty="0">
+                <a:solidFill>
+                  <a:srgbClr val="2DAAAF"/>
+                </a:solidFill>
+                <a:latin typeface="IBM Plex Sans Condensed" panose="020B0506050203000203" pitchFamily="34" charset="77"/>
+              </a:rPr>
+              <a:t>1 – CONTROLLED STUDY</a:t>
+            </a:r>
+          </a:p>
+          <a:p>
+            <a:pPr algn="just"/>
+            <a:endParaRPr lang="en-US" sz="1100" dirty="0">
+              <a:solidFill>
+                <a:schemeClr val="tx1"/>
+              </a:solidFill>
+              <a:latin typeface="IBM Plex Sans Condensed" panose="020B0506050203000203" pitchFamily="34" charset="77"/>
+            </a:endParaRPr>
+          </a:p>
+          <a:p>
+            <a:pPr algn="just"/>
+            <a:r>
+              <a:rPr lang="en-US" sz="1100" dirty="0">
+                <a:solidFill>
+                  <a:schemeClr val="tx1"/>
+                </a:solidFill>
+                <a:latin typeface="IBM Plex Sans Condensed" panose="020B0506050203000203" pitchFamily="34" charset="77"/>
+              </a:rPr>
+              <a:t>Given the complexity of pipeline incidents, the number one suggestion for future investigation is isolating the problem in a controlled environment. A controlled study would take significant time and resources but would provide the most accurate results as to how the physical and chemical properties of crude oil influence pipeline accidents. (Similar study: [9])</a:t>
+            </a:r>
+          </a:p>
+        </p:txBody>
+      </p:sp>
+      <p:sp>
+        <p:nvSpPr>
+          <p:cNvPr id="8" name="Rounded Rectangle 7">
+            <a:extLst>
+              <a:ext uri="{FF2B5EF4-FFF2-40B4-BE49-F238E27FC236}">
+                <a16:creationId xmlns:a16="http://schemas.microsoft.com/office/drawing/2014/main" id="{23E8FDB3-B0B5-923B-ECC7-705D3BEA6878}"/>
+              </a:ext>
+            </a:extLst>
+          </p:cNvPr>
+          <p:cNvSpPr/>
+          <p:nvPr/>
+        </p:nvSpPr>
+        <p:spPr>
+          <a:xfrm>
+            <a:off x="5839096" y="3067504"/>
+            <a:ext cx="5917472" cy="1345533"/>
+          </a:xfrm>
+          <a:prstGeom prst="roundRect">
+            <a:avLst/>
+          </a:prstGeom>
+          <a:noFill/>
+          <a:ln>
+            <a:noFill/>
+            <a:prstDash val="dash"/>
+          </a:ln>
+        </p:spPr>
+        <p:style>
+          <a:lnRef idx="2">
+            <a:schemeClr val="accent1">
+              <a:shade val="15000"/>
+            </a:schemeClr>
+          </a:lnRef>
+          <a:fillRef idx="1">
+            <a:schemeClr val="accent1"/>
+          </a:fillRef>
+          <a:effectRef idx="0">
+            <a:schemeClr val="accent1"/>
+          </a:effectRef>
+          <a:fontRef idx="minor">
+            <a:schemeClr val="lt1"/>
+          </a:fontRef>
+        </p:style>
+        <p:txBody>
+          <a:bodyPr rtlCol="0" anchor="t"/>
+          <a:lstStyle/>
+          <a:p>
+            <a:pPr algn="just"/>
+            <a:r>
+              <a:rPr lang="en-US" sz="1100" dirty="0">
+                <a:solidFill>
+                  <a:srgbClr val="2DAAAF"/>
+                </a:solidFill>
+                <a:latin typeface="IBM Plex Sans Condensed" panose="020B0506050203000203" pitchFamily="34" charset="77"/>
+              </a:rPr>
+              <a:t>2 – LARGER DATASET FOR CRUDE OIL INCIDENTS</a:t>
+            </a:r>
+          </a:p>
+          <a:p>
+            <a:pPr algn="just"/>
+            <a:endParaRPr lang="en-US" sz="1100" dirty="0">
+              <a:solidFill>
+                <a:schemeClr val="tx1"/>
+              </a:solidFill>
+              <a:latin typeface="IBM Plex Sans Condensed" panose="020B0506050203000203" pitchFamily="34" charset="77"/>
+            </a:endParaRPr>
+          </a:p>
+          <a:p>
+            <a:pPr algn="just"/>
+            <a:r>
+              <a:rPr lang="en-US" sz="1100" dirty="0">
+                <a:solidFill>
+                  <a:schemeClr val="tx1"/>
+                </a:solidFill>
+                <a:latin typeface="IBM Plex Sans Condensed" panose="020B0506050203000203" pitchFamily="34" charset="77"/>
+              </a:rPr>
+              <a:t>Other than performing a controlled study, the most direct approach for determining which properties of crude oil affect pipeline incidents is to identify how different types of crude oil relate to the frequency and type of pipeline accidents. Two methods to gather this data are: 1) reaching out to the governing bodies (CER / PHMSA) for additional data or 2) manually researching (or contacting) each company’s crude oil to determine its properties. </a:t>
+            </a:r>
+          </a:p>
+        </p:txBody>
+      </p:sp>
+      <p:sp>
+        <p:nvSpPr>
+          <p:cNvPr id="9" name="Rounded Rectangle 8">
+            <a:extLst>
+              <a:ext uri="{FF2B5EF4-FFF2-40B4-BE49-F238E27FC236}">
+                <a16:creationId xmlns:a16="http://schemas.microsoft.com/office/drawing/2014/main" id="{69426532-FDEE-4681-0AC6-0095AEE06B4C}"/>
+              </a:ext>
+            </a:extLst>
+          </p:cNvPr>
+          <p:cNvSpPr/>
+          <p:nvPr/>
+        </p:nvSpPr>
+        <p:spPr>
+          <a:xfrm>
+            <a:off x="348342" y="4413039"/>
+            <a:ext cx="5490754" cy="1345534"/>
+          </a:xfrm>
+          <a:prstGeom prst="roundRect">
+            <a:avLst/>
+          </a:prstGeom>
+          <a:noFill/>
+          <a:ln>
+            <a:noFill/>
+            <a:prstDash val="dash"/>
+          </a:ln>
+        </p:spPr>
+        <p:style>
+          <a:lnRef idx="2">
+            <a:schemeClr val="accent1">
+              <a:shade val="15000"/>
+            </a:schemeClr>
+          </a:lnRef>
+          <a:fillRef idx="1">
+            <a:schemeClr val="accent1"/>
+          </a:fillRef>
+          <a:effectRef idx="0">
+            <a:schemeClr val="accent1"/>
+          </a:effectRef>
+          <a:fontRef idx="minor">
+            <a:schemeClr val="lt1"/>
+          </a:fontRef>
+        </p:style>
+        <p:txBody>
+          <a:bodyPr rtlCol="0" anchor="t"/>
+          <a:lstStyle/>
+          <a:p>
+            <a:pPr algn="just"/>
+            <a:r>
+              <a:rPr lang="en-US" sz="1100" dirty="0">
+                <a:solidFill>
+                  <a:srgbClr val="2DAAAF"/>
+                </a:solidFill>
+                <a:latin typeface="IBM Plex Sans Condensed" panose="020B0506050203000203" pitchFamily="34" charset="77"/>
+              </a:rPr>
+              <a:t>3 – ALL PIPELINE TRANSFER DATA</a:t>
+            </a:r>
+          </a:p>
+          <a:p>
+            <a:pPr algn="just"/>
+            <a:endParaRPr lang="en-US" sz="1100" dirty="0">
+              <a:solidFill>
+                <a:schemeClr val="tx1"/>
+              </a:solidFill>
+              <a:latin typeface="IBM Plex Sans Condensed" panose="020B0506050203000203" pitchFamily="34" charset="77"/>
+            </a:endParaRPr>
+          </a:p>
+          <a:p>
+            <a:pPr algn="just"/>
+            <a:r>
+              <a:rPr lang="en-US" sz="1100" dirty="0">
+                <a:solidFill>
+                  <a:schemeClr val="tx1"/>
+                </a:solidFill>
+                <a:latin typeface="IBM Plex Sans Condensed" panose="020B0506050203000203" pitchFamily="34" charset="77"/>
+              </a:rPr>
+              <a:t>Instead of only looking at pipeline incidents, it could prove valuable to look at all data surrounding the transfer of substances via pipelines. This could identify the proportion of crude oil properties that are most-involved in pipeline accidents. Once again, contacting the governing bodies of pipeline regulations would be a good first step for sourcing this data. </a:t>
+            </a:r>
+          </a:p>
+        </p:txBody>
+      </p:sp>
+      <p:sp>
+        <p:nvSpPr>
+          <p:cNvPr id="10" name="Rounded Rectangle 9">
+            <a:extLst>
+              <a:ext uri="{FF2B5EF4-FFF2-40B4-BE49-F238E27FC236}">
+                <a16:creationId xmlns:a16="http://schemas.microsoft.com/office/drawing/2014/main" id="{3D52CF75-A7FA-A026-9349-8F30850C7264}"/>
+              </a:ext>
+            </a:extLst>
+          </p:cNvPr>
+          <p:cNvSpPr/>
+          <p:nvPr/>
+        </p:nvSpPr>
+        <p:spPr>
+          <a:xfrm>
+            <a:off x="5839096" y="4413037"/>
+            <a:ext cx="5917473" cy="1716027"/>
+          </a:xfrm>
+          <a:prstGeom prst="roundRect">
+            <a:avLst/>
+          </a:prstGeom>
+          <a:noFill/>
+          <a:ln>
+            <a:noFill/>
+            <a:prstDash val="dash"/>
+          </a:ln>
+        </p:spPr>
+        <p:style>
+          <a:lnRef idx="2">
+            <a:schemeClr val="accent1">
+              <a:shade val="15000"/>
+            </a:schemeClr>
+          </a:lnRef>
+          <a:fillRef idx="1">
+            <a:schemeClr val="accent1"/>
+          </a:fillRef>
+          <a:effectRef idx="0">
+            <a:schemeClr val="accent1"/>
+          </a:effectRef>
+          <a:fontRef idx="minor">
+            <a:schemeClr val="lt1"/>
+          </a:fontRef>
+        </p:style>
+        <p:txBody>
+          <a:bodyPr rtlCol="0" anchor="t"/>
+          <a:lstStyle/>
+          <a:p>
+            <a:pPr algn="just"/>
+            <a:r>
+              <a:rPr lang="en-US" sz="1100" dirty="0">
+                <a:solidFill>
+                  <a:srgbClr val="2DAAAF"/>
+                </a:solidFill>
+                <a:latin typeface="IBM Plex Sans Condensed" panose="020B0506050203000203" pitchFamily="34" charset="77"/>
+              </a:rPr>
+              <a:t>4 – EVALUATE FEATURE IMPORTANCE OF “NOT CRUDE OIL” INCIDENTS</a:t>
+            </a:r>
+          </a:p>
+          <a:p>
+            <a:pPr algn="just"/>
+            <a:endParaRPr lang="en-US" sz="1100" dirty="0">
+              <a:solidFill>
+                <a:schemeClr val="tx1"/>
+              </a:solidFill>
+              <a:latin typeface="IBM Plex Sans Condensed" panose="020B0506050203000203" pitchFamily="34" charset="77"/>
+            </a:endParaRPr>
+          </a:p>
+          <a:p>
+            <a:pPr algn="just"/>
+            <a:r>
+              <a:rPr lang="en-US" sz="1100" dirty="0">
+                <a:solidFill>
+                  <a:schemeClr val="tx1"/>
+                </a:solidFill>
+                <a:latin typeface="IBM Plex Sans Condensed" panose="020B0506050203000203" pitchFamily="34" charset="77"/>
+              </a:rPr>
+              <a:t>Given that the models from Approach #1 were able to confidently predict NOT Crude Oil incidents, it would be worthwhile to evaluate which features are contributing to these predictions. This could reveal which attributes are relevant for NOT Crude Oil instances, which could be potentially helpful for their Crude Oil counterparts.</a:t>
+            </a:r>
+          </a:p>
+          <a:p>
+            <a:pPr algn="just"/>
+            <a:endParaRPr lang="en-US" sz="1100" dirty="0">
+              <a:solidFill>
+                <a:schemeClr val="tx1"/>
+              </a:solidFill>
+              <a:latin typeface="IBM Plex Sans Condensed" panose="020B0506050203000203" pitchFamily="34" charset="77"/>
+            </a:endParaRPr>
+          </a:p>
+          <a:p>
+            <a:pPr algn="just"/>
+            <a:r>
+              <a:rPr lang="en-US" sz="1100" dirty="0">
+                <a:solidFill>
+                  <a:schemeClr val="tx1"/>
+                </a:solidFill>
+                <a:latin typeface="IBM Plex Sans Condensed" panose="020B0506050203000203" pitchFamily="34" charset="77"/>
+              </a:rPr>
+              <a:t>Additionally, the model could be expanded by concatenating / merging additional datasets. This is not recommended as a first approach due to inconsistencies in data structures.</a:t>
+            </a:r>
+          </a:p>
+        </p:txBody>
+      </p:sp>
+    </p:spTree>
+    <p:extLst>
+      <p:ext uri="{BB962C8B-B14F-4D97-AF65-F5344CB8AC3E}">
+        <p14:creationId xmlns:p14="http://schemas.microsoft.com/office/powerpoint/2010/main" val="2116172107"/>
+      </p:ext>
+    </p:extLst>
+  </p:cSld>
+  <p:clrMapOvr>
+    <a:masterClrMapping/>
+  </p:clrMapOvr>
+</p:sld>
+</file>
+
+<file path=ppt/slides/slide14.xml><?xml version="1.0" encoding="utf-8"?>
+<p:sld xmlns:a="http://schemas.openxmlformats.org/drawingml/2006/main" xmlns:r="http://schemas.openxmlformats.org/officeDocument/2006/relationships" xmlns:p="http://schemas.openxmlformats.org/presentationml/2006/main">
+  <p:cSld>
+    <p:spTree>
+      <p:nvGrpSpPr>
+        <p:cNvPr id="1" name="">
+          <a:extLst>
+            <a:ext uri="{FF2B5EF4-FFF2-40B4-BE49-F238E27FC236}">
+              <a16:creationId xmlns:a16="http://schemas.microsoft.com/office/drawing/2014/main" id="{5F28FAC0-7A5F-CB72-74FF-7B2DC972673E}"/>
+            </a:ext>
+          </a:extLst>
+        </p:cNvPr>
+        <p:cNvGrpSpPr/>
+        <p:nvPr/>
+      </p:nvGrpSpPr>
+      <p:grpSpPr>
+        <a:xfrm>
+          <a:off x="0" y="0"/>
+          <a:ext cx="0" cy="0"/>
+          <a:chOff x="0" y="0"/>
+          <a:chExt cx="0" cy="0"/>
+        </a:xfrm>
+      </p:grpSpPr>
+      <p:pic>
+        <p:nvPicPr>
+          <p:cNvPr id="7" name="Picture 2" descr="ESG Is Not a Black Box - Validere">
+            <a:extLst>
+              <a:ext uri="{FF2B5EF4-FFF2-40B4-BE49-F238E27FC236}">
+                <a16:creationId xmlns:a16="http://schemas.microsoft.com/office/drawing/2014/main" id="{712C5647-59F6-A90A-0049-6A4BD6F3716F}"/>
+              </a:ext>
+            </a:extLst>
+          </p:cNvPr>
+          <p:cNvPicPr>
+            <a:picLocks noChangeAspect="1" noChangeArrowheads="1"/>
+          </p:cNvPicPr>
+          <p:nvPr/>
+        </p:nvPicPr>
+        <p:blipFill>
+          <a:blip r:embed="rId2">
+            <a:extLst>
+              <a:ext uri="{28A0092B-C50C-407E-A947-70E740481C1C}">
+                <a14:useLocalDpi xmlns:a14="http://schemas.microsoft.com/office/drawing/2010/main" val="0"/>
+              </a:ext>
+            </a:extLst>
+          </a:blip>
+          <a:srcRect/>
+          <a:stretch>
+            <a:fillRect/>
+          </a:stretch>
+        </p:blipFill>
+        <p:spPr bwMode="auto">
+          <a:xfrm>
+            <a:off x="0" y="0"/>
+            <a:ext cx="12192000" cy="6858000"/>
+          </a:xfrm>
+          <a:prstGeom prst="rect">
+            <a:avLst/>
+          </a:prstGeom>
+          <a:noFill/>
+          <a:extLst>
+            <a:ext uri="{909E8E84-426E-40DD-AFC4-6F175D3DCCD1}">
+              <a14:hiddenFill xmlns:a14="http://schemas.microsoft.com/office/drawing/2010/main">
+                <a:solidFill>
+                  <a:srgbClr val="FFFFFF"/>
+                </a:solidFill>
+              </a14:hiddenFill>
+            </a:ext>
+          </a:extLst>
+        </p:spPr>
+      </p:pic>
+      <p:sp>
+        <p:nvSpPr>
+          <p:cNvPr id="6" name="Rectangle 5">
+            <a:extLst>
+              <a:ext uri="{FF2B5EF4-FFF2-40B4-BE49-F238E27FC236}">
+                <a16:creationId xmlns:a16="http://schemas.microsoft.com/office/drawing/2014/main" id="{1ABE4732-3A76-7F20-5401-CB869C5947DB}"/>
+              </a:ext>
+            </a:extLst>
+          </p:cNvPr>
+          <p:cNvSpPr/>
+          <p:nvPr/>
+        </p:nvSpPr>
+        <p:spPr>
+          <a:xfrm>
+            <a:off x="729573" y="2926086"/>
+            <a:ext cx="6698838" cy="502914"/>
+          </a:xfrm>
+          <a:prstGeom prst="rect">
+            <a:avLst/>
+          </a:prstGeom>
+          <a:noFill/>
+          <a:ln>
+            <a:noFill/>
+          </a:ln>
+        </p:spPr>
+        <p:style>
+          <a:lnRef idx="2">
+            <a:schemeClr val="accent1">
+              <a:shade val="15000"/>
+            </a:schemeClr>
+          </a:lnRef>
+          <a:fillRef idx="1">
+            <a:schemeClr val="accent1"/>
+          </a:fillRef>
+          <a:effectRef idx="0">
+            <a:schemeClr val="accent1"/>
+          </a:effectRef>
+          <a:fontRef idx="minor">
+            <a:schemeClr val="lt1"/>
+          </a:fontRef>
+        </p:style>
+        <p:txBody>
+          <a:bodyPr rtlCol="0" anchor="ctr"/>
+          <a:lstStyle/>
+          <a:p>
+            <a:r>
+              <a:rPr lang="en-US" sz="2800" dirty="0">
+                <a:solidFill>
+                  <a:schemeClr val="bg1"/>
+                </a:solidFill>
+                <a:latin typeface="Spectral" panose="02020502060000000000" pitchFamily="18" charset="77"/>
+              </a:rPr>
+              <a:t>Part B – Regulations &amp; Implications</a:t>
+            </a:r>
+          </a:p>
+        </p:txBody>
+      </p:sp>
+      <p:pic>
+        <p:nvPicPr>
+          <p:cNvPr id="4" name="Picture 2" descr="Validere Acquires Regulatory Reporting Platform Clairifi - Validere">
+            <a:extLst>
+              <a:ext uri="{FF2B5EF4-FFF2-40B4-BE49-F238E27FC236}">
+                <a16:creationId xmlns:a16="http://schemas.microsoft.com/office/drawing/2014/main" id="{49CC5BA3-427C-E9F1-1F70-BA24DA5D4684}"/>
+              </a:ext>
+            </a:extLst>
+          </p:cNvPr>
+          <p:cNvPicPr>
+            <a:picLocks noChangeAspect="1" noChangeArrowheads="1"/>
+          </p:cNvPicPr>
+          <p:nvPr/>
+        </p:nvPicPr>
+        <p:blipFill>
+          <a:blip r:embed="rId3">
+            <a:extLst>
+              <a:ext uri="{28A0092B-C50C-407E-A947-70E740481C1C}">
+                <a14:useLocalDpi xmlns:a14="http://schemas.microsoft.com/office/drawing/2010/main" val="0"/>
+              </a:ext>
+            </a:extLst>
+          </a:blip>
+          <a:srcRect/>
+          <a:stretch>
+            <a:fillRect/>
+          </a:stretch>
+        </p:blipFill>
+        <p:spPr bwMode="auto">
+          <a:xfrm>
+            <a:off x="9588137" y="6313713"/>
+            <a:ext cx="2377441" cy="247559"/>
+          </a:xfrm>
+          <a:prstGeom prst="rect">
+            <a:avLst/>
+          </a:prstGeom>
+          <a:noFill/>
+          <a:extLst>
+            <a:ext uri="{909E8E84-426E-40DD-AFC4-6F175D3DCCD1}">
+              <a14:hiddenFill xmlns:a14="http://schemas.microsoft.com/office/drawing/2010/main">
+                <a:solidFill>
+                  <a:srgbClr val="FFFFFF"/>
+                </a:solidFill>
+              </a14:hiddenFill>
+            </a:ext>
+          </a:extLst>
+        </p:spPr>
+      </p:pic>
+      <p:cxnSp>
+        <p:nvCxnSpPr>
+          <p:cNvPr id="2" name="Straight Connector 1">
+            <a:extLst>
+              <a:ext uri="{FF2B5EF4-FFF2-40B4-BE49-F238E27FC236}">
+                <a16:creationId xmlns:a16="http://schemas.microsoft.com/office/drawing/2014/main" id="{FB936853-1040-58E3-31D2-0E175CCE3D7D}"/>
+              </a:ext>
+            </a:extLst>
+          </p:cNvPr>
+          <p:cNvCxnSpPr>
+            <a:cxnSpLocks/>
+          </p:cNvCxnSpPr>
+          <p:nvPr/>
+        </p:nvCxnSpPr>
+        <p:spPr>
+          <a:xfrm>
+            <a:off x="827314" y="3579789"/>
+            <a:ext cx="6731726" cy="0"/>
+          </a:xfrm>
+          <a:prstGeom prst="line">
+            <a:avLst/>
+          </a:prstGeom>
+          <a:ln w="28575">
+            <a:solidFill>
+              <a:srgbClr val="D6DBDD"/>
+            </a:solidFill>
+          </a:ln>
+        </p:spPr>
+        <p:style>
+          <a:lnRef idx="1">
+            <a:schemeClr val="accent1"/>
+          </a:lnRef>
+          <a:fillRef idx="0">
+            <a:schemeClr val="accent1"/>
+          </a:fillRef>
+          <a:effectRef idx="0">
+            <a:schemeClr val="accent1"/>
+          </a:effectRef>
+          <a:fontRef idx="minor">
+            <a:schemeClr val="tx1"/>
+          </a:fontRef>
+        </p:style>
+      </p:cxnSp>
+    </p:spTree>
+    <p:extLst>
+      <p:ext uri="{BB962C8B-B14F-4D97-AF65-F5344CB8AC3E}">
+        <p14:creationId xmlns:p14="http://schemas.microsoft.com/office/powerpoint/2010/main" val="3886858306"/>
+      </p:ext>
+    </p:extLst>
+  </p:cSld>
+  <p:clrMapOvr>
+    <a:masterClrMapping/>
+  </p:clrMapOvr>
+</p:sld>
+</file>
+
+<file path=ppt/slides/slide15.xml><?xml version="1.0" encoding="utf-8"?>
 <p:sld xmlns:a="http://schemas.openxmlformats.org/drawingml/2006/main" xmlns:r="http://schemas.openxmlformats.org/officeDocument/2006/relationships" xmlns:p="http://schemas.openxmlformats.org/presentationml/2006/main">
   <p:cSld>
     <p:spTree>
@@ -5387,331 +10048,7 @@
                 </a:solidFill>
                 <a:latin typeface="Spectral" panose="02020502060000000000" pitchFamily="18" charset="77"/>
               </a:rPr>
-              <a:t>Conclusions / Key Takeaways – Approach #2</a:t>
-            </a:r>
-          </a:p>
-        </p:txBody>
-      </p:sp>
-      <p:pic>
-        <p:nvPicPr>
-          <p:cNvPr id="6" name="Picture 2" descr="Validere Acquires Regulatory Reporting Platform Clairifi - Validere">
-            <a:extLst>
-              <a:ext uri="{FF2B5EF4-FFF2-40B4-BE49-F238E27FC236}">
-                <a16:creationId xmlns:a16="http://schemas.microsoft.com/office/drawing/2014/main" id="{5AE29AB1-08CB-3040-BAF6-3C28420849C7}"/>
-              </a:ext>
-            </a:extLst>
-          </p:cNvPr>
-          <p:cNvPicPr>
-            <a:picLocks noChangeAspect="1" noChangeArrowheads="1"/>
-          </p:cNvPicPr>
-          <p:nvPr/>
-        </p:nvPicPr>
-        <p:blipFill>
-          <a:blip r:embed="rId2">
-            <a:extLst>
-              <a:ext uri="{28A0092B-C50C-407E-A947-70E740481C1C}">
-                <a14:useLocalDpi xmlns:a14="http://schemas.microsoft.com/office/drawing/2010/main" val="0"/>
-              </a:ext>
-            </a:extLst>
-          </a:blip>
-          <a:srcRect/>
-          <a:stretch>
-            <a:fillRect/>
-          </a:stretch>
-        </p:blipFill>
-        <p:spPr bwMode="auto">
-          <a:xfrm>
-            <a:off x="9588136" y="6313712"/>
-            <a:ext cx="2385518" cy="248400"/>
-          </a:xfrm>
-          <a:prstGeom prst="rect">
-            <a:avLst/>
-          </a:prstGeom>
-          <a:noFill/>
-          <a:extLst>
-            <a:ext uri="{909E8E84-426E-40DD-AFC4-6F175D3DCCD1}">
-              <a14:hiddenFill xmlns:a14="http://schemas.microsoft.com/office/drawing/2010/main">
-                <a:solidFill>
-                  <a:srgbClr val="FFFFFF"/>
-                </a:solidFill>
-              </a14:hiddenFill>
-            </a:ext>
-          </a:extLst>
-        </p:spPr>
-      </p:pic>
-      <p:sp>
-        <p:nvSpPr>
-          <p:cNvPr id="3" name="TextBox 2">
-            <a:extLst>
-              <a:ext uri="{FF2B5EF4-FFF2-40B4-BE49-F238E27FC236}">
-                <a16:creationId xmlns:a16="http://schemas.microsoft.com/office/drawing/2014/main" id="{FCB30CD3-8335-30C5-9FAD-B2DA3F7B3B60}"/>
-              </a:ext>
-            </a:extLst>
-          </p:cNvPr>
-          <p:cNvSpPr txBox="1"/>
-          <p:nvPr/>
-        </p:nvSpPr>
-        <p:spPr>
-          <a:xfrm>
-            <a:off x="348342" y="1047347"/>
-            <a:ext cx="11408227" cy="307777"/>
-          </a:xfrm>
-          <a:prstGeom prst="rect">
-            <a:avLst/>
-          </a:prstGeom>
-          <a:noFill/>
-        </p:spPr>
-        <p:txBody>
-          <a:bodyPr wrap="square" rtlCol="0">
-            <a:spAutoFit/>
-          </a:bodyPr>
-          <a:lstStyle/>
-          <a:p>
-            <a:r>
-              <a:rPr lang="en-US" sz="1400" dirty="0">
-                <a:latin typeface="IBM Plex Sans Condensed" panose="020B0506050203000203" pitchFamily="34" charset="77"/>
-              </a:rPr>
-              <a:t>……</a:t>
-            </a:r>
-          </a:p>
-        </p:txBody>
-      </p:sp>
-      <p:sp>
-        <p:nvSpPr>
-          <p:cNvPr id="5" name="Rectangle 4">
-            <a:extLst>
-              <a:ext uri="{FF2B5EF4-FFF2-40B4-BE49-F238E27FC236}">
-                <a16:creationId xmlns:a16="http://schemas.microsoft.com/office/drawing/2014/main" id="{691D5CA9-32D1-38D1-B393-C42D202C3AF8}"/>
-              </a:ext>
-            </a:extLst>
-          </p:cNvPr>
-          <p:cNvSpPr/>
-          <p:nvPr/>
-        </p:nvSpPr>
-        <p:spPr>
-          <a:xfrm>
-            <a:off x="431074" y="1578454"/>
-            <a:ext cx="4343400" cy="274480"/>
-          </a:xfrm>
-          <a:prstGeom prst="rect">
-            <a:avLst/>
-          </a:prstGeom>
-          <a:solidFill>
-            <a:srgbClr val="213442"/>
-          </a:solidFill>
-        </p:spPr>
-        <p:style>
-          <a:lnRef idx="2">
-            <a:schemeClr val="accent1">
-              <a:shade val="15000"/>
-            </a:schemeClr>
-          </a:lnRef>
-          <a:fillRef idx="1">
-            <a:schemeClr val="accent1"/>
-          </a:fillRef>
-          <a:effectRef idx="0">
-            <a:schemeClr val="accent1"/>
-          </a:effectRef>
-          <a:fontRef idx="minor">
-            <a:schemeClr val="lt1"/>
-          </a:fontRef>
-        </p:style>
-        <p:txBody>
-          <a:bodyPr rtlCol="0" anchor="ctr"/>
-          <a:lstStyle/>
-          <a:p>
-            <a:r>
-              <a:rPr lang="en-US" sz="1400" dirty="0">
-                <a:solidFill>
-                  <a:schemeClr val="bg1"/>
-                </a:solidFill>
-                <a:latin typeface="IBM Plex Sans Condensed" panose="020B0506050203000203" pitchFamily="34" charset="77"/>
-              </a:rPr>
-              <a:t>Approach #1 – Crude Oil vs. NOT Crude Oil</a:t>
-            </a:r>
-          </a:p>
-        </p:txBody>
-      </p:sp>
-      <p:sp>
-        <p:nvSpPr>
-          <p:cNvPr id="9" name="Rectangle 8">
-            <a:extLst>
-              <a:ext uri="{FF2B5EF4-FFF2-40B4-BE49-F238E27FC236}">
-                <a16:creationId xmlns:a16="http://schemas.microsoft.com/office/drawing/2014/main" id="{4E98AB9A-73DB-552B-AEA2-F1183214CACB}"/>
-              </a:ext>
-            </a:extLst>
-          </p:cNvPr>
-          <p:cNvSpPr/>
-          <p:nvPr/>
-        </p:nvSpPr>
-        <p:spPr>
-          <a:xfrm>
-            <a:off x="431075" y="1852934"/>
-            <a:ext cx="11325494" cy="604212"/>
-          </a:xfrm>
-          <a:prstGeom prst="rect">
-            <a:avLst/>
-          </a:prstGeom>
-          <a:noFill/>
-        </p:spPr>
-        <p:style>
-          <a:lnRef idx="2">
-            <a:schemeClr val="accent1">
-              <a:shade val="15000"/>
-            </a:schemeClr>
-          </a:lnRef>
-          <a:fillRef idx="1">
-            <a:schemeClr val="accent1"/>
-          </a:fillRef>
-          <a:effectRef idx="0">
-            <a:schemeClr val="accent1"/>
-          </a:effectRef>
-          <a:fontRef idx="minor">
-            <a:schemeClr val="lt1"/>
-          </a:fontRef>
-        </p:style>
-        <p:txBody>
-          <a:bodyPr rtlCol="0" anchor="ctr"/>
-          <a:lstStyle/>
-          <a:p>
-            <a:r>
-              <a:rPr lang="en-US" sz="1100" dirty="0">
-                <a:solidFill>
-                  <a:schemeClr val="tx1"/>
-                </a:solidFill>
-                <a:latin typeface="IBM Plex Sans Condensed" panose="020B0506050203000203" pitchFamily="34" charset="77"/>
-              </a:rPr>
-              <a:t>…</a:t>
-            </a:r>
-          </a:p>
-        </p:txBody>
-      </p:sp>
-      <p:cxnSp>
-        <p:nvCxnSpPr>
-          <p:cNvPr id="2" name="Straight Connector 1">
-            <a:extLst>
-              <a:ext uri="{FF2B5EF4-FFF2-40B4-BE49-F238E27FC236}">
-                <a16:creationId xmlns:a16="http://schemas.microsoft.com/office/drawing/2014/main" id="{8E6A056F-CCD7-E973-BB13-E8C45637CED5}"/>
-              </a:ext>
-            </a:extLst>
-          </p:cNvPr>
-          <p:cNvCxnSpPr>
-            <a:cxnSpLocks/>
-          </p:cNvCxnSpPr>
-          <p:nvPr/>
-        </p:nvCxnSpPr>
-        <p:spPr>
-          <a:xfrm>
-            <a:off x="-78377" y="923109"/>
-            <a:ext cx="11834947" cy="0"/>
-          </a:xfrm>
-          <a:prstGeom prst="line">
-            <a:avLst/>
-          </a:prstGeom>
-          <a:ln w="12700">
-            <a:solidFill>
-              <a:srgbClr val="0A2636"/>
-            </a:solidFill>
-          </a:ln>
-        </p:spPr>
-        <p:style>
-          <a:lnRef idx="1">
-            <a:schemeClr val="accent1"/>
-          </a:lnRef>
-          <a:fillRef idx="0">
-            <a:schemeClr val="accent1"/>
-          </a:fillRef>
-          <a:effectRef idx="0">
-            <a:schemeClr val="accent1"/>
-          </a:effectRef>
-          <a:fontRef idx="minor">
-            <a:schemeClr val="tx1"/>
-          </a:fontRef>
-        </p:style>
-      </p:cxnSp>
-    </p:spTree>
-    <p:extLst>
-      <p:ext uri="{BB962C8B-B14F-4D97-AF65-F5344CB8AC3E}">
-        <p14:creationId xmlns:p14="http://schemas.microsoft.com/office/powerpoint/2010/main" val="3229023963"/>
-      </p:ext>
-    </p:extLst>
-  </p:cSld>
-  <p:clrMapOvr>
-    <a:masterClrMapping/>
-  </p:clrMapOvr>
-</p:sld>
-</file>
-
-<file path=ppt/slides/slide13.xml><?xml version="1.0" encoding="utf-8"?>
-<p:sld xmlns:a="http://schemas.openxmlformats.org/drawingml/2006/main" xmlns:r="http://schemas.openxmlformats.org/officeDocument/2006/relationships" xmlns:p="http://schemas.openxmlformats.org/presentationml/2006/main">
-  <p:cSld>
-    <p:spTree>
-      <p:nvGrpSpPr>
-        <p:cNvPr id="1" name=""/>
-        <p:cNvGrpSpPr/>
-        <p:nvPr/>
-      </p:nvGrpSpPr>
-      <p:grpSpPr>
-        <a:xfrm>
-          <a:off x="0" y="0"/>
-          <a:ext cx="0" cy="0"/>
-          <a:chOff x="0" y="0"/>
-          <a:chExt cx="0" cy="0"/>
-        </a:xfrm>
-      </p:grpSpPr>
-      <p:sp>
-        <p:nvSpPr>
-          <p:cNvPr id="4" name="Rectangle 3">
-            <a:extLst>
-              <a:ext uri="{FF2B5EF4-FFF2-40B4-BE49-F238E27FC236}">
-                <a16:creationId xmlns:a16="http://schemas.microsoft.com/office/drawing/2014/main" id="{9C5E69D8-2133-86C5-C478-359118968E16}"/>
-              </a:ext>
-            </a:extLst>
-          </p:cNvPr>
-          <p:cNvSpPr/>
-          <p:nvPr/>
-        </p:nvSpPr>
-        <p:spPr>
-          <a:xfrm>
-            <a:off x="233183" y="304280"/>
-            <a:ext cx="11523387" cy="618829"/>
-          </a:xfrm>
-          <a:prstGeom prst="rect">
-            <a:avLst/>
-          </a:prstGeom>
-          <a:noFill/>
-          <a:ln>
-            <a:noFill/>
-          </a:ln>
-        </p:spPr>
-        <p:style>
-          <a:lnRef idx="2">
-            <a:schemeClr val="accent1">
-              <a:shade val="15000"/>
-            </a:schemeClr>
-          </a:lnRef>
-          <a:fillRef idx="1">
-            <a:schemeClr val="accent1"/>
-          </a:fillRef>
-          <a:effectRef idx="0">
-            <a:schemeClr val="accent1"/>
-          </a:effectRef>
-          <a:fontRef idx="minor">
-            <a:schemeClr val="lt1"/>
-          </a:fontRef>
-        </p:style>
-        <p:txBody>
-          <a:bodyPr rtlCol="0" anchor="ctr"/>
-          <a:lstStyle/>
-          <a:p>
-            <a:r>
-              <a:rPr lang="en-US" sz="3600" dirty="0">
-                <a:solidFill>
-                  <a:srgbClr val="0A2636"/>
-                </a:solidFill>
-                <a:latin typeface="Spectral" panose="02020502060000000000" pitchFamily="18" charset="77"/>
-              </a:rPr>
-              <a:t>Regulations &amp; Implications</a:t>
+              <a:t>Current &amp; Proposed Regulations</a:t>
             </a:r>
           </a:p>
         </p:txBody>
@@ -5778,7 +10115,7 @@
         <p:spPr>
           <a:xfrm>
             <a:off x="290763" y="1047347"/>
-            <a:ext cx="11682892" cy="369332"/>
+            <a:ext cx="11465807" cy="307777"/>
           </a:xfrm>
           <a:prstGeom prst="rect">
             <a:avLst/>
@@ -5792,10 +10129,10 @@
           <a:lstStyle/>
           <a:p>
             <a:r>
-              <a:rPr lang="en-US" dirty="0">
+              <a:rPr lang="en-US" sz="1400" dirty="0">
                 <a:latin typeface="IBM Plex Sans Condensed" panose="020B0506050203000203" pitchFamily="34" charset="77"/>
               </a:rPr>
-              <a:t>Looking at … data in 2 steps</a:t>
+              <a:t>To propose regulations, we need to understand the current regulations and how they’ve evolved over time. </a:t>
             </a:r>
           </a:p>
         </p:txBody>
@@ -5843,6 +10180,537 @@
           </a:fontRef>
         </p:style>
       </p:cxnSp>
+      <p:sp>
+        <p:nvSpPr>
+          <p:cNvPr id="10" name="Rounded Rectangle 9">
+            <a:extLst>
+              <a:ext uri="{FF2B5EF4-FFF2-40B4-BE49-F238E27FC236}">
+                <a16:creationId xmlns:a16="http://schemas.microsoft.com/office/drawing/2014/main" id="{BE2531BD-E42C-D218-5C76-613C1EF41C6E}"/>
+              </a:ext>
+            </a:extLst>
+          </p:cNvPr>
+          <p:cNvSpPr/>
+          <p:nvPr/>
+        </p:nvSpPr>
+        <p:spPr>
+          <a:xfrm>
+            <a:off x="2394857" y="1477043"/>
+            <a:ext cx="9304133" cy="497458"/>
+          </a:xfrm>
+          <a:prstGeom prst="roundRect">
+            <a:avLst/>
+          </a:prstGeom>
+          <a:noFill/>
+          <a:ln>
+            <a:noFill/>
+          </a:ln>
+        </p:spPr>
+        <p:style>
+          <a:lnRef idx="2">
+            <a:schemeClr val="accent1">
+              <a:shade val="15000"/>
+            </a:schemeClr>
+          </a:lnRef>
+          <a:fillRef idx="1">
+            <a:schemeClr val="accent1"/>
+          </a:fillRef>
+          <a:effectRef idx="0">
+            <a:schemeClr val="accent1"/>
+          </a:effectRef>
+          <a:fontRef idx="minor">
+            <a:schemeClr val="lt1"/>
+          </a:fontRef>
+        </p:style>
+        <p:txBody>
+          <a:bodyPr rtlCol="0" anchor="ctr"/>
+          <a:lstStyle/>
+          <a:p>
+            <a:pPr marL="228600" indent="-228600">
+              <a:buAutoNum type="arabicPeriod"/>
+            </a:pPr>
+            <a:r>
+              <a:rPr lang="en-US" sz="1100" dirty="0">
+                <a:solidFill>
+                  <a:schemeClr val="tx1"/>
+                </a:solidFill>
+                <a:latin typeface="IBM Plex Sans Condensed" panose="020B0506050203000203" pitchFamily="34" charset="77"/>
+              </a:rPr>
+              <a:t>What regulations on those properties would you recommend? </a:t>
+            </a:r>
+          </a:p>
+          <a:p>
+            <a:pPr marL="228600" indent="-228600">
+              <a:buAutoNum type="arabicPeriod"/>
+            </a:pPr>
+            <a:r>
+              <a:rPr lang="en-US" sz="1100" dirty="0">
+                <a:solidFill>
+                  <a:schemeClr val="tx1"/>
+                </a:solidFill>
+                <a:latin typeface="IBM Plex Sans Condensed" panose="020B0506050203000203" pitchFamily="34" charset="77"/>
+              </a:rPr>
+              <a:t>Have we gotten better at regulating those properties over time?</a:t>
+            </a:r>
+          </a:p>
+        </p:txBody>
+      </p:sp>
+      <p:graphicFrame>
+        <p:nvGraphicFramePr>
+          <p:cNvPr id="13" name="Table 12">
+            <a:extLst>
+              <a:ext uri="{FF2B5EF4-FFF2-40B4-BE49-F238E27FC236}">
+                <a16:creationId xmlns:a16="http://schemas.microsoft.com/office/drawing/2014/main" id="{5D1F0471-50C7-ACEE-D832-822B0943D635}"/>
+              </a:ext>
+            </a:extLst>
+          </p:cNvPr>
+          <p:cNvGraphicFramePr>
+            <a:graphicFrameLocks noGrp="1"/>
+          </p:cNvGraphicFramePr>
+          <p:nvPr>
+            <p:extLst>
+              <p:ext uri="{D42A27DB-BD31-4B8C-83A1-F6EECF244321}">
+                <p14:modId xmlns:p14="http://schemas.microsoft.com/office/powerpoint/2010/main" val="3375873778"/>
+              </p:ext>
+            </p:extLst>
+          </p:nvPr>
+        </p:nvGraphicFramePr>
+        <p:xfrm>
+          <a:off x="290763" y="2101055"/>
+          <a:ext cx="11408227" cy="1386840"/>
+        </p:xfrm>
+        <a:graphic>
+          <a:graphicData uri="http://schemas.openxmlformats.org/drawingml/2006/table">
+            <a:tbl>
+              <a:tblPr firstRow="1" bandRow="1">
+                <a:tableStyleId>{5C22544A-7EE6-4342-B048-85BDC9FD1C3A}</a:tableStyleId>
+              </a:tblPr>
+              <a:tblGrid>
+                <a:gridCol w="1927259">
+                  <a:extLst>
+                    <a:ext uri="{9D8B030D-6E8A-4147-A177-3AD203B41FA5}">
+                      <a16:colId xmlns:a16="http://schemas.microsoft.com/office/drawing/2014/main" val="1727256394"/>
+                    </a:ext>
+                  </a:extLst>
+                </a:gridCol>
+                <a:gridCol w="9480968">
+                  <a:extLst>
+                    <a:ext uri="{9D8B030D-6E8A-4147-A177-3AD203B41FA5}">
+                      <a16:colId xmlns:a16="http://schemas.microsoft.com/office/drawing/2014/main" val="2493933945"/>
+                    </a:ext>
+                  </a:extLst>
+                </a:gridCol>
+              </a:tblGrid>
+              <a:tr h="129243">
+                <a:tc>
+                  <a:txBody>
+                    <a:bodyPr/>
+                    <a:lstStyle/>
+                    <a:p>
+                      <a:r>
+                        <a:rPr lang="en-US" sz="1100" b="0" dirty="0">
+                          <a:solidFill>
+                            <a:schemeClr val="bg1"/>
+                          </a:solidFill>
+                          <a:latin typeface="Spectral" panose="02020502060000000000" pitchFamily="18" charset="77"/>
+                        </a:rPr>
+                        <a:t>Governing Body, Year</a:t>
+                      </a:r>
+                    </a:p>
+                  </a:txBody>
+                  <a:tcPr>
+                    <a:solidFill>
+                      <a:srgbClr val="0A2536"/>
+                    </a:solidFill>
+                  </a:tcPr>
+                </a:tc>
+                <a:tc>
+                  <a:txBody>
+                    <a:bodyPr/>
+                    <a:lstStyle/>
+                    <a:p>
+                      <a:r>
+                        <a:rPr lang="en-US" sz="1100" b="0" dirty="0">
+                          <a:solidFill>
+                            <a:schemeClr val="bg1"/>
+                          </a:solidFill>
+                          <a:latin typeface="Spectral" panose="02020502060000000000" pitchFamily="18" charset="77"/>
+                        </a:rPr>
+                        <a:t>Regulation</a:t>
+                      </a:r>
+                    </a:p>
+                  </a:txBody>
+                  <a:tcPr>
+                    <a:solidFill>
+                      <a:srgbClr val="0A2536"/>
+                    </a:solidFill>
+                  </a:tcPr>
+                </a:tc>
+                <a:extLst>
+                  <a:ext uri="{0D108BD9-81ED-4DB2-BD59-A6C34878D82A}">
+                    <a16:rowId xmlns:a16="http://schemas.microsoft.com/office/drawing/2014/main" val="3859704445"/>
+                  </a:ext>
+                </a:extLst>
+              </a:tr>
+              <a:tr h="129243">
+                <a:tc>
+                  <a:txBody>
+                    <a:bodyPr/>
+                    <a:lstStyle/>
+                    <a:p>
+                      <a:r>
+                        <a:rPr lang="en-US" sz="800" dirty="0">
+                          <a:solidFill>
+                            <a:schemeClr val="tx1"/>
+                          </a:solidFill>
+                          <a:latin typeface="IBM Plex Sans Condensed" panose="020B0506050203000203" pitchFamily="34" charset="77"/>
+                        </a:rPr>
+                        <a:t>PHMSA, 2013</a:t>
+                      </a:r>
+                    </a:p>
+                  </a:txBody>
+                  <a:tcPr anchor="ctr">
+                    <a:noFill/>
+                  </a:tcPr>
+                </a:tc>
+                <a:tc>
+                  <a:txBody>
+                    <a:bodyPr/>
+                    <a:lstStyle/>
+                    <a:p>
+                      <a:r>
+                        <a:rPr lang="en-US" sz="800" dirty="0">
+                          <a:solidFill>
+                            <a:schemeClr val="tx1"/>
+                          </a:solidFill>
+                        </a:rPr>
+                        <a:t>The PHMSA along with Federal Railroad Administration launched Operation Classification to verify that crude oil is being properly classified by performing unannounced spot inspections and data collection, and by sampling and testing at strategic locations in the crude oil transportation chain [10].</a:t>
+                      </a:r>
+                    </a:p>
+                  </a:txBody>
+                  <a:tcPr anchor="ctr">
+                    <a:noFill/>
+                  </a:tcPr>
+                </a:tc>
+                <a:extLst>
+                  <a:ext uri="{0D108BD9-81ED-4DB2-BD59-A6C34878D82A}">
+                    <a16:rowId xmlns:a16="http://schemas.microsoft.com/office/drawing/2014/main" val="1695792492"/>
+                  </a:ext>
+                </a:extLst>
+              </a:tr>
+              <a:tr h="212871">
+                <a:tc>
+                  <a:txBody>
+                    <a:bodyPr/>
+                    <a:lstStyle/>
+                    <a:p>
+                      <a:r>
+                        <a:rPr lang="en-US" sz="800" dirty="0">
+                          <a:solidFill>
+                            <a:schemeClr val="tx1"/>
+                          </a:solidFill>
+                          <a:latin typeface="IBM Plex Sans Condensed" panose="020B0506050203000203" pitchFamily="34" charset="77"/>
+                        </a:rPr>
+                        <a:t>DOT / Transport Canada, 2015</a:t>
+                      </a:r>
+                    </a:p>
+                  </a:txBody>
+                  <a:tcPr anchor="ctr">
+                    <a:solidFill>
+                      <a:srgbClr val="F7F9FC"/>
+                    </a:solidFill>
+                  </a:tcPr>
+                </a:tc>
+                <a:tc>
+                  <a:txBody>
+                    <a:bodyPr/>
+                    <a:lstStyle/>
+                    <a:p>
+                      <a:r>
+                        <a:rPr lang="en-US" sz="800" dirty="0">
+                          <a:solidFill>
+                            <a:schemeClr val="tx1"/>
+                          </a:solidFill>
+                        </a:rPr>
+                        <a:t>The US Department of Transportation (DOT) in conjunction with Transport Canada created a plan to conduct a research study to develop a more comprehensive understanding of the properties of crude oil [10]. The review has a heavy focus on identifying which properties are correlated with combustion. The study discusses a difficulty in utilizing available data because of sample point variability, sampling method variability, and analytical method variability. As of the plan’s announcement, there was no funding for the work (and the subsequent product cannot be found online). </a:t>
+                      </a:r>
+                    </a:p>
+                  </a:txBody>
+                  <a:tcPr anchor="ctr">
+                    <a:solidFill>
+                      <a:srgbClr val="F7F9FC"/>
+                    </a:solidFill>
+                  </a:tcPr>
+                </a:tc>
+                <a:extLst>
+                  <a:ext uri="{0D108BD9-81ED-4DB2-BD59-A6C34878D82A}">
+                    <a16:rowId xmlns:a16="http://schemas.microsoft.com/office/drawing/2014/main" val="3315963100"/>
+                  </a:ext>
+                </a:extLst>
+              </a:tr>
+              <a:tr h="212871">
+                <a:tc>
+                  <a:txBody>
+                    <a:bodyPr/>
+                    <a:lstStyle/>
+                    <a:p>
+                      <a:r>
+                        <a:rPr lang="en-US" sz="800" dirty="0">
+                          <a:solidFill>
+                            <a:schemeClr val="tx1"/>
+                          </a:solidFill>
+                          <a:latin typeface="IBM Plex Sans Condensed" panose="020B0506050203000203" pitchFamily="34" charset="77"/>
+                        </a:rPr>
+                        <a:t>AER, 2023</a:t>
+                      </a:r>
+                    </a:p>
+                  </a:txBody>
+                  <a:tcPr anchor="ctr">
+                    <a:noFill/>
+                  </a:tcPr>
+                </a:tc>
+                <a:tc>
+                  <a:txBody>
+                    <a:bodyPr/>
+                    <a:lstStyle/>
+                    <a:p>
+                      <a:pPr marL="0" marR="0" lvl="0" indent="0" algn="l" defTabSz="914400" rtl="0" eaLnBrk="1" fontAlgn="auto" latinLnBrk="0" hangingPunct="1">
+                        <a:lnSpc>
+                          <a:spcPct val="100000"/>
+                        </a:lnSpc>
+                        <a:spcBef>
+                          <a:spcPts val="0"/>
+                        </a:spcBef>
+                        <a:spcAft>
+                          <a:spcPts val="0"/>
+                        </a:spcAft>
+                        <a:buClrTx/>
+                        <a:buSzTx/>
+                        <a:buFontTx/>
+                        <a:buNone/>
+                        <a:tabLst/>
+                        <a:defRPr/>
+                      </a:pPr>
+                      <a:r>
+                        <a:rPr lang="en-US" sz="800" dirty="0">
+                          <a:solidFill>
+                            <a:schemeClr val="tx1"/>
+                          </a:solidFill>
+                        </a:rPr>
+                        <a:t>The Alberta Energy Regulator (AER) makes frequent updates to the OIL AND GAS CONSERVATION RULES (among other documents). With regards to the regulation of crude oil, the current version of this document states that the operator of wells / oil sands are required to keep records of the crude oil received into the pipeline and file the records with the Regulator [12].</a:t>
+                      </a:r>
+                    </a:p>
+                  </a:txBody>
+                  <a:tcPr anchor="ctr">
+                    <a:noFill/>
+                  </a:tcPr>
+                </a:tc>
+                <a:extLst>
+                  <a:ext uri="{0D108BD9-81ED-4DB2-BD59-A6C34878D82A}">
+                    <a16:rowId xmlns:a16="http://schemas.microsoft.com/office/drawing/2014/main" val="2713758480"/>
+                  </a:ext>
+                </a:extLst>
+              </a:tr>
+            </a:tbl>
+          </a:graphicData>
+        </a:graphic>
+      </p:graphicFrame>
+      <p:sp>
+        <p:nvSpPr>
+          <p:cNvPr id="14" name="Rounded Rectangle 13">
+            <a:extLst>
+              <a:ext uri="{FF2B5EF4-FFF2-40B4-BE49-F238E27FC236}">
+                <a16:creationId xmlns:a16="http://schemas.microsoft.com/office/drawing/2014/main" id="{8A2CA7BA-21DE-30A2-F9AA-FFAB68B188F2}"/>
+              </a:ext>
+            </a:extLst>
+          </p:cNvPr>
+          <p:cNvSpPr/>
+          <p:nvPr/>
+        </p:nvSpPr>
+        <p:spPr>
+          <a:xfrm>
+            <a:off x="104504" y="3487895"/>
+            <a:ext cx="11652066" cy="2756149"/>
+          </a:xfrm>
+          <a:prstGeom prst="roundRect">
+            <a:avLst/>
+          </a:prstGeom>
+          <a:noFill/>
+          <a:ln>
+            <a:noFill/>
+          </a:ln>
+        </p:spPr>
+        <p:style>
+          <a:lnRef idx="2">
+            <a:schemeClr val="accent1">
+              <a:shade val="15000"/>
+            </a:schemeClr>
+          </a:lnRef>
+          <a:fillRef idx="1">
+            <a:schemeClr val="accent1"/>
+          </a:fillRef>
+          <a:effectRef idx="0">
+            <a:schemeClr val="accent1"/>
+          </a:effectRef>
+          <a:fontRef idx="minor">
+            <a:schemeClr val="lt1"/>
+          </a:fontRef>
+        </p:style>
+        <p:txBody>
+          <a:bodyPr rtlCol="0" anchor="ctr"/>
+          <a:lstStyle/>
+          <a:p>
+            <a:r>
+              <a:rPr lang="en-US" sz="1200" dirty="0">
+                <a:solidFill>
+                  <a:srgbClr val="2DAAAF"/>
+                </a:solidFill>
+                <a:latin typeface="Spectral" panose="02020502060000000000" pitchFamily="18" charset="77"/>
+              </a:rPr>
+              <a:t>DISCUSSION</a:t>
+            </a:r>
+            <a:endParaRPr lang="en-US" sz="1100" dirty="0">
+              <a:solidFill>
+                <a:schemeClr val="tx1"/>
+              </a:solidFill>
+              <a:latin typeface="IBM Plex Sans Condensed" panose="020B0506050203000203" pitchFamily="34" charset="77"/>
+            </a:endParaRPr>
+          </a:p>
+          <a:p>
+            <a:r>
+              <a:rPr lang="en-US" sz="1000" dirty="0">
+                <a:solidFill>
+                  <a:schemeClr val="tx1"/>
+                </a:solidFill>
+                <a:latin typeface="IBM Plex Sans Condensed" panose="020B0506050203000203" pitchFamily="34" charset="77"/>
+              </a:rPr>
+              <a:t>The governing bodies of crude oil transportation across Canada and the USA have regulations in place to monitor the chemical and physical properties of crude oil. However, given the quantity of crude oil that is being transferred across North America, and the fact that crude oils have unique compositions, it seems unreasonable that a governing body could keep track of the properties of every crude oil that they govern. This is why an audit-based approach, like the PHMSA’s random sampling and AER’s required documentation, form a reasonable set of regulations.</a:t>
+            </a:r>
+          </a:p>
+          <a:p>
+            <a:endParaRPr lang="en-US" sz="1000" dirty="0">
+              <a:solidFill>
+                <a:schemeClr val="tx1"/>
+              </a:solidFill>
+              <a:latin typeface="IBM Plex Sans Condensed" panose="020B0506050203000203" pitchFamily="34" charset="77"/>
+            </a:endParaRPr>
+          </a:p>
+          <a:p>
+            <a:r>
+              <a:rPr lang="en-US" sz="1000" dirty="0">
+                <a:solidFill>
+                  <a:schemeClr val="tx1"/>
+                </a:solidFill>
+                <a:latin typeface="IBM Plex Sans Condensed" panose="020B0506050203000203" pitchFamily="34" charset="77"/>
+              </a:rPr>
+              <a:t>Regarding research studies concerning the composition of crude oil, it seems as though numerous organizations have proposed scientific plans to identify relevant properties ([1], [10]). But the necessary funding to execute these studies is not being given. This could potentially be a result of substance-related incidents making up a small portion of total incidents (e.g., human error contributes to more incidents than internal corrosion-related incidents). </a:t>
+            </a:r>
+          </a:p>
+          <a:p>
+            <a:endParaRPr lang="en-US" sz="1000" dirty="0">
+              <a:solidFill>
+                <a:schemeClr val="tx1"/>
+              </a:solidFill>
+              <a:latin typeface="IBM Plex Sans Condensed" panose="020B0506050203000203" pitchFamily="34" charset="77"/>
+            </a:endParaRPr>
+          </a:p>
+          <a:p>
+            <a:r>
+              <a:rPr lang="en-US" sz="1000" dirty="0">
+                <a:solidFill>
+                  <a:schemeClr val="tx1"/>
+                </a:solidFill>
+                <a:latin typeface="IBM Plex Sans Condensed" panose="020B0506050203000203" pitchFamily="34" charset="77"/>
+              </a:rPr>
+              <a:t>Ultimately, the regulations regarding the properties of crude oil do not seem to have improved much over time. The intention is there, but the execution is not. This conclusion is reinforced by the datasets provided by these governing bodies on pipeline incidents – next to no data is given regarding the composition of the crude oil that is involved in the respective accident. </a:t>
+            </a:r>
+          </a:p>
+          <a:p>
+            <a:endParaRPr lang="en-US" sz="1000" dirty="0">
+              <a:solidFill>
+                <a:schemeClr val="tx1"/>
+              </a:solidFill>
+              <a:latin typeface="IBM Plex Sans Condensed" panose="020B0506050203000203" pitchFamily="34" charset="77"/>
+            </a:endParaRPr>
+          </a:p>
+          <a:p>
+            <a:r>
+              <a:rPr lang="en-US" sz="1000" dirty="0">
+                <a:solidFill>
+                  <a:schemeClr val="tx1"/>
+                </a:solidFill>
+                <a:latin typeface="IBM Plex Sans Condensed" panose="020B0506050203000203" pitchFamily="34" charset="77"/>
+              </a:rPr>
+              <a:t>Without knowing which properties of crude oil are influencing pipeline incidents, we cannot make property-specific recommendations. However, we can make recommendations regarding the sampling and disclosure of crude oil across pipelines (for both regular operations and within incidents). It seems reasonable to require that when a pipeline incident occurs, the company samples the crude oil at the point of failure and includes this is in their disclosure. Additionally, it does not seem unreasonable to require sampling of substances during regular operations at frequent intervals (instead of just at the start) along pipelines that carry crude oil. These could be disclosed at quarterly or yearly intervals. </a:t>
+            </a:r>
+            <a:endParaRPr lang="en-US" sz="1100" dirty="0">
+              <a:solidFill>
+                <a:schemeClr val="tx1"/>
+              </a:solidFill>
+              <a:latin typeface="IBM Plex Sans Condensed" panose="020B0506050203000203" pitchFamily="34" charset="77"/>
+            </a:endParaRPr>
+          </a:p>
+        </p:txBody>
+      </p:sp>
+      <p:sp>
+        <p:nvSpPr>
+          <p:cNvPr id="15" name="Rounded Rectangle 14">
+            <a:extLst>
+              <a:ext uri="{FF2B5EF4-FFF2-40B4-BE49-F238E27FC236}">
+                <a16:creationId xmlns:a16="http://schemas.microsoft.com/office/drawing/2014/main" id="{CA0C4F2B-DE56-0F93-0F60-F98384C76C94}"/>
+              </a:ext>
+            </a:extLst>
+          </p:cNvPr>
+          <p:cNvSpPr/>
+          <p:nvPr/>
+        </p:nvSpPr>
+        <p:spPr>
+          <a:xfrm>
+            <a:off x="290763" y="1479360"/>
+            <a:ext cx="1938631" cy="497458"/>
+          </a:xfrm>
+          <a:prstGeom prst="roundRect">
+            <a:avLst/>
+          </a:prstGeom>
+          <a:solidFill>
+            <a:srgbClr val="F7F9FC"/>
+          </a:solidFill>
+          <a:ln>
+            <a:noFill/>
+          </a:ln>
+        </p:spPr>
+        <p:style>
+          <a:lnRef idx="2">
+            <a:schemeClr val="accent1">
+              <a:shade val="15000"/>
+            </a:schemeClr>
+          </a:lnRef>
+          <a:fillRef idx="1">
+            <a:schemeClr val="accent1"/>
+          </a:fillRef>
+          <a:effectRef idx="0">
+            <a:schemeClr val="accent1"/>
+          </a:effectRef>
+          <a:fontRef idx="minor">
+            <a:schemeClr val="lt1"/>
+          </a:fontRef>
+        </p:style>
+        <p:txBody>
+          <a:bodyPr rtlCol="0" anchor="ctr"/>
+          <a:lstStyle/>
+          <a:p>
+            <a:pPr algn="ctr"/>
+            <a:r>
+              <a:rPr lang="en-US" sz="1100" dirty="0">
+                <a:solidFill>
+                  <a:srgbClr val="0A2636"/>
+                </a:solidFill>
+                <a:latin typeface="Spectral" panose="02020502060000000000" pitchFamily="18" charset="77"/>
+              </a:rPr>
+              <a:t>Questions:</a:t>
+            </a:r>
+          </a:p>
+        </p:txBody>
+      </p:sp>
     </p:spTree>
     <p:extLst>
       <p:ext uri="{BB962C8B-B14F-4D97-AF65-F5344CB8AC3E}">
@@ -5856,12 +10724,18 @@
 </p:sld>
 </file>
 
-<file path=ppt/slides/slide14.xml><?xml version="1.0" encoding="utf-8"?>
+<file path=ppt/slides/slide16.xml><?xml version="1.0" encoding="utf-8"?>
 <p:sld xmlns:a="http://schemas.openxmlformats.org/drawingml/2006/main" xmlns:r="http://schemas.openxmlformats.org/officeDocument/2006/relationships" xmlns:p="http://schemas.openxmlformats.org/presentationml/2006/main">
   <p:cSld>
     <p:spTree>
       <p:nvGrpSpPr>
-        <p:cNvPr id="1" name=""/>
+        <p:cNvPr id="1" name="">
+          <a:extLst>
+            <a:ext uri="{FF2B5EF4-FFF2-40B4-BE49-F238E27FC236}">
+              <a16:creationId xmlns:a16="http://schemas.microsoft.com/office/drawing/2014/main" id="{F2474C33-58FB-7BDA-49A4-4C00D5C16066}"/>
+            </a:ext>
+          </a:extLst>
+        </p:cNvPr>
         <p:cNvGrpSpPr/>
         <p:nvPr/>
       </p:nvGrpSpPr>
@@ -5878,7 +10752,7 @@
           <p:cNvPr id="4" name="Rectangle 3">
             <a:extLst>
               <a:ext uri="{FF2B5EF4-FFF2-40B4-BE49-F238E27FC236}">
-                <a16:creationId xmlns:a16="http://schemas.microsoft.com/office/drawing/2014/main" id="{9C5E69D8-2133-86C5-C478-359118968E16}"/>
+                <a16:creationId xmlns:a16="http://schemas.microsoft.com/office/drawing/2014/main" id="{ADE72CDA-C845-1089-44C2-CF07C02AD23D}"/>
               </a:ext>
             </a:extLst>
           </p:cNvPr>
@@ -5925,7 +10799,7 @@
                 </a:solidFill>
                 <a:latin typeface="Spectral" panose="02020502060000000000" pitchFamily="18" charset="77"/>
               </a:rPr>
-              <a:t>Approach</a:t>
+              <a:t>Quantifying Success &amp; Market Implications</a:t>
             </a:r>
           </a:p>
         </p:txBody>
@@ -5935,7 +10809,7 @@
           <p:cNvPr id="6" name="Picture 2" descr="Validere Acquires Regulatory Reporting Platform Clairifi - Validere">
             <a:extLst>
               <a:ext uri="{FF2B5EF4-FFF2-40B4-BE49-F238E27FC236}">
-                <a16:creationId xmlns:a16="http://schemas.microsoft.com/office/drawing/2014/main" id="{5AE29AB1-08CB-3040-BAF6-3C28420849C7}"/>
+                <a16:creationId xmlns:a16="http://schemas.microsoft.com/office/drawing/2014/main" id="{4B943FA3-94CE-0FDB-9C6D-BFE7AAAC0F02}"/>
               </a:ext>
             </a:extLst>
           </p:cNvPr>
@@ -5979,10 +10853,10 @@
       </p:pic>
       <p:sp>
         <p:nvSpPr>
-          <p:cNvPr id="7" name="TextBox 6">
+          <p:cNvPr id="2" name="TextBox 1">
             <a:extLst>
               <a:ext uri="{FF2B5EF4-FFF2-40B4-BE49-F238E27FC236}">
-                <a16:creationId xmlns:a16="http://schemas.microsoft.com/office/drawing/2014/main" id="{3DA76F35-D9B8-C9A4-D281-3E7D21973AFB}"/>
+                <a16:creationId xmlns:a16="http://schemas.microsoft.com/office/drawing/2014/main" id="{0DD78157-1D4E-BF31-2F23-9DB18C696A9F}"/>
               </a:ext>
             </a:extLst>
           </p:cNvPr>
@@ -5991,8 +10865,8 @@
         </p:nvSpPr>
         <p:spPr>
           <a:xfrm>
-            <a:off x="348343" y="1910250"/>
-            <a:ext cx="10162903" cy="2677656"/>
+            <a:off x="290763" y="1047347"/>
+            <a:ext cx="11682892" cy="523220"/>
           </a:xfrm>
           <a:prstGeom prst="rect">
             <a:avLst/>
@@ -6006,225 +10880,20 @@
           <a:lstStyle/>
           <a:p>
             <a:r>
-              <a:rPr lang="en-US" sz="1200" b="1" dirty="0">
+              <a:rPr lang="en-US" sz="1400" dirty="0">
                 <a:latin typeface="IBM Plex Sans Condensed" panose="020B0506050203000203" pitchFamily="34" charset="77"/>
               </a:rPr>
-              <a:t>About crude oil</a:t>
-            </a:r>
-          </a:p>
-          <a:p>
-            <a:r>
-              <a:rPr lang="en-US" sz="1200" dirty="0">
-                <a:latin typeface="IBM Plex Sans Condensed" panose="020B0506050203000203" pitchFamily="34" charset="77"/>
-              </a:rPr>
-              <a:t>- made up of hydrocarbons (by weight carbon, some hydrogen)</a:t>
-            </a:r>
-          </a:p>
-          <a:p>
-            <a:r>
-              <a:rPr lang="en-US" sz="1200" dirty="0">
-                <a:latin typeface="IBM Plex Sans Condensed" panose="020B0506050203000203" pitchFamily="34" charset="77"/>
-              </a:rPr>
-              <a:t>- Physical properties: can be light, medium, or heavy – API gravity</a:t>
-            </a:r>
-          </a:p>
-          <a:p>
-            <a:r>
-              <a:rPr lang="en-US" sz="1200" dirty="0">
-                <a:latin typeface="IBM Plex Sans Condensed" panose="020B0506050203000203" pitchFamily="34" charset="77"/>
-              </a:rPr>
-              <a:t>- Chemical properties: can be sour or sweet depending on sulfur content</a:t>
-            </a:r>
-          </a:p>
-          <a:p>
-            <a:endParaRPr lang="en-US" sz="1200" dirty="0">
-              <a:latin typeface="IBM Plex Sans Condensed" panose="020B0506050203000203" pitchFamily="34" charset="77"/>
-            </a:endParaRPr>
-          </a:p>
-          <a:p>
-            <a:r>
-              <a:rPr lang="en-US" sz="1200" b="1" dirty="0">
-                <a:latin typeface="IBM Plex Sans Condensed" panose="020B0506050203000203" pitchFamily="34" charset="77"/>
-              </a:rPr>
-              <a:t>Hypothesis</a:t>
-            </a:r>
-          </a:p>
-          <a:p>
-            <a:r>
-              <a:rPr lang="en-US" sz="1200" dirty="0">
-                <a:latin typeface="IBM Plex Sans Condensed" panose="020B0506050203000203" pitchFamily="34" charset="77"/>
-              </a:rPr>
-              <a:t> - sour is more corrosive than sweet</a:t>
-            </a:r>
-          </a:p>
-          <a:p>
-            <a:r>
-              <a:rPr lang="en-US" sz="1200" dirty="0">
-                <a:latin typeface="IBM Plex Sans Condensed" panose="020B0506050203000203" pitchFamily="34" charset="77"/>
-              </a:rPr>
-              <a:t>- heavier affects how it flows – more pressure and energy required to pump the oil</a:t>
-            </a:r>
-          </a:p>
-          <a:p>
-            <a:r>
-              <a:rPr lang="en-US" sz="1200" dirty="0">
-                <a:latin typeface="IBM Plex Sans Condensed" panose="020B0506050203000203" pitchFamily="34" charset="77"/>
-              </a:rPr>
-              <a:t>	but light are more flammable</a:t>
-            </a:r>
-          </a:p>
-          <a:p>
-            <a:r>
-              <a:rPr lang="en-US" sz="1200" dirty="0">
-                <a:latin typeface="IBM Plex Sans Condensed" panose="020B0506050203000203" pitchFamily="34" charset="77"/>
-              </a:rPr>
-              <a:t>Make sure to use this:</a:t>
-            </a:r>
-          </a:p>
-          <a:p>
-            <a:r>
-              <a:rPr lang="en-US" sz="1200" dirty="0">
-                <a:latin typeface="IBM Plex Sans Condensed" panose="020B0506050203000203" pitchFamily="34" charset="77"/>
-              </a:rPr>
-              <a:t>	</a:t>
-            </a:r>
-            <a:r>
-              <a:rPr lang="en-US" sz="1200" dirty="0">
-                <a:latin typeface="IBM Plex Sans Condensed" panose="020B0506050203000203" pitchFamily="34" charset="77"/>
-                <a:hlinkClick r:id="rId3"/>
-              </a:rPr>
-              <a:t>https://www.epa.gov/emergency-response/types-crude-oil</a:t>
-            </a:r>
-            <a:endParaRPr lang="en-US" sz="1200" dirty="0">
-              <a:latin typeface="IBM Plex Sans Condensed" panose="020B0506050203000203" pitchFamily="34" charset="77"/>
-            </a:endParaRPr>
-          </a:p>
-          <a:p>
-            <a:endParaRPr lang="en-US" sz="1200" dirty="0">
-              <a:latin typeface="IBM Plex Sans Condensed" panose="020B0506050203000203" pitchFamily="34" charset="77"/>
-            </a:endParaRPr>
-          </a:p>
-          <a:p>
-            <a:endParaRPr lang="en-US" sz="1200" dirty="0">
-              <a:latin typeface="IBM Plex Sans Condensed" panose="020B0506050203000203" pitchFamily="34" charset="77"/>
-            </a:endParaRPr>
-          </a:p>
-          <a:p>
-            <a:r>
-              <a:rPr lang="en-US" sz="1200" dirty="0">
-                <a:latin typeface="IBM Plex Sans Condensed" panose="020B0506050203000203" pitchFamily="34" charset="77"/>
-              </a:rPr>
-              <a:t>FUTURE INVESTIGATION: material of pipe</a:t>
-            </a:r>
-          </a:p>
-        </p:txBody>
-      </p:sp>
-      <p:sp>
-        <p:nvSpPr>
-          <p:cNvPr id="2" name="TextBox 1">
-            <a:extLst>
-              <a:ext uri="{FF2B5EF4-FFF2-40B4-BE49-F238E27FC236}">
-                <a16:creationId xmlns:a16="http://schemas.microsoft.com/office/drawing/2014/main" id="{8446A0DB-5D02-B35C-44C5-F05E5426C5DF}"/>
-              </a:ext>
-            </a:extLst>
-          </p:cNvPr>
-          <p:cNvSpPr txBox="1"/>
-          <p:nvPr/>
-        </p:nvSpPr>
-        <p:spPr>
-          <a:xfrm>
-            <a:off x="290763" y="1047347"/>
-            <a:ext cx="11682892" cy="369332"/>
-          </a:xfrm>
-          <a:prstGeom prst="rect">
-            <a:avLst/>
-          </a:prstGeom>
-          <a:noFill/>
-        </p:spPr>
-        <p:txBody>
-          <a:bodyPr wrap="square" rtlCol="0">
-            <a:spAutoFit/>
-          </a:bodyPr>
-          <a:lstStyle/>
-          <a:p>
-            <a:r>
-              <a:rPr lang="en-US" dirty="0">
-                <a:latin typeface="IBM Plex Sans Condensed" panose="020B0506050203000203" pitchFamily="34" charset="77"/>
-              </a:rPr>
-              <a:t>Investigating properties of crude oil so that a logical approach can be taken to solve the problem. </a:t>
-            </a:r>
-          </a:p>
-        </p:txBody>
-      </p:sp>
-      <p:sp>
-        <p:nvSpPr>
-          <p:cNvPr id="3" name="Rectangle 2">
-            <a:extLst>
-              <a:ext uri="{FF2B5EF4-FFF2-40B4-BE49-F238E27FC236}">
-                <a16:creationId xmlns:a16="http://schemas.microsoft.com/office/drawing/2014/main" id="{CDAB2620-6329-77FE-F22C-EE6FD7271ACC}"/>
-              </a:ext>
-            </a:extLst>
-          </p:cNvPr>
-          <p:cNvSpPr/>
-          <p:nvPr/>
-        </p:nvSpPr>
-        <p:spPr>
-          <a:xfrm>
-            <a:off x="7768046" y="2316480"/>
-            <a:ext cx="2673531" cy="1889760"/>
-          </a:xfrm>
-          <a:prstGeom prst="rect">
-            <a:avLst/>
-          </a:prstGeom>
-        </p:spPr>
-        <p:style>
-          <a:lnRef idx="2">
-            <a:schemeClr val="accent1">
-              <a:shade val="15000"/>
-            </a:schemeClr>
-          </a:lnRef>
-          <a:fillRef idx="1">
-            <a:schemeClr val="accent1"/>
-          </a:fillRef>
-          <a:effectRef idx="0">
-            <a:schemeClr val="accent1"/>
-          </a:effectRef>
-          <a:fontRef idx="minor">
-            <a:schemeClr val="lt1"/>
-          </a:fontRef>
-        </p:style>
-        <p:txBody>
-          <a:bodyPr rtlCol="0" anchor="ctr"/>
-          <a:lstStyle/>
-          <a:p>
-            <a:pPr algn="ctr"/>
-            <a:r>
-              <a:rPr lang="en-US" dirty="0">
-                <a:latin typeface="IBM Plex Sans Condensed" panose="020B0506050203000203" pitchFamily="34" charset="77"/>
-              </a:rPr>
-              <a:t>Mention that is </a:t>
-            </a:r>
-            <a:r>
-              <a:rPr lang="en-US" dirty="0" err="1">
-                <a:latin typeface="IBM Plex Sans Condensed" panose="020B0506050203000203" pitchFamily="34" charset="77"/>
-              </a:rPr>
-              <a:t>tartd</a:t>
-            </a:r>
-            <a:r>
-              <a:rPr lang="en-US" dirty="0">
-                <a:latin typeface="IBM Plex Sans Condensed" panose="020B0506050203000203" pitchFamily="34" charset="77"/>
-              </a:rPr>
-              <a:t> with dataset A because it focused on pipeline incidents (and not facilities)</a:t>
+              <a:t>Should the proposed regulations be implemented, we need to understand how they could impact the oil market and there needs to be a method to quantify their success.</a:t>
             </a:r>
           </a:p>
         </p:txBody>
       </p:sp>
       <p:cxnSp>
         <p:nvCxnSpPr>
-          <p:cNvPr id="5" name="Straight Connector 4">
+          <p:cNvPr id="3" name="Straight Connector 2">
             <a:extLst>
               <a:ext uri="{FF2B5EF4-FFF2-40B4-BE49-F238E27FC236}">
-                <a16:creationId xmlns:a16="http://schemas.microsoft.com/office/drawing/2014/main" id="{B3F2107A-182B-4A5F-DA75-E8FE528A1CD7}"/>
+                <a16:creationId xmlns:a16="http://schemas.microsoft.com/office/drawing/2014/main" id="{38706618-F9EE-C9AD-AC18-8955112A8ACB}"/>
               </a:ext>
             </a:extLst>
           </p:cNvPr>
@@ -6262,10 +10931,731 @@
           </a:fontRef>
         </p:style>
       </p:cxnSp>
+      <p:sp>
+        <p:nvSpPr>
+          <p:cNvPr id="7" name="Rounded Rectangle 6">
+            <a:extLst>
+              <a:ext uri="{FF2B5EF4-FFF2-40B4-BE49-F238E27FC236}">
+                <a16:creationId xmlns:a16="http://schemas.microsoft.com/office/drawing/2014/main" id="{41E37A2A-615D-F8A9-BAE6-A4C6024DB426}"/>
+              </a:ext>
+            </a:extLst>
+          </p:cNvPr>
+          <p:cNvSpPr/>
+          <p:nvPr/>
+        </p:nvSpPr>
+        <p:spPr>
+          <a:xfrm>
+            <a:off x="2394857" y="1694804"/>
+            <a:ext cx="9304133" cy="497458"/>
+          </a:xfrm>
+          <a:prstGeom prst="roundRect">
+            <a:avLst/>
+          </a:prstGeom>
+          <a:noFill/>
+          <a:ln>
+            <a:noFill/>
+          </a:ln>
+        </p:spPr>
+        <p:style>
+          <a:lnRef idx="2">
+            <a:schemeClr val="accent1">
+              <a:shade val="15000"/>
+            </a:schemeClr>
+          </a:lnRef>
+          <a:fillRef idx="1">
+            <a:schemeClr val="accent1"/>
+          </a:fillRef>
+          <a:effectRef idx="0">
+            <a:schemeClr val="accent1"/>
+          </a:effectRef>
+          <a:fontRef idx="minor">
+            <a:schemeClr val="lt1"/>
+          </a:fontRef>
+        </p:style>
+        <p:txBody>
+          <a:bodyPr rtlCol="0" anchor="ctr"/>
+          <a:lstStyle/>
+          <a:p>
+            <a:r>
+              <a:rPr lang="en-US" sz="1100" dirty="0">
+                <a:solidFill>
+                  <a:schemeClr val="tx1"/>
+                </a:solidFill>
+                <a:latin typeface="IBM Plex Sans Condensed" panose="020B0506050203000203" pitchFamily="34" charset="77"/>
+              </a:rPr>
+              <a:t>1. What implications on the oil market would these regulations have? </a:t>
+            </a:r>
+          </a:p>
+          <a:p>
+            <a:pPr marL="0" marR="0" lvl="0" indent="0" algn="l" defTabSz="914400" rtl="0" eaLnBrk="1" fontAlgn="auto" latinLnBrk="0" hangingPunct="1">
+              <a:lnSpc>
+                <a:spcPct val="100000"/>
+              </a:lnSpc>
+              <a:spcBef>
+                <a:spcPts val="0"/>
+              </a:spcBef>
+              <a:spcAft>
+                <a:spcPts val="0"/>
+              </a:spcAft>
+              <a:buClrTx/>
+              <a:buSzTx/>
+              <a:buFontTx/>
+              <a:buNone/>
+              <a:tabLst/>
+              <a:defRPr/>
+            </a:pPr>
+            <a:r>
+              <a:rPr lang="en-US" sz="1100" dirty="0">
+                <a:solidFill>
+                  <a:schemeClr val="tx1"/>
+                </a:solidFill>
+                <a:latin typeface="IBM Plex Sans Condensed" panose="020B0506050203000203" pitchFamily="34" charset="77"/>
+              </a:rPr>
+              <a:t>2. How can success of these regulations be quantified in the short term and long term? </a:t>
+            </a:r>
+          </a:p>
+        </p:txBody>
+      </p:sp>
+      <p:sp>
+        <p:nvSpPr>
+          <p:cNvPr id="8" name="Rounded Rectangle 7">
+            <a:extLst>
+              <a:ext uri="{FF2B5EF4-FFF2-40B4-BE49-F238E27FC236}">
+                <a16:creationId xmlns:a16="http://schemas.microsoft.com/office/drawing/2014/main" id="{1D5EC608-E8AC-8FD3-1089-7BAD30B47FF7}"/>
+              </a:ext>
+            </a:extLst>
+          </p:cNvPr>
+          <p:cNvSpPr/>
+          <p:nvPr/>
+        </p:nvSpPr>
+        <p:spPr>
+          <a:xfrm>
+            <a:off x="290763" y="1697121"/>
+            <a:ext cx="1938631" cy="497458"/>
+          </a:xfrm>
+          <a:prstGeom prst="roundRect">
+            <a:avLst/>
+          </a:prstGeom>
+          <a:solidFill>
+            <a:srgbClr val="F7F9FC"/>
+          </a:solidFill>
+          <a:ln>
+            <a:noFill/>
+          </a:ln>
+        </p:spPr>
+        <p:style>
+          <a:lnRef idx="2">
+            <a:schemeClr val="accent1">
+              <a:shade val="15000"/>
+            </a:schemeClr>
+          </a:lnRef>
+          <a:fillRef idx="1">
+            <a:schemeClr val="accent1"/>
+          </a:fillRef>
+          <a:effectRef idx="0">
+            <a:schemeClr val="accent1"/>
+          </a:effectRef>
+          <a:fontRef idx="minor">
+            <a:schemeClr val="lt1"/>
+          </a:fontRef>
+        </p:style>
+        <p:txBody>
+          <a:bodyPr rtlCol="0" anchor="ctr"/>
+          <a:lstStyle/>
+          <a:p>
+            <a:pPr algn="ctr"/>
+            <a:r>
+              <a:rPr lang="en-US" sz="1100" dirty="0">
+                <a:solidFill>
+                  <a:srgbClr val="0A2636"/>
+                </a:solidFill>
+                <a:latin typeface="Spectral" panose="02020502060000000000" pitchFamily="18" charset="77"/>
+              </a:rPr>
+              <a:t>Questions:</a:t>
+            </a:r>
+          </a:p>
+        </p:txBody>
+      </p:sp>
+      <p:sp>
+        <p:nvSpPr>
+          <p:cNvPr id="9" name="Rounded Rectangle 8">
+            <a:extLst>
+              <a:ext uri="{FF2B5EF4-FFF2-40B4-BE49-F238E27FC236}">
+                <a16:creationId xmlns:a16="http://schemas.microsoft.com/office/drawing/2014/main" id="{E0CD56CD-8908-0568-25BB-D6E1F0D58AD7}"/>
+              </a:ext>
+            </a:extLst>
+          </p:cNvPr>
+          <p:cNvSpPr/>
+          <p:nvPr/>
+        </p:nvSpPr>
+        <p:spPr>
+          <a:xfrm>
+            <a:off x="2394855" y="2483176"/>
+            <a:ext cx="4615543" cy="1891647"/>
+          </a:xfrm>
+          <a:prstGeom prst="roundRect">
+            <a:avLst/>
+          </a:prstGeom>
+          <a:noFill/>
+          <a:ln>
+            <a:noFill/>
+            <a:prstDash val="dash"/>
+          </a:ln>
+        </p:spPr>
+        <p:style>
+          <a:lnRef idx="2">
+            <a:schemeClr val="accent1">
+              <a:shade val="15000"/>
+            </a:schemeClr>
+          </a:lnRef>
+          <a:fillRef idx="1">
+            <a:schemeClr val="accent1"/>
+          </a:fillRef>
+          <a:effectRef idx="0">
+            <a:schemeClr val="accent1"/>
+          </a:effectRef>
+          <a:fontRef idx="minor">
+            <a:schemeClr val="lt1"/>
+          </a:fontRef>
+        </p:style>
+        <p:txBody>
+          <a:bodyPr rtlCol="0" anchor="t"/>
+          <a:lstStyle/>
+          <a:p>
+            <a:r>
+              <a:rPr lang="en-US" sz="1100" dirty="0">
+                <a:solidFill>
+                  <a:srgbClr val="2DAAAF"/>
+                </a:solidFill>
+                <a:latin typeface="IBM Plex Sans Condensed" panose="020B0506050203000203" pitchFamily="34" charset="77"/>
+              </a:rPr>
+              <a:t>SHORT TERM</a:t>
+            </a:r>
+          </a:p>
+          <a:p>
+            <a:endParaRPr lang="en-US" sz="1100" dirty="0">
+              <a:solidFill>
+                <a:schemeClr val="tx1"/>
+              </a:solidFill>
+              <a:latin typeface="IBM Plex Sans Condensed" panose="020B0506050203000203" pitchFamily="34" charset="77"/>
+            </a:endParaRPr>
+          </a:p>
+          <a:p>
+            <a:pPr marL="171450" indent="-171450">
+              <a:buFont typeface="Arial" panose="020B0604020202020204" pitchFamily="34" charset="0"/>
+              <a:buChar char="•"/>
+            </a:pPr>
+            <a:r>
+              <a:rPr lang="en-US" sz="1100" dirty="0">
+                <a:solidFill>
+                  <a:schemeClr val="tx1"/>
+                </a:solidFill>
+                <a:latin typeface="IBM Plex Sans Condensed" panose="020B0506050203000203" pitchFamily="34" charset="77"/>
+              </a:rPr>
+              <a:t>Meet funding requirements for further scientific evaluation on the inherent properties of crude oil that are influencing pipeline accidents.</a:t>
+            </a:r>
+          </a:p>
+          <a:p>
+            <a:pPr marL="171450" indent="-171450">
+              <a:buFont typeface="Arial" panose="020B0604020202020204" pitchFamily="34" charset="0"/>
+              <a:buChar char="•"/>
+            </a:pPr>
+            <a:r>
+              <a:rPr lang="en-US" sz="1100" dirty="0">
+                <a:solidFill>
+                  <a:schemeClr val="tx1"/>
+                </a:solidFill>
+                <a:latin typeface="IBM Plex Sans Condensed" panose="020B0506050203000203" pitchFamily="34" charset="77"/>
+              </a:rPr>
+              <a:t>Have companies (or governing bodies) take samples of and disclose the crude oil involved in x percentage of pipeline incidents where x increases each year and eventually converges to 1.</a:t>
+            </a:r>
+          </a:p>
+          <a:p>
+            <a:pPr marL="171450" indent="-171450">
+              <a:buFont typeface="Arial" panose="020B0604020202020204" pitchFamily="34" charset="0"/>
+              <a:buChar char="•"/>
+            </a:pPr>
+            <a:r>
+              <a:rPr lang="en-US" sz="1100" dirty="0">
+                <a:solidFill>
+                  <a:schemeClr val="tx1"/>
+                </a:solidFill>
+                <a:latin typeface="IBM Plex Sans Condensed" panose="020B0506050203000203" pitchFamily="34" charset="77"/>
+              </a:rPr>
+              <a:t>Have companies (or governing bodies) take samples of and disclose the crude oil within their pipelines every x kms and at higher-risk points for their pipelines that transfer crude oil. Determine x based on the pipeline length. </a:t>
+            </a:r>
+          </a:p>
+        </p:txBody>
+      </p:sp>
+      <p:sp>
+        <p:nvSpPr>
+          <p:cNvPr id="10" name="Rounded Rectangle 9">
+            <a:extLst>
+              <a:ext uri="{FF2B5EF4-FFF2-40B4-BE49-F238E27FC236}">
+                <a16:creationId xmlns:a16="http://schemas.microsoft.com/office/drawing/2014/main" id="{E7E1FDC9-6346-5090-75A6-D07425E9C808}"/>
+              </a:ext>
+            </a:extLst>
+          </p:cNvPr>
+          <p:cNvSpPr/>
+          <p:nvPr/>
+        </p:nvSpPr>
+        <p:spPr>
+          <a:xfrm>
+            <a:off x="7046923" y="2483177"/>
+            <a:ext cx="4688591" cy="1891646"/>
+          </a:xfrm>
+          <a:prstGeom prst="roundRect">
+            <a:avLst/>
+          </a:prstGeom>
+          <a:noFill/>
+          <a:ln>
+            <a:noFill/>
+            <a:prstDash val="dash"/>
+          </a:ln>
+        </p:spPr>
+        <p:style>
+          <a:lnRef idx="2">
+            <a:schemeClr val="accent1">
+              <a:shade val="15000"/>
+            </a:schemeClr>
+          </a:lnRef>
+          <a:fillRef idx="1">
+            <a:schemeClr val="accent1"/>
+          </a:fillRef>
+          <a:effectRef idx="0">
+            <a:schemeClr val="accent1"/>
+          </a:effectRef>
+          <a:fontRef idx="minor">
+            <a:schemeClr val="lt1"/>
+          </a:fontRef>
+        </p:style>
+        <p:txBody>
+          <a:bodyPr rtlCol="0" anchor="t"/>
+          <a:lstStyle/>
+          <a:p>
+            <a:r>
+              <a:rPr lang="en-US" sz="1100" dirty="0">
+                <a:solidFill>
+                  <a:srgbClr val="2DAAAF"/>
+                </a:solidFill>
+                <a:latin typeface="IBM Plex Sans Condensed" panose="020B0506050203000203" pitchFamily="34" charset="77"/>
+              </a:rPr>
+              <a:t>LONG TERM</a:t>
+            </a:r>
+          </a:p>
+          <a:p>
+            <a:endParaRPr lang="en-US" sz="1100" dirty="0">
+              <a:solidFill>
+                <a:schemeClr val="tx1"/>
+              </a:solidFill>
+              <a:latin typeface="IBM Plex Sans Condensed" panose="020B0506050203000203" pitchFamily="34" charset="77"/>
+            </a:endParaRPr>
+          </a:p>
+          <a:p>
+            <a:pPr marL="171450" indent="-171450">
+              <a:buFont typeface="Arial" panose="020B0604020202020204" pitchFamily="34" charset="0"/>
+              <a:buChar char="•"/>
+            </a:pPr>
+            <a:r>
+              <a:rPr lang="en-US" sz="1100" dirty="0">
+                <a:solidFill>
+                  <a:schemeClr val="tx1"/>
+                </a:solidFill>
+                <a:latin typeface="IBM Plex Sans Condensed" panose="020B0506050203000203" pitchFamily="34" charset="77"/>
+              </a:rPr>
+              <a:t>Identify which properties of crude oil are leading to pipeline accidents; extract or minimize the transfer of these properties. </a:t>
+            </a:r>
+          </a:p>
+          <a:p>
+            <a:pPr marL="171450" indent="-171450">
+              <a:buFont typeface="Arial" panose="020B0604020202020204" pitchFamily="34" charset="0"/>
+              <a:buChar char="•"/>
+            </a:pPr>
+            <a:r>
+              <a:rPr lang="en-US" sz="1100" dirty="0">
+                <a:solidFill>
+                  <a:schemeClr val="tx1"/>
+                </a:solidFill>
+                <a:latin typeface="IBM Plex Sans Condensed" panose="020B0506050203000203" pitchFamily="34" charset="77"/>
+              </a:rPr>
+              <a:t>Minimize the number of crude oil-related pipeline incidents based on the analysis of the additional sampling and disclosure of data. Predict the ideal response type for an incident based on the substance that was being carried.</a:t>
+            </a:r>
+          </a:p>
+          <a:p>
+            <a:pPr marL="171450" indent="-171450">
+              <a:buFont typeface="Arial" panose="020B0604020202020204" pitchFamily="34" charset="0"/>
+              <a:buChar char="•"/>
+            </a:pPr>
+            <a:r>
+              <a:rPr lang="en-US" sz="1100" dirty="0">
+                <a:solidFill>
+                  <a:schemeClr val="tx1"/>
+                </a:solidFill>
+                <a:latin typeface="IBM Plex Sans Condensed" panose="020B0506050203000203" pitchFamily="34" charset="77"/>
+              </a:rPr>
+              <a:t>Analyze trends in crude oil prices to identify any economic impact of these regulations (however, safety is the number one priority). </a:t>
+            </a:r>
+          </a:p>
+        </p:txBody>
+      </p:sp>
+      <p:sp>
+        <p:nvSpPr>
+          <p:cNvPr id="11" name="Rounded Rectangle 10">
+            <a:extLst>
+              <a:ext uri="{FF2B5EF4-FFF2-40B4-BE49-F238E27FC236}">
+                <a16:creationId xmlns:a16="http://schemas.microsoft.com/office/drawing/2014/main" id="{585BA689-BB0E-D2AA-AB73-66EB5AB25A11}"/>
+              </a:ext>
+            </a:extLst>
+          </p:cNvPr>
+          <p:cNvSpPr/>
+          <p:nvPr/>
+        </p:nvSpPr>
+        <p:spPr>
+          <a:xfrm>
+            <a:off x="290763" y="2549771"/>
+            <a:ext cx="1938631" cy="497457"/>
+          </a:xfrm>
+          <a:prstGeom prst="roundRect">
+            <a:avLst/>
+          </a:prstGeom>
+          <a:solidFill>
+            <a:srgbClr val="175C61"/>
+          </a:solidFill>
+          <a:ln w="28575">
+            <a:noFill/>
+          </a:ln>
+        </p:spPr>
+        <p:style>
+          <a:lnRef idx="2">
+            <a:schemeClr val="accent1">
+              <a:shade val="15000"/>
+            </a:schemeClr>
+          </a:lnRef>
+          <a:fillRef idx="1">
+            <a:schemeClr val="accent1"/>
+          </a:fillRef>
+          <a:effectRef idx="0">
+            <a:schemeClr val="accent1"/>
+          </a:effectRef>
+          <a:fontRef idx="minor">
+            <a:schemeClr val="lt1"/>
+          </a:fontRef>
+        </p:style>
+        <p:txBody>
+          <a:bodyPr rtlCol="0" anchor="ctr"/>
+          <a:lstStyle/>
+          <a:p>
+            <a:pPr algn="ctr"/>
+            <a:r>
+              <a:rPr lang="en-US" sz="1400" dirty="0">
+                <a:solidFill>
+                  <a:schemeClr val="bg1"/>
+                </a:solidFill>
+                <a:latin typeface="Spectral" panose="02020502060000000000" pitchFamily="18" charset="77"/>
+              </a:rPr>
+              <a:t>Metrics for Quantifying Success</a:t>
+            </a:r>
+          </a:p>
+        </p:txBody>
+      </p:sp>
+      <p:sp>
+        <p:nvSpPr>
+          <p:cNvPr id="13" name="Rounded Rectangle 12">
+            <a:extLst>
+              <a:ext uri="{FF2B5EF4-FFF2-40B4-BE49-F238E27FC236}">
+                <a16:creationId xmlns:a16="http://schemas.microsoft.com/office/drawing/2014/main" id="{1BE937AC-2C3A-5362-3921-A3B92817B404}"/>
+              </a:ext>
+            </a:extLst>
+          </p:cNvPr>
+          <p:cNvSpPr/>
+          <p:nvPr/>
+        </p:nvSpPr>
+        <p:spPr>
+          <a:xfrm>
+            <a:off x="290763" y="4554629"/>
+            <a:ext cx="1938631" cy="497457"/>
+          </a:xfrm>
+          <a:prstGeom prst="roundRect">
+            <a:avLst/>
+          </a:prstGeom>
+          <a:solidFill>
+            <a:srgbClr val="2DAAAF"/>
+          </a:solidFill>
+          <a:ln w="28575">
+            <a:noFill/>
+          </a:ln>
+        </p:spPr>
+        <p:style>
+          <a:lnRef idx="2">
+            <a:schemeClr val="accent1">
+              <a:shade val="15000"/>
+            </a:schemeClr>
+          </a:lnRef>
+          <a:fillRef idx="1">
+            <a:schemeClr val="accent1"/>
+          </a:fillRef>
+          <a:effectRef idx="0">
+            <a:schemeClr val="accent1"/>
+          </a:effectRef>
+          <a:fontRef idx="minor">
+            <a:schemeClr val="lt1"/>
+          </a:fontRef>
+        </p:style>
+        <p:txBody>
+          <a:bodyPr rtlCol="0" anchor="ctr"/>
+          <a:lstStyle/>
+          <a:p>
+            <a:pPr algn="ctr"/>
+            <a:r>
+              <a:rPr lang="en-US" sz="1400" dirty="0">
+                <a:solidFill>
+                  <a:schemeClr val="bg1"/>
+                </a:solidFill>
+                <a:latin typeface="Spectral" panose="02020502060000000000" pitchFamily="18" charset="77"/>
+              </a:rPr>
+              <a:t>Implications on the Oil Market</a:t>
+            </a:r>
+          </a:p>
+        </p:txBody>
+      </p:sp>
+      <p:sp>
+        <p:nvSpPr>
+          <p:cNvPr id="14" name="Rounded Rectangle 13">
+            <a:extLst>
+              <a:ext uri="{FF2B5EF4-FFF2-40B4-BE49-F238E27FC236}">
+                <a16:creationId xmlns:a16="http://schemas.microsoft.com/office/drawing/2014/main" id="{388FCA6C-F832-F075-8B16-30D4FCF6249E}"/>
+              </a:ext>
+            </a:extLst>
+          </p:cNvPr>
+          <p:cNvSpPr/>
+          <p:nvPr/>
+        </p:nvSpPr>
+        <p:spPr>
+          <a:xfrm>
+            <a:off x="2394855" y="4554629"/>
+            <a:ext cx="4615543" cy="1750377"/>
+          </a:xfrm>
+          <a:prstGeom prst="roundRect">
+            <a:avLst/>
+          </a:prstGeom>
+          <a:noFill/>
+          <a:ln>
+            <a:noFill/>
+            <a:prstDash val="dash"/>
+          </a:ln>
+        </p:spPr>
+        <p:style>
+          <a:lnRef idx="2">
+            <a:schemeClr val="accent1">
+              <a:shade val="15000"/>
+            </a:schemeClr>
+          </a:lnRef>
+          <a:fillRef idx="1">
+            <a:schemeClr val="accent1"/>
+          </a:fillRef>
+          <a:effectRef idx="0">
+            <a:schemeClr val="accent1"/>
+          </a:effectRef>
+          <a:fontRef idx="minor">
+            <a:schemeClr val="lt1"/>
+          </a:fontRef>
+        </p:style>
+        <p:txBody>
+          <a:bodyPr rtlCol="0" anchor="t"/>
+          <a:lstStyle/>
+          <a:p>
+            <a:r>
+              <a:rPr lang="en-US" sz="1100" dirty="0">
+                <a:solidFill>
+                  <a:srgbClr val="2DAAAF"/>
+                </a:solidFill>
+                <a:latin typeface="IBM Plex Sans Condensed" panose="020B0506050203000203" pitchFamily="34" charset="77"/>
+              </a:rPr>
+              <a:t>SHORT TERM</a:t>
+            </a:r>
+          </a:p>
+          <a:p>
+            <a:endParaRPr lang="en-US" sz="1100" dirty="0">
+              <a:solidFill>
+                <a:schemeClr val="tx1"/>
+              </a:solidFill>
+              <a:latin typeface="IBM Plex Sans Condensed" panose="020B0506050203000203" pitchFamily="34" charset="77"/>
+            </a:endParaRPr>
+          </a:p>
+          <a:p>
+            <a:pPr marL="171450" indent="-171450">
+              <a:buFont typeface="Arial" panose="020B0604020202020204" pitchFamily="34" charset="0"/>
+              <a:buChar char="•"/>
+            </a:pPr>
+            <a:r>
+              <a:rPr lang="en-US" sz="1100" dirty="0">
+                <a:solidFill>
+                  <a:schemeClr val="tx1"/>
+                </a:solidFill>
+                <a:latin typeface="IBM Plex Sans Condensed" panose="020B0506050203000203" pitchFamily="34" charset="77"/>
+              </a:rPr>
+              <a:t>Additional funding required to meet disclosures</a:t>
+            </a:r>
+          </a:p>
+          <a:p>
+            <a:pPr marL="628650" lvl="1" indent="-171450">
+              <a:buFont typeface="Arial" panose="020B0604020202020204" pitchFamily="34" charset="0"/>
+              <a:buChar char="•"/>
+            </a:pPr>
+            <a:r>
+              <a:rPr lang="en-US" sz="1100" dirty="0">
+                <a:solidFill>
+                  <a:schemeClr val="tx1"/>
+                </a:solidFill>
+                <a:latin typeface="IBM Plex Sans Condensed" panose="020B0506050203000203" pitchFamily="34" charset="77"/>
+              </a:rPr>
+              <a:t>This would require an up-front investment and could influence company profitability</a:t>
+            </a:r>
+          </a:p>
+          <a:p>
+            <a:pPr marL="628650" lvl="1" indent="-171450">
+              <a:buFont typeface="Arial" panose="020B0604020202020204" pitchFamily="34" charset="0"/>
+              <a:buChar char="•"/>
+            </a:pPr>
+            <a:r>
+              <a:rPr lang="en-US" sz="1100" dirty="0">
+                <a:solidFill>
+                  <a:schemeClr val="tx1"/>
+                </a:solidFill>
+                <a:latin typeface="IBM Plex Sans Condensed" panose="020B0506050203000203" pitchFamily="34" charset="77"/>
+              </a:rPr>
+              <a:t>This could also influence the price of oil that trickles down to consumers</a:t>
+            </a:r>
+          </a:p>
+          <a:p>
+            <a:pPr marL="171450" indent="-171450">
+              <a:buFont typeface="Arial" panose="020B0604020202020204" pitchFamily="34" charset="0"/>
+              <a:buChar char="•"/>
+            </a:pPr>
+            <a:r>
+              <a:rPr lang="en-US" sz="1100" dirty="0">
+                <a:solidFill>
+                  <a:schemeClr val="tx1"/>
+                </a:solidFill>
+                <a:latin typeface="IBM Plex Sans Condensed" panose="020B0506050203000203" pitchFamily="34" charset="77"/>
+              </a:rPr>
+              <a:t>Additional sampling could slow down supply chain which could increase global oil prices (e.g., oil supply chain during COVID-19)</a:t>
+            </a:r>
+          </a:p>
+          <a:p>
+            <a:pPr marL="171450" indent="-171450">
+              <a:buFont typeface="Arial" panose="020B0604020202020204" pitchFamily="34" charset="0"/>
+              <a:buChar char="•"/>
+            </a:pPr>
+            <a:endParaRPr lang="en-US" sz="1100" dirty="0">
+              <a:solidFill>
+                <a:schemeClr val="tx1"/>
+              </a:solidFill>
+              <a:latin typeface="IBM Plex Sans Condensed" panose="020B0506050203000203" pitchFamily="34" charset="77"/>
+            </a:endParaRPr>
+          </a:p>
+        </p:txBody>
+      </p:sp>
+      <p:sp>
+        <p:nvSpPr>
+          <p:cNvPr id="15" name="Rounded Rectangle 14">
+            <a:extLst>
+              <a:ext uri="{FF2B5EF4-FFF2-40B4-BE49-F238E27FC236}">
+                <a16:creationId xmlns:a16="http://schemas.microsoft.com/office/drawing/2014/main" id="{F4BD6E55-292A-A4AC-27B1-F343CC862591}"/>
+              </a:ext>
+            </a:extLst>
+          </p:cNvPr>
+          <p:cNvSpPr/>
+          <p:nvPr/>
+        </p:nvSpPr>
+        <p:spPr>
+          <a:xfrm>
+            <a:off x="7046922" y="4554629"/>
+            <a:ext cx="4688591" cy="1619748"/>
+          </a:xfrm>
+          <a:prstGeom prst="roundRect">
+            <a:avLst/>
+          </a:prstGeom>
+          <a:noFill/>
+          <a:ln>
+            <a:noFill/>
+            <a:prstDash val="dash"/>
+          </a:ln>
+        </p:spPr>
+        <p:style>
+          <a:lnRef idx="2">
+            <a:schemeClr val="accent1">
+              <a:shade val="15000"/>
+            </a:schemeClr>
+          </a:lnRef>
+          <a:fillRef idx="1">
+            <a:schemeClr val="accent1"/>
+          </a:fillRef>
+          <a:effectRef idx="0">
+            <a:schemeClr val="accent1"/>
+          </a:effectRef>
+          <a:fontRef idx="minor">
+            <a:schemeClr val="lt1"/>
+          </a:fontRef>
+        </p:style>
+        <p:txBody>
+          <a:bodyPr rtlCol="0" anchor="t"/>
+          <a:lstStyle/>
+          <a:p>
+            <a:r>
+              <a:rPr lang="en-US" sz="1100" dirty="0">
+                <a:solidFill>
+                  <a:srgbClr val="2DAAAF"/>
+                </a:solidFill>
+                <a:latin typeface="IBM Plex Sans Condensed" panose="020B0506050203000203" pitchFamily="34" charset="77"/>
+              </a:rPr>
+              <a:t>LONG TERM</a:t>
+            </a:r>
+          </a:p>
+          <a:p>
+            <a:endParaRPr lang="en-US" sz="1100" dirty="0">
+              <a:solidFill>
+                <a:schemeClr val="tx1"/>
+              </a:solidFill>
+              <a:latin typeface="IBM Plex Sans Condensed" panose="020B0506050203000203" pitchFamily="34" charset="77"/>
+            </a:endParaRPr>
+          </a:p>
+          <a:p>
+            <a:pPr marL="171450" indent="-171450">
+              <a:buFont typeface="Arial" panose="020B0604020202020204" pitchFamily="34" charset="0"/>
+              <a:buChar char="•"/>
+            </a:pPr>
+            <a:r>
+              <a:rPr lang="en-US" sz="1100" dirty="0">
+                <a:solidFill>
+                  <a:schemeClr val="tx1"/>
+                </a:solidFill>
+                <a:latin typeface="IBM Plex Sans Condensed" panose="020B0506050203000203" pitchFamily="34" charset="77"/>
+              </a:rPr>
+              <a:t>Improved safety of pipelines could lead to better public perception of oil transportation. This is especially crucial with a portion of the public demanding the switch to clean energy. </a:t>
+            </a:r>
+          </a:p>
+          <a:p>
+            <a:pPr marL="171450" indent="-171450">
+              <a:buFont typeface="Arial" panose="020B0604020202020204" pitchFamily="34" charset="0"/>
+              <a:buChar char="•"/>
+            </a:pPr>
+            <a:r>
+              <a:rPr lang="en-US" sz="1100" dirty="0">
+                <a:solidFill>
+                  <a:schemeClr val="tx1"/>
+                </a:solidFill>
+                <a:latin typeface="IBM Plex Sans Condensed" panose="020B0506050203000203" pitchFamily="34" charset="77"/>
+              </a:rPr>
+              <a:t>Enhanced transparency regarding crude oil properties could reduce competitive advantages in the market, leading to a more balanced playing field.</a:t>
+            </a:r>
+          </a:p>
+        </p:txBody>
+      </p:sp>
     </p:spTree>
     <p:extLst>
       <p:ext uri="{BB962C8B-B14F-4D97-AF65-F5344CB8AC3E}">
-        <p14:creationId xmlns:p14="http://schemas.microsoft.com/office/powerpoint/2010/main" val="3191056045"/>
+        <p14:creationId xmlns:p14="http://schemas.microsoft.com/office/powerpoint/2010/main" val="978028827"/>
       </p:ext>
     </p:extLst>
   </p:cSld>
@@ -6275,7 +11665,7 @@
 </p:sld>
 </file>
 
-<file path=ppt/slides/slide15.xml><?xml version="1.0" encoding="utf-8"?>
+<file path=ppt/slides/slide17.xml><?xml version="1.0" encoding="utf-8"?>
 <p:sld xmlns:a="http://schemas.openxmlformats.org/drawingml/2006/main" xmlns:r="http://schemas.openxmlformats.org/officeDocument/2006/relationships" xmlns:p="http://schemas.openxmlformats.org/presentationml/2006/main">
   <p:cSld>
     <p:spTree>
@@ -6500,7 +11890,7 @@
 </p:sld>
 </file>
 
-<file path=ppt/slides/slide16.xml><?xml version="1.0" encoding="utf-8"?>
+<file path=ppt/slides/slide18.xml><?xml version="1.0" encoding="utf-8"?>
 <p:sld xmlns:a="http://schemas.openxmlformats.org/drawingml/2006/main" xmlns:r="http://schemas.openxmlformats.org/officeDocument/2006/relationships" xmlns:p="http://schemas.openxmlformats.org/presentationml/2006/main">
   <p:cSld>
     <p:spTree>
@@ -6636,7 +12026,7 @@
         <p:spPr>
           <a:xfrm>
             <a:off x="290763" y="1047347"/>
-            <a:ext cx="11682892" cy="2862322"/>
+            <a:ext cx="11682892" cy="4616648"/>
           </a:xfrm>
           <a:prstGeom prst="rect">
             <a:avLst/>
@@ -6649,165 +12039,340 @@
           </a:bodyPr>
           <a:lstStyle/>
           <a:p>
+            <a:r>
+              <a:rPr lang="en-US" sz="1400" b="1" dirty="0">
+                <a:latin typeface="IBM Plex Sans Condensed" panose="020B0506050203000203" pitchFamily="34" charset="77"/>
+              </a:rPr>
+              <a:t>Format: Author’s Name, Title, URL</a:t>
+            </a:r>
+          </a:p>
+          <a:p>
             <a:pPr marL="342900" indent="-342900">
               <a:buAutoNum type="arabicPeriod"/>
             </a:pPr>
-            <a:r>
-              <a:rPr lang="en-US" dirty="0">
+            <a:endParaRPr lang="en-US" sz="1400" dirty="0">
+              <a:latin typeface="IBM Plex Sans Condensed" panose="020B0506050203000203" pitchFamily="34" charset="77"/>
+            </a:endParaRPr>
+          </a:p>
+          <a:p>
+            <a:pPr marL="228600" indent="-228600">
+              <a:buAutoNum type="arabicPeriod"/>
+            </a:pPr>
+            <a:r>
+              <a:rPr lang="en-US" sz="1400" dirty="0">
                 <a:latin typeface="IBM Plex Sans Condensed" panose="020B0506050203000203" pitchFamily="34" charset="77"/>
               </a:rPr>
-              <a:t>TABLE - AFPM - Survey of Crude Oil Characteristics</a:t>
-            </a:r>
-          </a:p>
-          <a:p>
-            <a:pPr marL="342900" indent="-342900">
+              <a:t>American Fuel &amp; Petrochemical Manufacturers, A Survey of Bakken Crude Oil Characteristics Assembled For the U.S. Department of Transportation, chrome-extension://</a:t>
+            </a:r>
+            <a:r>
+              <a:rPr lang="en-US" sz="1400" dirty="0" err="1">
+                <a:latin typeface="IBM Plex Sans Condensed" panose="020B0506050203000203" pitchFamily="34" charset="77"/>
+              </a:rPr>
+              <a:t>efaidnbmnnnibpcajpcglclefindmkaj</a:t>
+            </a:r>
+            <a:r>
+              <a:rPr lang="en-US" sz="1400" dirty="0">
+                <a:latin typeface="IBM Plex Sans Condensed" panose="020B0506050203000203" pitchFamily="34" charset="77"/>
+              </a:rPr>
+              <a:t>/https://</a:t>
+            </a:r>
+            <a:r>
+              <a:rPr lang="en-US" sz="1400" dirty="0" err="1">
+                <a:latin typeface="IBM Plex Sans Condensed" panose="020B0506050203000203" pitchFamily="34" charset="77"/>
+              </a:rPr>
+              <a:t>www.nrt.org</a:t>
+            </a:r>
+            <a:r>
+              <a:rPr lang="en-US" sz="1400" dirty="0">
+                <a:latin typeface="IBM Plex Sans Condensed" panose="020B0506050203000203" pitchFamily="34" charset="77"/>
+              </a:rPr>
+              <a:t>/sites/2/files/AFPM%20-%20Survey%20of%20Crude%20Oil%20Characteristics.pdf</a:t>
+            </a:r>
+          </a:p>
+          <a:p>
+            <a:pPr marL="228600" indent="-228600">
               <a:buAutoNum type="arabicPeriod"/>
             </a:pPr>
             <a:r>
-              <a:rPr lang="en-US" dirty="0">
+              <a:rPr lang="en-US" sz="1400" dirty="0">
                 <a:latin typeface="IBM Plex Sans Condensed" panose="020B0506050203000203" pitchFamily="34" charset="77"/>
               </a:rPr>
-              <a:t>Types of crude oil – EPA</a:t>
-            </a:r>
-          </a:p>
-          <a:p>
-            <a:pPr marL="342900" indent="-342900">
-              <a:buAutoNum type="arabicPeriod"/>
-            </a:pPr>
-            <a:r>
-              <a:rPr lang="en-US" dirty="0">
-                <a:latin typeface="IBM Plex Sans Condensed" panose="020B0506050203000203" pitchFamily="34" charset="77"/>
-              </a:rPr>
-              <a:t>Measurement of weight (API) for crude oil - </a:t>
-            </a:r>
-            <a:r>
-              <a:rPr lang="en-US" dirty="0">
+              <a:t>United States Environmental Protection Agency (EPA), Types of Crude Oil, </a:t>
+            </a:r>
+            <a:r>
+              <a:rPr lang="en-US" sz="1400" dirty="0">
                 <a:latin typeface="IBM Plex Sans Condensed" panose="020B0506050203000203" pitchFamily="34" charset="77"/>
                 <a:hlinkClick r:id="rId3"/>
               </a:rPr>
-              <a:t>https://www.eia.gov/dnav/pet/TblDefs/pet_pnp_crq_tbldef2.asp</a:t>
-            </a:r>
-            <a:endParaRPr lang="en-US" dirty="0">
+              <a:t>https://www.epa.gov/emergency-response/types-crude-oil</a:t>
+            </a:r>
+            <a:endParaRPr lang="en-US" sz="1400" dirty="0">
               <a:latin typeface="IBM Plex Sans Condensed" panose="020B0506050203000203" pitchFamily="34" charset="77"/>
             </a:endParaRPr>
           </a:p>
           <a:p>
-            <a:pPr marL="342900" indent="-342900">
+            <a:pPr marL="228600" indent="-228600">
               <a:buAutoNum type="arabicPeriod"/>
             </a:pPr>
             <a:r>
-              <a:rPr lang="en-US" dirty="0">
+              <a:rPr lang="en-US" sz="1400" dirty="0">
                 <a:latin typeface="IBM Plex Sans Condensed" panose="020B0506050203000203" pitchFamily="34" charset="77"/>
               </a:rPr>
-              <a:t>Sweet vs. sour - </a:t>
-            </a:r>
-            <a:r>
-              <a:rPr lang="en-US" dirty="0">
+              <a:t>U.S. Energy Information Administration, Petroleum &amp; Other Liquids – Definitions, Sources and Explanatory Notes, </a:t>
+            </a:r>
+            <a:r>
+              <a:rPr lang="en-US" sz="1400" dirty="0">
                 <a:latin typeface="IBM Plex Sans Condensed" panose="020B0506050203000203" pitchFamily="34" charset="77"/>
                 <a:hlinkClick r:id="rId4"/>
               </a:rPr>
-              <a:t>https://www.pipesearch.com/blog/sweet-and-sour-crude-oil/136</a:t>
-            </a:r>
-            <a:endParaRPr lang="en-US" dirty="0">
+              <a:t>https://www.eia.gov/dnav/pet/TblDefs/pet_pnp_crq_tbldef2.asp</a:t>
+            </a:r>
+            <a:endParaRPr lang="en-US" sz="1400" dirty="0">
               <a:latin typeface="IBM Plex Sans Condensed" panose="020B0506050203000203" pitchFamily="34" charset="77"/>
             </a:endParaRPr>
           </a:p>
           <a:p>
-            <a:pPr marL="342900" indent="-342900">
+            <a:pPr marL="228600" indent="-228600">
               <a:buAutoNum type="arabicPeriod"/>
             </a:pPr>
             <a:r>
-              <a:rPr lang="en-US" dirty="0">
+              <a:rPr lang="en-US" sz="1400" dirty="0">
                 <a:latin typeface="IBM Plex Sans Condensed" panose="020B0506050203000203" pitchFamily="34" charset="77"/>
               </a:rPr>
-              <a:t>Pipeline failure causes (PHMSA) - </a:t>
-            </a:r>
-            <a:r>
-              <a:rPr lang="en-US" dirty="0">
+              <a:t>Kira Beltran, </a:t>
+            </a:r>
+            <a:r>
+              <a:rPr lang="en-US" sz="1400" dirty="0" err="1">
+                <a:latin typeface="IBM Plex Sans Condensed" panose="020B0506050203000203" pitchFamily="34" charset="77"/>
+              </a:rPr>
+              <a:t>PipeSearch</a:t>
+            </a:r>
+            <a:r>
+              <a:rPr lang="en-US" sz="1400" dirty="0">
+                <a:latin typeface="IBM Plex Sans Condensed" panose="020B0506050203000203" pitchFamily="34" charset="77"/>
+              </a:rPr>
+              <a:t>, Types of Crude Oil, </a:t>
+            </a:r>
+            <a:r>
+              <a:rPr lang="en-US" sz="1400" dirty="0">
                 <a:latin typeface="IBM Plex Sans Condensed" panose="020B0506050203000203" pitchFamily="34" charset="77"/>
                 <a:hlinkClick r:id="rId5"/>
               </a:rPr>
-              <a:t>https://www.phmsa.dot.gov/incident-reporting/accident-investigation-division/pipeline-failure-causes</a:t>
-            </a:r>
-            <a:endParaRPr lang="en-US" dirty="0">
+              <a:t>https://www.pipesearch.com/blog/sweet-and-sour-crude-oil/136</a:t>
+            </a:r>
+            <a:endParaRPr lang="en-US" sz="1400" dirty="0">
               <a:latin typeface="IBM Plex Sans Condensed" panose="020B0506050203000203" pitchFamily="34" charset="77"/>
             </a:endParaRPr>
           </a:p>
           <a:p>
-            <a:pPr marL="342900" indent="-342900">
+            <a:pPr marL="228600" indent="-228600">
               <a:buAutoNum type="arabicPeriod"/>
             </a:pPr>
             <a:r>
-              <a:rPr lang="en-US" dirty="0">
+              <a:rPr lang="en-US" sz="1400" dirty="0">
                 <a:latin typeface="IBM Plex Sans Condensed" panose="020B0506050203000203" pitchFamily="34" charset="77"/>
               </a:rPr>
-              <a:t>CER regulation of pipelines - </a:t>
-            </a:r>
-            <a:r>
-              <a:rPr lang="en-US" dirty="0">
+              <a:t>PHMSA, Pipeline Failure Causes, </a:t>
+            </a:r>
+            <a:r>
+              <a:rPr lang="en-US" sz="1400" dirty="0">
                 <a:latin typeface="IBM Plex Sans Condensed" panose="020B0506050203000203" pitchFamily="34" charset="77"/>
                 <a:hlinkClick r:id="rId6"/>
               </a:rPr>
-              <a:t>https://natural-resources.canada.ca/our-natural-resources/energy-sources-distribution/fossil-fuels/pipelines/faqs-federally-regulated-petroleum-pipelines-canada/5893#h-4-1</a:t>
-            </a:r>
-            <a:endParaRPr lang="en-US" dirty="0">
+              <a:t>https://www.phmsa.dot.gov/incident-reporting/accident-investigation-division/pipeline-failure-causes</a:t>
+            </a:r>
+            <a:endParaRPr lang="en-US" sz="1400" dirty="0">
               <a:latin typeface="IBM Plex Sans Condensed" panose="020B0506050203000203" pitchFamily="34" charset="77"/>
             </a:endParaRPr>
           </a:p>
           <a:p>
-            <a:pPr marL="342900" indent="-342900">
+            <a:pPr marL="228600" indent="-228600">
               <a:buAutoNum type="arabicPeriod"/>
             </a:pPr>
             <a:r>
-              <a:rPr lang="en-US" dirty="0">
+              <a:rPr lang="en-US" sz="1400" dirty="0">
                 <a:latin typeface="IBM Plex Sans Condensed" panose="020B0506050203000203" pitchFamily="34" charset="77"/>
               </a:rPr>
-              <a:t>PHMSA - </a:t>
-            </a:r>
-            <a:r>
-              <a:rPr lang="en-US" dirty="0">
+              <a:t>Government of Canada, FAQs Concerning Federally-Regulated Petroleum Pipelines in Canada, </a:t>
+            </a:r>
+            <a:r>
+              <a:rPr lang="en-US" sz="1400" dirty="0">
                 <a:latin typeface="IBM Plex Sans Condensed" panose="020B0506050203000203" pitchFamily="34" charset="77"/>
                 <a:hlinkClick r:id="rId7"/>
               </a:rPr>
-              <a:t>https://www.phmsa.dot.gov/regulations</a:t>
-            </a:r>
-            <a:endParaRPr lang="en-US" dirty="0">
+              <a:t>https://natural-resources.canada.ca/our-natural-resources/energy-sources-distribution/fossil-fuels/pipelines/faqs-federally-regulated-petroleum-pipelines-canada/5893#h-4-1</a:t>
+            </a:r>
+            <a:endParaRPr lang="en-US" sz="1400" dirty="0">
               <a:latin typeface="IBM Plex Sans Condensed" panose="020B0506050203000203" pitchFamily="34" charset="77"/>
             </a:endParaRPr>
           </a:p>
           <a:p>
-            <a:pPr marL="342900" indent="-342900">
+            <a:pPr marL="228600" indent="-228600">
+              <a:buFontTx/>
               <a:buAutoNum type="arabicPeriod"/>
             </a:pPr>
             <a:r>
-              <a:rPr lang="en-US" dirty="0">
+              <a:rPr lang="en-US" sz="1400" dirty="0">
                 <a:latin typeface="IBM Plex Sans Condensed" panose="020B0506050203000203" pitchFamily="34" charset="77"/>
               </a:rPr>
-              <a:t>Jan 1979 TSB datasets - https://</a:t>
-            </a:r>
-            <a:r>
-              <a:rPr lang="en-US" dirty="0" err="1">
+              <a:t>PHMSA, PHMSA Regulations, </a:t>
+            </a:r>
+            <a:r>
+              <a:rPr lang="en-US" sz="1400" dirty="0">
+                <a:latin typeface="IBM Plex Sans Condensed" panose="020B0506050203000203" pitchFamily="34" charset="77"/>
+                <a:hlinkClick r:id="rId8"/>
+              </a:rPr>
+              <a:t>https://www.phmsa.dot.gov/regulations</a:t>
+            </a:r>
+            <a:endParaRPr lang="en-US" sz="1400" dirty="0">
+              <a:latin typeface="IBM Plex Sans Condensed" panose="020B0506050203000203" pitchFamily="34" charset="77"/>
+            </a:endParaRPr>
+          </a:p>
+          <a:p>
+            <a:pPr marL="228600" indent="-228600">
+              <a:buFontTx/>
+              <a:buAutoNum type="arabicPeriod"/>
+            </a:pPr>
+            <a:r>
+              <a:rPr lang="en-US" sz="1400" dirty="0">
                 <a:latin typeface="IBM Plex Sans Condensed" panose="020B0506050203000203" pitchFamily="34" charset="77"/>
               </a:rPr>
-              <a:t>www.tsb.gc.ca</a:t>
-            </a:r>
-            <a:r>
-              <a:rPr lang="en-US" dirty="0">
+              <a:t>Transportation Safety Board of Canada (TSB), Pipeline occurrence datasets from January 1979, </a:t>
+            </a:r>
+            <a:r>
+              <a:rPr lang="en-US" sz="1400" dirty="0">
+                <a:latin typeface="IBM Plex Sans Condensed" panose="020B0506050203000203" pitchFamily="34" charset="77"/>
+                <a:hlinkClick r:id="rId9"/>
+              </a:rPr>
+              <a:t>https://www.tsb.gc.ca/eng/stats/pipeline/data-2.html</a:t>
+            </a:r>
+            <a:endParaRPr lang="en-US" sz="1400" dirty="0">
+              <a:latin typeface="IBM Plex Sans Condensed" panose="020B0506050203000203" pitchFamily="34" charset="77"/>
+            </a:endParaRPr>
+          </a:p>
+          <a:p>
+            <a:pPr marL="228600" indent="-228600">
+              <a:buFontTx/>
+              <a:buAutoNum type="arabicPeriod"/>
+            </a:pPr>
+            <a:r>
+              <a:rPr lang="en-US" sz="1400" dirty="0">
                 <a:latin typeface="IBM Plex Sans Condensed" panose="020B0506050203000203" pitchFamily="34" charset="77"/>
               </a:rPr>
-              <a:t>/</a:t>
-            </a:r>
-            <a:r>
-              <a:rPr lang="en-US" dirty="0" err="1">
+              <a:t>Michael Klem, Rapid Identification of Crude Oil Properties, chrome-extension://</a:t>
+            </a:r>
+            <a:r>
+              <a:rPr lang="en-US" sz="1400" dirty="0" err="1">
                 <a:latin typeface="IBM Plex Sans Condensed" panose="020B0506050203000203" pitchFamily="34" charset="77"/>
               </a:rPr>
-              <a:t>eng</a:t>
-            </a:r>
-            <a:r>
-              <a:rPr lang="en-US" dirty="0">
+              <a:t>efaidnbmnnnibpcajpcglclefindmkaj</a:t>
+            </a:r>
+            <a:r>
+              <a:rPr lang="en-US" sz="1400" dirty="0">
                 <a:latin typeface="IBM Plex Sans Condensed" panose="020B0506050203000203" pitchFamily="34" charset="77"/>
               </a:rPr>
-              <a:t>/stats/pipeline/data-2.html</a:t>
+              <a:t>/https://</a:t>
+            </a:r>
+            <a:r>
+              <a:rPr lang="en-US" sz="1400" dirty="0" err="1">
+                <a:latin typeface="IBM Plex Sans Condensed" panose="020B0506050203000203" pitchFamily="34" charset="77"/>
+              </a:rPr>
+              <a:t>www.phmsa.dot.gov</a:t>
+            </a:r>
+            <a:r>
+              <a:rPr lang="en-US" sz="1400" dirty="0">
+                <a:latin typeface="IBM Plex Sans Condensed" panose="020B0506050203000203" pitchFamily="34" charset="77"/>
+              </a:rPr>
+              <a:t>/sites/</a:t>
+            </a:r>
+            <a:r>
+              <a:rPr lang="en-US" sz="1400" dirty="0" err="1">
+                <a:latin typeface="IBM Plex Sans Condensed" panose="020B0506050203000203" pitchFamily="34" charset="77"/>
+              </a:rPr>
+              <a:t>phmsa.dot.gov</a:t>
+            </a:r>
+            <a:r>
+              <a:rPr lang="en-US" sz="1400" dirty="0">
+                <a:latin typeface="IBM Plex Sans Condensed" panose="020B0506050203000203" pitchFamily="34" charset="77"/>
+              </a:rPr>
+              <a:t>/files/docs/</a:t>
+            </a:r>
+            <a:r>
+              <a:rPr lang="en-US" sz="1400" dirty="0" err="1">
+                <a:latin typeface="IBM Plex Sans Condensed" panose="020B0506050203000203" pitchFamily="34" charset="77"/>
+              </a:rPr>
+              <a:t>Rapid_Oil_Classification_of_Crude_Oil_Michael_Klem.pdf</a:t>
+            </a:r>
+            <a:endParaRPr lang="en-US" sz="1400" dirty="0">
+              <a:latin typeface="IBM Plex Sans Condensed" panose="020B0506050203000203" pitchFamily="34" charset="77"/>
+            </a:endParaRPr>
+          </a:p>
+          <a:p>
+            <a:pPr marL="228600" indent="-228600">
+              <a:buFontTx/>
+              <a:buAutoNum type="arabicPeriod"/>
+            </a:pPr>
+            <a:r>
+              <a:rPr lang="en-US" sz="1400" dirty="0">
+                <a:latin typeface="IBM Plex Sans Condensed" panose="020B0506050203000203" pitchFamily="34" charset="77"/>
+              </a:rPr>
+              <a:t>PHMSA, Safe Transportation of Energy Products Overview, </a:t>
+            </a:r>
+            <a:r>
+              <a:rPr lang="en-US" sz="1400" dirty="0">
+                <a:latin typeface="IBM Plex Sans Condensed" panose="020B0506050203000203" pitchFamily="34" charset="77"/>
+                <a:hlinkClick r:id="rId10"/>
+              </a:rPr>
+              <a:t>https://www.phmsa.dot.gov/safe-transportation-energy-products/safe-transportation-energy-products-overview</a:t>
+            </a:r>
+            <a:endParaRPr lang="en-US" sz="1400" dirty="0">
+              <a:latin typeface="IBM Plex Sans Condensed" panose="020B0506050203000203" pitchFamily="34" charset="77"/>
+            </a:endParaRPr>
+          </a:p>
+          <a:p>
+            <a:pPr marL="228600" indent="-228600">
+              <a:buAutoNum type="arabicPeriod"/>
+            </a:pPr>
+            <a:r>
+              <a:rPr lang="en-US" sz="1400" dirty="0">
+                <a:latin typeface="IBM Plex Sans Condensed" panose="020B0506050203000203" pitchFamily="34" charset="77"/>
+              </a:rPr>
+              <a:t>U.S. Department of Energy (DOE), Crude Oil Characteristics Research Sampling, Analysis and Experiment (SAE) Plan</a:t>
+            </a:r>
+          </a:p>
+          <a:p>
+            <a:pPr marL="228600" indent="-228600">
+              <a:buAutoNum type="arabicPeriod"/>
+            </a:pPr>
+            <a:r>
+              <a:rPr lang="en-US" sz="1400" dirty="0">
+                <a:latin typeface="IBM Plex Sans Condensed" panose="020B0506050203000203" pitchFamily="34" charset="77"/>
+              </a:rPr>
+              <a:t>Province of Alberta, OIL AND GAS CONSERVATION RULES, https://</a:t>
+            </a:r>
+            <a:r>
+              <a:rPr lang="en-US" sz="1400" dirty="0" err="1">
+                <a:latin typeface="IBM Plex Sans Condensed" panose="020B0506050203000203" pitchFamily="34" charset="77"/>
+              </a:rPr>
+              <a:t>www.kings-printer.alberta.ca</a:t>
+            </a:r>
+            <a:r>
+              <a:rPr lang="en-US" sz="1400" dirty="0">
+                <a:latin typeface="IBM Plex Sans Condensed" panose="020B0506050203000203" pitchFamily="34" charset="77"/>
+              </a:rPr>
+              <a:t>/1266.cfm?page=1971_151.cfm&amp;leg_type=</a:t>
+            </a:r>
+            <a:r>
+              <a:rPr lang="en-US" sz="1400" dirty="0" err="1">
+                <a:latin typeface="IBM Plex Sans Condensed" panose="020B0506050203000203" pitchFamily="34" charset="77"/>
+              </a:rPr>
+              <a:t>Regs&amp;isbncln</a:t>
+            </a:r>
+            <a:r>
+              <a:rPr lang="en-US" sz="1400" dirty="0">
+                <a:latin typeface="IBM Plex Sans Condensed" panose="020B0506050203000203" pitchFamily="34" charset="77"/>
+              </a:rPr>
+              <a:t>=9780779807390</a:t>
             </a:r>
           </a:p>
         </p:txBody>
@@ -6868,7 +12433,7 @@
 </p:sld>
 </file>
 
-<file path=ppt/slides/slide17.xml><?xml version="1.0" encoding="utf-8"?>
+<file path=ppt/slides/slide19.xml><?xml version="1.0" encoding="utf-8"?>
 <p:sld xmlns:a="http://schemas.openxmlformats.org/drawingml/2006/main" xmlns:r="http://schemas.openxmlformats.org/officeDocument/2006/relationships" xmlns:p="http://schemas.openxmlformats.org/presentationml/2006/main">
   <p:cSld>
     <p:spTree>
@@ -7091,7 +12656,7 @@
 </p:sld>
 </file>
 
-<file path=ppt/slides/slide18.xml><?xml version="1.0" encoding="utf-8"?>
+<file path=ppt/slides/slide2.xml><?xml version="1.0" encoding="utf-8"?>
 <p:sld xmlns:a="http://schemas.openxmlformats.org/drawingml/2006/main" xmlns:r="http://schemas.openxmlformats.org/officeDocument/2006/relationships" xmlns:p="http://schemas.openxmlformats.org/presentationml/2006/main">
   <p:cSld>
     <p:spTree>
@@ -7160,7 +12725,370 @@
                 </a:solidFill>
                 <a:latin typeface="Spectral" panose="02020502060000000000" pitchFamily="18" charset="77"/>
               </a:rPr>
-              <a:t>Appendix A: ____</a:t>
+              <a:t>Table of Contents</a:t>
+            </a:r>
+          </a:p>
+        </p:txBody>
+      </p:sp>
+      <p:pic>
+        <p:nvPicPr>
+          <p:cNvPr id="6" name="Picture 2" descr="Validere Acquires Regulatory Reporting Platform Clairifi - Validere">
+            <a:extLst>
+              <a:ext uri="{FF2B5EF4-FFF2-40B4-BE49-F238E27FC236}">
+                <a16:creationId xmlns:a16="http://schemas.microsoft.com/office/drawing/2014/main" id="{5AE29AB1-08CB-3040-BAF6-3C28420849C7}"/>
+              </a:ext>
+            </a:extLst>
+          </p:cNvPr>
+          <p:cNvPicPr>
+            <a:picLocks noChangeAspect="1" noChangeArrowheads="1"/>
+          </p:cNvPicPr>
+          <p:nvPr/>
+        </p:nvPicPr>
+        <p:blipFill>
+          <a:blip r:embed="rId2">
+            <a:extLst>
+              <a:ext uri="{28A0092B-C50C-407E-A947-70E740481C1C}">
+                <a14:useLocalDpi xmlns:a14="http://schemas.microsoft.com/office/drawing/2010/main" val="0"/>
+              </a:ext>
+            </a:extLst>
+          </a:blip>
+          <a:srcRect/>
+          <a:stretch>
+            <a:fillRect/>
+          </a:stretch>
+        </p:blipFill>
+        <p:spPr bwMode="auto">
+          <a:xfrm>
+            <a:off x="9588136" y="6313712"/>
+            <a:ext cx="2385518" cy="248400"/>
+          </a:xfrm>
+          <a:prstGeom prst="rect">
+            <a:avLst/>
+          </a:prstGeom>
+          <a:noFill/>
+          <a:extLst>
+            <a:ext uri="{909E8E84-426E-40DD-AFC4-6F175D3DCCD1}">
+              <a14:hiddenFill xmlns:a14="http://schemas.microsoft.com/office/drawing/2010/main">
+                <a:solidFill>
+                  <a:srgbClr val="FFFFFF"/>
+                </a:solidFill>
+              </a14:hiddenFill>
+            </a:ext>
+          </a:extLst>
+        </p:spPr>
+      </p:pic>
+      <p:sp>
+        <p:nvSpPr>
+          <p:cNvPr id="7" name="TextBox 6">
+            <a:extLst>
+              <a:ext uri="{FF2B5EF4-FFF2-40B4-BE49-F238E27FC236}">
+                <a16:creationId xmlns:a16="http://schemas.microsoft.com/office/drawing/2014/main" id="{3DA76F35-D9B8-C9A4-D281-3E7D21973AFB}"/>
+              </a:ext>
+            </a:extLst>
+          </p:cNvPr>
+          <p:cNvSpPr txBox="1"/>
+          <p:nvPr/>
+        </p:nvSpPr>
+        <p:spPr>
+          <a:xfrm>
+            <a:off x="348343" y="1489166"/>
+            <a:ext cx="10162903" cy="4247317"/>
+          </a:xfrm>
+          <a:prstGeom prst="rect">
+            <a:avLst/>
+          </a:prstGeom>
+          <a:noFill/>
+        </p:spPr>
+        <p:txBody>
+          <a:bodyPr wrap="square" rtlCol="0">
+            <a:spAutoFit/>
+          </a:bodyPr>
+          <a:lstStyle/>
+          <a:p>
+            <a:r>
+              <a:rPr lang="en-US" dirty="0">
+                <a:latin typeface="IBM Plex Sans Condensed" panose="020B0506050203000203" pitchFamily="34" charset="77"/>
+              </a:rPr>
+              <a:t>Problem Statement</a:t>
+            </a:r>
+          </a:p>
+          <a:p>
+            <a:r>
+              <a:rPr lang="en-US" dirty="0">
+                <a:latin typeface="IBM Plex Sans Condensed" panose="020B0506050203000203" pitchFamily="34" charset="77"/>
+              </a:rPr>
+              <a:t>Part A</a:t>
+            </a:r>
+          </a:p>
+          <a:p>
+            <a:pPr marL="742950" lvl="1" indent="-285750">
+              <a:buFont typeface="Arial" panose="020B0604020202020204" pitchFamily="34" charset="0"/>
+              <a:buChar char="•"/>
+            </a:pPr>
+            <a:r>
+              <a:rPr lang="en-US" dirty="0">
+                <a:latin typeface="IBM Plex Sans Condensed" panose="020B0506050203000203" pitchFamily="34" charset="77"/>
+              </a:rPr>
+              <a:t>Crude Oil</a:t>
+            </a:r>
+          </a:p>
+          <a:p>
+            <a:pPr marL="742950" lvl="1" indent="-285750">
+              <a:buFont typeface="Arial" panose="020B0604020202020204" pitchFamily="34" charset="0"/>
+              <a:buChar char="•"/>
+            </a:pPr>
+            <a:r>
+              <a:rPr lang="en-US" dirty="0">
+                <a:latin typeface="IBM Plex Sans Condensed" panose="020B0506050203000203" pitchFamily="34" charset="77"/>
+              </a:rPr>
+              <a:t>Pipeline Accidents</a:t>
+            </a:r>
+          </a:p>
+          <a:p>
+            <a:pPr marL="742950" lvl="1" indent="-285750">
+              <a:buFont typeface="Arial" panose="020B0604020202020204" pitchFamily="34" charset="0"/>
+              <a:buChar char="•"/>
+            </a:pPr>
+            <a:r>
+              <a:rPr lang="en-US" dirty="0">
+                <a:latin typeface="IBM Plex Sans Condensed" panose="020B0506050203000203" pitchFamily="34" charset="77"/>
+              </a:rPr>
+              <a:t>Dataset Collection</a:t>
+            </a:r>
+          </a:p>
+          <a:p>
+            <a:pPr marL="742950" lvl="1" indent="-285750">
+              <a:buFont typeface="Arial" panose="020B0604020202020204" pitchFamily="34" charset="0"/>
+              <a:buChar char="•"/>
+            </a:pPr>
+            <a:r>
+              <a:rPr lang="en-US" dirty="0">
+                <a:latin typeface="IBM Plex Sans Condensed" panose="020B0506050203000203" pitchFamily="34" charset="77"/>
+              </a:rPr>
+              <a:t>Approach</a:t>
+            </a:r>
+          </a:p>
+          <a:p>
+            <a:pPr marL="742950" lvl="1" indent="-285750">
+              <a:buFont typeface="Arial" panose="020B0604020202020204" pitchFamily="34" charset="0"/>
+              <a:buChar char="•"/>
+            </a:pPr>
+            <a:r>
+              <a:rPr lang="en-US" dirty="0">
+                <a:latin typeface="IBM Plex Sans Condensed" panose="020B0506050203000203" pitchFamily="34" charset="77"/>
+              </a:rPr>
+              <a:t>Analysis</a:t>
+            </a:r>
+          </a:p>
+          <a:p>
+            <a:pPr marL="742950" lvl="1" indent="-285750">
+              <a:buFont typeface="Arial" panose="020B0604020202020204" pitchFamily="34" charset="0"/>
+              <a:buChar char="•"/>
+            </a:pPr>
+            <a:r>
+              <a:rPr lang="en-US" dirty="0">
+                <a:latin typeface="IBM Plex Sans Condensed" panose="020B0506050203000203" pitchFamily="34" charset="77"/>
+              </a:rPr>
+              <a:t>Results</a:t>
+            </a:r>
+          </a:p>
+          <a:p>
+            <a:pPr marL="742950" lvl="1" indent="-285750">
+              <a:buFont typeface="Arial" panose="020B0604020202020204" pitchFamily="34" charset="0"/>
+              <a:buChar char="•"/>
+            </a:pPr>
+            <a:r>
+              <a:rPr lang="en-US" dirty="0">
+                <a:latin typeface="IBM Plex Sans Condensed" panose="020B0506050203000203" pitchFamily="34" charset="77"/>
+              </a:rPr>
+              <a:t>Conclusion &amp; Suggested Next Steps</a:t>
+            </a:r>
+          </a:p>
+          <a:p>
+            <a:r>
+              <a:rPr lang="en-US" dirty="0">
+                <a:latin typeface="IBM Plex Sans Condensed" panose="020B0506050203000203" pitchFamily="34" charset="77"/>
+              </a:rPr>
+              <a:t>Part B</a:t>
+            </a:r>
+          </a:p>
+          <a:p>
+            <a:pPr marL="742950" lvl="1" indent="-285750">
+              <a:buFont typeface="Arial" panose="020B0604020202020204" pitchFamily="34" charset="0"/>
+              <a:buChar char="•"/>
+            </a:pPr>
+            <a:r>
+              <a:rPr lang="en-US" dirty="0">
+                <a:latin typeface="IBM Plex Sans Condensed" panose="020B0506050203000203" pitchFamily="34" charset="77"/>
+              </a:rPr>
+              <a:t>Current &amp; Proposed Regulations</a:t>
+            </a:r>
+          </a:p>
+          <a:p>
+            <a:pPr marL="742950" lvl="1" indent="-285750">
+              <a:buFont typeface="Arial" panose="020B0604020202020204" pitchFamily="34" charset="0"/>
+              <a:buChar char="•"/>
+            </a:pPr>
+            <a:r>
+              <a:rPr lang="en-US" dirty="0">
+                <a:latin typeface="IBM Plex Sans Condensed" panose="020B0506050203000203" pitchFamily="34" charset="77"/>
+              </a:rPr>
+              <a:t>Quantifying Success &amp; Market Implications</a:t>
+            </a:r>
+          </a:p>
+          <a:p>
+            <a:r>
+              <a:rPr lang="en-US" dirty="0">
+                <a:latin typeface="IBM Plex Sans Condensed" panose="020B0506050203000203" pitchFamily="34" charset="77"/>
+              </a:rPr>
+              <a:t>References</a:t>
+            </a:r>
+          </a:p>
+          <a:p>
+            <a:r>
+              <a:rPr lang="en-US" dirty="0">
+                <a:latin typeface="IBM Plex Sans Condensed" panose="020B0506050203000203" pitchFamily="34" charset="77"/>
+              </a:rPr>
+              <a:t>Appendix</a:t>
+            </a:r>
+          </a:p>
+          <a:p>
+            <a:pPr marL="342900" indent="-342900">
+              <a:buFont typeface="Arial" panose="020B0604020202020204" pitchFamily="34" charset="0"/>
+              <a:buChar char="•"/>
+            </a:pPr>
+            <a:endParaRPr lang="en-US" dirty="0">
+              <a:latin typeface="IBM Plex Sans Condensed" panose="020B0506050203000203" pitchFamily="34" charset="77"/>
+            </a:endParaRPr>
+          </a:p>
+        </p:txBody>
+      </p:sp>
+      <p:cxnSp>
+        <p:nvCxnSpPr>
+          <p:cNvPr id="8" name="Straight Connector 7">
+            <a:extLst>
+              <a:ext uri="{FF2B5EF4-FFF2-40B4-BE49-F238E27FC236}">
+                <a16:creationId xmlns:a16="http://schemas.microsoft.com/office/drawing/2014/main" id="{367ED728-390F-3F8A-5857-EA1F707AD76B}"/>
+              </a:ext>
+            </a:extLst>
+          </p:cNvPr>
+          <p:cNvCxnSpPr>
+            <a:cxnSpLocks/>
+          </p:cNvCxnSpPr>
+          <p:nvPr/>
+        </p:nvCxnSpPr>
+        <p:spPr>
+          <a:xfrm>
+            <a:off x="-78377" y="923109"/>
+            <a:ext cx="11834947" cy="0"/>
+          </a:xfrm>
+          <a:prstGeom prst="line">
+            <a:avLst/>
+          </a:prstGeom>
+          <a:ln w="12700">
+            <a:solidFill>
+              <a:srgbClr val="0A2636"/>
+            </a:solidFill>
+          </a:ln>
+        </p:spPr>
+        <p:style>
+          <a:lnRef idx="1">
+            <a:schemeClr val="accent1"/>
+          </a:lnRef>
+          <a:fillRef idx="0">
+            <a:schemeClr val="accent1"/>
+          </a:fillRef>
+          <a:effectRef idx="0">
+            <a:schemeClr val="accent1"/>
+          </a:effectRef>
+          <a:fontRef idx="minor">
+            <a:schemeClr val="tx1"/>
+          </a:fontRef>
+        </p:style>
+      </p:cxnSp>
+    </p:spTree>
+    <p:extLst>
+      <p:ext uri="{BB962C8B-B14F-4D97-AF65-F5344CB8AC3E}">
+        <p14:creationId xmlns:p14="http://schemas.microsoft.com/office/powerpoint/2010/main" val="418048750"/>
+      </p:ext>
+    </p:extLst>
+  </p:cSld>
+  <p:clrMapOvr>
+    <a:masterClrMapping/>
+  </p:clrMapOvr>
+</p:sld>
+</file>
+
+<file path=ppt/slides/slide20.xml><?xml version="1.0" encoding="utf-8"?>
+<p:sld xmlns:a="http://schemas.openxmlformats.org/drawingml/2006/main" xmlns:r="http://schemas.openxmlformats.org/officeDocument/2006/relationships" xmlns:p="http://schemas.openxmlformats.org/presentationml/2006/main">
+  <p:cSld>
+    <p:spTree>
+      <p:nvGrpSpPr>
+        <p:cNvPr id="1" name=""/>
+        <p:cNvGrpSpPr/>
+        <p:nvPr/>
+      </p:nvGrpSpPr>
+      <p:grpSpPr>
+        <a:xfrm>
+          <a:off x="0" y="0"/>
+          <a:ext cx="0" cy="0"/>
+          <a:chOff x="0" y="0"/>
+          <a:chExt cx="0" cy="0"/>
+        </a:xfrm>
+      </p:grpSpPr>
+      <p:sp>
+        <p:nvSpPr>
+          <p:cNvPr id="4" name="Rectangle 3">
+            <a:extLst>
+              <a:ext uri="{FF2B5EF4-FFF2-40B4-BE49-F238E27FC236}">
+                <a16:creationId xmlns:a16="http://schemas.microsoft.com/office/drawing/2014/main" id="{9C5E69D8-2133-86C5-C478-359118968E16}"/>
+              </a:ext>
+            </a:extLst>
+          </p:cNvPr>
+          <p:cNvSpPr/>
+          <p:nvPr/>
+        </p:nvSpPr>
+        <p:spPr>
+          <a:xfrm>
+            <a:off x="233183" y="304280"/>
+            <a:ext cx="11523387" cy="618829"/>
+          </a:xfrm>
+          <a:prstGeom prst="rect">
+            <a:avLst/>
+          </a:prstGeom>
+          <a:noFill/>
+          <a:ln>
+            <a:noFill/>
+          </a:ln>
+        </p:spPr>
+        <p:style>
+          <a:lnRef idx="2">
+            <a:schemeClr val="accent1">
+              <a:shade val="15000"/>
+            </a:schemeClr>
+          </a:lnRef>
+          <a:fillRef idx="1">
+            <a:schemeClr val="accent1"/>
+          </a:fillRef>
+          <a:effectRef idx="0">
+            <a:schemeClr val="accent1"/>
+          </a:effectRef>
+          <a:fontRef idx="minor">
+            <a:schemeClr val="lt1"/>
+          </a:fontRef>
+        </p:style>
+        <p:txBody>
+          <a:bodyPr rtlCol="0" anchor="ctr"/>
+          <a:lstStyle/>
+          <a:p>
+            <a:r>
+              <a:rPr lang="en-US" sz="3600" dirty="0">
+                <a:solidFill>
+                  <a:srgbClr val="0A2636"/>
+                </a:solidFill>
+                <a:latin typeface="Spectral" panose="02020502060000000000" pitchFamily="18" charset="77"/>
+              </a:rPr>
+              <a:t>Appendix A: Composition of Bakken Crude Oil</a:t>
             </a:r>
           </a:p>
         </p:txBody>
@@ -7227,13 +13155,13 @@
           <p:nvPr>
             <p:extLst>
               <p:ext uri="{D42A27DB-BD31-4B8C-83A1-F6EECF244321}">
-                <p14:modId xmlns:p14="http://schemas.microsoft.com/office/powerpoint/2010/main" val="458556974"/>
+                <p14:modId xmlns:p14="http://schemas.microsoft.com/office/powerpoint/2010/main" val="2228488957"/>
               </p:ext>
             </p:extLst>
           </p:nvPr>
         </p:nvGraphicFramePr>
         <p:xfrm>
-          <a:off x="348343" y="1917941"/>
+          <a:off x="3807095" y="1615440"/>
           <a:ext cx="4064001" cy="3627120"/>
         </p:xfrm>
         <a:graphic>
@@ -7302,7 +13230,7 @@
                       <a:tailEnd type="none" w="med" len="med"/>
                     </a:lnB>
                     <a:solidFill>
-                      <a:srgbClr val="257E88"/>
+                      <a:srgbClr val="0A2536"/>
                     </a:solidFill>
                   </a:tcPr>
                 </a:tc>
@@ -7351,7 +13279,7 @@
                       <a:tailEnd type="none" w="med" len="med"/>
                     </a:lnB>
                     <a:solidFill>
-                      <a:srgbClr val="257E88"/>
+                      <a:srgbClr val="0A2536"/>
                     </a:solidFill>
                   </a:tcPr>
                 </a:tc>
@@ -7391,7 +13319,7 @@
                       <a:tailEnd type="none" w="med" len="med"/>
                     </a:lnB>
                     <a:solidFill>
-                      <a:srgbClr val="257E88"/>
+                      <a:srgbClr val="0A2536"/>
                     </a:solidFill>
                   </a:tcPr>
                 </a:tc>
@@ -9268,463 +15196,10 @@
           </a:fontRef>
         </p:style>
       </p:cxnSp>
-      <p:sp>
-        <p:nvSpPr>
-          <p:cNvPr id="5" name="Rounded Rectangle 4">
-            <a:extLst>
-              <a:ext uri="{FF2B5EF4-FFF2-40B4-BE49-F238E27FC236}">
-                <a16:creationId xmlns:a16="http://schemas.microsoft.com/office/drawing/2014/main" id="{E9550253-DEA6-9947-B00F-FF486CBBA0C4}"/>
-              </a:ext>
-            </a:extLst>
-          </p:cNvPr>
-          <p:cNvSpPr/>
-          <p:nvPr/>
-        </p:nvSpPr>
-        <p:spPr>
-          <a:xfrm>
-            <a:off x="5183549" y="3002201"/>
-            <a:ext cx="6573021" cy="853598"/>
-          </a:xfrm>
-          <a:prstGeom prst="roundRect">
-            <a:avLst/>
-          </a:prstGeom>
-          <a:solidFill>
-            <a:srgbClr val="F6F9FB"/>
-          </a:solidFill>
-          <a:ln>
-            <a:noFill/>
-            <a:prstDash val="dash"/>
-          </a:ln>
-        </p:spPr>
-        <p:style>
-          <a:lnRef idx="2">
-            <a:schemeClr val="accent1">
-              <a:shade val="15000"/>
-            </a:schemeClr>
-          </a:lnRef>
-          <a:fillRef idx="1">
-            <a:schemeClr val="accent1"/>
-          </a:fillRef>
-          <a:effectRef idx="0">
-            <a:schemeClr val="accent1"/>
-          </a:effectRef>
-          <a:fontRef idx="minor">
-            <a:schemeClr val="lt1"/>
-          </a:fontRef>
-        </p:style>
-        <p:txBody>
-          <a:bodyPr rtlCol="0" anchor="ctr"/>
-          <a:lstStyle/>
-          <a:p>
-            <a:r>
-              <a:rPr lang="en-US" sz="1200" dirty="0">
-                <a:solidFill>
-                  <a:srgbClr val="0A2636"/>
-                </a:solidFill>
-                <a:latin typeface="Spectral" panose="02020502060000000000" pitchFamily="18" charset="77"/>
-              </a:rPr>
-              <a:t>General </a:t>
-            </a:r>
-          </a:p>
-          <a:p>
-            <a:endParaRPr lang="en-US" sz="1100" dirty="0">
-              <a:solidFill>
-                <a:schemeClr val="tx1"/>
-              </a:solidFill>
-              <a:latin typeface="IBM Plex Sans Condensed" panose="020B0506050203000203" pitchFamily="34" charset="77"/>
-            </a:endParaRPr>
-          </a:p>
-          <a:p>
-            <a:r>
-              <a:rPr lang="en-US" sz="1100" dirty="0">
-                <a:solidFill>
-                  <a:schemeClr val="tx1"/>
-                </a:solidFill>
-                <a:latin typeface="IBM Plex Sans Condensed" panose="020B0506050203000203" pitchFamily="34" charset="77"/>
-              </a:rPr>
-              <a:t>Crude oils are primarily composed of hydrocarbon gases and liquids. A sample breakdown of Bakken crude oil, considered a light crude oil, is given in Appendix A [1]. The DOT classification is a measurement of flammability (2.1 for gases, 3 for liquids).</a:t>
-            </a:r>
-          </a:p>
-        </p:txBody>
-      </p:sp>
     </p:spTree>
     <p:extLst>
       <p:ext uri="{BB962C8B-B14F-4D97-AF65-F5344CB8AC3E}">
         <p14:creationId xmlns:p14="http://schemas.microsoft.com/office/powerpoint/2010/main" val="1328600140"/>
-      </p:ext>
-    </p:extLst>
-  </p:cSld>
-  <p:clrMapOvr>
-    <a:masterClrMapping/>
-  </p:clrMapOvr>
-</p:sld>
-</file>
-
-<file path=ppt/slides/slide2.xml><?xml version="1.0" encoding="utf-8"?>
-<p:sld xmlns:a="http://schemas.openxmlformats.org/drawingml/2006/main" xmlns:r="http://schemas.openxmlformats.org/officeDocument/2006/relationships" xmlns:p="http://schemas.openxmlformats.org/presentationml/2006/main">
-  <p:cSld>
-    <p:spTree>
-      <p:nvGrpSpPr>
-        <p:cNvPr id="1" name=""/>
-        <p:cNvGrpSpPr/>
-        <p:nvPr/>
-      </p:nvGrpSpPr>
-      <p:grpSpPr>
-        <a:xfrm>
-          <a:off x="0" y="0"/>
-          <a:ext cx="0" cy="0"/>
-          <a:chOff x="0" y="0"/>
-          <a:chExt cx="0" cy="0"/>
-        </a:xfrm>
-      </p:grpSpPr>
-      <p:sp>
-        <p:nvSpPr>
-          <p:cNvPr id="4" name="Rectangle 3">
-            <a:extLst>
-              <a:ext uri="{FF2B5EF4-FFF2-40B4-BE49-F238E27FC236}">
-                <a16:creationId xmlns:a16="http://schemas.microsoft.com/office/drawing/2014/main" id="{9C5E69D8-2133-86C5-C478-359118968E16}"/>
-              </a:ext>
-            </a:extLst>
-          </p:cNvPr>
-          <p:cNvSpPr/>
-          <p:nvPr/>
-        </p:nvSpPr>
-        <p:spPr>
-          <a:xfrm>
-            <a:off x="233183" y="304280"/>
-            <a:ext cx="11523387" cy="618829"/>
-          </a:xfrm>
-          <a:prstGeom prst="rect">
-            <a:avLst/>
-          </a:prstGeom>
-          <a:noFill/>
-          <a:ln>
-            <a:noFill/>
-          </a:ln>
-        </p:spPr>
-        <p:style>
-          <a:lnRef idx="2">
-            <a:schemeClr val="accent1">
-              <a:shade val="15000"/>
-            </a:schemeClr>
-          </a:lnRef>
-          <a:fillRef idx="1">
-            <a:schemeClr val="accent1"/>
-          </a:fillRef>
-          <a:effectRef idx="0">
-            <a:schemeClr val="accent1"/>
-          </a:effectRef>
-          <a:fontRef idx="minor">
-            <a:schemeClr val="lt1"/>
-          </a:fontRef>
-        </p:style>
-        <p:txBody>
-          <a:bodyPr rtlCol="0" anchor="ctr"/>
-          <a:lstStyle/>
-          <a:p>
-            <a:r>
-              <a:rPr lang="en-US" sz="3600" dirty="0">
-                <a:solidFill>
-                  <a:srgbClr val="0A2636"/>
-                </a:solidFill>
-                <a:latin typeface="Spectral" panose="02020502060000000000" pitchFamily="18" charset="77"/>
-              </a:rPr>
-              <a:t>Table of Contents</a:t>
-            </a:r>
-          </a:p>
-        </p:txBody>
-      </p:sp>
-      <p:pic>
-        <p:nvPicPr>
-          <p:cNvPr id="6" name="Picture 2" descr="Validere Acquires Regulatory Reporting Platform Clairifi - Validere">
-            <a:extLst>
-              <a:ext uri="{FF2B5EF4-FFF2-40B4-BE49-F238E27FC236}">
-                <a16:creationId xmlns:a16="http://schemas.microsoft.com/office/drawing/2014/main" id="{5AE29AB1-08CB-3040-BAF6-3C28420849C7}"/>
-              </a:ext>
-            </a:extLst>
-          </p:cNvPr>
-          <p:cNvPicPr>
-            <a:picLocks noChangeAspect="1" noChangeArrowheads="1"/>
-          </p:cNvPicPr>
-          <p:nvPr/>
-        </p:nvPicPr>
-        <p:blipFill>
-          <a:blip r:embed="rId2">
-            <a:extLst>
-              <a:ext uri="{28A0092B-C50C-407E-A947-70E740481C1C}">
-                <a14:useLocalDpi xmlns:a14="http://schemas.microsoft.com/office/drawing/2010/main" val="0"/>
-              </a:ext>
-            </a:extLst>
-          </a:blip>
-          <a:srcRect/>
-          <a:stretch>
-            <a:fillRect/>
-          </a:stretch>
-        </p:blipFill>
-        <p:spPr bwMode="auto">
-          <a:xfrm>
-            <a:off x="9588136" y="6313712"/>
-            <a:ext cx="2385518" cy="248400"/>
-          </a:xfrm>
-          <a:prstGeom prst="rect">
-            <a:avLst/>
-          </a:prstGeom>
-          <a:noFill/>
-          <a:extLst>
-            <a:ext uri="{909E8E84-426E-40DD-AFC4-6F175D3DCCD1}">
-              <a14:hiddenFill xmlns:a14="http://schemas.microsoft.com/office/drawing/2010/main">
-                <a:solidFill>
-                  <a:srgbClr val="FFFFFF"/>
-                </a:solidFill>
-              </a14:hiddenFill>
-            </a:ext>
-          </a:extLst>
-        </p:spPr>
-      </p:pic>
-      <p:sp>
-        <p:nvSpPr>
-          <p:cNvPr id="7" name="TextBox 6">
-            <a:extLst>
-              <a:ext uri="{FF2B5EF4-FFF2-40B4-BE49-F238E27FC236}">
-                <a16:creationId xmlns:a16="http://schemas.microsoft.com/office/drawing/2014/main" id="{3DA76F35-D9B8-C9A4-D281-3E7D21973AFB}"/>
-              </a:ext>
-            </a:extLst>
-          </p:cNvPr>
-          <p:cNvSpPr txBox="1"/>
-          <p:nvPr/>
-        </p:nvSpPr>
-        <p:spPr>
-          <a:xfrm>
-            <a:off x="348343" y="1489166"/>
-            <a:ext cx="10162903" cy="3970318"/>
-          </a:xfrm>
-          <a:prstGeom prst="rect">
-            <a:avLst/>
-          </a:prstGeom>
-          <a:noFill/>
-        </p:spPr>
-        <p:txBody>
-          <a:bodyPr wrap="square" rtlCol="0">
-            <a:spAutoFit/>
-          </a:bodyPr>
-          <a:lstStyle/>
-          <a:p>
-            <a:pPr marL="342900" indent="-342900">
-              <a:buFont typeface="Arial" panose="020B0604020202020204" pitchFamily="34" charset="0"/>
-              <a:buChar char="•"/>
-            </a:pPr>
-            <a:r>
-              <a:rPr lang="en-US" dirty="0">
-                <a:latin typeface="IBM Plex Sans Condensed" panose="020B0506050203000203" pitchFamily="34" charset="77"/>
-              </a:rPr>
-              <a:t>Problem Statement</a:t>
-            </a:r>
-          </a:p>
-          <a:p>
-            <a:pPr marL="342900" indent="-342900">
-              <a:buFont typeface="Arial" panose="020B0604020202020204" pitchFamily="34" charset="0"/>
-              <a:buChar char="•"/>
-            </a:pPr>
-            <a:r>
-              <a:rPr lang="en-US" dirty="0">
-                <a:latin typeface="IBM Plex Sans Condensed" panose="020B0506050203000203" pitchFamily="34" charset="77"/>
-              </a:rPr>
-              <a:t>Scope</a:t>
-            </a:r>
-          </a:p>
-          <a:p>
-            <a:pPr marL="800100" lvl="1" indent="-342900">
-              <a:buFont typeface="Arial" panose="020B0604020202020204" pitchFamily="34" charset="0"/>
-              <a:buChar char="•"/>
-            </a:pPr>
-            <a:r>
-              <a:rPr lang="en-US" dirty="0">
-                <a:latin typeface="IBM Plex Sans Condensed" panose="020B0506050203000203" pitchFamily="34" charset="77"/>
-              </a:rPr>
-              <a:t>Pipeline Accidents</a:t>
-            </a:r>
-          </a:p>
-          <a:p>
-            <a:pPr marL="800100" lvl="1" indent="-342900">
-              <a:buFont typeface="Arial" panose="020B0604020202020204" pitchFamily="34" charset="0"/>
-              <a:buChar char="•"/>
-            </a:pPr>
-            <a:r>
-              <a:rPr lang="en-US" dirty="0">
-                <a:latin typeface="IBM Plex Sans Condensed" panose="020B0506050203000203" pitchFamily="34" charset="77"/>
-              </a:rPr>
-              <a:t>Pipeline Materials</a:t>
-            </a:r>
-          </a:p>
-          <a:p>
-            <a:pPr marL="342900" indent="-342900">
-              <a:buFont typeface="Arial" panose="020B0604020202020204" pitchFamily="34" charset="0"/>
-              <a:buChar char="•"/>
-            </a:pPr>
-            <a:r>
-              <a:rPr lang="en-US" dirty="0">
-                <a:latin typeface="IBM Plex Sans Condensed" panose="020B0506050203000203" pitchFamily="34" charset="77"/>
-              </a:rPr>
-              <a:t>Approach</a:t>
-            </a:r>
-          </a:p>
-          <a:p>
-            <a:pPr marL="800100" lvl="1" indent="-342900">
-              <a:buFont typeface="Arial" panose="020B0604020202020204" pitchFamily="34" charset="0"/>
-              <a:buChar char="•"/>
-            </a:pPr>
-            <a:r>
-              <a:rPr lang="en-US" dirty="0">
-                <a:latin typeface="IBM Plex Sans Condensed" panose="020B0506050203000203" pitchFamily="34" charset="77"/>
-              </a:rPr>
-              <a:t>Physical and Chemical Properties of Crude Oil</a:t>
-            </a:r>
-          </a:p>
-          <a:p>
-            <a:pPr marL="800100" lvl="1" indent="-342900">
-              <a:buFont typeface="Arial" panose="020B0604020202020204" pitchFamily="34" charset="0"/>
-              <a:buChar char="•"/>
-            </a:pPr>
-            <a:r>
-              <a:rPr lang="en-US" dirty="0">
-                <a:latin typeface="IBM Plex Sans Condensed" panose="020B0506050203000203" pitchFamily="34" charset="77"/>
-              </a:rPr>
-              <a:t>Hypothesis</a:t>
-            </a:r>
-          </a:p>
-          <a:p>
-            <a:pPr marL="342900" indent="-342900">
-              <a:buFont typeface="Arial" panose="020B0604020202020204" pitchFamily="34" charset="0"/>
-              <a:buChar char="•"/>
-            </a:pPr>
-            <a:r>
-              <a:rPr lang="en-US" dirty="0">
-                <a:latin typeface="IBM Plex Sans Condensed" panose="020B0506050203000203" pitchFamily="34" charset="77"/>
-              </a:rPr>
-              <a:t>Datasets</a:t>
-            </a:r>
-          </a:p>
-          <a:p>
-            <a:pPr marL="342900" indent="-342900">
-              <a:buFont typeface="Arial" panose="020B0604020202020204" pitchFamily="34" charset="0"/>
-              <a:buChar char="•"/>
-            </a:pPr>
-            <a:r>
-              <a:rPr lang="en-US" dirty="0">
-                <a:latin typeface="IBM Plex Sans Condensed" panose="020B0506050203000203" pitchFamily="34" charset="77"/>
-              </a:rPr>
-              <a:t>Analysis</a:t>
-            </a:r>
-          </a:p>
-          <a:p>
-            <a:pPr marL="342900" indent="-342900">
-              <a:buFont typeface="Arial" panose="020B0604020202020204" pitchFamily="34" charset="0"/>
-              <a:buChar char="•"/>
-            </a:pPr>
-            <a:r>
-              <a:rPr lang="en-US" dirty="0">
-                <a:latin typeface="IBM Plex Sans Condensed" panose="020B0506050203000203" pitchFamily="34" charset="77"/>
-              </a:rPr>
-              <a:t>Results</a:t>
-            </a:r>
-          </a:p>
-          <a:p>
-            <a:pPr marL="342900" indent="-342900">
-              <a:buFont typeface="Arial" panose="020B0604020202020204" pitchFamily="34" charset="0"/>
-              <a:buChar char="•"/>
-            </a:pPr>
-            <a:r>
-              <a:rPr lang="en-US" dirty="0">
-                <a:latin typeface="IBM Plex Sans Condensed" panose="020B0506050203000203" pitchFamily="34" charset="77"/>
-              </a:rPr>
-              <a:t>Conclusion / Future Investigation</a:t>
-            </a:r>
-          </a:p>
-          <a:p>
-            <a:pPr marL="342900" indent="-342900">
-              <a:buFont typeface="Arial" panose="020B0604020202020204" pitchFamily="34" charset="0"/>
-              <a:buChar char="•"/>
-            </a:pPr>
-            <a:r>
-              <a:rPr lang="en-US" dirty="0">
-                <a:latin typeface="IBM Plex Sans Condensed" panose="020B0506050203000203" pitchFamily="34" charset="77"/>
-              </a:rPr>
-              <a:t>Regulations &amp; Implications</a:t>
-            </a:r>
-          </a:p>
-          <a:p>
-            <a:pPr marL="342900" indent="-342900">
-              <a:buFont typeface="Arial" panose="020B0604020202020204" pitchFamily="34" charset="0"/>
-              <a:buChar char="•"/>
-            </a:pPr>
-            <a:r>
-              <a:rPr lang="en-US" dirty="0">
-                <a:latin typeface="IBM Plex Sans Condensed" panose="020B0506050203000203" pitchFamily="34" charset="77"/>
-              </a:rPr>
-              <a:t>References</a:t>
-            </a:r>
-          </a:p>
-          <a:p>
-            <a:pPr marL="342900" indent="-342900">
-              <a:buFont typeface="Arial" panose="020B0604020202020204" pitchFamily="34" charset="0"/>
-              <a:buChar char="•"/>
-            </a:pPr>
-            <a:r>
-              <a:rPr lang="en-US" dirty="0">
-                <a:latin typeface="IBM Plex Sans Condensed" panose="020B0506050203000203" pitchFamily="34" charset="77"/>
-              </a:rPr>
-              <a:t>Appendix</a:t>
-            </a:r>
-          </a:p>
-        </p:txBody>
-      </p:sp>
-      <p:cxnSp>
-        <p:nvCxnSpPr>
-          <p:cNvPr id="8" name="Straight Connector 7">
-            <a:extLst>
-              <a:ext uri="{FF2B5EF4-FFF2-40B4-BE49-F238E27FC236}">
-                <a16:creationId xmlns:a16="http://schemas.microsoft.com/office/drawing/2014/main" id="{367ED728-390F-3F8A-5857-EA1F707AD76B}"/>
-              </a:ext>
-            </a:extLst>
-          </p:cNvPr>
-          <p:cNvCxnSpPr>
-            <a:cxnSpLocks/>
-          </p:cNvCxnSpPr>
-          <p:nvPr/>
-        </p:nvCxnSpPr>
-        <p:spPr>
-          <a:xfrm>
-            <a:off x="-78377" y="923109"/>
-            <a:ext cx="11834947" cy="0"/>
-          </a:xfrm>
-          <a:prstGeom prst="line">
-            <a:avLst/>
-          </a:prstGeom>
-          <a:ln w="12700">
-            <a:solidFill>
-              <a:srgbClr val="0A2636"/>
-            </a:solidFill>
-          </a:ln>
-        </p:spPr>
-        <p:style>
-          <a:lnRef idx="1">
-            <a:schemeClr val="accent1"/>
-          </a:lnRef>
-          <a:fillRef idx="0">
-            <a:schemeClr val="accent1"/>
-          </a:fillRef>
-          <a:effectRef idx="0">
-            <a:schemeClr val="accent1"/>
-          </a:effectRef>
-          <a:fontRef idx="minor">
-            <a:schemeClr val="tx1"/>
-          </a:fontRef>
-        </p:style>
-      </p:cxnSp>
-    </p:spTree>
-    <p:extLst>
-      <p:ext uri="{BB962C8B-B14F-4D97-AF65-F5344CB8AC3E}">
-        <p14:creationId xmlns:p14="http://schemas.microsoft.com/office/powerpoint/2010/main" val="418048750"/>
       </p:ext>
     </p:extLst>
   </p:cSld>
@@ -10563,7 +16038,7 @@
         </p:nvSpPr>
         <p:spPr>
           <a:xfrm>
-            <a:off x="333468" y="2646674"/>
+            <a:off x="348341" y="2687053"/>
             <a:ext cx="7589505" cy="461550"/>
           </a:xfrm>
           <a:prstGeom prst="roundRect">
@@ -10622,7 +16097,7 @@
         </p:nvSpPr>
         <p:spPr>
           <a:xfrm>
-            <a:off x="2510047" y="3232044"/>
+            <a:off x="2524920" y="3272423"/>
             <a:ext cx="2432595" cy="213623"/>
           </a:xfrm>
           <a:prstGeom prst="rect">
@@ -10679,7 +16154,7 @@
         </p:nvSpPr>
         <p:spPr>
           <a:xfrm>
-            <a:off x="5141298" y="3232044"/>
+            <a:off x="5156171" y="3272423"/>
             <a:ext cx="2354218" cy="213623"/>
           </a:xfrm>
           <a:prstGeom prst="rect">
@@ -10736,7 +16211,7 @@
         </p:nvSpPr>
         <p:spPr>
           <a:xfrm>
-            <a:off x="2588423" y="3445667"/>
+            <a:off x="2603296" y="3486046"/>
             <a:ext cx="2354219" cy="1259170"/>
           </a:xfrm>
           <a:prstGeom prst="rect">
@@ -10872,7 +16347,7 @@
         </p:nvSpPr>
         <p:spPr>
           <a:xfrm>
-            <a:off x="5197905" y="3489322"/>
+            <a:off x="5212778" y="3529701"/>
             <a:ext cx="2354219" cy="873672"/>
           </a:xfrm>
           <a:prstGeom prst="rect">
@@ -10978,7 +16453,7 @@
         </p:nvSpPr>
         <p:spPr>
           <a:xfrm>
-            <a:off x="2510047" y="4901786"/>
+            <a:off x="2524920" y="4942165"/>
             <a:ext cx="2354218" cy="213623"/>
           </a:xfrm>
           <a:prstGeom prst="rect">
@@ -11035,7 +16510,7 @@
         </p:nvSpPr>
         <p:spPr>
           <a:xfrm>
-            <a:off x="2602216" y="5159064"/>
+            <a:off x="2617089" y="5199443"/>
             <a:ext cx="2354219" cy="488520"/>
           </a:xfrm>
           <a:prstGeom prst="rect">
@@ -11126,7 +16601,7 @@
         </p:nvSpPr>
         <p:spPr>
           <a:xfrm>
-            <a:off x="5141298" y="4865265"/>
+            <a:off x="5156171" y="4905644"/>
             <a:ext cx="2354218" cy="213623"/>
           </a:xfrm>
           <a:prstGeom prst="rect">
@@ -11183,7 +16658,7 @@
         </p:nvSpPr>
         <p:spPr>
           <a:xfrm>
-            <a:off x="5197905" y="5089066"/>
+            <a:off x="5212778" y="5129445"/>
             <a:ext cx="2354219" cy="558518"/>
           </a:xfrm>
           <a:prstGeom prst="rect">
@@ -11311,7 +16786,7 @@
         </p:nvSpPr>
         <p:spPr>
           <a:xfrm>
-            <a:off x="420522" y="3232044"/>
+            <a:off x="435395" y="3272423"/>
             <a:ext cx="1719937" cy="1772064"/>
           </a:xfrm>
           <a:prstGeom prst="rect">
@@ -11368,7 +16843,7 @@
         </p:nvSpPr>
         <p:spPr>
           <a:xfrm>
-            <a:off x="8042740" y="2646674"/>
+            <a:off x="8057613" y="2687053"/>
             <a:ext cx="3713828" cy="461550"/>
           </a:xfrm>
           <a:prstGeom prst="roundRect">
@@ -11427,7 +16902,7 @@
         </p:nvSpPr>
         <p:spPr>
           <a:xfrm>
-            <a:off x="8000088" y="3232044"/>
+            <a:off x="8014961" y="3272423"/>
             <a:ext cx="3713828" cy="594380"/>
           </a:xfrm>
           <a:prstGeom prst="rect">
@@ -11484,7 +16959,7 @@
         </p:nvSpPr>
         <p:spPr>
           <a:xfrm>
-            <a:off x="8975640" y="4190709"/>
+            <a:off x="8990513" y="4231088"/>
             <a:ext cx="1953617" cy="281980"/>
           </a:xfrm>
           <a:prstGeom prst="rect">
@@ -11619,20 +17094,17 @@
                 </a:solidFill>
                 <a:latin typeface="IBM Plex Sans Condensed" panose="020B0506050203000203" pitchFamily="34" charset="77"/>
               </a:rPr>
-              <a:t>Crude oils are primarily composed of hydrocarbon gases and liquids. A sample breakdown of Bakken crude oil, considered a light crude oil, is given in Appendix A [1]. </a:t>
-            </a:r>
-            <a:r>
-              <a:rPr lang="en-US" sz="1100" dirty="0">
-                <a:solidFill>
-                  <a:schemeClr val="tx1"/>
-                </a:solidFill>
-                <a:highlight>
-                  <a:srgbClr val="FFFF00"/>
-                </a:highlight>
-                <a:latin typeface="IBM Plex Sans Condensed" panose="020B0506050203000203" pitchFamily="34" charset="77"/>
-              </a:rPr>
-              <a:t>[anything else here cam???!!!] talk about chemical physical ….</a:t>
-            </a:r>
+              <a:t>Crude oil is an unrefined petroleum-based product that is primarily composed of hydrocarbon gases and liquids. A sample breakdown of Bakken crude oil, considered a light crude oil, is given in Appendix A [1]. The classifications of crude oil’s physical and chemical properties can be seen below. Crude oil is refined into a variety of products, such as gasoline, kerosene, asphalt, or plastics.  </a:t>
+            </a:r>
+            <a:endParaRPr lang="en-US" sz="1100" dirty="0">
+              <a:solidFill>
+                <a:schemeClr val="tx1"/>
+              </a:solidFill>
+              <a:highlight>
+                <a:srgbClr val="FFFF00"/>
+              </a:highlight>
+              <a:latin typeface="IBM Plex Sans Condensed" panose="020B0506050203000203" pitchFamily="34" charset="77"/>
+            </a:endParaRPr>
           </a:p>
         </p:txBody>
       </p:sp>
@@ -11650,7 +17122,7 @@
         </p:nvSpPr>
         <p:spPr>
           <a:xfrm>
-            <a:off x="8962570" y="3940402"/>
+            <a:off x="8977443" y="3980781"/>
             <a:ext cx="1874168" cy="281980"/>
           </a:xfrm>
           <a:prstGeom prst="rect">
@@ -11931,7 +17403,7 @@
           <p:nvPr>
             <p:extLst>
               <p:ext uri="{D42A27DB-BD31-4B8C-83A1-F6EECF244321}">
-                <p14:modId xmlns:p14="http://schemas.microsoft.com/office/powerpoint/2010/main" val="3888486892"/>
+                <p14:modId xmlns:p14="http://schemas.microsoft.com/office/powerpoint/2010/main" val="4252036993"/>
               </p:ext>
             </p:extLst>
           </p:nvPr>
@@ -13051,7 +18523,7 @@
                           </a:solidFill>
                           <a:latin typeface="IBM Plex Sans Condensed" panose="020B0506050203000203" pitchFamily="34" charset="77"/>
                         </a:rPr>
-                        <a:t>Localized corrosion along specific welding points. Generally, has been fixed since 1970 due to upgrade materials. </a:t>
+                        <a:t>Localized corrosion along specific welding points. Generally, has been fixed since 1970 due to upgrade in materials. </a:t>
                       </a:r>
                     </a:p>
                   </a:txBody>
@@ -15100,7 +20572,7 @@
           <p:nvPr>
             <p:extLst>
               <p:ext uri="{D42A27DB-BD31-4B8C-83A1-F6EECF244321}">
-                <p14:modId xmlns:p14="http://schemas.microsoft.com/office/powerpoint/2010/main" val="352853919"/>
+                <p14:modId xmlns:p14="http://schemas.microsoft.com/office/powerpoint/2010/main" val="227003431"/>
               </p:ext>
             </p:extLst>
           </p:nvPr>
@@ -18527,14 +23999,14 @@
           <p:nvPr>
             <p:extLst>
               <p:ext uri="{D42A27DB-BD31-4B8C-83A1-F6EECF244321}">
-                <p14:modId xmlns:p14="http://schemas.microsoft.com/office/powerpoint/2010/main" val="2377609518"/>
+                <p14:modId xmlns:p14="http://schemas.microsoft.com/office/powerpoint/2010/main" val="3485776024"/>
               </p:ext>
             </p:extLst>
           </p:nvPr>
         </p:nvGraphicFramePr>
         <p:xfrm>
           <a:off x="348342" y="1694803"/>
-          <a:ext cx="11408226" cy="4563213"/>
+          <a:ext cx="11408226" cy="4319373"/>
         </p:xfrm>
         <a:graphic>
           <a:graphicData uri="http://schemas.openxmlformats.org/drawingml/2006/table">
@@ -18565,7 +24037,7 @@
                     <a:lstStyle/>
                     <a:p>
                       <a:r>
-                        <a:rPr lang="en-US" sz="1000" b="0" dirty="0">
+                        <a:rPr lang="en-US" sz="1100" b="0" dirty="0">
                           <a:solidFill>
                             <a:schemeClr val="bg1"/>
                           </a:solidFill>
@@ -18596,7 +24068,7 @@
                     <a:lstStyle/>
                     <a:p>
                       <a:r>
-                        <a:rPr lang="en-US" sz="1000" b="0" dirty="0">
+                        <a:rPr lang="en-US" sz="1100" b="0" dirty="0">
                           <a:solidFill>
                             <a:schemeClr val="bg1"/>
                           </a:solidFill>
@@ -18696,12 +24168,29 @@
                   </a:ext>
                 </a:extLst>
               </a:tr>
-              <a:tr h="216733">
-                <a:tc>
-                  <a:txBody>
-                    <a:bodyPr/>
-                    <a:lstStyle/>
-                    <a:p>
+              <a:tr h="356973">
+                <a:tc>
+                  <a:txBody>
+                    <a:bodyPr/>
+                    <a:lstStyle/>
+                    <a:p>
+                      <a:pPr marL="0" marR="0" lvl="0" indent="0" algn="l" defTabSz="914400" rtl="0" eaLnBrk="1" fontAlgn="auto" latinLnBrk="0" hangingPunct="1">
+                        <a:lnSpc>
+                          <a:spcPct val="100000"/>
+                        </a:lnSpc>
+                        <a:spcBef>
+                          <a:spcPts val="0"/>
+                        </a:spcBef>
+                        <a:spcAft>
+                          <a:spcPts val="0"/>
+                        </a:spcAft>
+                        <a:buClrTx/>
+                        <a:buSzTx/>
+                        <a:buFontTx/>
+                        <a:buNone/>
+                        <a:tabLst/>
+                        <a:defRPr/>
+                      </a:pPr>
                       <a:r>
                         <a:rPr lang="en-US" sz="1100" dirty="0">
                           <a:solidFill>
@@ -18711,50 +24200,6 @@
                         </a:rPr>
                         <a:t>2. Data Cleaning</a:t>
                       </a:r>
-                    </a:p>
-                  </a:txBody>
-                  <a:tcPr>
-                    <a:noFill/>
-                  </a:tcPr>
-                </a:tc>
-                <a:tc>
-                  <a:txBody>
-                    <a:bodyPr/>
-                    <a:lstStyle/>
-                    <a:p>
-                      <a:r>
-                        <a:rPr lang="en-US" sz="1100" dirty="0">
-                          <a:solidFill>
-                            <a:schemeClr val="tx1"/>
-                          </a:solidFill>
-                          <a:latin typeface="IBM Plex Sans Condensed" panose="020B0506050203000203" pitchFamily="34" charset="77"/>
-                        </a:rPr>
-                        <a:t>2.1 Clean the dataframe so that it can be used in analysis. Use information from the dataset’s corresponding data dictionary</a:t>
-                      </a:r>
-                    </a:p>
-                  </a:txBody>
-                  <a:tcPr>
-                    <a:noFill/>
-                  </a:tcPr>
-                </a:tc>
-                <a:extLst>
-                  <a:ext uri="{0D108BD9-81ED-4DB2-BD59-A6C34878D82A}">
-                    <a16:rowId xmlns:a16="http://schemas.microsoft.com/office/drawing/2014/main" val="874727889"/>
-                  </a:ext>
-                </a:extLst>
-              </a:tr>
-              <a:tr h="356973">
-                <a:tc>
-                  <a:txBody>
-                    <a:bodyPr/>
-                    <a:lstStyle/>
-                    <a:p>
-                      <a:endParaRPr lang="en-US" sz="1100" dirty="0">
-                        <a:solidFill>
-                          <a:schemeClr val="tx1"/>
-                        </a:solidFill>
-                        <a:latin typeface="IBM Plex Sans Condensed" panose="020B0506050203000203" pitchFamily="34" charset="77"/>
-                      </a:endParaRPr>
                     </a:p>
                   </a:txBody>
                   <a:tcPr>
@@ -18817,7 +24262,7 @@
                           </a:solidFill>
                           <a:latin typeface="IBM Plex Sans Condensed" panose="020B0506050203000203" pitchFamily="34" charset="77"/>
                         </a:rPr>
-                        <a:t>2.2 Optimize the substance carried column using the released substance type column. Want to perform this task before dropping attributes that don’t meet a specific threshold. Additionally,     map any substance that does not equal crude oil to 0, and any crude oil substance to 1. </a:t>
+                        <a:t>2.2 Optimize the substance carried column using the released substance type column. Want to perform this task before dropping attributes that don’t meet a specific threshold. Additionally, map any substance that does not equal crude oil to 0, and any crude oil substance to 1. </a:t>
                       </a:r>
                     </a:p>
                   </a:txBody>
@@ -19699,4 +25144,299 @@
     </a:ext>
   </a:extLst>
 </a:theme>
+</file>
+
+<file path=ppt/theme/theme2.xml><?xml version="1.0" encoding="utf-8"?>
+<a:theme xmlns:a="http://schemas.openxmlformats.org/drawingml/2006/main" name="Office Theme">
+  <a:themeElements>
+    <a:clrScheme name="Office">
+      <a:dk1>
+        <a:sysClr val="windowText" lastClr="000000"/>
+      </a:dk1>
+      <a:lt1>
+        <a:sysClr val="window" lastClr="FFFFFF"/>
+      </a:lt1>
+      <a:dk2>
+        <a:srgbClr val="44546A"/>
+      </a:dk2>
+      <a:lt2>
+        <a:srgbClr val="E7E6E6"/>
+      </a:lt2>
+      <a:accent1>
+        <a:srgbClr val="4472C4"/>
+      </a:accent1>
+      <a:accent2>
+        <a:srgbClr val="ED7D31"/>
+      </a:accent2>
+      <a:accent3>
+        <a:srgbClr val="A5A5A5"/>
+      </a:accent3>
+      <a:accent4>
+        <a:srgbClr val="FFC000"/>
+      </a:accent4>
+      <a:accent5>
+        <a:srgbClr val="5B9BD5"/>
+      </a:accent5>
+      <a:accent6>
+        <a:srgbClr val="70AD47"/>
+      </a:accent6>
+      <a:hlink>
+        <a:srgbClr val="0563C1"/>
+      </a:hlink>
+      <a:folHlink>
+        <a:srgbClr val="954F72"/>
+      </a:folHlink>
+    </a:clrScheme>
+    <a:fontScheme name="Office">
+      <a:majorFont>
+        <a:latin typeface="Calibri Light" panose="020F0302020204030204"/>
+        <a:ea typeface=""/>
+        <a:cs typeface=""/>
+        <a:font script="Jpan" typeface="游ゴシック Light"/>
+        <a:font script="Hang" typeface="맑은 고딕"/>
+        <a:font script="Hans" typeface="等线 Light"/>
+        <a:font script="Hant" typeface="新細明體"/>
+        <a:font script="Arab" typeface="Times New Roman"/>
+        <a:font script="Hebr" typeface="Times New Roman"/>
+        <a:font script="Thai" typeface="Angsana New"/>
+        <a:font script="Ethi" typeface="Nyala"/>
+        <a:font script="Beng" typeface="Vrinda"/>
+        <a:font script="Gujr" typeface="Shruti"/>
+        <a:font script="Khmr" typeface="MoolBoran"/>
+        <a:font script="Knda" typeface="Tunga"/>
+        <a:font script="Guru" typeface="Raavi"/>
+        <a:font script="Cans" typeface="Euphemia"/>
+        <a:font script="Cher" typeface="Plantagenet Cherokee"/>
+        <a:font script="Yiii" typeface="Microsoft Yi Baiti"/>
+        <a:font script="Tibt" typeface="Microsoft Himalaya"/>
+        <a:font script="Thaa" typeface="MV Boli"/>
+        <a:font script="Deva" typeface="Mangal"/>
+        <a:font script="Telu" typeface="Gautami"/>
+        <a:font script="Taml" typeface="Latha"/>
+        <a:font script="Syrc" typeface="Estrangelo Edessa"/>
+        <a:font script="Orya" typeface="Kalinga"/>
+        <a:font script="Mlym" typeface="Kartika"/>
+        <a:font script="Laoo" typeface="DokChampa"/>
+        <a:font script="Sinh" typeface="Iskoola Pota"/>
+        <a:font script="Mong" typeface="Mongolian Baiti"/>
+        <a:font script="Viet" typeface="Times New Roman"/>
+        <a:font script="Uigh" typeface="Microsoft Uighur"/>
+        <a:font script="Geor" typeface="Sylfaen"/>
+        <a:font script="Armn" typeface="Arial"/>
+        <a:font script="Bugi" typeface="Leelawadee UI"/>
+        <a:font script="Bopo" typeface="Microsoft JhengHei"/>
+        <a:font script="Java" typeface="Javanese Text"/>
+        <a:font script="Lisu" typeface="Segoe UI"/>
+        <a:font script="Mymr" typeface="Myanmar Text"/>
+        <a:font script="Nkoo" typeface="Ebrima"/>
+        <a:font script="Olck" typeface="Nirmala UI"/>
+        <a:font script="Osma" typeface="Ebrima"/>
+        <a:font script="Phag" typeface="Phagspa"/>
+        <a:font script="Syrn" typeface="Estrangelo Edessa"/>
+        <a:font script="Syrj" typeface="Estrangelo Edessa"/>
+        <a:font script="Syre" typeface="Estrangelo Edessa"/>
+        <a:font script="Sora" typeface="Nirmala UI"/>
+        <a:font script="Tale" typeface="Microsoft Tai Le"/>
+        <a:font script="Talu" typeface="Microsoft New Tai Lue"/>
+        <a:font script="Tfng" typeface="Ebrima"/>
+      </a:majorFont>
+      <a:minorFont>
+        <a:latin typeface="Calibri" panose="020F0502020204030204"/>
+        <a:ea typeface=""/>
+        <a:cs typeface=""/>
+        <a:font script="Jpan" typeface="游ゴシック"/>
+        <a:font script="Hang" typeface="맑은 고딕"/>
+        <a:font script="Hans" typeface="等线"/>
+        <a:font script="Hant" typeface="新細明體"/>
+        <a:font script="Arab" typeface="Arial"/>
+        <a:font script="Hebr" typeface="Arial"/>
+        <a:font script="Thai" typeface="Cordia New"/>
+        <a:font script="Ethi" typeface="Nyala"/>
+        <a:font script="Beng" typeface="Vrinda"/>
+        <a:font script="Gujr" typeface="Shruti"/>
+        <a:font script="Khmr" typeface="DaunPenh"/>
+        <a:font script="Knda" typeface="Tunga"/>
+        <a:font script="Guru" typeface="Raavi"/>
+        <a:font script="Cans" typeface="Euphemia"/>
+        <a:font script="Cher" typeface="Plantagenet Cherokee"/>
+        <a:font script="Yiii" typeface="Microsoft Yi Baiti"/>
+        <a:font script="Tibt" typeface="Microsoft Himalaya"/>
+        <a:font script="Thaa" typeface="MV Boli"/>
+        <a:font script="Deva" typeface="Mangal"/>
+        <a:font script="Telu" typeface="Gautami"/>
+        <a:font script="Taml" typeface="Latha"/>
+        <a:font script="Syrc" typeface="Estrangelo Edessa"/>
+        <a:font script="Orya" typeface="Kalinga"/>
+        <a:font script="Mlym" typeface="Kartika"/>
+        <a:font script="Laoo" typeface="DokChampa"/>
+        <a:font script="Sinh" typeface="Iskoola Pota"/>
+        <a:font script="Mong" typeface="Mongolian Baiti"/>
+        <a:font script="Viet" typeface="Arial"/>
+        <a:font script="Uigh" typeface="Microsoft Uighur"/>
+        <a:font script="Geor" typeface="Sylfaen"/>
+        <a:font script="Armn" typeface="Arial"/>
+        <a:font script="Bugi" typeface="Leelawadee UI"/>
+        <a:font script="Bopo" typeface="Microsoft JhengHei"/>
+        <a:font script="Java" typeface="Javanese Text"/>
+        <a:font script="Lisu" typeface="Segoe UI"/>
+        <a:font script="Mymr" typeface="Myanmar Text"/>
+        <a:font script="Nkoo" typeface="Ebrima"/>
+        <a:font script="Olck" typeface="Nirmala UI"/>
+        <a:font script="Osma" typeface="Ebrima"/>
+        <a:font script="Phag" typeface="Phagspa"/>
+        <a:font script="Syrn" typeface="Estrangelo Edessa"/>
+        <a:font script="Syrj" typeface="Estrangelo Edessa"/>
+        <a:font script="Syre" typeface="Estrangelo Edessa"/>
+        <a:font script="Sora" typeface="Nirmala UI"/>
+        <a:font script="Tale" typeface="Microsoft Tai Le"/>
+        <a:font script="Talu" typeface="Microsoft New Tai Lue"/>
+        <a:font script="Tfng" typeface="Ebrima"/>
+      </a:minorFont>
+    </a:fontScheme>
+    <a:fmtScheme name="Office">
+      <a:fillStyleLst>
+        <a:solidFill>
+          <a:schemeClr val="phClr"/>
+        </a:solidFill>
+        <a:gradFill rotWithShape="1">
+          <a:gsLst>
+            <a:gs pos="0">
+              <a:schemeClr val="phClr">
+                <a:lumMod val="110000"/>
+                <a:satMod val="105000"/>
+                <a:tint val="67000"/>
+              </a:schemeClr>
+            </a:gs>
+            <a:gs pos="50000">
+              <a:schemeClr val="phClr">
+                <a:lumMod val="105000"/>
+                <a:satMod val="103000"/>
+                <a:tint val="73000"/>
+              </a:schemeClr>
+            </a:gs>
+            <a:gs pos="100000">
+              <a:schemeClr val="phClr">
+                <a:lumMod val="105000"/>
+                <a:satMod val="109000"/>
+                <a:tint val="81000"/>
+              </a:schemeClr>
+            </a:gs>
+          </a:gsLst>
+          <a:lin ang="5400000" scaled="0"/>
+        </a:gradFill>
+        <a:gradFill rotWithShape="1">
+          <a:gsLst>
+            <a:gs pos="0">
+              <a:schemeClr val="phClr">
+                <a:satMod val="103000"/>
+                <a:lumMod val="102000"/>
+                <a:tint val="94000"/>
+              </a:schemeClr>
+            </a:gs>
+            <a:gs pos="50000">
+              <a:schemeClr val="phClr">
+                <a:satMod val="110000"/>
+                <a:lumMod val="100000"/>
+                <a:shade val="100000"/>
+              </a:schemeClr>
+            </a:gs>
+            <a:gs pos="100000">
+              <a:schemeClr val="phClr">
+                <a:lumMod val="99000"/>
+                <a:satMod val="120000"/>
+                <a:shade val="78000"/>
+              </a:schemeClr>
+            </a:gs>
+          </a:gsLst>
+          <a:lin ang="5400000" scaled="0"/>
+        </a:gradFill>
+      </a:fillStyleLst>
+      <a:lnStyleLst>
+        <a:ln w="6350" cap="flat" cmpd="sng" algn="ctr">
+          <a:solidFill>
+            <a:schemeClr val="phClr"/>
+          </a:solidFill>
+          <a:prstDash val="solid"/>
+          <a:miter lim="800000"/>
+        </a:ln>
+        <a:ln w="12700" cap="flat" cmpd="sng" algn="ctr">
+          <a:solidFill>
+            <a:schemeClr val="phClr"/>
+          </a:solidFill>
+          <a:prstDash val="solid"/>
+          <a:miter lim="800000"/>
+        </a:ln>
+        <a:ln w="19050" cap="flat" cmpd="sng" algn="ctr">
+          <a:solidFill>
+            <a:schemeClr val="phClr"/>
+          </a:solidFill>
+          <a:prstDash val="solid"/>
+          <a:miter lim="800000"/>
+        </a:ln>
+      </a:lnStyleLst>
+      <a:effectStyleLst>
+        <a:effectStyle>
+          <a:effectLst/>
+        </a:effectStyle>
+        <a:effectStyle>
+          <a:effectLst/>
+        </a:effectStyle>
+        <a:effectStyle>
+          <a:effectLst>
+            <a:outerShdw blurRad="57150" dist="19050" dir="5400000" algn="ctr" rotWithShape="0">
+              <a:srgbClr val="000000">
+                <a:alpha val="63000"/>
+              </a:srgbClr>
+            </a:outerShdw>
+          </a:effectLst>
+        </a:effectStyle>
+      </a:effectStyleLst>
+      <a:bgFillStyleLst>
+        <a:solidFill>
+          <a:schemeClr val="phClr"/>
+        </a:solidFill>
+        <a:solidFill>
+          <a:schemeClr val="phClr">
+            <a:tint val="95000"/>
+            <a:satMod val="170000"/>
+          </a:schemeClr>
+        </a:solidFill>
+        <a:gradFill rotWithShape="1">
+          <a:gsLst>
+            <a:gs pos="0">
+              <a:schemeClr val="phClr">
+                <a:tint val="93000"/>
+                <a:satMod val="150000"/>
+                <a:shade val="98000"/>
+                <a:lumMod val="102000"/>
+              </a:schemeClr>
+            </a:gs>
+            <a:gs pos="50000">
+              <a:schemeClr val="phClr">
+                <a:tint val="98000"/>
+                <a:satMod val="130000"/>
+                <a:shade val="90000"/>
+                <a:lumMod val="103000"/>
+              </a:schemeClr>
+            </a:gs>
+            <a:gs pos="100000">
+              <a:schemeClr val="phClr">
+                <a:shade val="63000"/>
+                <a:satMod val="120000"/>
+              </a:schemeClr>
+            </a:gs>
+          </a:gsLst>
+          <a:lin ang="5400000" scaled="0"/>
+        </a:gradFill>
+      </a:bgFillStyleLst>
+    </a:fmtScheme>
+  </a:themeElements>
+  <a:objectDefaults/>
+  <a:extraClrSchemeLst/>
+  <a:extLst>
+    <a:ext uri="{05A4C25C-085E-4340-85A3-A5531E510DB2}">
+      <thm15:themeFamily xmlns:thm15="http://schemas.microsoft.com/office/thememl/2012/main" name="Office Theme" id="{62F939B6-93AF-4DB8-9C6B-D6C7DFDC589F}" vid="{4A3C46E8-61CC-4603-A589-7422A47A8E4A}"/>
+    </a:ext>
+  </a:extLst>
+</a:theme>
 </file>
--- a/presentations/Pipeline Accidents Presentation v0.pptx
+++ b/presentations/Pipeline Accidents Presentation v0.pptx
@@ -4348,14 +4348,14 @@
           <p:nvPr>
             <p:extLst>
               <p:ext uri="{D42A27DB-BD31-4B8C-83A1-F6EECF244321}">
-                <p14:modId xmlns:p14="http://schemas.microsoft.com/office/powerpoint/2010/main" val="2814815693"/>
+                <p14:modId xmlns:p14="http://schemas.microsoft.com/office/powerpoint/2010/main" val="2773062411"/>
               </p:ext>
             </p:extLst>
           </p:nvPr>
         </p:nvGraphicFramePr>
         <p:xfrm>
           <a:off x="348342" y="1694803"/>
-          <a:ext cx="11408226" cy="3153406"/>
+          <a:ext cx="11408226" cy="3061966"/>
         </p:xfrm>
         <a:graphic>
           <a:graphicData uri="http://schemas.openxmlformats.org/drawingml/2006/table">
@@ -4556,7 +4556,25 @@
                           </a:solidFill>
                           <a:latin typeface="IBM Plex Sans Condensed" panose="020B0506050203000203" pitchFamily="34" charset="77"/>
                         </a:rPr>
-                        <a:t>2.1 Prioritize the commodity column as their properties (sweet vs. sour, heavy vs light) are the basis of this analysis. </a:t>
+                        <a:t>2.1 Prioritize the commodity column as their properties (sweet vs. sour, heavy vs light) are the basis of this analysis. Map these properties to binary columns using string extrapolation. E.g., “Heavy </a:t>
+                      </a:r>
+                      <a:r>
+                        <a:rPr lang="en-US" sz="1100" dirty="0" err="1">
+                          <a:solidFill>
+                            <a:schemeClr val="tx1"/>
+                          </a:solidFill>
+                          <a:latin typeface="IBM Plex Sans Condensed" panose="020B0506050203000203" pitchFamily="34" charset="77"/>
+                        </a:rPr>
+                        <a:t>Louisana</a:t>
+                      </a:r>
+                      <a:r>
+                        <a:rPr lang="en-US" sz="1100" dirty="0">
+                          <a:solidFill>
+                            <a:schemeClr val="tx1"/>
+                          </a:solidFill>
+                          <a:latin typeface="IBM Plex Sans Condensed" panose="020B0506050203000203" pitchFamily="34" charset="77"/>
+                        </a:rPr>
+                        <a:t> Sweet” would mark a 1 in the “heavy” and “sweet” columns. These properties were only given for a tiny portion (~45/1355) of the records. </a:t>
                       </a:r>
                     </a:p>
                   </a:txBody>
@@ -4570,7 +4588,7 @@
                   </a:ext>
                 </a:extLst>
               </a:tr>
-              <a:tr h="341598">
+              <a:tr h="285764">
                 <a:tc>
                   <a:txBody>
                     <a:bodyPr/>
@@ -4600,69 +4618,7 @@
                           </a:solidFill>
                           <a:latin typeface="IBM Plex Sans Condensed" panose="020B0506050203000203" pitchFamily="34" charset="77"/>
                         </a:rPr>
-                        <a:t>2.2 Map these properties to binary columns using string extrapolation. E.g., “Heavy </a:t>
-                      </a:r>
-                      <a:r>
-                        <a:rPr lang="en-US" sz="1100" dirty="0" err="1">
-                          <a:solidFill>
-                            <a:schemeClr val="tx1"/>
-                          </a:solidFill>
-                          <a:latin typeface="IBM Plex Sans Condensed" panose="020B0506050203000203" pitchFamily="34" charset="77"/>
-                        </a:rPr>
-                        <a:t>Louisana</a:t>
-                      </a:r>
-                      <a:r>
-                        <a:rPr lang="en-US" sz="1100" dirty="0">
-                          <a:solidFill>
-                            <a:schemeClr val="tx1"/>
-                          </a:solidFill>
-                          <a:latin typeface="IBM Plex Sans Condensed" panose="020B0506050203000203" pitchFamily="34" charset="77"/>
-                        </a:rPr>
-                        <a:t> Sweet” would mark a 1 in the “heavy” and “sweet” columns. These properties were only given for a tiny portion (~45/1355) of the records. </a:t>
-                      </a:r>
-                    </a:p>
-                  </a:txBody>
-                  <a:tcPr>
-                    <a:noFill/>
-                  </a:tcPr>
-                </a:tc>
-                <a:extLst>
-                  <a:ext uri="{0D108BD9-81ED-4DB2-BD59-A6C34878D82A}">
-                    <a16:rowId xmlns:a16="http://schemas.microsoft.com/office/drawing/2014/main" val="2774700380"/>
-                  </a:ext>
-                </a:extLst>
-              </a:tr>
-              <a:tr h="285764">
-                <a:tc>
-                  <a:txBody>
-                    <a:bodyPr/>
-                    <a:lstStyle/>
-                    <a:p>
-                      <a:endParaRPr lang="en-US" sz="1100" dirty="0">
-                        <a:solidFill>
-                          <a:schemeClr val="tx1"/>
-                        </a:solidFill>
-                        <a:latin typeface="IBM Plex Sans Condensed" panose="020B0506050203000203" pitchFamily="34" charset="77"/>
-                      </a:endParaRPr>
-                    </a:p>
-                  </a:txBody>
-                  <a:tcPr>
-                    <a:noFill/>
-                  </a:tcPr>
-                </a:tc>
-                <a:tc>
-                  <a:txBody>
-                    <a:bodyPr/>
-                    <a:lstStyle/>
-                    <a:p>
-                      <a:r>
-                        <a:rPr lang="en-US" sz="1100" dirty="0">
-                          <a:solidFill>
-                            <a:schemeClr val="tx1"/>
-                          </a:solidFill>
-                          <a:latin typeface="IBM Plex Sans Condensed" panose="020B0506050203000203" pitchFamily="34" charset="77"/>
-                        </a:rPr>
-                        <a:t>2.3 Identify and fill in the general cause of the incident using logic from the corresponding data dictionary. </a:t>
+                        <a:t>2.2 Identify and fill in the general cause of the incident using logic from the corresponding data dictionary. </a:t>
                       </a:r>
                     </a:p>
                   </a:txBody>
@@ -4711,7 +4667,7 @@
                           </a:solidFill>
                           <a:latin typeface="IBM Plex Sans Condensed" panose="020B0506050203000203" pitchFamily="34" charset="77"/>
                         </a:rPr>
-                        <a:t>2.4 Clean the remaining columns using a similar process to that for dataset A / Approach #1. </a:t>
+                        <a:t>2.3 Clean the remaining columns using a similar process to that for dataset A / Approach #1. </a:t>
                       </a:r>
                     </a:p>
                   </a:txBody>
@@ -5037,7 +4993,7 @@
           <p:nvPr>
             <p:extLst>
               <p:ext uri="{D42A27DB-BD31-4B8C-83A1-F6EECF244321}">
-                <p14:modId xmlns:p14="http://schemas.microsoft.com/office/powerpoint/2010/main" val="4038507880"/>
+                <p14:modId xmlns:p14="http://schemas.microsoft.com/office/powerpoint/2010/main" val="1852076606"/>
               </p:ext>
             </p:extLst>
           </p:nvPr>
@@ -5106,7 +5062,25 @@
                           </a:solidFill>
                           <a:latin typeface="IBM Plex Sans Condensed" panose="020B0506050203000203" pitchFamily="34" charset="77"/>
                         </a:rPr>
-                        <a:t>The majority of the steps from 2.3 - onwards were performed and iterated upon in an attempt to salvage the approach. Ultimately, the minimal number of records (~45) with property-specific information on crude oil limited the extent of this analysis. </a:t>
+                        <a:t>The majority of the steps </a:t>
+                      </a:r>
+                      <a:r>
+                        <a:rPr lang="en-US" sz="1100" b="0">
+                          <a:solidFill>
+                            <a:schemeClr val="tx1"/>
+                          </a:solidFill>
+                          <a:latin typeface="IBM Plex Sans Condensed" panose="020B0506050203000203" pitchFamily="34" charset="77"/>
+                        </a:rPr>
+                        <a:t>from 2.2 </a:t>
+                      </a:r>
+                      <a:r>
+                        <a:rPr lang="en-US" sz="1100" b="0" dirty="0">
+                          <a:solidFill>
+                            <a:schemeClr val="tx1"/>
+                          </a:solidFill>
+                          <a:latin typeface="IBM Plex Sans Condensed" panose="020B0506050203000203" pitchFamily="34" charset="77"/>
+                        </a:rPr>
+                        <a:t>- onwards were performed and iterated upon in an attempt to salvage the approach. Ultimately, the minimal number of records (~45) with property-specific information on crude oil limited the extent of this analysis. </a:t>
                       </a:r>
                     </a:p>
                   </a:txBody>
@@ -23578,7 +23552,7 @@
                 </a:solidFill>
                 <a:latin typeface="IBM Plex Sans Condensed" panose="020B0506050203000203" pitchFamily="34" charset="77"/>
               </a:rPr>
-              <a:t>DATASET COLLECTION</a:t>
+              <a:t>DATASET SELECTION</a:t>
             </a:r>
           </a:p>
           <a:p>
